--- a/docs/presentations/Vexi-Hakari-6min-ZH-TW.pptx
+++ b/docs/presentations/Vexi-Hakari-6min-ZH-TW.pptx
@@ -2,32 +2,32 @@
 <file path=ppt/presentation.xml><?xml version="1.0" encoding="utf-8"?>
 <p:presentation xmlns:p="http://schemas.openxmlformats.org/presentationml/2006/main">
   <p:sldMasterIdLst>
-    <p:sldMasterId xmlns:r="http://schemas.openxmlformats.org/officeDocument/2006/relationships" id="2147483648" r:id="R7d5236fe7f994a4d"/>
+    <p:sldMasterId xmlns:r="http://schemas.openxmlformats.org/officeDocument/2006/relationships" id="2147483648" r:id="R07735aa117c54e98"/>
   </p:sldMasterIdLst>
   <p:notesMasterIdLst>
-    <p:notesMasterId xmlns:r="http://schemas.openxmlformats.org/officeDocument/2006/relationships" r:id="R752c8c90c5d048a9"/>
+    <p:notesMasterId xmlns:r="http://schemas.openxmlformats.org/officeDocument/2006/relationships" r:id="R7aed5177097042a1"/>
   </p:notesMasterIdLst>
   <p:sldIdLst>
-    <p:sldId xmlns:r="http://schemas.openxmlformats.org/officeDocument/2006/relationships" id="256" r:id="Reba8f0d8067d4317"/>
-    <p:sldId xmlns:r="http://schemas.openxmlformats.org/officeDocument/2006/relationships" id="257" r:id="R649ee1d30a734d3f"/>
-    <p:sldId xmlns:r="http://schemas.openxmlformats.org/officeDocument/2006/relationships" id="258" r:id="R9093b52549454d18"/>
-    <p:sldId xmlns:r="http://schemas.openxmlformats.org/officeDocument/2006/relationships" id="259" r:id="Rba7b712501d94660"/>
-    <p:sldId xmlns:r="http://schemas.openxmlformats.org/officeDocument/2006/relationships" id="260" r:id="Rb8bbc8a71c364bde"/>
-    <p:sldId xmlns:r="http://schemas.openxmlformats.org/officeDocument/2006/relationships" id="261" r:id="Rd389eeadd8b84e66"/>
-    <p:sldId xmlns:r="http://schemas.openxmlformats.org/officeDocument/2006/relationships" id="262" r:id="R5141e8dc4fdc42f8"/>
-    <p:sldId xmlns:r="http://schemas.openxmlformats.org/officeDocument/2006/relationships" id="263" r:id="R3e9c056c9ff3421e"/>
-    <p:sldId xmlns:r="http://schemas.openxmlformats.org/officeDocument/2006/relationships" id="264" r:id="R39b99fcda04547bf"/>
-    <p:sldId xmlns:r="http://schemas.openxmlformats.org/officeDocument/2006/relationships" id="265" r:id="R614fcfeae4f14f86"/>
-    <p:sldId xmlns:r="http://schemas.openxmlformats.org/officeDocument/2006/relationships" id="266" r:id="Rccc64e6e37c64004"/>
-    <p:sldId xmlns:r="http://schemas.openxmlformats.org/officeDocument/2006/relationships" id="267" r:id="R6f825f1b15e44ef1"/>
-    <p:sldId xmlns:r="http://schemas.openxmlformats.org/officeDocument/2006/relationships" id="268" r:id="R82af52b374534b8d"/>
-    <p:sldId xmlns:r="http://schemas.openxmlformats.org/officeDocument/2006/relationships" id="269" r:id="R1961f07ac0e94d5b"/>
-    <p:sldId xmlns:r="http://schemas.openxmlformats.org/officeDocument/2006/relationships" id="270" r:id="Red8175d056314b4f"/>
-    <p:sldId xmlns:r="http://schemas.openxmlformats.org/officeDocument/2006/relationships" id="271" r:id="R741fc098730c439f"/>
-    <p:sldId xmlns:r="http://schemas.openxmlformats.org/officeDocument/2006/relationships" id="272" r:id="R533726ed5f0445c2"/>
-    <p:sldId xmlns:r="http://schemas.openxmlformats.org/officeDocument/2006/relationships" id="273" r:id="Rfb7776d6d7a14dc1"/>
-    <p:sldId xmlns:r="http://schemas.openxmlformats.org/officeDocument/2006/relationships" id="274" r:id="R841db50fe2534379"/>
-    <p:sldId xmlns:r="http://schemas.openxmlformats.org/officeDocument/2006/relationships" id="275" r:id="Ra63ddac477164555"/>
+    <p:sldId xmlns:r="http://schemas.openxmlformats.org/officeDocument/2006/relationships" id="256" r:id="Rb7bc84027e254909"/>
+    <p:sldId xmlns:r="http://schemas.openxmlformats.org/officeDocument/2006/relationships" id="257" r:id="Rc7992ad6e6a541bb"/>
+    <p:sldId xmlns:r="http://schemas.openxmlformats.org/officeDocument/2006/relationships" id="258" r:id="R162f9d7aa8c840af"/>
+    <p:sldId xmlns:r="http://schemas.openxmlformats.org/officeDocument/2006/relationships" id="259" r:id="Rdfa7a0120d7f4d7d"/>
+    <p:sldId xmlns:r="http://schemas.openxmlformats.org/officeDocument/2006/relationships" id="260" r:id="R0205396cf1054b2b"/>
+    <p:sldId xmlns:r="http://schemas.openxmlformats.org/officeDocument/2006/relationships" id="261" r:id="R79f24387780e48dc"/>
+    <p:sldId xmlns:r="http://schemas.openxmlformats.org/officeDocument/2006/relationships" id="262" r:id="Rb3fb21312fc444b3"/>
+    <p:sldId xmlns:r="http://schemas.openxmlformats.org/officeDocument/2006/relationships" id="263" r:id="R9abbce4c33704385"/>
+    <p:sldId xmlns:r="http://schemas.openxmlformats.org/officeDocument/2006/relationships" id="264" r:id="Rccd25f0e47174be0"/>
+    <p:sldId xmlns:r="http://schemas.openxmlformats.org/officeDocument/2006/relationships" id="265" r:id="R248a73986ca94b68"/>
+    <p:sldId xmlns:r="http://schemas.openxmlformats.org/officeDocument/2006/relationships" id="266" r:id="R44f3499d48904e67"/>
+    <p:sldId xmlns:r="http://schemas.openxmlformats.org/officeDocument/2006/relationships" id="267" r:id="R6c8ec006956d40f2"/>
+    <p:sldId xmlns:r="http://schemas.openxmlformats.org/officeDocument/2006/relationships" id="268" r:id="R20294b46bfcb4ab1"/>
+    <p:sldId xmlns:r="http://schemas.openxmlformats.org/officeDocument/2006/relationships" id="269" r:id="R306025e3b5404aef"/>
+    <p:sldId xmlns:r="http://schemas.openxmlformats.org/officeDocument/2006/relationships" id="270" r:id="R6d3bc29f983a486d"/>
+    <p:sldId xmlns:r="http://schemas.openxmlformats.org/officeDocument/2006/relationships" id="271" r:id="R44868e276021429c"/>
+    <p:sldId xmlns:r="http://schemas.openxmlformats.org/officeDocument/2006/relationships" id="272" r:id="R45a2483b02cd4847"/>
+    <p:sldId xmlns:r="http://schemas.openxmlformats.org/officeDocument/2006/relationships" id="273" r:id="R0ff652eb1d5049cc"/>
+    <p:sldId xmlns:r="http://schemas.openxmlformats.org/officeDocument/2006/relationships" id="274" r:id="Rc787b26880df4c9c"/>
+    <p:sldId xmlns:r="http://schemas.openxmlformats.org/officeDocument/2006/relationships" id="275" r:id="Ra3551596296e447b"/>
   </p:sldIdLst>
   <p:sldSz cx="12192000" cy="6858000"/>
   <p:notesSz cx="6858000" cy="9144000"/>
@@ -511,6 +511,11 @@
           </a:p>
           <a:p xmlns:a="http://schemas.openxmlformats.org/drawingml/2006/main">
             <a:r>
+              <a:t>AAPL 是本簡報的代幣示意範例。數量與價格路徑改編自 TSLA/USDG 本機分叉測試，並非 AAPL 執行紀錄或股票即時價格。連結的網站回放保留原始 TSLA 標籤；HIMS 歷史資料也維持原本資產名稱。</a:t>
+            </a:r>
+          </a:p>
+          <a:p xmlns:a="http://schemas.openxmlformats.org/drawingml/2006/main">
+            <a:r>
               <a:t>https://github.com/vexi-v1/vexi-hakari</a:t>
             </a:r>
           </a:p>
@@ -621,7 +626,7 @@
           </a:p>
           <a:p xmlns:a="http://schemas.openxmlformats.org/drawingml/2006/main">
             <a:r>
-              <a:t>對照兩張圖的 2.5% 位置。整數捨入會減少口數、提高報價。到 ±5% 已沒有一整口可報。</a:t>
+              <a:t>對照兩張圖的 2.5% 位置。整數捨入會減少口數、提高報價。到 ±5% 已沒有一整口可報。 AAPL 是本簡報的代幣示意範例。數量與價格路徑改編自 TSLA/USDG 本機分叉測試，並非 AAPL 執行紀錄或股票即時價格。連結的網站回放保留原始 TSLA 標籤；HIMS 歷史資料也維持原本資產名稱。</a:t>
             </a:r>
           </a:p>
           <a:p xmlns:a="http://schemas.openxmlformats.org/drawingml/2006/main">
@@ -637,6 +642,11 @@
           <a:p xmlns:a="http://schemas.openxmlformats.org/drawingml/2006/main">
             <a:r>
               <a:t>website/band.mjs calculateBand; fixed example assumes readable reference, enough liquidity and raw/truncated agreement</a:t>
+            </a:r>
+          </a:p>
+          <a:p xmlns:a="http://schemas.openxmlformats.org/drawingml/2006/main">
+            <a:r>
+              <a:t>AAPL 是本簡報的代幣示意範例。數量與價格路徑改編自 TSLA/USDG 本機分叉測試，並非 AAPL 執行紀錄或股票即時價格。連結的網站回放保留原始 TSLA 標籤；HIMS 歷史資料也維持原本資產名稱。</a:t>
             </a:r>
           </a:p>
           <a:p xmlns:a="http://schemas.openxmlformats.org/drawingml/2006/main">
@@ -751,7 +761,7 @@
           </a:p>
           <a:p xmlns:a="http://schemas.openxmlformats.org/drawingml/2006/main">
             <a:r>
-              <a:t>逐列橫向閱讀。讀得到報價不代表能買，book 依序檢查，可能在第一個失敗處停止。</a:t>
+              <a:t>逐列橫向閱讀。讀得到報價不代表能買，book 依序檢查，可能在第一個失敗處停止。 AAPL 是本簡報的代幣示意範例。數量與價格路徑改編自 TSLA/USDG 本機分叉測試，並非 AAPL 執行紀錄或股票即時價格。連結的網站回放保留原始 TSLA 標籤；HIMS 歷史資料也維持原本資產名稱。</a:t>
             </a:r>
           </a:p>
           <a:p xmlns:a="http://schemas.openxmlformats.org/drawingml/2006/main">
@@ -767,6 +777,11 @@
           <a:p xmlns:a="http://schemas.openxmlformats.org/drawingml/2006/main">
             <a:r>
               <a:t>website/evidence/demo.json: lifecycle pause, expired; anchor anchor-refused; unguarded unguarded; website/app.js cases</a:t>
+            </a:r>
+          </a:p>
+          <a:p xmlns:a="http://schemas.openxmlformats.org/drawingml/2006/main">
+            <a:r>
+              <a:t>AAPL 是本簡報的代幣示意範例。數量與價格路徑改編自 TSLA/USDG 本機分叉測試，並非 AAPL 執行紀錄或股票即時價格。連結的網站回放保留原始 TSLA 標籤；HIMS 歷史資料也維持原本資產名稱。</a:t>
             </a:r>
           </a:p>
           <a:p xmlns:a="http://schemas.openxmlformats.org/drawingml/2006/main">
@@ -866,7 +881,7 @@
           </a:p>
           <a:p xmlns:a="http://schemas.openxmlformats.org/drawingml/2006/main">
             <a:r>
-              <a:t>接受的到期價格約三百七十八點二六九，低於四百履約價，所以 put 在價內。買方交付三個 TSLA，收到一千兩百 USDG，call 則在價外。履約期結束後，關單透過 Aqua 退回八個 TSLA，包含五個未用的 call 抵押品，以及三個履約收入。再分開領取六十四點零零六四的權利金，book 代幣餘額歸零。</a:t>
+              <a:t>範例接受的到期價格約三百七十八點二六九，低於四百履約價，所以 put 在價內。買方交付三個 AAPL，收到一千兩百 USDG，call 則在價外。履約期結束後，關單透過 Aqua 退回八個 AAPL，包含五個未用的 call 抵押品，以及三個履約收入。再分開領取六十四點零零六四的權利金，book 代幣餘額歸零。</a:t>
             </a:r>
           </a:p>
           <a:p xmlns:a="http://schemas.openxmlformats.org/drawingml/2006/main">
@@ -881,7 +896,7 @@
           </a:p>
           <a:p xmlns:a="http://schemas.openxmlformats.org/drawingml/2006/main">
             <a:r>
-              <a:t>兩種代幣都來自同一條生命週期。Close 和 claim 是不同操作，剩餘承諾在第 15 步解除。</a:t>
+              <a:t>兩種代幣都來自同一條生命週期。Close 和 claim 是不同操作，剩餘承諾在第 15 步解除。 AAPL 是本簡報的代幣示意範例。數量與價格路徑改編自 TSLA/USDG 本機分叉測試，並非 AAPL 執行紀錄或股票即時價格。連結的網站回放保留原始 TSLA 標籤；HIMS 歷史資料也維持原本資產名稱。</a:t>
             </a:r>
           </a:p>
           <a:p xmlns:a="http://schemas.openxmlformats.org/drawingml/2006/main">
@@ -897,6 +912,11 @@
           <a:p xmlns:a="http://schemas.openxmlformats.org/drawingml/2006/main">
             <a:r>
               <a:t>website/evidence/demo.json: lifecycle settle, exercise, close, premium, release; docs/settlement.md</a:t>
+            </a:r>
+          </a:p>
+          <a:p xmlns:a="http://schemas.openxmlformats.org/drawingml/2006/main">
+            <a:r>
+              <a:t>AAPL 是本簡報的代幣示意範例。數量與價格路徑改編自 TSLA/USDG 本機分叉測試，並非 AAPL 執行紀錄或股票即時價格。連結的網站回放保留原始 TSLA 標籤；HIMS 歷史資料也維持原本資產名稱。</a:t>
             </a:r>
           </a:p>
           <a:p xmlns:a="http://schemas.openxmlformats.org/drawingml/2006/main">
@@ -996,7 +1016,7 @@
           </a:p>
           <a:p xmlns:a="http://schemas.openxmlformats.org/drawingml/2006/main">
             <a:r>
-              <a:t>直接看合約回放。第五步，抵押品和權利金進入 book，可以看到兩者的差別。第七步，超出價格帶再買一筆會 revert，買方資金和部位不變。第九步，band 已開啟，但報價到期，必須由造市者更新。第十四步，領完權利金後，book 的代幣餘額變成零。每一步都有前後餘額和 EVM logs 可以展開查核。</a:t>
+              <a:t>AAPL 範例對應這份 TSLA/USDG 合約回放。第五步，抵押品和權利金進入 book，可以看到兩者的差別。第七步，超出價格帶再買一筆會 revert，買方資金和部位不變。第九步，band 已開啟，但報價到期，必須由造市者更新。第十四步，領完權利金後，book 的代幣餘額變成零。每一步都有前後餘額和 EVM logs 可以展開查核。</a:t>
             </a:r>
           </a:p>
           <a:p xmlns:a="http://schemas.openxmlformats.org/drawingml/2006/main">
@@ -1011,7 +1031,7 @@
           </a:p>
           <a:p xmlns:a="http://schemas.openxmlformats.org/drawingml/2006/main">
             <a:r>
-              <a:t>先開好回放，依序選 05、07、09、14，每步約十秒；網站無法使用時，以本頁完成講解。 Public demo: https://vexi-v1.github.io/vexi-hakari/ . Local fallback: http://127.0.0.1:8787/ .</a:t>
+              <a:t>先開好回放，依序選 05、07、09、14，每步約十秒；網站無法使用時，以本頁完成講解。 Public demo: https://vexi-v1.github.io/vexi-hakari/ . Local fallback: http://127.0.0.1:8787/ . AAPL 是本簡報的代幣示意範例。數量與價格路徑改編自 TSLA/USDG 本機分叉測試，並非 AAPL 執行紀錄或股票即時價格。連結的網站回放保留原始 TSLA 標籤；HIMS 歷史資料也維持原本資產名稱。</a:t>
             </a:r>
           </a:p>
           <a:p xmlns:a="http://schemas.openxmlformats.org/drawingml/2006/main">
@@ -1027,6 +1047,11 @@
           <a:p xmlns:a="http://schemas.openxmlformats.org/drawingml/2006/main">
             <a:r>
               <a:t>website/evidence/demo.json: lifecycle buy, pause, expired, premium; website/app.js</a:t>
+            </a:r>
+          </a:p>
+          <a:p xmlns:a="http://schemas.openxmlformats.org/drawingml/2006/main">
+            <a:r>
+              <a:t>AAPL 是本簡報的代幣示意範例。數量與價格路徑改編自 TSLA/USDG 本機分叉測試，並非 AAPL 執行紀錄或股票即時價格。連結的網站回放保留原始 TSLA 標籤；HIMS 歷史資料也維持原本資產名稱。</a:t>
             </a:r>
           </a:p>
           <a:p xmlns:a="http://schemas.openxmlformats.org/drawingml/2006/main">
@@ -1161,6 +1186,11 @@
           </a:p>
           <a:p xmlns:a="http://schemas.openxmlformats.org/drawingml/2006/main">
             <a:r>
+              <a:t>AAPL 是本簡報的代幣示意範例。數量與價格路徑改編自 TSLA/USDG 本機分叉測試，並非 AAPL 執行紀錄或股票即時價格。連結的網站回放保留原始 TSLA 標籤；HIMS 歷史資料也維持原本資產名稱。</a:t>
+            </a:r>
+          </a:p>
+          <a:p xmlns:a="http://schemas.openxmlformats.org/drawingml/2006/main">
+            <a:r>
               <a:t>https://github.com/vexi-v1/vexi-hakari</a:t>
             </a:r>
           </a:p>
@@ -1291,6 +1321,11 @@
           </a:p>
           <a:p xmlns:a="http://schemas.openxmlformats.org/drawingml/2006/main">
             <a:r>
+              <a:t>AAPL 是本簡報的代幣示意範例。數量與價格路徑改編自 TSLA/USDG 本機分叉測試，並非 AAPL 執行紀錄或股票即時價格。連結的網站回放保留原始 TSLA 標籤；HIMS 歷史資料也維持原本資產名稱。</a:t>
+            </a:r>
+          </a:p>
+          <a:p xmlns:a="http://schemas.openxmlformats.org/drawingml/2006/main">
+            <a:r>
               <a:t>https://github.com/vexi-v1/vexi-hakari</a:t>
             </a:r>
           </a:p>
@@ -1401,7 +1436,7 @@
           </a:p>
           <a:p xmlns:a="http://schemas.openxmlformats.org/drawingml/2006/main">
             <a:r>
-              <a:t>Explain the three integration seams. The fork creates a new reference pool, not a hook attached to the existing TSLA pool. FEEDBACK.md documents current integration findings; historical feedback is separate.</a:t>
+              <a:t>Explain the three integration seams. The fork creates a new reference pool, not a hook attached to the existing unhooked pool. FEEDBACK.md documents current integration findings; historical feedback is separate.</a:t>
             </a:r>
           </a:p>
           <a:p xmlns:a="http://schemas.openxmlformats.org/drawingml/2006/main">
@@ -1417,6 +1452,11 @@
           <a:p xmlns:a="http://schemas.openxmlformats.org/drawingml/2006/main">
             <a:r>
               <a:t>README.md; FEEDBACK.md; src/HakariOracleHook.sol; aqua/test/StabilityBandFork.t.sol</a:t>
+            </a:r>
+          </a:p>
+          <a:p xmlns:a="http://schemas.openxmlformats.org/drawingml/2006/main">
+            <a:r>
+              <a:t>AAPL 是本簡報的代幣示意範例。數量與價格路徑改編自 TSLA/USDG 本機分叉測試，並非 AAPL 執行紀錄或股票即時價格。連結的網站回放保留原始 TSLA 標籤；HIMS 歷史資料也維持原本資產名稱。</a:t>
             </a:r>
           </a:p>
           <a:p xmlns:a="http://schemas.openxmlformats.org/drawingml/2006/main">
@@ -1551,6 +1591,11 @@
           </a:p>
           <a:p xmlns:a="http://schemas.openxmlformats.org/drawingml/2006/main">
             <a:r>
+              <a:t>AAPL 是本簡報的代幣示意範例。數量與價格路徑改編自 TSLA/USDG 本機分叉測試，並非 AAPL 執行紀錄或股票即時價格。連結的網站回放保留原始 TSLA 標籤；HIMS 歷史資料也維持原本資產名稱。</a:t>
+            </a:r>
+          </a:p>
+          <a:p xmlns:a="http://schemas.openxmlformats.org/drawingml/2006/main">
+            <a:r>
               <a:t>https://github.com/vexi-v1/vexi-hakari</a:t>
             </a:r>
           </a:p>
@@ -1681,6 +1726,11 @@
           </a:p>
           <a:p xmlns:a="http://schemas.openxmlformats.org/drawingml/2006/main">
             <a:r>
+              <a:t>AAPL 是本簡報的代幣示意範例。數量與價格路徑改編自 TSLA/USDG 本機分叉測試，並非 AAPL 執行紀錄或股票即時價格。連結的網站回放保留原始 TSLA 標籤；HIMS 歷史資料也維持原本資產名稱。</a:t>
+            </a:r>
+          </a:p>
+          <a:p xmlns:a="http://schemas.openxmlformats.org/drawingml/2006/main">
+            <a:r>
               <a:t>https://github.com/vexi-v1/vexi-hakari</a:t>
             </a:r>
           </a:p>
@@ -1811,6 +1861,11 @@
           </a:p>
           <a:p xmlns:a="http://schemas.openxmlformats.org/drawingml/2006/main">
             <a:r>
+              <a:t>AAPL 是本簡報的代幣示意範例。數量與價格路徑改編自 TSLA/USDG 本機分叉測試，並非 AAPL 執行紀錄或股票即時價格。連結的網站回放保留原始 TSLA 標籤；HIMS 歷史資料也維持原本資產名稱。</a:t>
+            </a:r>
+          </a:p>
+          <a:p xmlns:a="http://schemas.openxmlformats.org/drawingml/2006/main">
+            <a:r>
               <a:t>https://github.com/vexi-v1/vexi-hakari</a:t>
             </a:r>
           </a:p>
@@ -1906,7 +1961,7 @@
           </a:p>
           <a:p xmlns:a="http://schemas.openxmlformats.org/drawingml/2006/main">
             <a:r>
-              <a:t>先用 TSLA 代幣和 USDG 理解選擇權。Covered call 是買方先付五塊權利金，取得用四百買一個 TSLA 的權利。到期三百五十就不履約，四百五十就付四百取得代幣。Put 方向相反，買方有權用四百賣出 TSLA，所以賣方要備妥四百 USDG。</a:t>
+              <a:t>先用 AAPL 代幣和 USDG 的假設價格理解選擇權。Covered call 是買方先付五塊權利金，取得用四百買一個 AAPL 的權利。到期三百五十就不履約，四百五十就付四百取得代幣。Put 方向相反，買方有權用四百賣出 AAPL，所以賣方要備妥四百 USDG。</a:t>
             </a:r>
           </a:p>
           <a:p xmlns:a="http://schemas.openxmlformats.org/drawingml/2006/main">
@@ -1921,7 +1976,7 @@
           </a:p>
           <a:p xmlns:a="http://schemas.openxmlformats.org/drawingml/2006/main">
             <a:r>
-              <a:t>Illustrative contract with a five-USDG premium. This is a teaching example, not the recorded eight-USDG base-premium lifecycle.</a:t>
+              <a:t>Illustrative contract with a five-USDG premium. This is a teaching example, not the recorded eight-USDG base-premium lifecycle. AAPL 是本簡報的代幣示意範例。數量與價格路徑改編自 TSLA/USDG 本機分叉測試，並非 AAPL 執行紀錄或股票即時價格。連結的網站回放保留原始 TSLA 標籤；HIMS 歷史資料也維持原本資產名稱。</a:t>
             </a:r>
           </a:p>
           <a:p xmlns:a="http://schemas.openxmlformats.org/drawingml/2006/main">
@@ -1937,6 +1992,11 @@
           <a:p xmlns:a="http://schemas.openxmlformats.org/drawingml/2006/main">
             <a:r>
               <a:t>User-supplied HAKARI Pitch Deck.html, slides 2–3; aqua/src/book/OptionBook.sol</a:t>
+            </a:r>
+          </a:p>
+          <a:p xmlns:a="http://schemas.openxmlformats.org/drawingml/2006/main">
+            <a:r>
+              <a:t>AAPL 是本簡報的代幣示意範例。數量與價格路徑改編自 TSLA/USDG 本機分叉測試，並非 AAPL 執行紀錄或股票即時價格。連結的網站回放保留原始 TSLA 標籤；HIMS 歷史資料也維持原本資產名稱。</a:t>
             </a:r>
           </a:p>
           <a:p xmlns:a="http://schemas.openxmlformats.org/drawingml/2006/main">
@@ -2121,6 +2181,11 @@
           </a:p>
           <a:p xmlns:a="http://schemas.openxmlformats.org/drawingml/2006/main">
             <a:r>
+              <a:t>AAPL 是本簡報的代幣示意範例。數量與價格路徑改編自 TSLA/USDG 本機分叉測試，並非 AAPL 執行紀錄或股票即時價格。連結的網站回放保留原始 TSLA 標籤；HIMS 歷史資料也維持原本資產名稱。</a:t>
+            </a:r>
+          </a:p>
+          <a:p xmlns:a="http://schemas.openxmlformats.org/drawingml/2006/main">
+            <a:r>
               <a:t>https://github.com/vexi-v1/vexi-hakari</a:t>
             </a:r>
           </a:p>
@@ -2251,6 +2316,11 @@
           </a:p>
           <a:p xmlns:a="http://schemas.openxmlformats.org/drawingml/2006/main">
             <a:r>
+              <a:t>AAPL 是本簡報的代幣示意範例。數量與價格路徑改編自 TSLA/USDG 本機分叉測試，並非 AAPL 執行紀錄或股票即時價格。連結的網站回放保留原始 TSLA 標籤；HIMS 歷史資料也維持原本資產名稱。</a:t>
+            </a:r>
+          </a:p>
+          <a:p xmlns:a="http://schemas.openxmlformats.org/drawingml/2006/main">
+            <a:r>
               <a:t>https://github.com/vexi-v1/vexi-hakari</a:t>
             </a:r>
           </a:p>
@@ -2381,6 +2451,11 @@
           </a:p>
           <a:p xmlns:a="http://schemas.openxmlformats.org/drawingml/2006/main">
             <a:r>
+              <a:t>AAPL 是本簡報的代幣示意範例。數量與價格路徑改編自 TSLA/USDG 本機分叉測試，並非 AAPL 執行紀錄或股票即時價格。連結的網站回放保留原始 TSLA 標籤；HIMS 歷史資料也維持原本資產名稱。</a:t>
+            </a:r>
+          </a:p>
+          <a:p xmlns:a="http://schemas.openxmlformats.org/drawingml/2006/main">
+            <a:r>
               <a:t>https://github.com/vexi-v1/vexi-hakari</a:t>
             </a:r>
           </a:p>
@@ -2476,7 +2551,7 @@
           </a:p>
           <a:p xmlns:a="http://schemas.openxmlformats.org/drawingml/2006/main">
             <a:r>
-              <a:t>錢包最初有三十個 TSLA 和兩萬 USDG。掛十口 call，承諾十個 TSLA；掛十口履約價四百的 put，承諾四千 USDG。此時 book 還沒有收到代幣，其餘是未承諾庫存。Aqua 的虛擬額度指向同一批資產，不能相加當成更多存款。</a:t>
+              <a:t>錢包最初有三十個 AAPL 和兩萬 USDG。掛十口 call，承諾十個 AAPL；掛十口履約價四百的 put，承諾四千 USDG。此時 book 還沒有收到代幣，其餘是未承諾庫存。Aqua 的虛擬額度指向同一批資產，不能相加當成更多存款。</a:t>
             </a:r>
           </a:p>
           <a:p xmlns:a="http://schemas.openxmlformats.org/drawingml/2006/main">
@@ -2491,7 +2566,7 @@
           </a:p>
           <a:p xmlns:a="http://schemas.openxmlformats.org/drawingml/2006/main">
             <a:r>
-              <a:t>先指出承諾與可用區段，再指出 book 為零。Ship 和 post 都沒有移動代幣。</a:t>
+              <a:t>先指出承諾與可用區段，再指出 book 為零。Ship 和 post 都沒有移動代幣。 AAPL 是本簡報的代幣示意範例。數量與價格路徑改編自 TSLA/USDG 本機分叉測試，並非 AAPL 執行紀錄或股票即時價格。連結的網站回放保留原始 TSLA 標籤；HIMS 歷史資料也維持原本資產名稱。</a:t>
             </a:r>
           </a:p>
           <a:p xmlns:a="http://schemas.openxmlformats.org/drawingml/2006/main">
@@ -2507,6 +2582,11 @@
           <a:p xmlns:a="http://schemas.openxmlformats.org/drawingml/2006/main">
             <a:r>
               <a:t>website/evidence/demo.json: lifecycle initial, ship, post</a:t>
+            </a:r>
+          </a:p>
+          <a:p xmlns:a="http://schemas.openxmlformats.org/drawingml/2006/main">
+            <a:r>
+              <a:t>AAPL 是本簡報的代幣示意範例。數量與價格路徑改編自 TSLA/USDG 本機分叉測試，並非 AAPL 執行紀錄或股票即時價格。連結的網站回放保留原始 TSLA 標籤；HIMS 歷史資料也維持原本資產名稱。</a:t>
             </a:r>
           </a:p>
           <a:p xmlns:a="http://schemas.openxmlformats.org/drawingml/2006/main">
@@ -2606,7 +2686,7 @@
           </a:p>
           <a:p xmlns:a="http://schemas.openxmlformats.org/drawingml/2006/main">
             <a:r>
-              <a:t>Guard 會用實際錢包餘額扣掉 writer 的未成交承諾，再等比例縮小 SwapVM 的兩邊虛擬儲備。有保護的測試中，四百 USDG 的現貨交易後還剩約二十九個 TSLA。另一個沒有 guard 的獨立情境賣掉二十一個，只剩九個，低於十個的承諾，後續 call 成交就會失敗。這個保護只約束有使用 guard 的策略。</a:t>
+              <a:t>Guard 會用實際錢包餘額扣掉 writer 的未成交承諾，再等比例縮小 SwapVM 的兩邊虛擬儲備。有保護的範例中，四百 USDG 的現貨交易後還剩約二十九個 AAPL。另一個沒有 guard 的獨立情境賣掉二十一個，只剩九個，低於十個的承諾，後續 call 成交就會失敗。這個保護只約束有使用 guard 的策略。</a:t>
             </a:r>
           </a:p>
           <a:p xmlns:a="http://schemas.openxmlformats.org/drawingml/2006/main">
@@ -2621,7 +2701,7 @@
           </a:p>
           <a:p xmlns:a="http://schemas.openxmlformats.org/drawingml/2006/main">
             <a:r>
-              <a:t>比較錢包餘額與十個 TSLA 的承諾。兩個現貨交易的輸入不同，且屬獨立情境，不是交易績效比較。</a:t>
+              <a:t>比較錢包餘額與十個 AAPL 的承諾。兩個現貨交易的輸入不同，且屬獨立情境，不是交易績效比較。 AAPL 是本簡報的代幣示意範例。數量與價格路徑改編自 TSLA/USDG 本機分叉測試，並非 AAPL 執行紀錄或股票即時價格。連結的網站回放保留原始 TSLA 標籤；HIMS 歷史資料也維持原本資產名稱。</a:t>
             </a:r>
           </a:p>
           <a:p xmlns:a="http://schemas.openxmlformats.org/drawingml/2006/main">
@@ -2637,6 +2717,11 @@
           <a:p xmlns:a="http://schemas.openxmlformats.org/drawingml/2006/main">
             <a:r>
               <a:t>website/evidence/demo.json: lifecycle spot; unguarded unguarded; aqua/src/swapvm/ExposureGuard.sol</a:t>
+            </a:r>
+          </a:p>
+          <a:p xmlns:a="http://schemas.openxmlformats.org/drawingml/2006/main">
+            <a:r>
+              <a:t>AAPL 是本簡報的代幣示意範例。數量與價格路徑改編自 TSLA/USDG 本機分叉測試，並非 AAPL 執行紀錄或股票即時價格。連結的網站回放保留原始 TSLA 標籤；HIMS 歷史資料也維持原本資產名稱。</a:t>
             </a:r>
           </a:p>
           <a:p xmlns:a="http://schemas.openxmlformats.org/drawingml/2006/main">
@@ -2736,7 +2821,7 @@
           </a:p>
           <a:p xmlns:a="http://schemas.openxmlformats.org/drawingml/2006/main">
             <a:r>
-              <a:t>買方成交五口 call 和三口 put。Writer 透過 Aqua.pull，從造市者直接拉取五個 TSLA 和一千兩百 USDG 到 book。買方另付六十四點零零六四 USDG 權利金，取得多頭部位。所以 book 共有五個 TSLA 和一千兩百六十四點零零六四 USDG。剩餘未成交承諾則是五個 TSLA 和兩千八百 USDG。</a:t>
+              <a:t>買方成交五口 call 和三口 put。Writer 透過 Aqua.pull，從造市者直接拉取五個 AAPL 和一千兩百 USDG 到 book。買方另付六十四點零零六四 USDG 權利金，取得多頭部位。所以 book 共有五個 AAPL 和一千兩百六十四點零零六四 USDG。剩餘未成交承諾則是五個 AAPL 和兩千八百 USDG。</a:t>
             </a:r>
           </a:p>
           <a:p xmlns:a="http://schemas.openxmlformats.org/drawingml/2006/main">
@@ -2751,7 +2836,7 @@
           </a:p>
           <a:p xmlns:a="http://schemas.openxmlformats.org/drawingml/2006/main">
             <a:r>
-              <a:t>綠色是抵押品，粉紅是權利金。Aqua.pull 是拉取機制，不是中間保管帳戶。</a:t>
+              <a:t>綠色是抵押品，粉紅是權利金。Aqua.pull 是拉取機制，不是中間保管帳戶。 AAPL 是本簡報的代幣示意範例。數量與價格路徑改編自 TSLA/USDG 本機分叉測試，並非 AAPL 執行紀錄或股票即時價格。連結的網站回放保留原始 TSLA 標籤；HIMS 歷史資料也維持原本資產名稱。</a:t>
             </a:r>
           </a:p>
           <a:p xmlns:a="http://schemas.openxmlformats.org/drawingml/2006/main">
@@ -2767,6 +2852,11 @@
           <a:p xmlns:a="http://schemas.openxmlformats.org/drawingml/2006/main">
             <a:r>
               <a:t>website/evidence/demo.json: lifecycle spot, buy; aqua/test/WebsiteEvidence.t.sol</a:t>
+            </a:r>
+          </a:p>
+          <a:p xmlns:a="http://schemas.openxmlformats.org/drawingml/2006/main">
+            <a:r>
+              <a:t>AAPL 是本簡報的代幣示意範例。數量與價格路徑改編自 TSLA/USDG 本機分叉測試，並非 AAPL 執行紀錄或股票即時價格。連結的網站回放保留原始 TSLA 標籤；HIMS 歷史資料也維持原本資產名稱。</a:t>
             </a:r>
           </a:p>
           <a:p xmlns:a="http://schemas.openxmlformats.org/drawingml/2006/main">
@@ -2901,6 +2991,11 @@
           </a:p>
           <a:p xmlns:a="http://schemas.openxmlformats.org/drawingml/2006/main">
             <a:r>
+              <a:t>AAPL 是本簡報的代幣示意範例。數量與價格路徑改編自 TSLA/USDG 本機分叉測試，並非 AAPL 執行紀錄或股票即時價格。連結的網站回放保留原始 TSLA 標籤；HIMS 歷史資料也維持原本資產名稱。</a:t>
+            </a:r>
+          </a:p>
+          <a:p xmlns:a="http://schemas.openxmlformats.org/drawingml/2006/main">
+            <a:r>
               <a:t>https://github.com/vexi-v1/vexi-hakari</a:t>
             </a:r>
           </a:p>
@@ -2996,7 +3091,7 @@
           </a:p>
           <a:p xmlns:a="http://schemas.openxmlformats.org/drawingml/2006/main">
             <a:r>
-              <a:t>這張圖是已記錄的參考池快照。滾動 TWAP 中心約三百七十八點二三，固定往上下各延伸百分之五。偏離百分之二點五時還能報價；到百分之五點一就越過上界，合約拒絕買入。另外也會檢查觀測資料是否可讀、流動性是否足夠，以及原始與截斷價格是否一致。</a:t>
+              <a:t>這張 AAPL 示意圖沿用已記錄的 TSLA 參考價格路徑。滾動 TWAP 中心約三百七十八點二三，固定往上下各延伸百分之五。偏離百分之二點五時還能報價；到百分之五點一就越過上界，合約拒絕買入。另外也會檢查觀測資料是否可讀、流動性是否足夠，以及原始與截斷價格是否一致。</a:t>
             </a:r>
           </a:p>
           <a:p xmlns:a="http://schemas.openxmlformats.org/drawingml/2006/main">
@@ -3011,7 +3106,7 @@
           </a:p>
           <a:p xmlns:a="http://schemas.openxmlformats.org/drawingml/2006/main">
             <a:r>
-              <a:t>指出 +5.1% 快照超過上界。這是本機 EVM 裡的合成市場觀測。</a:t>
+              <a:t>指出 +5.1% 快照超過上界。這是本機 EVM 裡的合成市場觀測。 AAPL 是本簡報的代幣示意範例。數量與價格路徑改編自 TSLA/USDG 本機分叉測試，並非 AAPL 執行紀錄或股票即時價格。連結的網站回放保留原始 TSLA 標籤；HIMS 歷史資料也維持原本資產名稱。</a:t>
             </a:r>
           </a:p>
           <a:p xmlns:a="http://schemas.openxmlformats.org/drawingml/2006/main">
@@ -3027,6 +3122,11 @@
           <a:p xmlns:a="http://schemas.openxmlformats.org/drawingml/2006/main">
             <a:r>
               <a:t>website/evidence/demo.json: lifecycle buy, taper, pause, recover; aqua/src/band/StabilityBandPricer.sol</a:t>
+            </a:r>
+          </a:p>
+          <a:p xmlns:a="http://schemas.openxmlformats.org/drawingml/2006/main">
+            <a:r>
+              <a:t>AAPL 是本簡報的代幣示意範例。數量與價格路徑改編自 TSLA/USDG 本機分叉測試，並非 AAPL 執行紀錄或股票即時價格。連結的網站回放保留原始 TSLA 標籤；HIMS 歷史資料也維持原本資產名稱。</a:t>
             </a:r>
           </a:p>
           <a:p xmlns:a="http://schemas.openxmlformats.org/drawingml/2006/main">
@@ -3109,7 +3209,7 @@
   </p:cSld>
   <p:clrMap bg1="lt1" tx1="dk1" bg2="lt2" tx2="dk2" accent1="accent1" accent2="accent2" accent3="accent3" accent4="accent4" accent5="accent5" accent6="accent6" hlink="hlink" folHlink="folHlink"/>
   <p:sldLayoutIdLst>
-    <p:sldLayoutId xmlns:r="http://schemas.openxmlformats.org/officeDocument/2006/relationships" id="2147483649" r:id="R92f069b1343d47df"/>
+    <p:sldLayoutId xmlns:r="http://schemas.openxmlformats.org/officeDocument/2006/relationships" id="2147483649" r:id="R6e38f3fd052c440d"/>
   </p:sldLayoutIdLst>
   <p:txStyles>
     <p:titleStyle>
@@ -4460,7 +4560,7 @@
               <c:strCache>
                 <c:ptCount val="1"/>
                 <c:pt idx="0">
-                  <c:v>TSLA</c:v>
+                  <c:v>AAPL</c:v>
                 </c:pt>
               </c:strCache>
             </c:strRef>
@@ -4495,7 +4595,7 @@
               <c:strCache>
                 <c:ptCount val="1"/>
                 <c:pt idx="0">
-                  <c:v>TSLA</c:v>
+                  <c:v>AAPL</c:v>
                 </c:pt>
               </c:strCache>
             </c:strRef>
@@ -4863,7 +4963,7 @@
           <c:idx val="0"/>
           <c:order val="0"/>
           <c:tx>
-            <c:v>錢包 TSLA</c:v>
+            <c:v>錢包 AAPL</c:v>
           </c:tx>
           <c:spPr>
             <a:solidFill xmlns:a="http://schemas.openxmlformats.org/drawingml/2006/main">
@@ -4904,7 +5004,7 @@
           <c:idx val="1"/>
           <c:order val="1"/>
           <c:tx>
-            <c:v>承諾 TSLA</c:v>
+            <c:v>承諾 AAPL</c:v>
           </c:tx>
           <c:spPr>
             <a:solidFill xmlns:a="http://schemas.openxmlformats.org/drawingml/2006/main">
@@ -5974,7 +6074,7 @@
           <c:idx val="0"/>
           <c:order val="0"/>
           <c:tx>
-            <c:v>TSLA</c:v>
+            <c:v>AAPL</c:v>
           </c:tx>
           <c:spPr>
             <a:solidFill xmlns:a="http://schemas.openxmlformats.org/drawingml/2006/main">
@@ -6190,7 +6290,7 @@
           <p:nvPr/>
         </p:nvPicPr>
         <p:blipFill>
-          <a:blip xmlns:r="http://schemas.openxmlformats.org/officeDocument/2006/relationships" xmlns:a="http://schemas.openxmlformats.org/drawingml/2006/main" r:embed="R7261876c49ff4c35"/>
+          <a:blip xmlns:r="http://schemas.openxmlformats.org/officeDocument/2006/relationships" xmlns:a="http://schemas.openxmlformats.org/drawingml/2006/main" r:embed="R4cfe307d6f56499a"/>
           <a:stretch xmlns:a="http://schemas.openxmlformats.org/drawingml/2006/main"/>
         </p:blipFill>
         <p:spPr>
@@ -6208,7 +6308,7 @@
           <p:cNvPr id="2" name="Vexi Hakari">
             <a:extLst xmlns:a="http://schemas.openxmlformats.org/drawingml/2006/main">
               <a:ext uri="{FF2B5EF4-FFF2-40B4-BE49-F238E27FC236}">
-                <a16:creationId xmlns:a16="http://schemas.microsoft.com/office/drawing/2014/main" id="{A8F42DAE-AC72-47D9-A12B-280B37A7D036}"/>
+                <a16:creationId xmlns:a16="http://schemas.microsoft.com/office/drawing/2014/main" id="{74C83A7B-2B53-48F6-9976-0D4A0AC8E18D}"/>
               </a:ext>
             </a:extLst>
           </p:cNvPr>
@@ -6265,7 +6365,7 @@
           <p:cNvPr id="3" name="選擇權與現貨，共用錢包流動性">
             <a:extLst xmlns:a="http://schemas.openxmlformats.org/drawingml/2006/main">
               <a:ext uri="{FF2B5EF4-FFF2-40B4-BE49-F238E27FC236}">
-                <a16:creationId xmlns:a16="http://schemas.microsoft.com/office/drawing/2014/main" id="{2FD22801-9C50-4D4D-8F03-363F4B9E2F48}"/>
+                <a16:creationId xmlns:a16="http://schemas.microsoft.com/office/drawing/2014/main" id="{8BCC3CE5-71B7-4BD5-8246-125AB38AC0E2}"/>
               </a:ext>
             </a:extLst>
           </p:cNvPr>
@@ -6322,7 +6422,7 @@
           <p:cNvPr id="4" name="Aqua 策略帳務與 Uniswap v4 報價檢查">
             <a:extLst xmlns:a="http://schemas.openxmlformats.org/drawingml/2006/main">
               <a:ext uri="{FF2B5EF4-FFF2-40B4-BE49-F238E27FC236}">
-                <a16:creationId xmlns:a16="http://schemas.microsoft.com/office/drawing/2014/main" id="{883C176E-E2AD-4050-93A2-328312CCA5C4}"/>
+                <a16:creationId xmlns:a16="http://schemas.microsoft.com/office/drawing/2014/main" id="{ADA569D1-E038-482D-9566-63EC2C146317}"/>
               </a:ext>
             </a:extLst>
           </p:cNvPr>
@@ -6376,10 +6476,10 @@
       </p:sp>
       <p:sp>
         <p:nvSpPr>
-          <p:cNvPr id="5" name="6 分鐘協議 demo">
-            <a:extLst xmlns:a="http://schemas.openxmlformats.org/drawingml/2006/main">
-              <a:ext uri="{FF2B5EF4-FFF2-40B4-BE49-F238E27FC236}">
-                <a16:creationId xmlns:a16="http://schemas.microsoft.com/office/drawing/2014/main" id="{68AFAF8A-BF12-4636-A159-40B6EE5F7247}"/>
+          <p:cNvPr id="5" name="6 分鐘協議 demo／AAPL 範例">
+            <a:extLst xmlns:a="http://schemas.openxmlformats.org/drawingml/2006/main">
+              <a:ext uri="{FF2B5EF4-FFF2-40B4-BE49-F238E27FC236}">
+                <a16:creationId xmlns:a16="http://schemas.microsoft.com/office/drawing/2014/main" id="{B1B92265-8C08-4303-A811-FD52A2C6E544}"/>
               </a:ext>
             </a:extLst>
           </p:cNvPr>
@@ -6426,7 +6526,7 @@
                 <a:ea typeface="Arial Unicode MS"/>
                 <a:cs typeface="Arial Unicode MS"/>
               </a:rPr>
-              <a:t>6 分鐘協議 demo</a:t>
+              <a:t>6 分鐘協議 demo／AAPL 範例</a:t>
             </a:r>
           </a:p>
         </p:txBody>
@@ -6436,7 +6536,7 @@
           <p:cNvPr id="6" name="ETHGlobal Tokyo 2026">
             <a:extLst xmlns:a="http://schemas.openxmlformats.org/drawingml/2006/main">
               <a:ext uri="{FF2B5EF4-FFF2-40B4-BE49-F238E27FC236}">
-                <a16:creationId xmlns:a16="http://schemas.microsoft.com/office/drawing/2014/main" id="{EB436D32-EDC4-47FE-88B9-BFF64755B0A7}"/>
+                <a16:creationId xmlns:a16="http://schemas.microsoft.com/office/drawing/2014/main" id="{507723D3-6AC4-408E-BE9F-68AEB73CB6C7}"/>
               </a:ext>
             </a:extLst>
           </p:cNvPr>
@@ -6491,7 +6591,7 @@
     </p:spTree>
     <p:extLst>
       <p:ext uri="{BB962C8B-B14F-4D97-AF65-F5344CB8AC3E}">
-        <p14:creationId xmlns:p14="http://schemas.microsoft.com/office/powerpoint/2010/main" val="835014934"/>
+        <p14:creationId xmlns:p14="http://schemas.microsoft.com/office/powerpoint/2010/main" val="1306243729"/>
       </p:ext>
     </p:extLst>
   </p:cSld>
@@ -6519,10 +6619,10 @@
       </p:grpSpPr>
       <p:sp>
         <p:nvSpPr>
-          <p:cNvPr id="11" name="可成交量與權利金的反應不同">
-            <a:extLst xmlns:a="http://schemas.openxmlformats.org/drawingml/2006/main">
-              <a:ext uri="{FF2B5EF4-FFF2-40B4-BE49-F238E27FC236}">
-                <a16:creationId xmlns:a16="http://schemas.microsoft.com/office/drawing/2014/main" id="{2D366CFF-3EBE-414A-B6E9-D145541131F0}"/>
+          <p:cNvPr id="12" name="可成交量與權利金的反應不同">
+            <a:extLst xmlns:a="http://schemas.openxmlformats.org/drawingml/2006/main">
+              <a:ext uri="{FF2B5EF4-FFF2-40B4-BE49-F238E27FC236}">
+                <a16:creationId xmlns:a16="http://schemas.microsoft.com/office/drawing/2014/main" id="{F008A89B-C3C2-4D5C-A5ED-109FC7E92159}"/>
               </a:ext>
             </a:extLst>
           </p:cNvPr>
@@ -6576,14 +6676,14 @@
       </p:sp>
       <p:pic>
         <p:nvPicPr>
-          <p:cNvPr id="12" name=""/>
+          <p:cNvPr id="13" name=""/>
           <p:cNvPicPr>
             <a:picLocks xmlns:a="http://schemas.openxmlformats.org/drawingml/2006/main" noChangeAspect="1"/>
           </p:cNvPicPr>
           <p:nvPr/>
         </p:nvPicPr>
         <p:blipFill>
-          <a:blip xmlns:r="http://schemas.openxmlformats.org/officeDocument/2006/relationships" xmlns:a="http://schemas.openxmlformats.org/drawingml/2006/main" r:embed="Re57bad4987ca41f7"/>
+          <a:blip xmlns:r="http://schemas.openxmlformats.org/officeDocument/2006/relationships" xmlns:a="http://schemas.openxmlformats.org/drawingml/2006/main" r:embed="R0776593a90844b67"/>
           <a:stretch xmlns:a="http://schemas.openxmlformats.org/drawingml/2006/main"/>
         </p:blipFill>
         <p:spPr>
@@ -6601,7 +6701,7 @@
           <p:cNvPr id="3" name="Vexi Hakari">
             <a:extLst xmlns:a="http://schemas.openxmlformats.org/drawingml/2006/main">
               <a:ext uri="{FF2B5EF4-FFF2-40B4-BE49-F238E27FC236}">
-                <a16:creationId xmlns:a16="http://schemas.microsoft.com/office/drawing/2014/main" id="{E3A36942-9958-4307-BBC0-55B932E7B776}"/>
+                <a16:creationId xmlns:a16="http://schemas.microsoft.com/office/drawing/2014/main" id="{3EE438AB-6FAA-4198-8F3C-3C2A0E742B6E}"/>
               </a:ext>
             </a:extLst>
           </p:cNvPr>
@@ -6655,22 +6755,22 @@
       </p:sp>
       <p:sp>
         <p:nvSpPr>
-          <p:cNvPr id="4" name="10">
-            <a:extLst xmlns:a="http://schemas.openxmlformats.org/drawingml/2006/main">
-              <a:ext uri="{FF2B5EF4-FFF2-40B4-BE49-F238E27FC236}">
-                <a16:creationId xmlns:a16="http://schemas.microsoft.com/office/drawing/2014/main" id="{73B7CA9D-194C-48CE-83B9-8D86B54B1EF9}"/>
-              </a:ext>
-            </a:extLst>
-          </p:cNvPr>
-          <p:cNvSpPr>
-            <a:spLocks xmlns:a="http://schemas.openxmlformats.org/drawingml/2006/main" noGrp="1"/>
-          </p:cNvSpPr>
-          <p:nvPr/>
-        </p:nvSpPr>
-        <p:spPr>
-          <a:xfrm xmlns:a="http://schemas.openxmlformats.org/drawingml/2006/main">
-            <a:off x="11001375" y="6153150"/>
-            <a:ext cx="619125" cy="342900"/>
+          <p:cNvPr id="4" name="AAPL 範例／示意數值">
+            <a:extLst xmlns:a="http://schemas.openxmlformats.org/drawingml/2006/main">
+              <a:ext uri="{FF2B5EF4-FFF2-40B4-BE49-F238E27FC236}">
+                <a16:creationId xmlns:a16="http://schemas.microsoft.com/office/drawing/2014/main" id="{67E27A25-10B1-4EAE-AB3E-443AF12F1011}"/>
+              </a:ext>
+            </a:extLst>
+          </p:cNvPr>
+          <p:cNvSpPr>
+            <a:spLocks xmlns:a="http://schemas.openxmlformats.org/drawingml/2006/main" noGrp="1"/>
+          </p:cNvSpPr>
+          <p:nvPr/>
+        </p:nvSpPr>
+        <p:spPr>
+          <a:xfrm xmlns:a="http://schemas.openxmlformats.org/drawingml/2006/main">
+            <a:off x="3905250" y="6153150"/>
+            <a:ext cx="6667500" cy="342900"/>
           </a:xfrm>
           <a:prstGeom xmlns:a="http://schemas.openxmlformats.org/drawingml/2006/main" prst="rect">
             <a:avLst/>
@@ -6686,7 +6786,7 @@
           </a:bodyPr>
           <a:lstStyle xmlns:a="http://schemas.openxmlformats.org/drawingml/2006/main"/>
           <a:p xmlns:a="http://schemas.openxmlformats.org/drawingml/2006/main">
-            <a:pPr algn="r">
+            <a:pPr algn="l">
               <a:defRPr sz="1275" b="0">
                 <a:solidFill>
                   <a:srgbClr val="A8A8B2"/>
@@ -6705,29 +6805,29 @@
                 <a:ea typeface="Arial Unicode MS"/>
                 <a:cs typeface="Arial Unicode MS"/>
               </a:rPr>
-              <a:t>10</a:t>
-            </a:r>
-          </a:p>
-        </p:txBody>
-      </p:sp>
-      <p:sp>
-        <p:nvSpPr>
-          <p:cNvPr id="5" name="每次口數上限">
-            <a:extLst xmlns:a="http://schemas.openxmlformats.org/drawingml/2006/main">
-              <a:ext uri="{FF2B5EF4-FFF2-40B4-BE49-F238E27FC236}">
-                <a16:creationId xmlns:a16="http://schemas.microsoft.com/office/drawing/2014/main" id="{D81904AD-E2E9-478E-A261-C5815190CC92}"/>
-              </a:ext>
-            </a:extLst>
-          </p:cNvPr>
-          <p:cNvSpPr>
-            <a:spLocks xmlns:a="http://schemas.openxmlformats.org/drawingml/2006/main" noGrp="1"/>
-          </p:cNvSpPr>
-          <p:nvPr/>
-        </p:nvSpPr>
-        <p:spPr>
-          <a:xfrm xmlns:a="http://schemas.openxmlformats.org/drawingml/2006/main">
-            <a:off x="685800" y="1476375"/>
-            <a:ext cx="5048250" cy="447675"/>
+              <a:t>AAPL 範例／示意數值</a:t>
+            </a:r>
+          </a:p>
+        </p:txBody>
+      </p:sp>
+      <p:sp>
+        <p:nvSpPr>
+          <p:cNvPr id="5" name="10">
+            <a:extLst xmlns:a="http://schemas.openxmlformats.org/drawingml/2006/main">
+              <a:ext uri="{FF2B5EF4-FFF2-40B4-BE49-F238E27FC236}">
+                <a16:creationId xmlns:a16="http://schemas.microsoft.com/office/drawing/2014/main" id="{B1AD826B-B6CE-43FC-A5DB-006448057ED2}"/>
+              </a:ext>
+            </a:extLst>
+          </p:cNvPr>
+          <p:cNvSpPr>
+            <a:spLocks xmlns:a="http://schemas.openxmlformats.org/drawingml/2006/main" noGrp="1"/>
+          </p:cNvSpPr>
+          <p:nvPr/>
+        </p:nvSpPr>
+        <p:spPr>
+          <a:xfrm xmlns:a="http://schemas.openxmlformats.org/drawingml/2006/main">
+            <a:off x="11001375" y="6153150"/>
+            <a:ext cx="619125" cy="342900"/>
           </a:xfrm>
           <a:prstGeom xmlns:a="http://schemas.openxmlformats.org/drawingml/2006/main" prst="rect">
             <a:avLst/>
@@ -6743,47 +6843,47 @@
           </a:bodyPr>
           <a:lstStyle xmlns:a="http://schemas.openxmlformats.org/drawingml/2006/main"/>
           <a:p xmlns:a="http://schemas.openxmlformats.org/drawingml/2006/main">
-            <a:pPr algn="l">
-              <a:defRPr sz="2250" b="1">
-                <a:solidFill>
-                  <a:srgbClr val="37D67A"/>
-                </a:solidFill>
-                <a:latin typeface="Arial Unicode MS"/>
-                <a:ea typeface="Arial Unicode MS"/>
-                <a:cs typeface="Arial Unicode MS"/>
-              </a:defRPr>
-            </a:pPr>
-            <a:r>
-              <a:rPr sz="2250" b="1">
-                <a:solidFill>
-                  <a:srgbClr val="37D67A"/>
-                </a:solidFill>
-                <a:latin typeface="Arial Unicode MS"/>
-                <a:ea typeface="Arial Unicode MS"/>
-                <a:cs typeface="Arial Unicode MS"/>
-              </a:rPr>
-              <a:t>每次口數上限</a:t>
-            </a:r>
-          </a:p>
-        </p:txBody>
-      </p:sp>
-      <p:sp>
-        <p:nvSpPr>
-          <p:cNvPr id="6" name="每口權利金／USDG">
-            <a:extLst xmlns:a="http://schemas.openxmlformats.org/drawingml/2006/main">
-              <a:ext uri="{FF2B5EF4-FFF2-40B4-BE49-F238E27FC236}">
-                <a16:creationId xmlns:a16="http://schemas.microsoft.com/office/drawing/2014/main" id="{49843D10-0BE7-4B4B-A3FD-56A7A166D2E3}"/>
-              </a:ext>
-            </a:extLst>
-          </p:cNvPr>
-          <p:cNvSpPr>
-            <a:spLocks xmlns:a="http://schemas.openxmlformats.org/drawingml/2006/main" noGrp="1"/>
-          </p:cNvSpPr>
-          <p:nvPr/>
-        </p:nvSpPr>
-        <p:spPr>
-          <a:xfrm xmlns:a="http://schemas.openxmlformats.org/drawingml/2006/main">
-            <a:off x="6553200" y="1476375"/>
+            <a:pPr algn="r">
+              <a:defRPr sz="1275" b="0">
+                <a:solidFill>
+                  <a:srgbClr val="A8A8B2"/>
+                </a:solidFill>
+                <a:latin typeface="Arial Unicode MS"/>
+                <a:ea typeface="Arial Unicode MS"/>
+                <a:cs typeface="Arial Unicode MS"/>
+              </a:defRPr>
+            </a:pPr>
+            <a:r>
+              <a:rPr sz="1275" b="0">
+                <a:solidFill>
+                  <a:srgbClr val="A8A8B2"/>
+                </a:solidFill>
+                <a:latin typeface="Arial Unicode MS"/>
+                <a:ea typeface="Arial Unicode MS"/>
+                <a:cs typeface="Arial Unicode MS"/>
+              </a:rPr>
+              <a:t>10</a:t>
+            </a:r>
+          </a:p>
+        </p:txBody>
+      </p:sp>
+      <p:sp>
+        <p:nvSpPr>
+          <p:cNvPr id="6" name="每次口數上限">
+            <a:extLst xmlns:a="http://schemas.openxmlformats.org/drawingml/2006/main">
+              <a:ext uri="{FF2B5EF4-FFF2-40B4-BE49-F238E27FC236}">
+                <a16:creationId xmlns:a16="http://schemas.microsoft.com/office/drawing/2014/main" id="{A9AD08FA-C812-46CB-8C45-73A58979B5A5}"/>
+              </a:ext>
+            </a:extLst>
+          </p:cNvPr>
+          <p:cNvSpPr>
+            <a:spLocks xmlns:a="http://schemas.openxmlformats.org/drawingml/2006/main" noGrp="1"/>
+          </p:cNvSpPr>
+          <p:nvPr/>
+        </p:nvSpPr>
+        <p:spPr>
+          <a:xfrm xmlns:a="http://schemas.openxmlformats.org/drawingml/2006/main">
+            <a:off x="685800" y="1476375"/>
             <a:ext cx="5048250" cy="447675"/>
           </a:xfrm>
           <a:prstGeom xmlns:a="http://schemas.openxmlformats.org/drawingml/2006/main" prst="rect">
@@ -6803,6 +6903,63 @@
             <a:pPr algn="l">
               <a:defRPr sz="2250" b="1">
                 <a:solidFill>
+                  <a:srgbClr val="37D67A"/>
+                </a:solidFill>
+                <a:latin typeface="Arial Unicode MS"/>
+                <a:ea typeface="Arial Unicode MS"/>
+                <a:cs typeface="Arial Unicode MS"/>
+              </a:defRPr>
+            </a:pPr>
+            <a:r>
+              <a:rPr sz="2250" b="1">
+                <a:solidFill>
+                  <a:srgbClr val="37D67A"/>
+                </a:solidFill>
+                <a:latin typeface="Arial Unicode MS"/>
+                <a:ea typeface="Arial Unicode MS"/>
+                <a:cs typeface="Arial Unicode MS"/>
+              </a:rPr>
+              <a:t>每次口數上限</a:t>
+            </a:r>
+          </a:p>
+        </p:txBody>
+      </p:sp>
+      <p:sp>
+        <p:nvSpPr>
+          <p:cNvPr id="7" name="每口權利金／USDG">
+            <a:extLst xmlns:a="http://schemas.openxmlformats.org/drawingml/2006/main">
+              <a:ext uri="{FF2B5EF4-FFF2-40B4-BE49-F238E27FC236}">
+                <a16:creationId xmlns:a16="http://schemas.microsoft.com/office/drawing/2014/main" id="{0D29C5E9-48F9-49A6-B89A-86F3D9E57DEB}"/>
+              </a:ext>
+            </a:extLst>
+          </p:cNvPr>
+          <p:cNvSpPr>
+            <a:spLocks xmlns:a="http://schemas.openxmlformats.org/drawingml/2006/main" noGrp="1"/>
+          </p:cNvSpPr>
+          <p:nvPr/>
+        </p:nvSpPr>
+        <p:spPr>
+          <a:xfrm xmlns:a="http://schemas.openxmlformats.org/drawingml/2006/main">
+            <a:off x="6553200" y="1476375"/>
+            <a:ext cx="5048250" cy="447675"/>
+          </a:xfrm>
+          <a:prstGeom xmlns:a="http://schemas.openxmlformats.org/drawingml/2006/main" prst="rect">
+            <a:avLst/>
+          </a:prstGeom>
+          <a:noFill xmlns:a="http://schemas.openxmlformats.org/drawingml/2006/main"/>
+          <a:ln xmlns:a="http://schemas.openxmlformats.org/drawingml/2006/main" w="0">
+            <a:noFill/>
+          </a:ln>
+        </p:spPr>
+        <p:txBody>
+          <a:bodyPr xmlns:a="http://schemas.openxmlformats.org/drawingml/2006/main" wrap="none" lIns="0" tIns="0" rIns="0" bIns="0" anchor="ctr">
+            <a:noAutofit/>
+          </a:bodyPr>
+          <a:lstStyle xmlns:a="http://schemas.openxmlformats.org/drawingml/2006/main"/>
+          <a:p xmlns:a="http://schemas.openxmlformats.org/drawingml/2006/main">
+            <a:pPr algn="l">
+              <a:defRPr sz="2250" b="1">
+                <a:solidFill>
                   <a:srgbClr val="FF007A"/>
                 </a:solidFill>
                 <a:latin typeface="Arial Unicode MS"/>
@@ -6826,7 +6983,7 @@
       </p:sp>
       <p:graphicFrame>
         <p:nvGraphicFramePr>
-          <p:cNvPr id="17" name="Chart"/>
+          <p:cNvPr id="19" name="Chart"/>
           <p:cNvGraphicFramePr/>
           <p:nvPr/>
         </p:nvGraphicFramePr>
@@ -6836,13 +6993,13 @@
         </p:xfrm>
         <a:graphic xmlns:a="http://schemas.openxmlformats.org/drawingml/2006/main">
           <a:graphicData uri="http://schemas.openxmlformats.org/drawingml/2006/chart">
-            <c:chart xmlns:r="http://schemas.openxmlformats.org/officeDocument/2006/relationships" xmlns:c="http://schemas.openxmlformats.org/drawingml/2006/chart" r:id="Rbce2e4bb371842e9"/>
+            <c:chart xmlns:r="http://schemas.openxmlformats.org/officeDocument/2006/relationships" xmlns:c="http://schemas.openxmlformats.org/drawingml/2006/chart" r:id="Rab671bba1e5f462e"/>
           </a:graphicData>
         </a:graphic>
       </p:graphicFrame>
       <p:graphicFrame>
         <p:nvGraphicFramePr>
-          <p:cNvPr id="18" name="Chart"/>
+          <p:cNvPr id="20" name="Chart"/>
           <p:cNvGraphicFramePr/>
           <p:nvPr/>
         </p:nvGraphicFramePr>
@@ -6852,16 +7009,16 @@
         </p:xfrm>
         <a:graphic xmlns:a="http://schemas.openxmlformats.org/drawingml/2006/main">
           <a:graphicData uri="http://schemas.openxmlformats.org/drawingml/2006/chart">
-            <c:chart xmlns:r="http://schemas.openxmlformats.org/officeDocument/2006/relationships" xmlns:c="http://schemas.openxmlformats.org/drawingml/2006/chart" r:id="R2ef3572f1d754843"/>
+            <c:chart xmlns:r="http://schemas.openxmlformats.org/officeDocument/2006/relationships" xmlns:c="http://schemas.openxmlformats.org/drawingml/2006/chart" r:id="Rb12b6c79c96f479a"/>
           </a:graphicData>
         </a:graphic>
       </p:graphicFrame>
       <p:sp>
         <p:nvSpPr>
-          <p:cNvPr id="9" name="+2.5%：25 口，8.4 USDG">
-            <a:extLst xmlns:a="http://schemas.openxmlformats.org/drawingml/2006/main">
-              <a:ext uri="{FF2B5EF4-FFF2-40B4-BE49-F238E27FC236}">
-                <a16:creationId xmlns:a16="http://schemas.microsoft.com/office/drawing/2014/main" id="{2789F79D-3AE0-4A56-AF00-02FA9BEDE3D5}"/>
+          <p:cNvPr id="10" name="+2.5%：25 口，8.4 USDG">
+            <a:extLst xmlns:a="http://schemas.openxmlformats.org/drawingml/2006/main">
+              <a:ext uri="{FF2B5EF4-FFF2-40B4-BE49-F238E27FC236}">
+                <a16:creationId xmlns:a16="http://schemas.microsoft.com/office/drawing/2014/main" id="{DDBBAA49-4C7B-4A13-8F3D-F4833FD33F70}"/>
               </a:ext>
             </a:extLst>
           </p:cNvPr>
@@ -6915,10 +7072,10 @@
       </p:sp>
       <p:sp>
         <p:nvSpPr>
-          <p:cNvPr id="10" name="示意：中心 400，基本權利金 8。到 ±5%：上限 0，停止報價">
-            <a:extLst xmlns:a="http://schemas.openxmlformats.org/drawingml/2006/main">
-              <a:ext uri="{FF2B5EF4-FFF2-40B4-BE49-F238E27FC236}">
-                <a16:creationId xmlns:a16="http://schemas.microsoft.com/office/drawing/2014/main" id="{56306A9A-E508-4EA6-8B89-9C5EE5B07454}"/>
+          <p:cNvPr id="11" name="示意：中心 400，基本權利金 8。到 ±5%：上限 0，停止報價">
+            <a:extLst xmlns:a="http://schemas.openxmlformats.org/drawingml/2006/main">
+              <a:ext uri="{FF2B5EF4-FFF2-40B4-BE49-F238E27FC236}">
+                <a16:creationId xmlns:a16="http://schemas.microsoft.com/office/drawing/2014/main" id="{51F50898-5530-4D3F-BBAE-1EA08062F195}"/>
               </a:ext>
             </a:extLst>
           </p:cNvPr>
@@ -6973,7 +7130,7 @@
     </p:spTree>
     <p:extLst>
       <p:ext uri="{BB962C8B-B14F-4D97-AF65-F5344CB8AC3E}">
-        <p14:creationId xmlns:p14="http://schemas.microsoft.com/office/powerpoint/2010/main" val="1322285348"/>
+        <p14:creationId xmlns:p14="http://schemas.microsoft.com/office/powerpoint/2010/main" val="1058783308"/>
       </p:ext>
     </p:extLst>
   </p:cSld>
@@ -7001,10 +7158,10 @@
       </p:grpSpPr>
       <p:sp>
         <p:nvSpPr>
-          <p:cNvPr id="7" name="價格帶開啟，不代表一定能成交">
-            <a:extLst xmlns:a="http://schemas.openxmlformats.org/drawingml/2006/main">
-              <a:ext uri="{FF2B5EF4-FFF2-40B4-BE49-F238E27FC236}">
-                <a16:creationId xmlns:a16="http://schemas.microsoft.com/office/drawing/2014/main" id="{4B022250-6454-4B7A-929D-054AFF652DAB}"/>
+          <p:cNvPr id="8" name="價格帶開啟，不代表一定能成交">
+            <a:extLst xmlns:a="http://schemas.openxmlformats.org/drawingml/2006/main">
+              <a:ext uri="{FF2B5EF4-FFF2-40B4-BE49-F238E27FC236}">
+                <a16:creationId xmlns:a16="http://schemas.microsoft.com/office/drawing/2014/main" id="{99B32389-A67E-4727-966E-79DD8AF66460}"/>
               </a:ext>
             </a:extLst>
           </p:cNvPr>
@@ -7058,14 +7215,14 @@
       </p:sp>
       <p:pic>
         <p:nvPicPr>
-          <p:cNvPr id="8" name=""/>
+          <p:cNvPr id="9" name=""/>
           <p:cNvPicPr>
             <a:picLocks xmlns:a="http://schemas.openxmlformats.org/drawingml/2006/main" noChangeAspect="1"/>
           </p:cNvPicPr>
           <p:nvPr/>
         </p:nvPicPr>
         <p:blipFill>
-          <a:blip xmlns:r="http://schemas.openxmlformats.org/officeDocument/2006/relationships" xmlns:a="http://schemas.openxmlformats.org/drawingml/2006/main" r:embed="Rd6d81f020afc450f"/>
+          <a:blip xmlns:r="http://schemas.openxmlformats.org/officeDocument/2006/relationships" xmlns:a="http://schemas.openxmlformats.org/drawingml/2006/main" r:embed="Rb11ac85c2cf043e4"/>
           <a:stretch xmlns:a="http://schemas.openxmlformats.org/drawingml/2006/main"/>
         </p:blipFill>
         <p:spPr>
@@ -7083,7 +7240,7 @@
           <p:cNvPr id="3" name="Vexi Hakari">
             <a:extLst xmlns:a="http://schemas.openxmlformats.org/drawingml/2006/main">
               <a:ext uri="{FF2B5EF4-FFF2-40B4-BE49-F238E27FC236}">
-                <a16:creationId xmlns:a16="http://schemas.microsoft.com/office/drawing/2014/main" id="{AB647601-5F67-4D34-9A07-0BAD9932096C}"/>
+                <a16:creationId xmlns:a16="http://schemas.microsoft.com/office/drawing/2014/main" id="{548F99F1-32EA-49CE-9930-056C6B104323}"/>
               </a:ext>
             </a:extLst>
           </p:cNvPr>
@@ -7137,22 +7294,22 @@
       </p:sp>
       <p:sp>
         <p:nvSpPr>
-          <p:cNvPr id="4" name="11">
-            <a:extLst xmlns:a="http://schemas.openxmlformats.org/drawingml/2006/main">
-              <a:ext uri="{FF2B5EF4-FFF2-40B4-BE49-F238E27FC236}">
-                <a16:creationId xmlns:a16="http://schemas.microsoft.com/office/drawing/2014/main" id="{F54484F8-ABB4-4935-939E-4B5774143B6D}"/>
-              </a:ext>
-            </a:extLst>
-          </p:cNvPr>
-          <p:cNvSpPr>
-            <a:spLocks xmlns:a="http://schemas.openxmlformats.org/drawingml/2006/main" noGrp="1"/>
-          </p:cNvSpPr>
-          <p:nvPr/>
-        </p:nvSpPr>
-        <p:spPr>
-          <a:xfrm xmlns:a="http://schemas.openxmlformats.org/drawingml/2006/main">
-            <a:off x="11001375" y="6153150"/>
-            <a:ext cx="619125" cy="342900"/>
+          <p:cNvPr id="4" name="AAPL 範例／示意數值">
+            <a:extLst xmlns:a="http://schemas.openxmlformats.org/drawingml/2006/main">
+              <a:ext uri="{FF2B5EF4-FFF2-40B4-BE49-F238E27FC236}">
+                <a16:creationId xmlns:a16="http://schemas.microsoft.com/office/drawing/2014/main" id="{A27540F2-E01E-4C7B-84F8-280B5D7C969C}"/>
+              </a:ext>
+            </a:extLst>
+          </p:cNvPr>
+          <p:cNvSpPr>
+            <a:spLocks xmlns:a="http://schemas.openxmlformats.org/drawingml/2006/main" noGrp="1"/>
+          </p:cNvSpPr>
+          <p:nvPr/>
+        </p:nvSpPr>
+        <p:spPr>
+          <a:xfrm xmlns:a="http://schemas.openxmlformats.org/drawingml/2006/main">
+            <a:off x="3905250" y="6153150"/>
+            <a:ext cx="6667500" cy="342900"/>
           </a:xfrm>
           <a:prstGeom xmlns:a="http://schemas.openxmlformats.org/drawingml/2006/main" prst="rect">
             <a:avLst/>
@@ -7168,6 +7325,63 @@
           </a:bodyPr>
           <a:lstStyle xmlns:a="http://schemas.openxmlformats.org/drawingml/2006/main"/>
           <a:p xmlns:a="http://schemas.openxmlformats.org/drawingml/2006/main">
+            <a:pPr algn="l">
+              <a:defRPr sz="1275" b="0">
+                <a:solidFill>
+                  <a:srgbClr val="A8A8B2"/>
+                </a:solidFill>
+                <a:latin typeface="Arial Unicode MS"/>
+                <a:ea typeface="Arial Unicode MS"/>
+                <a:cs typeface="Arial Unicode MS"/>
+              </a:defRPr>
+            </a:pPr>
+            <a:r>
+              <a:rPr sz="1275" b="0">
+                <a:solidFill>
+                  <a:srgbClr val="A8A8B2"/>
+                </a:solidFill>
+                <a:latin typeface="Arial Unicode MS"/>
+                <a:ea typeface="Arial Unicode MS"/>
+                <a:cs typeface="Arial Unicode MS"/>
+              </a:rPr>
+              <a:t>AAPL 範例／示意數值</a:t>
+            </a:r>
+          </a:p>
+        </p:txBody>
+      </p:sp>
+      <p:sp>
+        <p:nvSpPr>
+          <p:cNvPr id="5" name="11">
+            <a:extLst xmlns:a="http://schemas.openxmlformats.org/drawingml/2006/main">
+              <a:ext uri="{FF2B5EF4-FFF2-40B4-BE49-F238E27FC236}">
+                <a16:creationId xmlns:a16="http://schemas.microsoft.com/office/drawing/2014/main" id="{6A58CDE3-79B6-4BEE-A9CE-895A4DDC049E}"/>
+              </a:ext>
+            </a:extLst>
+          </p:cNvPr>
+          <p:cNvSpPr>
+            <a:spLocks xmlns:a="http://schemas.openxmlformats.org/drawingml/2006/main" noGrp="1"/>
+          </p:cNvSpPr>
+          <p:nvPr/>
+        </p:nvSpPr>
+        <p:spPr>
+          <a:xfrm xmlns:a="http://schemas.openxmlformats.org/drawingml/2006/main">
+            <a:off x="11001375" y="6153150"/>
+            <a:ext cx="619125" cy="342900"/>
+          </a:xfrm>
+          <a:prstGeom xmlns:a="http://schemas.openxmlformats.org/drawingml/2006/main" prst="rect">
+            <a:avLst/>
+          </a:prstGeom>
+          <a:noFill xmlns:a="http://schemas.openxmlformats.org/drawingml/2006/main"/>
+          <a:ln xmlns:a="http://schemas.openxmlformats.org/drawingml/2006/main" w="0">
+            <a:noFill/>
+          </a:ln>
+        </p:spPr>
+        <p:txBody>
+          <a:bodyPr xmlns:a="http://schemas.openxmlformats.org/drawingml/2006/main" wrap="none" lIns="0" tIns="0" rIns="0" bIns="0" anchor="ctr">
+            <a:noAutofit/>
+          </a:bodyPr>
+          <a:lstStyle xmlns:a="http://schemas.openxmlformats.org/drawingml/2006/main"/>
+          <a:p xmlns:a="http://schemas.openxmlformats.org/drawingml/2006/main">
             <a:pPr algn="r">
               <a:defRPr sz="1275" b="0">
                 <a:solidFill>
@@ -7194,7 +7408,7 @@
       </p:sp>
       <p:graphicFrame>
         <p:nvGraphicFramePr>
-          <p:cNvPr id="11" name=""/>
+          <p:cNvPr id="13" name=""/>
           <p:cNvGraphicFramePr/>
           <p:nvPr/>
         </p:nvGraphicFramePr>
@@ -7768,10 +7982,10 @@
       </p:graphicFrame>
       <p:sp>
         <p:nvSpPr>
-          <p:cNvPr id="6" name="讀得到報價 ≠ 保證可以成交">
-            <a:extLst xmlns:a="http://schemas.openxmlformats.org/drawingml/2006/main">
-              <a:ext uri="{FF2B5EF4-FFF2-40B4-BE49-F238E27FC236}">
-                <a16:creationId xmlns:a16="http://schemas.microsoft.com/office/drawing/2014/main" id="{6FA90BB4-617B-4B33-9578-B9AD1DFD035F}"/>
+          <p:cNvPr id="7" name="讀得到報價 ≠ 保證可以成交">
+            <a:extLst xmlns:a="http://schemas.openxmlformats.org/drawingml/2006/main">
+              <a:ext uri="{FF2B5EF4-FFF2-40B4-BE49-F238E27FC236}">
+                <a16:creationId xmlns:a16="http://schemas.microsoft.com/office/drawing/2014/main" id="{20B2C394-A1B5-4653-86BF-A7BE1B8E4D2E}"/>
               </a:ext>
             </a:extLst>
           </p:cNvPr>
@@ -7826,7 +8040,7 @@
     </p:spTree>
     <p:extLst>
       <p:ext uri="{BB962C8B-B14F-4D97-AF65-F5344CB8AC3E}">
-        <p14:creationId xmlns:p14="http://schemas.microsoft.com/office/powerpoint/2010/main" val="454454434"/>
+        <p14:creationId xmlns:p14="http://schemas.microsoft.com/office/powerpoint/2010/main" val="1519365475"/>
       </p:ext>
     </p:extLst>
   </p:cSld>
@@ -7854,10 +8068,10 @@
       </p:grpSpPr>
       <p:sp>
         <p:nvSpPr>
-          <p:cNvPr id="11" name="履約、關單與權利金回流">
-            <a:extLst xmlns:a="http://schemas.openxmlformats.org/drawingml/2006/main">
-              <a:ext uri="{FF2B5EF4-FFF2-40B4-BE49-F238E27FC236}">
-                <a16:creationId xmlns:a16="http://schemas.microsoft.com/office/drawing/2014/main" id="{430331BF-6FC8-4CAC-B59A-343ADD2CEB9B}"/>
+          <p:cNvPr id="12" name="履約、關單與權利金回流">
+            <a:extLst xmlns:a="http://schemas.openxmlformats.org/drawingml/2006/main">
+              <a:ext uri="{FF2B5EF4-FFF2-40B4-BE49-F238E27FC236}">
+                <a16:creationId xmlns:a16="http://schemas.microsoft.com/office/drawing/2014/main" id="{AEA4291A-8C7D-4FE5-B041-5F0BBC9A7B43}"/>
               </a:ext>
             </a:extLst>
           </p:cNvPr>
@@ -7911,14 +8125,14 @@
       </p:sp>
       <p:pic>
         <p:nvPicPr>
-          <p:cNvPr id="12" name=""/>
+          <p:cNvPr id="13" name=""/>
           <p:cNvPicPr>
             <a:picLocks xmlns:a="http://schemas.openxmlformats.org/drawingml/2006/main" noChangeAspect="1"/>
           </p:cNvPicPr>
           <p:nvPr/>
         </p:nvPicPr>
         <p:blipFill>
-          <a:blip xmlns:r="http://schemas.openxmlformats.org/officeDocument/2006/relationships" xmlns:a="http://schemas.openxmlformats.org/drawingml/2006/main" r:embed="R04c6f4a5459742e9"/>
+          <a:blip xmlns:r="http://schemas.openxmlformats.org/officeDocument/2006/relationships" xmlns:a="http://schemas.openxmlformats.org/drawingml/2006/main" r:embed="R9e9b8d3164b24e48"/>
           <a:stretch xmlns:a="http://schemas.openxmlformats.org/drawingml/2006/main"/>
         </p:blipFill>
         <p:spPr>
@@ -7936,7 +8150,7 @@
           <p:cNvPr id="3" name="Vexi Hakari">
             <a:extLst xmlns:a="http://schemas.openxmlformats.org/drawingml/2006/main">
               <a:ext uri="{FF2B5EF4-FFF2-40B4-BE49-F238E27FC236}">
-                <a16:creationId xmlns:a16="http://schemas.microsoft.com/office/drawing/2014/main" id="{591EA6E1-4483-43AD-BB1D-A676644CDD62}"/>
+                <a16:creationId xmlns:a16="http://schemas.microsoft.com/office/drawing/2014/main" id="{2267897D-B837-40D2-A109-360C0D136465}"/>
               </a:ext>
             </a:extLst>
           </p:cNvPr>
@@ -7990,22 +8204,22 @@
       </p:sp>
       <p:sp>
         <p:nvSpPr>
-          <p:cNvPr id="4" name="12">
-            <a:extLst xmlns:a="http://schemas.openxmlformats.org/drawingml/2006/main">
-              <a:ext uri="{FF2B5EF4-FFF2-40B4-BE49-F238E27FC236}">
-                <a16:creationId xmlns:a16="http://schemas.microsoft.com/office/drawing/2014/main" id="{C2B03045-0499-46AD-A347-61C36DC4E4E5}"/>
-              </a:ext>
-            </a:extLst>
-          </p:cNvPr>
-          <p:cNvSpPr>
-            <a:spLocks xmlns:a="http://schemas.openxmlformats.org/drawingml/2006/main" noGrp="1"/>
-          </p:cNvSpPr>
-          <p:nvPr/>
-        </p:nvSpPr>
-        <p:spPr>
-          <a:xfrm xmlns:a="http://schemas.openxmlformats.org/drawingml/2006/main">
-            <a:off x="11001375" y="6153150"/>
-            <a:ext cx="619125" cy="342900"/>
+          <p:cNvPr id="4" name="AAPL 範例／示意數值">
+            <a:extLst xmlns:a="http://schemas.openxmlformats.org/drawingml/2006/main">
+              <a:ext uri="{FF2B5EF4-FFF2-40B4-BE49-F238E27FC236}">
+                <a16:creationId xmlns:a16="http://schemas.microsoft.com/office/drawing/2014/main" id="{367B5C07-7FC6-403C-8E19-A20E70821CBC}"/>
+              </a:ext>
+            </a:extLst>
+          </p:cNvPr>
+          <p:cNvSpPr>
+            <a:spLocks xmlns:a="http://schemas.openxmlformats.org/drawingml/2006/main" noGrp="1"/>
+          </p:cNvSpPr>
+          <p:nvPr/>
+        </p:nvSpPr>
+        <p:spPr>
+          <a:xfrm xmlns:a="http://schemas.openxmlformats.org/drawingml/2006/main">
+            <a:off x="3905250" y="6153150"/>
+            <a:ext cx="6667500" cy="342900"/>
           </a:xfrm>
           <a:prstGeom xmlns:a="http://schemas.openxmlformats.org/drawingml/2006/main" prst="rect">
             <a:avLst/>
@@ -8021,7 +8235,7 @@
           </a:bodyPr>
           <a:lstStyle xmlns:a="http://schemas.openxmlformats.org/drawingml/2006/main"/>
           <a:p xmlns:a="http://schemas.openxmlformats.org/drawingml/2006/main">
-            <a:pPr algn="r">
+            <a:pPr algn="l">
               <a:defRPr sz="1275" b="0">
                 <a:solidFill>
                   <a:srgbClr val="A8A8B2"/>
@@ -8040,29 +8254,29 @@
                 <a:ea typeface="Arial Unicode MS"/>
                 <a:cs typeface="Arial Unicode MS"/>
               </a:rPr>
-              <a:t>12</a:t>
-            </a:r>
-          </a:p>
-        </p:txBody>
-      </p:sp>
-      <p:sp>
-        <p:nvSpPr>
-          <p:cNvPr id="5" name="3 口 put：交付 3 TSLA，收到 1,200 USDG">
-            <a:extLst xmlns:a="http://schemas.openxmlformats.org/drawingml/2006/main">
-              <a:ext uri="{FF2B5EF4-FFF2-40B4-BE49-F238E27FC236}">
-                <a16:creationId xmlns:a16="http://schemas.microsoft.com/office/drawing/2014/main" id="{EA70E05C-4C81-4E42-B155-23F371FE6681}"/>
-              </a:ext>
-            </a:extLst>
-          </p:cNvPr>
-          <p:cNvSpPr>
-            <a:spLocks xmlns:a="http://schemas.openxmlformats.org/drawingml/2006/main" noGrp="1"/>
-          </p:cNvSpPr>
-          <p:nvPr/>
-        </p:nvSpPr>
-        <p:spPr>
-          <a:xfrm xmlns:a="http://schemas.openxmlformats.org/drawingml/2006/main">
-            <a:off x="647700" y="1381125"/>
-            <a:ext cx="10991850" cy="523875"/>
+              <a:t>AAPL 範例／示意數值</a:t>
+            </a:r>
+          </a:p>
+        </p:txBody>
+      </p:sp>
+      <p:sp>
+        <p:nvSpPr>
+          <p:cNvPr id="5" name="12">
+            <a:extLst xmlns:a="http://schemas.openxmlformats.org/drawingml/2006/main">
+              <a:ext uri="{FF2B5EF4-FFF2-40B4-BE49-F238E27FC236}">
+                <a16:creationId xmlns:a16="http://schemas.microsoft.com/office/drawing/2014/main" id="{D9B0AFC8-A208-4A63-B51D-2A6DDE11713C}"/>
+              </a:ext>
+            </a:extLst>
+          </p:cNvPr>
+          <p:cNvSpPr>
+            <a:spLocks xmlns:a="http://schemas.openxmlformats.org/drawingml/2006/main" noGrp="1"/>
+          </p:cNvSpPr>
+          <p:nvPr/>
+        </p:nvSpPr>
+        <p:spPr>
+          <a:xfrm xmlns:a="http://schemas.openxmlformats.org/drawingml/2006/main">
+            <a:off x="11001375" y="6153150"/>
+            <a:ext cx="619125" cy="342900"/>
           </a:xfrm>
           <a:prstGeom xmlns:a="http://schemas.openxmlformats.org/drawingml/2006/main" prst="rect">
             <a:avLst/>
@@ -8078,48 +8292,48 @@
           </a:bodyPr>
           <a:lstStyle xmlns:a="http://schemas.openxmlformats.org/drawingml/2006/main"/>
           <a:p xmlns:a="http://schemas.openxmlformats.org/drawingml/2006/main">
-            <a:pPr algn="l">
-              <a:defRPr sz="2475" b="1">
-                <a:solidFill>
-                  <a:srgbClr val="37D67A"/>
-                </a:solidFill>
-                <a:latin typeface="Arial Unicode MS"/>
-                <a:ea typeface="Arial Unicode MS"/>
-                <a:cs typeface="Arial Unicode MS"/>
-              </a:defRPr>
-            </a:pPr>
-            <a:r>
-              <a:rPr sz="2475" b="1">
-                <a:solidFill>
-                  <a:srgbClr val="37D67A"/>
-                </a:solidFill>
-                <a:latin typeface="Arial Unicode MS"/>
-                <a:ea typeface="Arial Unicode MS"/>
-                <a:cs typeface="Arial Unicode MS"/>
-              </a:rPr>
-              <a:t>3 口 put：交付 3 TSLA，收到 1,200 USDG</a:t>
-            </a:r>
-          </a:p>
-        </p:txBody>
-      </p:sp>
-      <p:sp>
-        <p:nvSpPr>
-          <p:cNvPr id="6" name="Book 的 TSLA">
-            <a:extLst xmlns:a="http://schemas.openxmlformats.org/drawingml/2006/main">
-              <a:ext uri="{FF2B5EF4-FFF2-40B4-BE49-F238E27FC236}">
-                <a16:creationId xmlns:a16="http://schemas.microsoft.com/office/drawing/2014/main" id="{2EBDAB78-5591-4BF2-A35E-5EAB0CB59D60}"/>
-              </a:ext>
-            </a:extLst>
-          </p:cNvPr>
-          <p:cNvSpPr>
-            <a:spLocks xmlns:a="http://schemas.openxmlformats.org/drawingml/2006/main" noGrp="1"/>
-          </p:cNvSpPr>
-          <p:nvPr/>
-        </p:nvSpPr>
-        <p:spPr>
-          <a:xfrm xmlns:a="http://schemas.openxmlformats.org/drawingml/2006/main">
-            <a:off x="676275" y="2209800"/>
-            <a:ext cx="5286375" cy="438150"/>
+            <a:pPr algn="r">
+              <a:defRPr sz="1275" b="0">
+                <a:solidFill>
+                  <a:srgbClr val="A8A8B2"/>
+                </a:solidFill>
+                <a:latin typeface="Arial Unicode MS"/>
+                <a:ea typeface="Arial Unicode MS"/>
+                <a:cs typeface="Arial Unicode MS"/>
+              </a:defRPr>
+            </a:pPr>
+            <a:r>
+              <a:rPr sz="1275" b="0">
+                <a:solidFill>
+                  <a:srgbClr val="A8A8B2"/>
+                </a:solidFill>
+                <a:latin typeface="Arial Unicode MS"/>
+                <a:ea typeface="Arial Unicode MS"/>
+                <a:cs typeface="Arial Unicode MS"/>
+              </a:rPr>
+              <a:t>12</a:t>
+            </a:r>
+          </a:p>
+        </p:txBody>
+      </p:sp>
+      <p:sp>
+        <p:nvSpPr>
+          <p:cNvPr id="6" name="3 口 put：交付 3 AAPL，收到 1,200 USDG">
+            <a:extLst xmlns:a="http://schemas.openxmlformats.org/drawingml/2006/main">
+              <a:ext uri="{FF2B5EF4-FFF2-40B4-BE49-F238E27FC236}">
+                <a16:creationId xmlns:a16="http://schemas.microsoft.com/office/drawing/2014/main" id="{B41F952D-E4E3-4077-9076-F04F510037D1}"/>
+              </a:ext>
+            </a:extLst>
+          </p:cNvPr>
+          <p:cNvSpPr>
+            <a:spLocks xmlns:a="http://schemas.openxmlformats.org/drawingml/2006/main" noGrp="1"/>
+          </p:cNvSpPr>
+          <p:nvPr/>
+        </p:nvSpPr>
+        <p:spPr>
+          <a:xfrm xmlns:a="http://schemas.openxmlformats.org/drawingml/2006/main">
+            <a:off x="647700" y="1381125"/>
+            <a:ext cx="10991850" cy="523875"/>
           </a:xfrm>
           <a:prstGeom xmlns:a="http://schemas.openxmlformats.org/drawingml/2006/main" prst="rect">
             <a:avLst/>
@@ -8136,47 +8350,47 @@
           <a:lstStyle xmlns:a="http://schemas.openxmlformats.org/drawingml/2006/main"/>
           <a:p xmlns:a="http://schemas.openxmlformats.org/drawingml/2006/main">
             <a:pPr algn="l">
-              <a:defRPr sz="2175" b="1">
-                <a:solidFill>
-                  <a:srgbClr val="FAFAFA"/>
-                </a:solidFill>
-                <a:latin typeface="Arial Unicode MS"/>
-                <a:ea typeface="Arial Unicode MS"/>
-                <a:cs typeface="Arial Unicode MS"/>
-              </a:defRPr>
-            </a:pPr>
-            <a:r>
-              <a:rPr sz="2175" b="1">
-                <a:solidFill>
-                  <a:srgbClr val="FAFAFA"/>
-                </a:solidFill>
-                <a:latin typeface="Arial Unicode MS"/>
-                <a:ea typeface="Arial Unicode MS"/>
-                <a:cs typeface="Arial Unicode MS"/>
-              </a:rPr>
-              <a:t>Book 的 TSLA</a:t>
-            </a:r>
-          </a:p>
-        </p:txBody>
-      </p:sp>
-      <p:sp>
-        <p:nvSpPr>
-          <p:cNvPr id="7" name="Book 的 USDG">
-            <a:extLst xmlns:a="http://schemas.openxmlformats.org/drawingml/2006/main">
-              <a:ext uri="{FF2B5EF4-FFF2-40B4-BE49-F238E27FC236}">
-                <a16:creationId xmlns:a16="http://schemas.microsoft.com/office/drawing/2014/main" id="{A8A801E8-92EB-4415-B357-517B7B9C4047}"/>
-              </a:ext>
-            </a:extLst>
-          </p:cNvPr>
-          <p:cNvSpPr>
-            <a:spLocks xmlns:a="http://schemas.openxmlformats.org/drawingml/2006/main" noGrp="1"/>
-          </p:cNvSpPr>
-          <p:nvPr/>
-        </p:nvSpPr>
-        <p:spPr>
-          <a:xfrm xmlns:a="http://schemas.openxmlformats.org/drawingml/2006/main">
-            <a:off x="6524625" y="2209800"/>
-            <a:ext cx="5143500" cy="438150"/>
+              <a:defRPr sz="2475" b="1">
+                <a:solidFill>
+                  <a:srgbClr val="37D67A"/>
+                </a:solidFill>
+                <a:latin typeface="Arial Unicode MS"/>
+                <a:ea typeface="Arial Unicode MS"/>
+                <a:cs typeface="Arial Unicode MS"/>
+              </a:defRPr>
+            </a:pPr>
+            <a:r>
+              <a:rPr sz="2475" b="1">
+                <a:solidFill>
+                  <a:srgbClr val="37D67A"/>
+                </a:solidFill>
+                <a:latin typeface="Arial Unicode MS"/>
+                <a:ea typeface="Arial Unicode MS"/>
+                <a:cs typeface="Arial Unicode MS"/>
+              </a:rPr>
+              <a:t>3 口 put：交付 3 AAPL，收到 1,200 USDG</a:t>
+            </a:r>
+          </a:p>
+        </p:txBody>
+      </p:sp>
+      <p:sp>
+        <p:nvSpPr>
+          <p:cNvPr id="7" name="Book 的 AAPL">
+            <a:extLst xmlns:a="http://schemas.openxmlformats.org/drawingml/2006/main">
+              <a:ext uri="{FF2B5EF4-FFF2-40B4-BE49-F238E27FC236}">
+                <a16:creationId xmlns:a16="http://schemas.microsoft.com/office/drawing/2014/main" id="{22E568E5-6B0B-4A08-A517-7ACCE1118F41}"/>
+              </a:ext>
+            </a:extLst>
+          </p:cNvPr>
+          <p:cNvSpPr>
+            <a:spLocks xmlns:a="http://schemas.openxmlformats.org/drawingml/2006/main" noGrp="1"/>
+          </p:cNvSpPr>
+          <p:nvPr/>
+        </p:nvSpPr>
+        <p:spPr>
+          <a:xfrm xmlns:a="http://schemas.openxmlformats.org/drawingml/2006/main">
+            <a:off x="676275" y="2209800"/>
+            <a:ext cx="5286375" cy="438150"/>
           </a:xfrm>
           <a:prstGeom xmlns:a="http://schemas.openxmlformats.org/drawingml/2006/main" prst="rect">
             <a:avLst/>
@@ -8211,6 +8425,63 @@
                 <a:ea typeface="Arial Unicode MS"/>
                 <a:cs typeface="Arial Unicode MS"/>
               </a:rPr>
+              <a:t>Book 的 AAPL</a:t>
+            </a:r>
+          </a:p>
+        </p:txBody>
+      </p:sp>
+      <p:sp>
+        <p:nvSpPr>
+          <p:cNvPr id="8" name="Book 的 USDG">
+            <a:extLst xmlns:a="http://schemas.openxmlformats.org/drawingml/2006/main">
+              <a:ext uri="{FF2B5EF4-FFF2-40B4-BE49-F238E27FC236}">
+                <a16:creationId xmlns:a16="http://schemas.microsoft.com/office/drawing/2014/main" id="{DD67EFF6-06A4-41B0-8C40-D3C12C6E5011}"/>
+              </a:ext>
+            </a:extLst>
+          </p:cNvPr>
+          <p:cNvSpPr>
+            <a:spLocks xmlns:a="http://schemas.openxmlformats.org/drawingml/2006/main" noGrp="1"/>
+          </p:cNvSpPr>
+          <p:nvPr/>
+        </p:nvSpPr>
+        <p:spPr>
+          <a:xfrm xmlns:a="http://schemas.openxmlformats.org/drawingml/2006/main">
+            <a:off x="6524625" y="2209800"/>
+            <a:ext cx="5143500" cy="438150"/>
+          </a:xfrm>
+          <a:prstGeom xmlns:a="http://schemas.openxmlformats.org/drawingml/2006/main" prst="rect">
+            <a:avLst/>
+          </a:prstGeom>
+          <a:noFill xmlns:a="http://schemas.openxmlformats.org/drawingml/2006/main"/>
+          <a:ln xmlns:a="http://schemas.openxmlformats.org/drawingml/2006/main" w="0">
+            <a:noFill/>
+          </a:ln>
+        </p:spPr>
+        <p:txBody>
+          <a:bodyPr xmlns:a="http://schemas.openxmlformats.org/drawingml/2006/main" wrap="none" lIns="0" tIns="0" rIns="0" bIns="0" anchor="ctr">
+            <a:noAutofit/>
+          </a:bodyPr>
+          <a:lstStyle xmlns:a="http://schemas.openxmlformats.org/drawingml/2006/main"/>
+          <a:p xmlns:a="http://schemas.openxmlformats.org/drawingml/2006/main">
+            <a:pPr algn="l">
+              <a:defRPr sz="2175" b="1">
+                <a:solidFill>
+                  <a:srgbClr val="FAFAFA"/>
+                </a:solidFill>
+                <a:latin typeface="Arial Unicode MS"/>
+                <a:ea typeface="Arial Unicode MS"/>
+                <a:cs typeface="Arial Unicode MS"/>
+              </a:defRPr>
+            </a:pPr>
+            <a:r>
+              <a:rPr sz="2175" b="1">
+                <a:solidFill>
+                  <a:srgbClr val="FAFAFA"/>
+                </a:solidFill>
+                <a:latin typeface="Arial Unicode MS"/>
+                <a:ea typeface="Arial Unicode MS"/>
+                <a:cs typeface="Arial Unicode MS"/>
+              </a:rPr>
               <a:t>Book 的 USDG</a:t>
             </a:r>
           </a:p>
@@ -8218,7 +8489,7 @@
       </p:sp>
       <p:graphicFrame>
         <p:nvGraphicFramePr>
-          <p:cNvPr id="18" name="Chart"/>
+          <p:cNvPr id="20" name="Chart"/>
           <p:cNvGraphicFramePr/>
           <p:nvPr/>
         </p:nvGraphicFramePr>
@@ -8228,13 +8499,13 @@
         </p:xfrm>
         <a:graphic xmlns:a="http://schemas.openxmlformats.org/drawingml/2006/main">
           <a:graphicData uri="http://schemas.openxmlformats.org/drawingml/2006/chart">
-            <c:chart xmlns:r="http://schemas.openxmlformats.org/officeDocument/2006/relationships" xmlns:c="http://schemas.openxmlformats.org/drawingml/2006/chart" r:id="R839b951f2adc4c46"/>
+            <c:chart xmlns:r="http://schemas.openxmlformats.org/officeDocument/2006/relationships" xmlns:c="http://schemas.openxmlformats.org/drawingml/2006/chart" r:id="Rf24dc71a954346d7"/>
           </a:graphicData>
         </a:graphic>
       </p:graphicFrame>
       <p:graphicFrame>
         <p:nvGraphicFramePr>
-          <p:cNvPr id="19" name="Chart"/>
+          <p:cNvPr id="21" name="Chart"/>
           <p:cNvGraphicFramePr/>
           <p:nvPr/>
         </p:nvGraphicFramePr>
@@ -8244,16 +8515,16 @@
         </p:xfrm>
         <a:graphic xmlns:a="http://schemas.openxmlformats.org/drawingml/2006/main">
           <a:graphicData uri="http://schemas.openxmlformats.org/drawingml/2006/chart">
-            <c:chart xmlns:r="http://schemas.openxmlformats.org/officeDocument/2006/relationships" xmlns:c="http://schemas.openxmlformats.org/drawingml/2006/chart" r:id="R3cf8391972e54d0d"/>
+            <c:chart xmlns:r="http://schemas.openxmlformats.org/officeDocument/2006/relationships" xmlns:c="http://schemas.openxmlformats.org/drawingml/2006/chart" r:id="R4b97eb2ffa3e480a"/>
           </a:graphicData>
         </a:graphic>
       </p:graphicFrame>
       <p:sp>
         <p:nvSpPr>
-          <p:cNvPr id="10" name="接受價 ≈378.269 &lt; 履約價 400；call 價外，關單與領權利金分開執行">
-            <a:extLst xmlns:a="http://schemas.openxmlformats.org/drawingml/2006/main">
-              <a:ext uri="{FF2B5EF4-FFF2-40B4-BE49-F238E27FC236}">
-                <a16:creationId xmlns:a16="http://schemas.microsoft.com/office/drawing/2014/main" id="{68893429-95C6-44A9-A36C-209D3F097B79}"/>
+          <p:cNvPr id="11" name="示意價格 ≈378.269 &lt; 履約價 400；call 價外，關單與領權利金分開執行">
+            <a:extLst xmlns:a="http://schemas.openxmlformats.org/drawingml/2006/main">
+              <a:ext uri="{FF2B5EF4-FFF2-40B4-BE49-F238E27FC236}">
+                <a16:creationId xmlns:a16="http://schemas.microsoft.com/office/drawing/2014/main" id="{1A5E1E36-1930-4535-9535-94B9AB6B3373}"/>
               </a:ext>
             </a:extLst>
           </p:cNvPr>
@@ -8300,7 +8571,7 @@
                 <a:ea typeface="Arial Unicode MS"/>
                 <a:cs typeface="Arial Unicode MS"/>
               </a:rPr>
-              <a:t>接受價 ≈378.269 &lt; 履約價 400；call 價外，關單與領權利金分開執行</a:t>
+              <a:t>示意價格 ≈378.269 &lt; 履約價 400；call 價外，關單與領權利金分開執行</a:t>
             </a:r>
           </a:p>
         </p:txBody>
@@ -8308,7 +8579,7 @@
     </p:spTree>
     <p:extLst>
       <p:ext uri="{BB962C8B-B14F-4D97-AF65-F5344CB8AC3E}">
-        <p14:creationId xmlns:p14="http://schemas.microsoft.com/office/powerpoint/2010/main" val="453191325"/>
+        <p14:creationId xmlns:p14="http://schemas.microsoft.com/office/powerpoint/2010/main" val="1523028093"/>
       </p:ext>
     </p:extLst>
   </p:cSld>
@@ -8336,10 +8607,10 @@
       </p:grpSpPr>
       <p:sp>
         <p:nvSpPr>
-          <p:cNvPr id="19" name="合約回放的四個檢查點">
-            <a:extLst xmlns:a="http://schemas.openxmlformats.org/drawingml/2006/main">
-              <a:ext uri="{FF2B5EF4-FFF2-40B4-BE49-F238E27FC236}">
-                <a16:creationId xmlns:a16="http://schemas.microsoft.com/office/drawing/2014/main" id="{0AEFB8EF-555A-44AF-A5F5-1CB6FB8AB8DA}"/>
+          <p:cNvPr id="20" name="合約回放的四個檢查點">
+            <a:extLst xmlns:a="http://schemas.openxmlformats.org/drawingml/2006/main">
+              <a:ext uri="{FF2B5EF4-FFF2-40B4-BE49-F238E27FC236}">
+                <a16:creationId xmlns:a16="http://schemas.microsoft.com/office/drawing/2014/main" id="{ED8EB710-0A02-498D-A3A8-DAC6000A3206}"/>
               </a:ext>
             </a:extLst>
           </p:cNvPr>
@@ -8393,14 +8664,14 @@
       </p:sp>
       <p:pic>
         <p:nvPicPr>
-          <p:cNvPr id="20" name=""/>
+          <p:cNvPr id="21" name=""/>
           <p:cNvPicPr>
             <a:picLocks xmlns:a="http://schemas.openxmlformats.org/drawingml/2006/main" noChangeAspect="1"/>
           </p:cNvPicPr>
           <p:nvPr/>
         </p:nvPicPr>
         <p:blipFill>
-          <a:blip xmlns:r="http://schemas.openxmlformats.org/officeDocument/2006/relationships" xmlns:a="http://schemas.openxmlformats.org/drawingml/2006/main" r:embed="R057295eb6c1c4e04"/>
+          <a:blip xmlns:r="http://schemas.openxmlformats.org/officeDocument/2006/relationships" xmlns:a="http://schemas.openxmlformats.org/drawingml/2006/main" r:embed="R07974e62bbcb407b"/>
           <a:stretch xmlns:a="http://schemas.openxmlformats.org/drawingml/2006/main"/>
         </p:blipFill>
         <p:spPr>
@@ -8418,7 +8689,7 @@
           <p:cNvPr id="3" name="Vexi Hakari">
             <a:extLst xmlns:a="http://schemas.openxmlformats.org/drawingml/2006/main">
               <a:ext uri="{FF2B5EF4-FFF2-40B4-BE49-F238E27FC236}">
-                <a16:creationId xmlns:a16="http://schemas.microsoft.com/office/drawing/2014/main" id="{DE44B289-318F-43DF-ACF3-3BD1A7D56275}"/>
+                <a16:creationId xmlns:a16="http://schemas.microsoft.com/office/drawing/2014/main" id="{4F72C8F4-1CC7-4412-8B38-3FBA68B16E4C}"/>
               </a:ext>
             </a:extLst>
           </p:cNvPr>
@@ -8472,22 +8743,22 @@
       </p:sp>
       <p:sp>
         <p:nvSpPr>
-          <p:cNvPr id="4" name="13">
-            <a:extLst xmlns:a="http://schemas.openxmlformats.org/drawingml/2006/main">
-              <a:ext uri="{FF2B5EF4-FFF2-40B4-BE49-F238E27FC236}">
-                <a16:creationId xmlns:a16="http://schemas.microsoft.com/office/drawing/2014/main" id="{3E334D75-D722-4132-939B-0F81B8523236}"/>
-              </a:ext>
-            </a:extLst>
-          </p:cNvPr>
-          <p:cNvSpPr>
-            <a:spLocks xmlns:a="http://schemas.openxmlformats.org/drawingml/2006/main" noGrp="1"/>
-          </p:cNvSpPr>
-          <p:nvPr/>
-        </p:nvSpPr>
-        <p:spPr>
-          <a:xfrm xmlns:a="http://schemas.openxmlformats.org/drawingml/2006/main">
-            <a:off x="11001375" y="6153150"/>
-            <a:ext cx="619125" cy="342900"/>
+          <p:cNvPr id="4" name="AAPL 範例／示意數值">
+            <a:extLst xmlns:a="http://schemas.openxmlformats.org/drawingml/2006/main">
+              <a:ext uri="{FF2B5EF4-FFF2-40B4-BE49-F238E27FC236}">
+                <a16:creationId xmlns:a16="http://schemas.microsoft.com/office/drawing/2014/main" id="{96493C59-B651-4538-8270-8FF3BE037553}"/>
+              </a:ext>
+            </a:extLst>
+          </p:cNvPr>
+          <p:cNvSpPr>
+            <a:spLocks xmlns:a="http://schemas.openxmlformats.org/drawingml/2006/main" noGrp="1"/>
+          </p:cNvSpPr>
+          <p:nvPr/>
+        </p:nvSpPr>
+        <p:spPr>
+          <a:xfrm xmlns:a="http://schemas.openxmlformats.org/drawingml/2006/main">
+            <a:off x="3905250" y="6153150"/>
+            <a:ext cx="6667500" cy="342900"/>
           </a:xfrm>
           <a:prstGeom xmlns:a="http://schemas.openxmlformats.org/drawingml/2006/main" prst="rect">
             <a:avLst/>
@@ -8503,7 +8774,7 @@
           </a:bodyPr>
           <a:lstStyle xmlns:a="http://schemas.openxmlformats.org/drawingml/2006/main"/>
           <a:p xmlns:a="http://schemas.openxmlformats.org/drawingml/2006/main">
-            <a:pPr algn="r">
+            <a:pPr algn="l">
               <a:defRPr sz="1275" b="0">
                 <a:solidFill>
                   <a:srgbClr val="A8A8B2"/>
@@ -8522,29 +8793,29 @@
                 <a:ea typeface="Arial Unicode MS"/>
                 <a:cs typeface="Arial Unicode MS"/>
               </a:rPr>
-              <a:t>13</a:t>
-            </a:r>
-          </a:p>
-        </p:txBody>
-      </p:sp>
-      <p:sp>
-        <p:nvSpPr>
-          <p:cNvPr id="5" name="05">
-            <a:extLst xmlns:a="http://schemas.openxmlformats.org/drawingml/2006/main">
-              <a:ext uri="{FF2B5EF4-FFF2-40B4-BE49-F238E27FC236}">
-                <a16:creationId xmlns:a16="http://schemas.microsoft.com/office/drawing/2014/main" id="{171EF0AA-6333-4EB7-A18A-B45A8D6B83E4}"/>
-              </a:ext>
-            </a:extLst>
-          </p:cNvPr>
-          <p:cNvSpPr>
-            <a:spLocks xmlns:a="http://schemas.openxmlformats.org/drawingml/2006/main" noGrp="1"/>
-          </p:cNvSpPr>
-          <p:nvPr/>
-        </p:nvSpPr>
-        <p:spPr>
-          <a:xfrm xmlns:a="http://schemas.openxmlformats.org/drawingml/2006/main">
-            <a:off x="685800" y="1962150"/>
-            <a:ext cx="2333625" cy="1209675"/>
+              <a:t>AAPL 範例／示意數值</a:t>
+            </a:r>
+          </a:p>
+        </p:txBody>
+      </p:sp>
+      <p:sp>
+        <p:nvSpPr>
+          <p:cNvPr id="5" name="13">
+            <a:extLst xmlns:a="http://schemas.openxmlformats.org/drawingml/2006/main">
+              <a:ext uri="{FF2B5EF4-FFF2-40B4-BE49-F238E27FC236}">
+                <a16:creationId xmlns:a16="http://schemas.microsoft.com/office/drawing/2014/main" id="{EADE7BAB-19EF-4A3D-89C7-DA4B531A5D1C}"/>
+              </a:ext>
+            </a:extLst>
+          </p:cNvPr>
+          <p:cNvSpPr>
+            <a:spLocks xmlns:a="http://schemas.openxmlformats.org/drawingml/2006/main" noGrp="1"/>
+          </p:cNvSpPr>
+          <p:nvPr/>
+        </p:nvSpPr>
+        <p:spPr>
+          <a:xfrm xmlns:a="http://schemas.openxmlformats.org/drawingml/2006/main">
+            <a:off x="11001375" y="6153150"/>
+            <a:ext cx="619125" cy="342900"/>
           </a:xfrm>
           <a:prstGeom xmlns:a="http://schemas.openxmlformats.org/drawingml/2006/main" prst="rect">
             <a:avLst/>
@@ -8560,48 +8831,48 @@
           </a:bodyPr>
           <a:lstStyle xmlns:a="http://schemas.openxmlformats.org/drawingml/2006/main"/>
           <a:p xmlns:a="http://schemas.openxmlformats.org/drawingml/2006/main">
-            <a:pPr algn="l">
-              <a:defRPr sz="7200" b="1">
-                <a:solidFill>
-                  <a:srgbClr val="37D67A"/>
-                </a:solidFill>
-                <a:latin typeface="Arial Unicode MS"/>
-                <a:ea typeface="Arial Unicode MS"/>
-                <a:cs typeface="Arial Unicode MS"/>
-              </a:defRPr>
-            </a:pPr>
-            <a:r>
-              <a:rPr sz="7200" b="1">
-                <a:solidFill>
-                  <a:srgbClr val="37D67A"/>
-                </a:solidFill>
-                <a:latin typeface="Arial Unicode MS"/>
-                <a:ea typeface="Arial Unicode MS"/>
-                <a:cs typeface="Arial Unicode MS"/>
-              </a:rPr>
-              <a:t>05</a:t>
-            </a:r>
-          </a:p>
-        </p:txBody>
-      </p:sp>
-      <p:sp>
-        <p:nvSpPr>
-          <p:cNvPr id="6" name="抵押品進入">
-            <a:extLst xmlns:a="http://schemas.openxmlformats.org/drawingml/2006/main">
-              <a:ext uri="{FF2B5EF4-FFF2-40B4-BE49-F238E27FC236}">
-                <a16:creationId xmlns:a16="http://schemas.microsoft.com/office/drawing/2014/main" id="{55BF4CA0-2BBE-4F3D-9A96-6DD5E3968C80}"/>
-              </a:ext>
-            </a:extLst>
-          </p:cNvPr>
-          <p:cNvSpPr>
-            <a:spLocks xmlns:a="http://schemas.openxmlformats.org/drawingml/2006/main" noGrp="1"/>
-          </p:cNvSpPr>
-          <p:nvPr/>
-        </p:nvSpPr>
-        <p:spPr>
-          <a:xfrm xmlns:a="http://schemas.openxmlformats.org/drawingml/2006/main">
-            <a:off x="685800" y="3486150"/>
-            <a:ext cx="2428875" cy="476250"/>
+            <a:pPr algn="r">
+              <a:defRPr sz="1275" b="0">
+                <a:solidFill>
+                  <a:srgbClr val="A8A8B2"/>
+                </a:solidFill>
+                <a:latin typeface="Arial Unicode MS"/>
+                <a:ea typeface="Arial Unicode MS"/>
+                <a:cs typeface="Arial Unicode MS"/>
+              </a:defRPr>
+            </a:pPr>
+            <a:r>
+              <a:rPr sz="1275" b="0">
+                <a:solidFill>
+                  <a:srgbClr val="A8A8B2"/>
+                </a:solidFill>
+                <a:latin typeface="Arial Unicode MS"/>
+                <a:ea typeface="Arial Unicode MS"/>
+                <a:cs typeface="Arial Unicode MS"/>
+              </a:rPr>
+              <a:t>13</a:t>
+            </a:r>
+          </a:p>
+        </p:txBody>
+      </p:sp>
+      <p:sp>
+        <p:nvSpPr>
+          <p:cNvPr id="6" name="05">
+            <a:extLst xmlns:a="http://schemas.openxmlformats.org/drawingml/2006/main">
+              <a:ext uri="{FF2B5EF4-FFF2-40B4-BE49-F238E27FC236}">
+                <a16:creationId xmlns:a16="http://schemas.microsoft.com/office/drawing/2014/main" id="{D6DB4BBD-2F71-4BA3-9AB2-637CB8B55F87}"/>
+              </a:ext>
+            </a:extLst>
+          </p:cNvPr>
+          <p:cNvSpPr>
+            <a:spLocks xmlns:a="http://schemas.openxmlformats.org/drawingml/2006/main" noGrp="1"/>
+          </p:cNvSpPr>
+          <p:nvPr/>
+        </p:nvSpPr>
+        <p:spPr>
+          <a:xfrm xmlns:a="http://schemas.openxmlformats.org/drawingml/2006/main">
+            <a:off x="685800" y="1962150"/>
+            <a:ext cx="2333625" cy="1209675"/>
           </a:xfrm>
           <a:prstGeom xmlns:a="http://schemas.openxmlformats.org/drawingml/2006/main" prst="rect">
             <a:avLst/>
@@ -8618,47 +8889,47 @@
           <a:lstStyle xmlns:a="http://schemas.openxmlformats.org/drawingml/2006/main"/>
           <a:p xmlns:a="http://schemas.openxmlformats.org/drawingml/2006/main">
             <a:pPr algn="l">
-              <a:defRPr sz="2250" b="1">
-                <a:solidFill>
-                  <a:srgbClr val="FAFAFA"/>
-                </a:solidFill>
-                <a:latin typeface="Arial Unicode MS"/>
-                <a:ea typeface="Arial Unicode MS"/>
-                <a:cs typeface="Arial Unicode MS"/>
-              </a:defRPr>
-            </a:pPr>
-            <a:r>
-              <a:rPr sz="2250" b="1">
-                <a:solidFill>
-                  <a:srgbClr val="FAFAFA"/>
-                </a:solidFill>
-                <a:latin typeface="Arial Unicode MS"/>
-                <a:ea typeface="Arial Unicode MS"/>
-                <a:cs typeface="Arial Unicode MS"/>
-              </a:rPr>
-              <a:t>抵押品進入</a:t>
-            </a:r>
-          </a:p>
-        </p:txBody>
-      </p:sp>
-      <p:sp>
-        <p:nvSpPr>
-          <p:cNvPr id="7" name="5 TSLA">
-            <a:extLst xmlns:a="http://schemas.openxmlformats.org/drawingml/2006/main">
-              <a:ext uri="{FF2B5EF4-FFF2-40B4-BE49-F238E27FC236}">
-                <a16:creationId xmlns:a16="http://schemas.microsoft.com/office/drawing/2014/main" id="{DFA8AB1F-B446-44C4-8932-6EF975F6640D}"/>
-              </a:ext>
-            </a:extLst>
-          </p:cNvPr>
-          <p:cNvSpPr>
-            <a:spLocks xmlns:a="http://schemas.openxmlformats.org/drawingml/2006/main" noGrp="1"/>
-          </p:cNvSpPr>
-          <p:nvPr/>
-        </p:nvSpPr>
-        <p:spPr>
-          <a:xfrm xmlns:a="http://schemas.openxmlformats.org/drawingml/2006/main">
-            <a:off x="685800" y="4086225"/>
-            <a:ext cx="2428875" cy="438150"/>
+              <a:defRPr sz="7200" b="1">
+                <a:solidFill>
+                  <a:srgbClr val="37D67A"/>
+                </a:solidFill>
+                <a:latin typeface="Arial Unicode MS"/>
+                <a:ea typeface="Arial Unicode MS"/>
+                <a:cs typeface="Arial Unicode MS"/>
+              </a:defRPr>
+            </a:pPr>
+            <a:r>
+              <a:rPr sz="7200" b="1">
+                <a:solidFill>
+                  <a:srgbClr val="37D67A"/>
+                </a:solidFill>
+                <a:latin typeface="Arial Unicode MS"/>
+                <a:ea typeface="Arial Unicode MS"/>
+                <a:cs typeface="Arial Unicode MS"/>
+              </a:rPr>
+              <a:t>05</a:t>
+            </a:r>
+          </a:p>
+        </p:txBody>
+      </p:sp>
+      <p:sp>
+        <p:nvSpPr>
+          <p:cNvPr id="7" name="抵押品進入">
+            <a:extLst xmlns:a="http://schemas.openxmlformats.org/drawingml/2006/main">
+              <a:ext uri="{FF2B5EF4-FFF2-40B4-BE49-F238E27FC236}">
+                <a16:creationId xmlns:a16="http://schemas.microsoft.com/office/drawing/2014/main" id="{DBC6163F-0820-408D-A7E2-24E7628D065F}"/>
+              </a:ext>
+            </a:extLst>
+          </p:cNvPr>
+          <p:cNvSpPr>
+            <a:spLocks xmlns:a="http://schemas.openxmlformats.org/drawingml/2006/main" noGrp="1"/>
+          </p:cNvSpPr>
+          <p:nvPr/>
+        </p:nvSpPr>
+        <p:spPr>
+          <a:xfrm xmlns:a="http://schemas.openxmlformats.org/drawingml/2006/main">
+            <a:off x="685800" y="3486150"/>
+            <a:ext cx="2428875" cy="476250"/>
           </a:xfrm>
           <a:prstGeom xmlns:a="http://schemas.openxmlformats.org/drawingml/2006/main" prst="rect">
             <a:avLst/>
@@ -8675,47 +8946,47 @@
           <a:lstStyle xmlns:a="http://schemas.openxmlformats.org/drawingml/2006/main"/>
           <a:p xmlns:a="http://schemas.openxmlformats.org/drawingml/2006/main">
             <a:pPr algn="l">
-              <a:defRPr sz="1875" b="0">
-                <a:solidFill>
-                  <a:srgbClr val="A8A8B2"/>
-                </a:solidFill>
-                <a:latin typeface="Arial Unicode MS"/>
-                <a:ea typeface="Arial Unicode MS"/>
-                <a:cs typeface="Arial Unicode MS"/>
-              </a:defRPr>
-            </a:pPr>
-            <a:r>
-              <a:rPr sz="1875" b="0">
-                <a:solidFill>
-                  <a:srgbClr val="A8A8B2"/>
-                </a:solidFill>
-                <a:latin typeface="Arial Unicode MS"/>
-                <a:ea typeface="Arial Unicode MS"/>
-                <a:cs typeface="Arial Unicode MS"/>
-              </a:rPr>
-              <a:t>5 TSLA</a:t>
-            </a:r>
-          </a:p>
-        </p:txBody>
-      </p:sp>
-      <p:sp>
-        <p:nvSpPr>
-          <p:cNvPr id="8" name="07">
-            <a:extLst xmlns:a="http://schemas.openxmlformats.org/drawingml/2006/main">
-              <a:ext uri="{FF2B5EF4-FFF2-40B4-BE49-F238E27FC236}">
-                <a16:creationId xmlns:a16="http://schemas.microsoft.com/office/drawing/2014/main" id="{B81461AD-644F-4EBB-BC5A-792146E0CBF9}"/>
-              </a:ext>
-            </a:extLst>
-          </p:cNvPr>
-          <p:cNvSpPr>
-            <a:spLocks xmlns:a="http://schemas.openxmlformats.org/drawingml/2006/main" noGrp="1"/>
-          </p:cNvSpPr>
-          <p:nvPr/>
-        </p:nvSpPr>
-        <p:spPr>
-          <a:xfrm xmlns:a="http://schemas.openxmlformats.org/drawingml/2006/main">
-            <a:off x="3590925" y="1962150"/>
-            <a:ext cx="2333625" cy="1209675"/>
+              <a:defRPr sz="2250" b="1">
+                <a:solidFill>
+                  <a:srgbClr val="FAFAFA"/>
+                </a:solidFill>
+                <a:latin typeface="Arial Unicode MS"/>
+                <a:ea typeface="Arial Unicode MS"/>
+                <a:cs typeface="Arial Unicode MS"/>
+              </a:defRPr>
+            </a:pPr>
+            <a:r>
+              <a:rPr sz="2250" b="1">
+                <a:solidFill>
+                  <a:srgbClr val="FAFAFA"/>
+                </a:solidFill>
+                <a:latin typeface="Arial Unicode MS"/>
+                <a:ea typeface="Arial Unicode MS"/>
+                <a:cs typeface="Arial Unicode MS"/>
+              </a:rPr>
+              <a:t>抵押品進入</a:t>
+            </a:r>
+          </a:p>
+        </p:txBody>
+      </p:sp>
+      <p:sp>
+        <p:nvSpPr>
+          <p:cNvPr id="8" name="5 AAPL">
+            <a:extLst xmlns:a="http://schemas.openxmlformats.org/drawingml/2006/main">
+              <a:ext uri="{FF2B5EF4-FFF2-40B4-BE49-F238E27FC236}">
+                <a16:creationId xmlns:a16="http://schemas.microsoft.com/office/drawing/2014/main" id="{543E32AB-D625-45EA-A816-A6CB4F40FE2B}"/>
+              </a:ext>
+            </a:extLst>
+          </p:cNvPr>
+          <p:cNvSpPr>
+            <a:spLocks xmlns:a="http://schemas.openxmlformats.org/drawingml/2006/main" noGrp="1"/>
+          </p:cNvSpPr>
+          <p:nvPr/>
+        </p:nvSpPr>
+        <p:spPr>
+          <a:xfrm xmlns:a="http://schemas.openxmlformats.org/drawingml/2006/main">
+            <a:off x="685800" y="4086225"/>
+            <a:ext cx="2428875" cy="438150"/>
           </a:xfrm>
           <a:prstGeom xmlns:a="http://schemas.openxmlformats.org/drawingml/2006/main" prst="rect">
             <a:avLst/>
@@ -8732,47 +9003,47 @@
           <a:lstStyle xmlns:a="http://schemas.openxmlformats.org/drawingml/2006/main"/>
           <a:p xmlns:a="http://schemas.openxmlformats.org/drawingml/2006/main">
             <a:pPr algn="l">
-              <a:defRPr sz="7200" b="1">
-                <a:solidFill>
-                  <a:srgbClr val="FF5470"/>
-                </a:solidFill>
-                <a:latin typeface="Arial Unicode MS"/>
-                <a:ea typeface="Arial Unicode MS"/>
-                <a:cs typeface="Arial Unicode MS"/>
-              </a:defRPr>
-            </a:pPr>
-            <a:r>
-              <a:rPr sz="7200" b="1">
-                <a:solidFill>
-                  <a:srgbClr val="FF5470"/>
-                </a:solidFill>
-                <a:latin typeface="Arial Unicode MS"/>
-                <a:ea typeface="Arial Unicode MS"/>
-                <a:cs typeface="Arial Unicode MS"/>
-              </a:rPr>
-              <a:t>07</a:t>
-            </a:r>
-          </a:p>
-        </p:txBody>
-      </p:sp>
-      <p:sp>
-        <p:nvSpPr>
-          <p:cNvPr id="9" name="越界拒單">
-            <a:extLst xmlns:a="http://schemas.openxmlformats.org/drawingml/2006/main">
-              <a:ext uri="{FF2B5EF4-FFF2-40B4-BE49-F238E27FC236}">
-                <a16:creationId xmlns:a16="http://schemas.microsoft.com/office/drawing/2014/main" id="{1D10D74B-FB55-41F3-A000-206DF364E989}"/>
-              </a:ext>
-            </a:extLst>
-          </p:cNvPr>
-          <p:cNvSpPr>
-            <a:spLocks xmlns:a="http://schemas.openxmlformats.org/drawingml/2006/main" noGrp="1"/>
-          </p:cNvSpPr>
-          <p:nvPr/>
-        </p:nvSpPr>
-        <p:spPr>
-          <a:xfrm xmlns:a="http://schemas.openxmlformats.org/drawingml/2006/main">
-            <a:off x="3590925" y="3486150"/>
-            <a:ext cx="2428875" cy="476250"/>
+              <a:defRPr sz="1875" b="0">
+                <a:solidFill>
+                  <a:srgbClr val="A8A8B2"/>
+                </a:solidFill>
+                <a:latin typeface="Arial Unicode MS"/>
+                <a:ea typeface="Arial Unicode MS"/>
+                <a:cs typeface="Arial Unicode MS"/>
+              </a:defRPr>
+            </a:pPr>
+            <a:r>
+              <a:rPr sz="1875" b="0">
+                <a:solidFill>
+                  <a:srgbClr val="A8A8B2"/>
+                </a:solidFill>
+                <a:latin typeface="Arial Unicode MS"/>
+                <a:ea typeface="Arial Unicode MS"/>
+                <a:cs typeface="Arial Unicode MS"/>
+              </a:rPr>
+              <a:t>5 AAPL</a:t>
+            </a:r>
+          </a:p>
+        </p:txBody>
+      </p:sp>
+      <p:sp>
+        <p:nvSpPr>
+          <p:cNvPr id="9" name="07">
+            <a:extLst xmlns:a="http://schemas.openxmlformats.org/drawingml/2006/main">
+              <a:ext uri="{FF2B5EF4-FFF2-40B4-BE49-F238E27FC236}">
+                <a16:creationId xmlns:a16="http://schemas.microsoft.com/office/drawing/2014/main" id="{3FD6A777-D0DC-4807-A918-0BB730A736CC}"/>
+              </a:ext>
+            </a:extLst>
+          </p:cNvPr>
+          <p:cNvSpPr>
+            <a:spLocks xmlns:a="http://schemas.openxmlformats.org/drawingml/2006/main" noGrp="1"/>
+          </p:cNvSpPr>
+          <p:nvPr/>
+        </p:nvSpPr>
+        <p:spPr>
+          <a:xfrm xmlns:a="http://schemas.openxmlformats.org/drawingml/2006/main">
+            <a:off x="3590925" y="1962150"/>
+            <a:ext cx="2333625" cy="1209675"/>
           </a:xfrm>
           <a:prstGeom xmlns:a="http://schemas.openxmlformats.org/drawingml/2006/main" prst="rect">
             <a:avLst/>
@@ -8789,47 +9060,47 @@
           <a:lstStyle xmlns:a="http://schemas.openxmlformats.org/drawingml/2006/main"/>
           <a:p xmlns:a="http://schemas.openxmlformats.org/drawingml/2006/main">
             <a:pPr algn="l">
-              <a:defRPr sz="2250" b="1">
-                <a:solidFill>
-                  <a:srgbClr val="FAFAFA"/>
-                </a:solidFill>
-                <a:latin typeface="Arial Unicode MS"/>
-                <a:ea typeface="Arial Unicode MS"/>
-                <a:cs typeface="Arial Unicode MS"/>
-              </a:defRPr>
-            </a:pPr>
-            <a:r>
-              <a:rPr sz="2250" b="1">
-                <a:solidFill>
-                  <a:srgbClr val="FAFAFA"/>
-                </a:solidFill>
-                <a:latin typeface="Arial Unicode MS"/>
-                <a:ea typeface="Arial Unicode MS"/>
-                <a:cs typeface="Arial Unicode MS"/>
-              </a:rPr>
-              <a:t>越界拒單</a:t>
-            </a:r>
-          </a:p>
-        </p:txBody>
-      </p:sp>
-      <p:sp>
-        <p:nvSpPr>
-          <p:cNvPr id="10" name="資金不變">
-            <a:extLst xmlns:a="http://schemas.openxmlformats.org/drawingml/2006/main">
-              <a:ext uri="{FF2B5EF4-FFF2-40B4-BE49-F238E27FC236}">
-                <a16:creationId xmlns:a16="http://schemas.microsoft.com/office/drawing/2014/main" id="{70832483-10D1-4E70-A049-F9AAD33772B7}"/>
-              </a:ext>
-            </a:extLst>
-          </p:cNvPr>
-          <p:cNvSpPr>
-            <a:spLocks xmlns:a="http://schemas.openxmlformats.org/drawingml/2006/main" noGrp="1"/>
-          </p:cNvSpPr>
-          <p:nvPr/>
-        </p:nvSpPr>
-        <p:spPr>
-          <a:xfrm xmlns:a="http://schemas.openxmlformats.org/drawingml/2006/main">
-            <a:off x="3590925" y="4086225"/>
-            <a:ext cx="2428875" cy="438150"/>
+              <a:defRPr sz="7200" b="1">
+                <a:solidFill>
+                  <a:srgbClr val="FF5470"/>
+                </a:solidFill>
+                <a:latin typeface="Arial Unicode MS"/>
+                <a:ea typeface="Arial Unicode MS"/>
+                <a:cs typeface="Arial Unicode MS"/>
+              </a:defRPr>
+            </a:pPr>
+            <a:r>
+              <a:rPr sz="7200" b="1">
+                <a:solidFill>
+                  <a:srgbClr val="FF5470"/>
+                </a:solidFill>
+                <a:latin typeface="Arial Unicode MS"/>
+                <a:ea typeface="Arial Unicode MS"/>
+                <a:cs typeface="Arial Unicode MS"/>
+              </a:rPr>
+              <a:t>07</a:t>
+            </a:r>
+          </a:p>
+        </p:txBody>
+      </p:sp>
+      <p:sp>
+        <p:nvSpPr>
+          <p:cNvPr id="10" name="越界拒單">
+            <a:extLst xmlns:a="http://schemas.openxmlformats.org/drawingml/2006/main">
+              <a:ext uri="{FF2B5EF4-FFF2-40B4-BE49-F238E27FC236}">
+                <a16:creationId xmlns:a16="http://schemas.microsoft.com/office/drawing/2014/main" id="{5D1CEFE8-0CC3-4CF9-B83F-2FAD50B252ED}"/>
+              </a:ext>
+            </a:extLst>
+          </p:cNvPr>
+          <p:cNvSpPr>
+            <a:spLocks xmlns:a="http://schemas.openxmlformats.org/drawingml/2006/main" noGrp="1"/>
+          </p:cNvSpPr>
+          <p:nvPr/>
+        </p:nvSpPr>
+        <p:spPr>
+          <a:xfrm xmlns:a="http://schemas.openxmlformats.org/drawingml/2006/main">
+            <a:off x="3590925" y="3486150"/>
+            <a:ext cx="2428875" cy="476250"/>
           </a:xfrm>
           <a:prstGeom xmlns:a="http://schemas.openxmlformats.org/drawingml/2006/main" prst="rect">
             <a:avLst/>
@@ -8846,47 +9117,47 @@
           <a:lstStyle xmlns:a="http://schemas.openxmlformats.org/drawingml/2006/main"/>
           <a:p xmlns:a="http://schemas.openxmlformats.org/drawingml/2006/main">
             <a:pPr algn="l">
-              <a:defRPr sz="1875" b="0">
-                <a:solidFill>
-                  <a:srgbClr val="A8A8B2"/>
-                </a:solidFill>
-                <a:latin typeface="Arial Unicode MS"/>
-                <a:ea typeface="Arial Unicode MS"/>
-                <a:cs typeface="Arial Unicode MS"/>
-              </a:defRPr>
-            </a:pPr>
-            <a:r>
-              <a:rPr sz="1875" b="0">
-                <a:solidFill>
-                  <a:srgbClr val="A8A8B2"/>
-                </a:solidFill>
-                <a:latin typeface="Arial Unicode MS"/>
-                <a:ea typeface="Arial Unicode MS"/>
-                <a:cs typeface="Arial Unicode MS"/>
-              </a:rPr>
-              <a:t>資金不變</a:t>
-            </a:r>
-          </a:p>
-        </p:txBody>
-      </p:sp>
-      <p:sp>
-        <p:nvSpPr>
-          <p:cNvPr id="11" name="09">
-            <a:extLst xmlns:a="http://schemas.openxmlformats.org/drawingml/2006/main">
-              <a:ext uri="{FF2B5EF4-FFF2-40B4-BE49-F238E27FC236}">
-                <a16:creationId xmlns:a16="http://schemas.microsoft.com/office/drawing/2014/main" id="{36DB2FC8-8AA0-47A7-A4DC-B630E04038D0}"/>
-              </a:ext>
-            </a:extLst>
-          </p:cNvPr>
-          <p:cNvSpPr>
-            <a:spLocks xmlns:a="http://schemas.openxmlformats.org/drawingml/2006/main" noGrp="1"/>
-          </p:cNvSpPr>
-          <p:nvPr/>
-        </p:nvSpPr>
-        <p:spPr>
-          <a:xfrm xmlns:a="http://schemas.openxmlformats.org/drawingml/2006/main">
-            <a:off x="6496050" y="1962150"/>
-            <a:ext cx="2333625" cy="1209675"/>
+              <a:defRPr sz="2250" b="1">
+                <a:solidFill>
+                  <a:srgbClr val="FAFAFA"/>
+                </a:solidFill>
+                <a:latin typeface="Arial Unicode MS"/>
+                <a:ea typeface="Arial Unicode MS"/>
+                <a:cs typeface="Arial Unicode MS"/>
+              </a:defRPr>
+            </a:pPr>
+            <a:r>
+              <a:rPr sz="2250" b="1">
+                <a:solidFill>
+                  <a:srgbClr val="FAFAFA"/>
+                </a:solidFill>
+                <a:latin typeface="Arial Unicode MS"/>
+                <a:ea typeface="Arial Unicode MS"/>
+                <a:cs typeface="Arial Unicode MS"/>
+              </a:rPr>
+              <a:t>越界拒單</a:t>
+            </a:r>
+          </a:p>
+        </p:txBody>
+      </p:sp>
+      <p:sp>
+        <p:nvSpPr>
+          <p:cNvPr id="11" name="資金不變">
+            <a:extLst xmlns:a="http://schemas.openxmlformats.org/drawingml/2006/main">
+              <a:ext uri="{FF2B5EF4-FFF2-40B4-BE49-F238E27FC236}">
+                <a16:creationId xmlns:a16="http://schemas.microsoft.com/office/drawing/2014/main" id="{C09AF457-76AD-404F-9AEE-B5C9FCEE7435}"/>
+              </a:ext>
+            </a:extLst>
+          </p:cNvPr>
+          <p:cNvSpPr>
+            <a:spLocks xmlns:a="http://schemas.openxmlformats.org/drawingml/2006/main" noGrp="1"/>
+          </p:cNvSpPr>
+          <p:nvPr/>
+        </p:nvSpPr>
+        <p:spPr>
+          <a:xfrm xmlns:a="http://schemas.openxmlformats.org/drawingml/2006/main">
+            <a:off x="3590925" y="4086225"/>
+            <a:ext cx="2428875" cy="438150"/>
           </a:xfrm>
           <a:prstGeom xmlns:a="http://schemas.openxmlformats.org/drawingml/2006/main" prst="rect">
             <a:avLst/>
@@ -8903,47 +9174,47 @@
           <a:lstStyle xmlns:a="http://schemas.openxmlformats.org/drawingml/2006/main"/>
           <a:p xmlns:a="http://schemas.openxmlformats.org/drawingml/2006/main">
             <a:pPr algn="l">
-              <a:defRPr sz="7200" b="1">
-                <a:solidFill>
-                  <a:srgbClr val="FF5470"/>
-                </a:solidFill>
-                <a:latin typeface="Arial Unicode MS"/>
-                <a:ea typeface="Arial Unicode MS"/>
-                <a:cs typeface="Arial Unicode MS"/>
-              </a:defRPr>
-            </a:pPr>
-            <a:r>
-              <a:rPr sz="7200" b="1">
-                <a:solidFill>
-                  <a:srgbClr val="FF5470"/>
-                </a:solidFill>
-                <a:latin typeface="Arial Unicode MS"/>
-                <a:ea typeface="Arial Unicode MS"/>
-                <a:cs typeface="Arial Unicode MS"/>
-              </a:rPr>
-              <a:t>09</a:t>
-            </a:r>
-          </a:p>
-        </p:txBody>
-      </p:sp>
-      <p:sp>
-        <p:nvSpPr>
-          <p:cNvPr id="12" name="到期拒單">
-            <a:extLst xmlns:a="http://schemas.openxmlformats.org/drawingml/2006/main">
-              <a:ext uri="{FF2B5EF4-FFF2-40B4-BE49-F238E27FC236}">
-                <a16:creationId xmlns:a16="http://schemas.microsoft.com/office/drawing/2014/main" id="{326C6517-F30D-4B48-9E51-2FED922DA665}"/>
-              </a:ext>
-            </a:extLst>
-          </p:cNvPr>
-          <p:cNvSpPr>
-            <a:spLocks xmlns:a="http://schemas.openxmlformats.org/drawingml/2006/main" noGrp="1"/>
-          </p:cNvSpPr>
-          <p:nvPr/>
-        </p:nvSpPr>
-        <p:spPr>
-          <a:xfrm xmlns:a="http://schemas.openxmlformats.org/drawingml/2006/main">
-            <a:off x="6496050" y="3486150"/>
-            <a:ext cx="2428875" cy="476250"/>
+              <a:defRPr sz="1875" b="0">
+                <a:solidFill>
+                  <a:srgbClr val="A8A8B2"/>
+                </a:solidFill>
+                <a:latin typeface="Arial Unicode MS"/>
+                <a:ea typeface="Arial Unicode MS"/>
+                <a:cs typeface="Arial Unicode MS"/>
+              </a:defRPr>
+            </a:pPr>
+            <a:r>
+              <a:rPr sz="1875" b="0">
+                <a:solidFill>
+                  <a:srgbClr val="A8A8B2"/>
+                </a:solidFill>
+                <a:latin typeface="Arial Unicode MS"/>
+                <a:ea typeface="Arial Unicode MS"/>
+                <a:cs typeface="Arial Unicode MS"/>
+              </a:rPr>
+              <a:t>資金不變</a:t>
+            </a:r>
+          </a:p>
+        </p:txBody>
+      </p:sp>
+      <p:sp>
+        <p:nvSpPr>
+          <p:cNvPr id="12" name="09">
+            <a:extLst xmlns:a="http://schemas.openxmlformats.org/drawingml/2006/main">
+              <a:ext uri="{FF2B5EF4-FFF2-40B4-BE49-F238E27FC236}">
+                <a16:creationId xmlns:a16="http://schemas.microsoft.com/office/drawing/2014/main" id="{AFDAB209-2E49-4F9A-999D-B5D515EEAF38}"/>
+              </a:ext>
+            </a:extLst>
+          </p:cNvPr>
+          <p:cNvSpPr>
+            <a:spLocks xmlns:a="http://schemas.openxmlformats.org/drawingml/2006/main" noGrp="1"/>
+          </p:cNvSpPr>
+          <p:nvPr/>
+        </p:nvSpPr>
+        <p:spPr>
+          <a:xfrm xmlns:a="http://schemas.openxmlformats.org/drawingml/2006/main">
+            <a:off x="6496050" y="1962150"/>
+            <a:ext cx="2333625" cy="1209675"/>
           </a:xfrm>
           <a:prstGeom xmlns:a="http://schemas.openxmlformats.org/drawingml/2006/main" prst="rect">
             <a:avLst/>
@@ -8960,47 +9231,47 @@
           <a:lstStyle xmlns:a="http://schemas.openxmlformats.org/drawingml/2006/main"/>
           <a:p xmlns:a="http://schemas.openxmlformats.org/drawingml/2006/main">
             <a:pPr algn="l">
-              <a:defRPr sz="2250" b="1">
-                <a:solidFill>
-                  <a:srgbClr val="FAFAFA"/>
-                </a:solidFill>
-                <a:latin typeface="Arial Unicode MS"/>
-                <a:ea typeface="Arial Unicode MS"/>
-                <a:cs typeface="Arial Unicode MS"/>
-              </a:defRPr>
-            </a:pPr>
-            <a:r>
-              <a:rPr sz="2250" b="1">
-                <a:solidFill>
-                  <a:srgbClr val="FAFAFA"/>
-                </a:solidFill>
-                <a:latin typeface="Arial Unicode MS"/>
-                <a:ea typeface="Arial Unicode MS"/>
-                <a:cs typeface="Arial Unicode MS"/>
-              </a:rPr>
-              <a:t>到期拒單</a:t>
-            </a:r>
-          </a:p>
-        </p:txBody>
-      </p:sp>
-      <p:sp>
-        <p:nvSpPr>
-          <p:cNvPr id="13" name="造市者更新">
-            <a:extLst xmlns:a="http://schemas.openxmlformats.org/drawingml/2006/main">
-              <a:ext uri="{FF2B5EF4-FFF2-40B4-BE49-F238E27FC236}">
-                <a16:creationId xmlns:a16="http://schemas.microsoft.com/office/drawing/2014/main" id="{87B267FE-4442-4C1E-A954-E97D3B02C754}"/>
-              </a:ext>
-            </a:extLst>
-          </p:cNvPr>
-          <p:cNvSpPr>
-            <a:spLocks xmlns:a="http://schemas.openxmlformats.org/drawingml/2006/main" noGrp="1"/>
-          </p:cNvSpPr>
-          <p:nvPr/>
-        </p:nvSpPr>
-        <p:spPr>
-          <a:xfrm xmlns:a="http://schemas.openxmlformats.org/drawingml/2006/main">
-            <a:off x="6496050" y="4086225"/>
-            <a:ext cx="2428875" cy="438150"/>
+              <a:defRPr sz="7200" b="1">
+                <a:solidFill>
+                  <a:srgbClr val="FF5470"/>
+                </a:solidFill>
+                <a:latin typeface="Arial Unicode MS"/>
+                <a:ea typeface="Arial Unicode MS"/>
+                <a:cs typeface="Arial Unicode MS"/>
+              </a:defRPr>
+            </a:pPr>
+            <a:r>
+              <a:rPr sz="7200" b="1">
+                <a:solidFill>
+                  <a:srgbClr val="FF5470"/>
+                </a:solidFill>
+                <a:latin typeface="Arial Unicode MS"/>
+                <a:ea typeface="Arial Unicode MS"/>
+                <a:cs typeface="Arial Unicode MS"/>
+              </a:rPr>
+              <a:t>09</a:t>
+            </a:r>
+          </a:p>
+        </p:txBody>
+      </p:sp>
+      <p:sp>
+        <p:nvSpPr>
+          <p:cNvPr id="13" name="到期拒單">
+            <a:extLst xmlns:a="http://schemas.openxmlformats.org/drawingml/2006/main">
+              <a:ext uri="{FF2B5EF4-FFF2-40B4-BE49-F238E27FC236}">
+                <a16:creationId xmlns:a16="http://schemas.microsoft.com/office/drawing/2014/main" id="{7D0F81D7-227B-4E18-9687-591B562982D7}"/>
+              </a:ext>
+            </a:extLst>
+          </p:cNvPr>
+          <p:cNvSpPr>
+            <a:spLocks xmlns:a="http://schemas.openxmlformats.org/drawingml/2006/main" noGrp="1"/>
+          </p:cNvSpPr>
+          <p:nvPr/>
+        </p:nvSpPr>
+        <p:spPr>
+          <a:xfrm xmlns:a="http://schemas.openxmlformats.org/drawingml/2006/main">
+            <a:off x="6496050" y="3486150"/>
+            <a:ext cx="2428875" cy="476250"/>
           </a:xfrm>
           <a:prstGeom xmlns:a="http://schemas.openxmlformats.org/drawingml/2006/main" prst="rect">
             <a:avLst/>
@@ -9017,47 +9288,47 @@
           <a:lstStyle xmlns:a="http://schemas.openxmlformats.org/drawingml/2006/main"/>
           <a:p xmlns:a="http://schemas.openxmlformats.org/drawingml/2006/main">
             <a:pPr algn="l">
-              <a:defRPr sz="1875" b="0">
-                <a:solidFill>
-                  <a:srgbClr val="A8A8B2"/>
-                </a:solidFill>
-                <a:latin typeface="Arial Unicode MS"/>
-                <a:ea typeface="Arial Unicode MS"/>
-                <a:cs typeface="Arial Unicode MS"/>
-              </a:defRPr>
-            </a:pPr>
-            <a:r>
-              <a:rPr sz="1875" b="0">
-                <a:solidFill>
-                  <a:srgbClr val="A8A8B2"/>
-                </a:solidFill>
-                <a:latin typeface="Arial Unicode MS"/>
-                <a:ea typeface="Arial Unicode MS"/>
-                <a:cs typeface="Arial Unicode MS"/>
-              </a:rPr>
-              <a:t>造市者更新</a:t>
-            </a:r>
-          </a:p>
-        </p:txBody>
-      </p:sp>
-      <p:sp>
-        <p:nvSpPr>
-          <p:cNvPr id="14" name="14">
-            <a:extLst xmlns:a="http://schemas.openxmlformats.org/drawingml/2006/main">
-              <a:ext uri="{FF2B5EF4-FFF2-40B4-BE49-F238E27FC236}">
-                <a16:creationId xmlns:a16="http://schemas.microsoft.com/office/drawing/2014/main" id="{FEB67AE1-AA10-4D4A-8BA3-2D0D4A0DD5C2}"/>
-              </a:ext>
-            </a:extLst>
-          </p:cNvPr>
-          <p:cNvSpPr>
-            <a:spLocks xmlns:a="http://schemas.openxmlformats.org/drawingml/2006/main" noGrp="1"/>
-          </p:cNvSpPr>
-          <p:nvPr/>
-        </p:nvSpPr>
-        <p:spPr>
-          <a:xfrm xmlns:a="http://schemas.openxmlformats.org/drawingml/2006/main">
-            <a:off x="9401175" y="1962150"/>
-            <a:ext cx="2333625" cy="1209675"/>
+              <a:defRPr sz="2250" b="1">
+                <a:solidFill>
+                  <a:srgbClr val="FAFAFA"/>
+                </a:solidFill>
+                <a:latin typeface="Arial Unicode MS"/>
+                <a:ea typeface="Arial Unicode MS"/>
+                <a:cs typeface="Arial Unicode MS"/>
+              </a:defRPr>
+            </a:pPr>
+            <a:r>
+              <a:rPr sz="2250" b="1">
+                <a:solidFill>
+                  <a:srgbClr val="FAFAFA"/>
+                </a:solidFill>
+                <a:latin typeface="Arial Unicode MS"/>
+                <a:ea typeface="Arial Unicode MS"/>
+                <a:cs typeface="Arial Unicode MS"/>
+              </a:rPr>
+              <a:t>到期拒單</a:t>
+            </a:r>
+          </a:p>
+        </p:txBody>
+      </p:sp>
+      <p:sp>
+        <p:nvSpPr>
+          <p:cNvPr id="14" name="造市者更新">
+            <a:extLst xmlns:a="http://schemas.openxmlformats.org/drawingml/2006/main">
+              <a:ext uri="{FF2B5EF4-FFF2-40B4-BE49-F238E27FC236}">
+                <a16:creationId xmlns:a16="http://schemas.microsoft.com/office/drawing/2014/main" id="{13FA3E9F-9D6D-48AA-980D-EE4E807A0745}"/>
+              </a:ext>
+            </a:extLst>
+          </p:cNvPr>
+          <p:cNvSpPr>
+            <a:spLocks xmlns:a="http://schemas.openxmlformats.org/drawingml/2006/main" noGrp="1"/>
+          </p:cNvSpPr>
+          <p:nvPr/>
+        </p:nvSpPr>
+        <p:spPr>
+          <a:xfrm xmlns:a="http://schemas.openxmlformats.org/drawingml/2006/main">
+            <a:off x="6496050" y="4086225"/>
+            <a:ext cx="2428875" cy="438150"/>
           </a:xfrm>
           <a:prstGeom xmlns:a="http://schemas.openxmlformats.org/drawingml/2006/main" prst="rect">
             <a:avLst/>
@@ -9074,47 +9345,47 @@
           <a:lstStyle xmlns:a="http://schemas.openxmlformats.org/drawingml/2006/main"/>
           <a:p xmlns:a="http://schemas.openxmlformats.org/drawingml/2006/main">
             <a:pPr algn="l">
-              <a:defRPr sz="7200" b="1">
-                <a:solidFill>
-                  <a:srgbClr val="37D67A"/>
-                </a:solidFill>
-                <a:latin typeface="Arial Unicode MS"/>
-                <a:ea typeface="Arial Unicode MS"/>
-                <a:cs typeface="Arial Unicode MS"/>
-              </a:defRPr>
-            </a:pPr>
-            <a:r>
-              <a:rPr sz="7200" b="1">
-                <a:solidFill>
-                  <a:srgbClr val="37D67A"/>
-                </a:solidFill>
-                <a:latin typeface="Arial Unicode MS"/>
-                <a:ea typeface="Arial Unicode MS"/>
-                <a:cs typeface="Arial Unicode MS"/>
-              </a:rPr>
-              <a:t>14</a:t>
-            </a:r>
-          </a:p>
-        </p:txBody>
-      </p:sp>
-      <p:sp>
-        <p:nvSpPr>
-          <p:cNvPr id="15" name="權利金回流">
-            <a:extLst xmlns:a="http://schemas.openxmlformats.org/drawingml/2006/main">
-              <a:ext uri="{FF2B5EF4-FFF2-40B4-BE49-F238E27FC236}">
-                <a16:creationId xmlns:a16="http://schemas.microsoft.com/office/drawing/2014/main" id="{EE7A0B0A-D29A-4077-81B6-D04A4244F960}"/>
-              </a:ext>
-            </a:extLst>
-          </p:cNvPr>
-          <p:cNvSpPr>
-            <a:spLocks xmlns:a="http://schemas.openxmlformats.org/drawingml/2006/main" noGrp="1"/>
-          </p:cNvSpPr>
-          <p:nvPr/>
-        </p:nvSpPr>
-        <p:spPr>
-          <a:xfrm xmlns:a="http://schemas.openxmlformats.org/drawingml/2006/main">
-            <a:off x="9401175" y="3486150"/>
-            <a:ext cx="2428875" cy="476250"/>
+              <a:defRPr sz="1875" b="0">
+                <a:solidFill>
+                  <a:srgbClr val="A8A8B2"/>
+                </a:solidFill>
+                <a:latin typeface="Arial Unicode MS"/>
+                <a:ea typeface="Arial Unicode MS"/>
+                <a:cs typeface="Arial Unicode MS"/>
+              </a:defRPr>
+            </a:pPr>
+            <a:r>
+              <a:rPr sz="1875" b="0">
+                <a:solidFill>
+                  <a:srgbClr val="A8A8B2"/>
+                </a:solidFill>
+                <a:latin typeface="Arial Unicode MS"/>
+                <a:ea typeface="Arial Unicode MS"/>
+                <a:cs typeface="Arial Unicode MS"/>
+              </a:rPr>
+              <a:t>造市者更新</a:t>
+            </a:r>
+          </a:p>
+        </p:txBody>
+      </p:sp>
+      <p:sp>
+        <p:nvSpPr>
+          <p:cNvPr id="15" name="14">
+            <a:extLst xmlns:a="http://schemas.openxmlformats.org/drawingml/2006/main">
+              <a:ext uri="{FF2B5EF4-FFF2-40B4-BE49-F238E27FC236}">
+                <a16:creationId xmlns:a16="http://schemas.microsoft.com/office/drawing/2014/main" id="{B111A647-77DE-49B1-888B-0C050126FB71}"/>
+              </a:ext>
+            </a:extLst>
+          </p:cNvPr>
+          <p:cNvSpPr>
+            <a:spLocks xmlns:a="http://schemas.openxmlformats.org/drawingml/2006/main" noGrp="1"/>
+          </p:cNvSpPr>
+          <p:nvPr/>
+        </p:nvSpPr>
+        <p:spPr>
+          <a:xfrm xmlns:a="http://schemas.openxmlformats.org/drawingml/2006/main">
+            <a:off x="9401175" y="1962150"/>
+            <a:ext cx="2333625" cy="1209675"/>
           </a:xfrm>
           <a:prstGeom xmlns:a="http://schemas.openxmlformats.org/drawingml/2006/main" prst="rect">
             <a:avLst/>
@@ -9131,47 +9402,47 @@
           <a:lstStyle xmlns:a="http://schemas.openxmlformats.org/drawingml/2006/main"/>
           <a:p xmlns:a="http://schemas.openxmlformats.org/drawingml/2006/main">
             <a:pPr algn="l">
-              <a:defRPr sz="2250" b="1">
-                <a:solidFill>
-                  <a:srgbClr val="FAFAFA"/>
-                </a:solidFill>
-                <a:latin typeface="Arial Unicode MS"/>
-                <a:ea typeface="Arial Unicode MS"/>
-                <a:cs typeface="Arial Unicode MS"/>
-              </a:defRPr>
-            </a:pPr>
-            <a:r>
-              <a:rPr sz="2250" b="1">
-                <a:solidFill>
-                  <a:srgbClr val="FAFAFA"/>
-                </a:solidFill>
-                <a:latin typeface="Arial Unicode MS"/>
-                <a:ea typeface="Arial Unicode MS"/>
-                <a:cs typeface="Arial Unicode MS"/>
-              </a:rPr>
-              <a:t>權利金回流</a:t>
-            </a:r>
-          </a:p>
-        </p:txBody>
-      </p:sp>
-      <p:sp>
-        <p:nvSpPr>
-          <p:cNvPr id="16" name="Book = 0">
-            <a:extLst xmlns:a="http://schemas.openxmlformats.org/drawingml/2006/main">
-              <a:ext uri="{FF2B5EF4-FFF2-40B4-BE49-F238E27FC236}">
-                <a16:creationId xmlns:a16="http://schemas.microsoft.com/office/drawing/2014/main" id="{6D96A1E6-42D7-4B92-8D32-FF269CE64A9C}"/>
-              </a:ext>
-            </a:extLst>
-          </p:cNvPr>
-          <p:cNvSpPr>
-            <a:spLocks xmlns:a="http://schemas.openxmlformats.org/drawingml/2006/main" noGrp="1"/>
-          </p:cNvSpPr>
-          <p:nvPr/>
-        </p:nvSpPr>
-        <p:spPr>
-          <a:xfrm xmlns:a="http://schemas.openxmlformats.org/drawingml/2006/main">
-            <a:off x="9401175" y="4086225"/>
-            <a:ext cx="2428875" cy="438150"/>
+              <a:defRPr sz="7200" b="1">
+                <a:solidFill>
+                  <a:srgbClr val="37D67A"/>
+                </a:solidFill>
+                <a:latin typeface="Arial Unicode MS"/>
+                <a:ea typeface="Arial Unicode MS"/>
+                <a:cs typeface="Arial Unicode MS"/>
+              </a:defRPr>
+            </a:pPr>
+            <a:r>
+              <a:rPr sz="7200" b="1">
+                <a:solidFill>
+                  <a:srgbClr val="37D67A"/>
+                </a:solidFill>
+                <a:latin typeface="Arial Unicode MS"/>
+                <a:ea typeface="Arial Unicode MS"/>
+                <a:cs typeface="Arial Unicode MS"/>
+              </a:rPr>
+              <a:t>14</a:t>
+            </a:r>
+          </a:p>
+        </p:txBody>
+      </p:sp>
+      <p:sp>
+        <p:nvSpPr>
+          <p:cNvPr id="16" name="權利金回流">
+            <a:extLst xmlns:a="http://schemas.openxmlformats.org/drawingml/2006/main">
+              <a:ext uri="{FF2B5EF4-FFF2-40B4-BE49-F238E27FC236}">
+                <a16:creationId xmlns:a16="http://schemas.microsoft.com/office/drawing/2014/main" id="{58D3CEA2-C7C0-4017-9727-C4DA528F2486}"/>
+              </a:ext>
+            </a:extLst>
+          </p:cNvPr>
+          <p:cNvSpPr>
+            <a:spLocks xmlns:a="http://schemas.openxmlformats.org/drawingml/2006/main" noGrp="1"/>
+          </p:cNvSpPr>
+          <p:nvPr/>
+        </p:nvSpPr>
+        <p:spPr>
+          <a:xfrm xmlns:a="http://schemas.openxmlformats.org/drawingml/2006/main">
+            <a:off x="9401175" y="3486150"/>
+            <a:ext cx="2428875" cy="476250"/>
           </a:xfrm>
           <a:prstGeom xmlns:a="http://schemas.openxmlformats.org/drawingml/2006/main" prst="rect">
             <a:avLst/>
@@ -9188,47 +9459,47 @@
           <a:lstStyle xmlns:a="http://schemas.openxmlformats.org/drawingml/2006/main"/>
           <a:p xmlns:a="http://schemas.openxmlformats.org/drawingml/2006/main">
             <a:pPr algn="l">
-              <a:defRPr sz="1875" b="0">
-                <a:solidFill>
-                  <a:srgbClr val="A8A8B2"/>
-                </a:solidFill>
-                <a:latin typeface="Arial Unicode MS"/>
-                <a:ea typeface="Arial Unicode MS"/>
-                <a:cs typeface="Arial Unicode MS"/>
-              </a:defRPr>
-            </a:pPr>
-            <a:r>
-              <a:rPr sz="1875" b="0">
-                <a:solidFill>
-                  <a:srgbClr val="A8A8B2"/>
-                </a:solidFill>
-                <a:latin typeface="Arial Unicode MS"/>
-                <a:ea typeface="Arial Unicode MS"/>
-                <a:cs typeface="Arial Unicode MS"/>
-              </a:rPr>
-              <a:t>Book = 0</a:t>
-            </a:r>
-          </a:p>
-        </p:txBody>
-      </p:sp>
-      <p:sp>
-        <p:nvSpPr>
-          <p:cNvPr id="17" name="開啟合約流程回放">
-            <a:extLst xmlns:a="http://schemas.openxmlformats.org/drawingml/2006/main">
-              <a:ext uri="{FF2B5EF4-FFF2-40B4-BE49-F238E27FC236}">
-                <a16:creationId xmlns:a16="http://schemas.microsoft.com/office/drawing/2014/main" id="{E3A70266-7F55-439A-9DC2-C7BAC9710607}"/>
-              </a:ext>
-            </a:extLst>
-          </p:cNvPr>
-          <p:cNvSpPr>
-            <a:spLocks xmlns:a="http://schemas.openxmlformats.org/drawingml/2006/main" noGrp="1"/>
-          </p:cNvSpPr>
-          <p:nvPr/>
-        </p:nvSpPr>
-        <p:spPr>
-          <a:xfrm xmlns:a="http://schemas.openxmlformats.org/drawingml/2006/main">
-            <a:off x="695325" y="5105400"/>
-            <a:ext cx="10858500" cy="552450"/>
+              <a:defRPr sz="2250" b="1">
+                <a:solidFill>
+                  <a:srgbClr val="FAFAFA"/>
+                </a:solidFill>
+                <a:latin typeface="Arial Unicode MS"/>
+                <a:ea typeface="Arial Unicode MS"/>
+                <a:cs typeface="Arial Unicode MS"/>
+              </a:defRPr>
+            </a:pPr>
+            <a:r>
+              <a:rPr sz="2250" b="1">
+                <a:solidFill>
+                  <a:srgbClr val="FAFAFA"/>
+                </a:solidFill>
+                <a:latin typeface="Arial Unicode MS"/>
+                <a:ea typeface="Arial Unicode MS"/>
+                <a:cs typeface="Arial Unicode MS"/>
+              </a:rPr>
+              <a:t>權利金回流</a:t>
+            </a:r>
+          </a:p>
+        </p:txBody>
+      </p:sp>
+      <p:sp>
+        <p:nvSpPr>
+          <p:cNvPr id="17" name="Book = 0">
+            <a:extLst xmlns:a="http://schemas.openxmlformats.org/drawingml/2006/main">
+              <a:ext uri="{FF2B5EF4-FFF2-40B4-BE49-F238E27FC236}">
+                <a16:creationId xmlns:a16="http://schemas.microsoft.com/office/drawing/2014/main" id="{B03B6AF0-2F1A-45C2-886E-1269F3BE7671}"/>
+              </a:ext>
+            </a:extLst>
+          </p:cNvPr>
+          <p:cNvSpPr>
+            <a:spLocks xmlns:a="http://schemas.openxmlformats.org/drawingml/2006/main" noGrp="1"/>
+          </p:cNvSpPr>
+          <p:nvPr/>
+        </p:nvSpPr>
+        <p:spPr>
+          <a:xfrm xmlns:a="http://schemas.openxmlformats.org/drawingml/2006/main">
+            <a:off x="9401175" y="4086225"/>
+            <a:ext cx="2428875" cy="438150"/>
           </a:xfrm>
           <a:prstGeom xmlns:a="http://schemas.openxmlformats.org/drawingml/2006/main" prst="rect">
             <a:avLst/>
@@ -9245,48 +9516,47 @@
           <a:lstStyle xmlns:a="http://schemas.openxmlformats.org/drawingml/2006/main"/>
           <a:p xmlns:a="http://schemas.openxmlformats.org/drawingml/2006/main">
             <a:pPr algn="l">
-              <a:defRPr sz="2550" b="0">
-                <a:solidFill>
-                  <a:srgbClr val="37D67A"/>
-                </a:solidFill>
-                <a:latin typeface="Arial Unicode MS"/>
-                <a:ea typeface="Arial Unicode MS"/>
-                <a:cs typeface="Arial Unicode MS"/>
-              </a:defRPr>
-            </a:pPr>
-            <a:r>
-              <a:rPr sz="2550" b="0" u="sng">
-                <a:solidFill>
-                  <a:srgbClr val="37D67A"/>
-                </a:solidFill>
-                <a:latin typeface="Arial Unicode MS"/>
-                <a:ea typeface="Arial Unicode MS"/>
-                <a:cs typeface="Arial Unicode MS"/>
-                <a:hlinkClick xmlns:r="http://schemas.openxmlformats.org/officeDocument/2006/relationships" r:id="R38aebfaa8b844730"/>
-              </a:rPr>
-              <a:t>開啟合約流程回放</a:t>
-            </a:r>
-          </a:p>
-        </p:txBody>
-      </p:sp>
-      <p:sp>
-        <p:nvSpPr>
-          <p:cNvPr id="18" name="15 步都沿用相同帳戶、錢包與訂單">
-            <a:extLst xmlns:a="http://schemas.openxmlformats.org/drawingml/2006/main">
-              <a:ext uri="{FF2B5EF4-FFF2-40B4-BE49-F238E27FC236}">
-                <a16:creationId xmlns:a16="http://schemas.microsoft.com/office/drawing/2014/main" id="{C91200DF-5755-45C4-9D99-0750417A7B46}"/>
-              </a:ext>
-            </a:extLst>
-          </p:cNvPr>
-          <p:cNvSpPr>
-            <a:spLocks xmlns:a="http://schemas.openxmlformats.org/drawingml/2006/main" noGrp="1"/>
-          </p:cNvSpPr>
-          <p:nvPr/>
-        </p:nvSpPr>
-        <p:spPr>
-          <a:xfrm xmlns:a="http://schemas.openxmlformats.org/drawingml/2006/main">
-            <a:off x="695325" y="5753100"/>
-            <a:ext cx="10839450" cy="323850"/>
+              <a:defRPr sz="1875" b="0">
+                <a:solidFill>
+                  <a:srgbClr val="A8A8B2"/>
+                </a:solidFill>
+                <a:latin typeface="Arial Unicode MS"/>
+                <a:ea typeface="Arial Unicode MS"/>
+                <a:cs typeface="Arial Unicode MS"/>
+              </a:defRPr>
+            </a:pPr>
+            <a:r>
+              <a:rPr sz="1875" b="0">
+                <a:solidFill>
+                  <a:srgbClr val="A8A8B2"/>
+                </a:solidFill>
+                <a:latin typeface="Arial Unicode MS"/>
+                <a:ea typeface="Arial Unicode MS"/>
+                <a:cs typeface="Arial Unicode MS"/>
+              </a:rPr>
+              <a:t>Book = 0</a:t>
+            </a:r>
+          </a:p>
+        </p:txBody>
+      </p:sp>
+      <p:sp>
+        <p:nvSpPr>
+          <p:cNvPr id="18" name="開啟合約流程回放">
+            <a:extLst xmlns:a="http://schemas.openxmlformats.org/drawingml/2006/main">
+              <a:ext uri="{FF2B5EF4-FFF2-40B4-BE49-F238E27FC236}">
+                <a16:creationId xmlns:a16="http://schemas.microsoft.com/office/drawing/2014/main" id="{498B6050-2447-4697-94B6-2C4461A52FC7}"/>
+              </a:ext>
+            </a:extLst>
+          </p:cNvPr>
+          <p:cNvSpPr>
+            <a:spLocks xmlns:a="http://schemas.openxmlformats.org/drawingml/2006/main" noGrp="1"/>
+          </p:cNvSpPr>
+          <p:nvPr/>
+        </p:nvSpPr>
+        <p:spPr>
+          <a:xfrm xmlns:a="http://schemas.openxmlformats.org/drawingml/2006/main">
+            <a:off x="695325" y="5105400"/>
+            <a:ext cx="10858500" cy="552450"/>
           </a:xfrm>
           <a:prstGeom xmlns:a="http://schemas.openxmlformats.org/drawingml/2006/main" prst="rect">
             <a:avLst/>
@@ -9303,6 +9573,64 @@
           <a:lstStyle xmlns:a="http://schemas.openxmlformats.org/drawingml/2006/main"/>
           <a:p xmlns:a="http://schemas.openxmlformats.org/drawingml/2006/main">
             <a:pPr algn="l">
+              <a:defRPr sz="2550" b="0">
+                <a:solidFill>
+                  <a:srgbClr val="37D67A"/>
+                </a:solidFill>
+                <a:latin typeface="Arial Unicode MS"/>
+                <a:ea typeface="Arial Unicode MS"/>
+                <a:cs typeface="Arial Unicode MS"/>
+              </a:defRPr>
+            </a:pPr>
+            <a:r>
+              <a:rPr sz="2550" b="0" u="sng">
+                <a:solidFill>
+                  <a:srgbClr val="37D67A"/>
+                </a:solidFill>
+                <a:latin typeface="Arial Unicode MS"/>
+                <a:ea typeface="Arial Unicode MS"/>
+                <a:cs typeface="Arial Unicode MS"/>
+                <a:hlinkClick xmlns:r="http://schemas.openxmlformats.org/officeDocument/2006/relationships" r:id="R4ab278b22f5c46f5"/>
+              </a:rPr>
+              <a:t>開啟合約流程回放</a:t>
+            </a:r>
+          </a:p>
+        </p:txBody>
+      </p:sp>
+      <p:sp>
+        <p:nvSpPr>
+          <p:cNvPr id="19" name="原始回放使用 TSLA/USDG；簡報以 AAPL 示意">
+            <a:extLst xmlns:a="http://schemas.openxmlformats.org/drawingml/2006/main">
+              <a:ext uri="{FF2B5EF4-FFF2-40B4-BE49-F238E27FC236}">
+                <a16:creationId xmlns:a16="http://schemas.microsoft.com/office/drawing/2014/main" id="{0F2CA603-A4CA-42AA-A49D-C9B787114323}"/>
+              </a:ext>
+            </a:extLst>
+          </p:cNvPr>
+          <p:cNvSpPr>
+            <a:spLocks xmlns:a="http://schemas.openxmlformats.org/drawingml/2006/main" noGrp="1"/>
+          </p:cNvSpPr>
+          <p:nvPr/>
+        </p:nvSpPr>
+        <p:spPr>
+          <a:xfrm xmlns:a="http://schemas.openxmlformats.org/drawingml/2006/main">
+            <a:off x="695325" y="5753100"/>
+            <a:ext cx="10839450" cy="323850"/>
+          </a:xfrm>
+          <a:prstGeom xmlns:a="http://schemas.openxmlformats.org/drawingml/2006/main" prst="rect">
+            <a:avLst/>
+          </a:prstGeom>
+          <a:noFill xmlns:a="http://schemas.openxmlformats.org/drawingml/2006/main"/>
+          <a:ln xmlns:a="http://schemas.openxmlformats.org/drawingml/2006/main" w="0">
+            <a:noFill/>
+          </a:ln>
+        </p:spPr>
+        <p:txBody>
+          <a:bodyPr xmlns:a="http://schemas.openxmlformats.org/drawingml/2006/main" wrap="none" lIns="0" tIns="0" rIns="0" bIns="0" anchor="ctr">
+            <a:noAutofit/>
+          </a:bodyPr>
+          <a:lstStyle xmlns:a="http://schemas.openxmlformats.org/drawingml/2006/main"/>
+          <a:p xmlns:a="http://schemas.openxmlformats.org/drawingml/2006/main">
+            <a:pPr algn="l">
               <a:defRPr sz="1725" b="0">
                 <a:solidFill>
                   <a:srgbClr val="A8A8B2"/>
@@ -9321,7 +9649,7 @@
                 <a:ea typeface="Arial Unicode MS"/>
                 <a:cs typeface="Arial Unicode MS"/>
               </a:rPr>
-              <a:t>15 步都沿用相同帳戶、錢包與訂單</a:t>
+              <a:t>原始回放使用 TSLA/USDG；簡報以 AAPL 示意</a:t>
             </a:r>
           </a:p>
         </p:txBody>
@@ -9329,7 +9657,7 @@
     </p:spTree>
     <p:extLst>
       <p:ext uri="{BB962C8B-B14F-4D97-AF65-F5344CB8AC3E}">
-        <p14:creationId xmlns:p14="http://schemas.microsoft.com/office/powerpoint/2010/main" val="1427624617"/>
+        <p14:creationId xmlns:p14="http://schemas.microsoft.com/office/powerpoint/2010/main" val="640102732"/>
       </p:ext>
     </p:extLst>
   </p:cSld>
@@ -9360,7 +9688,7 @@
           <p:cNvPr id="12" name="Vexi Hakari 的公開貢獻">
             <a:extLst xmlns:a="http://schemas.openxmlformats.org/drawingml/2006/main">
               <a:ext uri="{FF2B5EF4-FFF2-40B4-BE49-F238E27FC236}">
-                <a16:creationId xmlns:a16="http://schemas.microsoft.com/office/drawing/2014/main" id="{E18ECE2D-7B58-4452-AE78-A26AE4FCE3DE}"/>
+                <a16:creationId xmlns:a16="http://schemas.microsoft.com/office/drawing/2014/main" id="{014F0A10-0DF5-474E-9A3A-31A47F93507D}"/>
               </a:ext>
             </a:extLst>
           </p:cNvPr>
@@ -9421,7 +9749,7 @@
           <p:nvPr/>
         </p:nvPicPr>
         <p:blipFill>
-          <a:blip xmlns:r="http://schemas.openxmlformats.org/officeDocument/2006/relationships" xmlns:a="http://schemas.openxmlformats.org/drawingml/2006/main" r:embed="Rc2c1caf0cdae44f6"/>
+          <a:blip xmlns:r="http://schemas.openxmlformats.org/officeDocument/2006/relationships" xmlns:a="http://schemas.openxmlformats.org/drawingml/2006/main" r:embed="R7228321d4e574d5d"/>
           <a:stretch xmlns:a="http://schemas.openxmlformats.org/drawingml/2006/main"/>
         </p:blipFill>
         <p:spPr>
@@ -9439,7 +9767,7 @@
           <p:cNvPr id="3" name="Vexi Hakari">
             <a:extLst xmlns:a="http://schemas.openxmlformats.org/drawingml/2006/main">
               <a:ext uri="{FF2B5EF4-FFF2-40B4-BE49-F238E27FC236}">
-                <a16:creationId xmlns:a16="http://schemas.microsoft.com/office/drawing/2014/main" id="{F50C45F2-19C6-4F7A-99EF-9FCBC02CCF75}"/>
+                <a16:creationId xmlns:a16="http://schemas.microsoft.com/office/drawing/2014/main" id="{2297F865-CB1E-446E-B439-8A0CF487DE91}"/>
               </a:ext>
             </a:extLst>
           </p:cNvPr>
@@ -9496,7 +9824,7 @@
           <p:cNvPr id="4" name="14">
             <a:extLst xmlns:a="http://schemas.openxmlformats.org/drawingml/2006/main">
               <a:ext uri="{FF2B5EF4-FFF2-40B4-BE49-F238E27FC236}">
-                <a16:creationId xmlns:a16="http://schemas.microsoft.com/office/drawing/2014/main" id="{B4742573-B0D8-4670-BE90-197B83EA8AAA}"/>
+                <a16:creationId xmlns:a16="http://schemas.microsoft.com/office/drawing/2014/main" id="{60B45632-AC3B-4380-9E7B-BB4120E98CD6}"/>
               </a:ext>
             </a:extLst>
           </p:cNvPr>
@@ -9553,7 +9881,7 @@
           <p:cNvPr id="5" name="1inch Aqua + SwapVM">
             <a:extLst xmlns:a="http://schemas.openxmlformats.org/drawingml/2006/main">
               <a:ext uri="{FF2B5EF4-FFF2-40B4-BE49-F238E27FC236}">
-                <a16:creationId xmlns:a16="http://schemas.microsoft.com/office/drawing/2014/main" id="{9F270507-28E9-4290-889D-9607D7B62DED}"/>
+                <a16:creationId xmlns:a16="http://schemas.microsoft.com/office/drawing/2014/main" id="{36421623-AB4E-4253-8042-630CE9B5FC58}"/>
               </a:ext>
             </a:extLst>
           </p:cNvPr>
@@ -9610,7 +9938,7 @@
           <p:cNvPr id="6" name="成交才拉抵押品，共用庫存有 guard">
             <a:extLst xmlns:a="http://schemas.openxmlformats.org/drawingml/2006/main">
               <a:ext uri="{FF2B5EF4-FFF2-40B4-BE49-F238E27FC236}">
-                <a16:creationId xmlns:a16="http://schemas.microsoft.com/office/drawing/2014/main" id="{E23FAF43-0D9D-492E-A092-7128812E6D3D}"/>
+                <a16:creationId xmlns:a16="http://schemas.microsoft.com/office/drawing/2014/main" id="{FAF9AB03-0F17-4F0B-AF7F-25927075A77E}"/>
               </a:ext>
             </a:extLst>
           </p:cNvPr>
@@ -9667,7 +9995,7 @@
           <p:cNvPr id="7" name="">
             <a:extLst xmlns:a="http://schemas.openxmlformats.org/drawingml/2006/main">
               <a:ext uri="{FF2B5EF4-FFF2-40B4-BE49-F238E27FC236}">
-                <a16:creationId xmlns:a16="http://schemas.microsoft.com/office/drawing/2014/main" id="{CDC15369-5FC3-4C6B-BF35-362C4ADB1D74}"/>
+                <a16:creationId xmlns:a16="http://schemas.microsoft.com/office/drawing/2014/main" id="{80903ADD-05F7-4DB5-9CB1-D5BDA86CCA82}"/>
               </a:ext>
             </a:extLst>
           </p:cNvPr>
@@ -9697,7 +10025,7 @@
           <p:cNvPr id="8" name="Uniswap v4">
             <a:extLst xmlns:a="http://schemas.openxmlformats.org/drawingml/2006/main">
               <a:ext uri="{FF2B5EF4-FFF2-40B4-BE49-F238E27FC236}">
-                <a16:creationId xmlns:a16="http://schemas.microsoft.com/office/drawing/2014/main" id="{2A53AB54-C149-4A00-A5E4-1BAB87AC0E2B}"/>
+                <a16:creationId xmlns:a16="http://schemas.microsoft.com/office/drawing/2014/main" id="{E63B9D78-C890-4706-9C6E-3667ADA46ED4}"/>
               </a:ext>
             </a:extLst>
           </p:cNvPr>
@@ -9754,7 +10082,7 @@
           <p:cNvPr id="9" name="Hook 觀測會改變實際選擇權成交">
             <a:extLst xmlns:a="http://schemas.openxmlformats.org/drawingml/2006/main">
               <a:ext uri="{FF2B5EF4-FFF2-40B4-BE49-F238E27FC236}">
-                <a16:creationId xmlns:a16="http://schemas.microsoft.com/office/drawing/2014/main" id="{FBE8904D-8380-42EE-A7C8-F9021DA6D46E}"/>
+                <a16:creationId xmlns:a16="http://schemas.microsoft.com/office/drawing/2014/main" id="{D1F47D05-4A94-47D0-A764-A7A91E12E7CF}"/>
               </a:ext>
             </a:extLst>
           </p:cNvPr>
@@ -9811,7 +10139,7 @@
           <p:cNvPr id="10" name="github.com/vexi-v1/vexi-hakari">
             <a:extLst xmlns:a="http://schemas.openxmlformats.org/drawingml/2006/main">
               <a:ext uri="{FF2B5EF4-FFF2-40B4-BE49-F238E27FC236}">
-                <a16:creationId xmlns:a16="http://schemas.microsoft.com/office/drawing/2014/main" id="{A8DF9AB3-90C8-4114-B924-46ED239C3052}"/>
+                <a16:creationId xmlns:a16="http://schemas.microsoft.com/office/drawing/2014/main" id="{44107036-FDA7-4DEB-89B3-FAA1DAA480C7}"/>
               </a:ext>
             </a:extLst>
           </p:cNvPr>
@@ -9857,7 +10185,7 @@
                 <a:latin typeface="Arial Unicode MS"/>
                 <a:ea typeface="Arial Unicode MS"/>
                 <a:cs typeface="Arial Unicode MS"/>
-                <a:hlinkClick xmlns:r="http://schemas.openxmlformats.org/officeDocument/2006/relationships" r:id="R91c5164d7d7a4868"/>
+                <a:hlinkClick xmlns:r="http://schemas.openxmlformats.org/officeDocument/2006/relationships" r:id="Rb94b01ae9b304287"/>
               </a:rPr>
               <a:t>github.com/vexi-v1/vexi-hakari</a:t>
             </a:r>
@@ -9869,7 +10197,7 @@
           <p:cNvPr id="11" name="公開分叉證據；hook 與 pool 有測試網紀錄">
             <a:extLst xmlns:a="http://schemas.openxmlformats.org/drawingml/2006/main">
               <a:ext uri="{FF2B5EF4-FFF2-40B4-BE49-F238E27FC236}">
-                <a16:creationId xmlns:a16="http://schemas.microsoft.com/office/drawing/2014/main" id="{36F41434-DED3-461B-AA94-3D1DB30B8598}"/>
+                <a16:creationId xmlns:a16="http://schemas.microsoft.com/office/drawing/2014/main" id="{C6C9D189-F571-4306-99EE-929262D386AA}"/>
               </a:ext>
             </a:extLst>
           </p:cNvPr>
@@ -9924,7 +10252,7 @@
     </p:spTree>
     <p:extLst>
       <p:ext uri="{BB962C8B-B14F-4D97-AF65-F5344CB8AC3E}">
-        <p14:creationId xmlns:p14="http://schemas.microsoft.com/office/powerpoint/2010/main" val="1461805617"/>
+        <p14:creationId xmlns:p14="http://schemas.microsoft.com/office/powerpoint/2010/main" val="1294436450"/>
       </p:ext>
     </p:extLst>
   </p:cSld>
@@ -9955,7 +10283,7 @@
           <p:cNvPr id="26" name="兩條實驗性的結算分支">
             <a:extLst xmlns:a="http://schemas.openxmlformats.org/drawingml/2006/main">
               <a:ext uri="{FF2B5EF4-FFF2-40B4-BE49-F238E27FC236}">
-                <a16:creationId xmlns:a16="http://schemas.microsoft.com/office/drawing/2014/main" id="{72DC751B-69FC-4517-87D4-CA62CFCC0C43}"/>
+                <a16:creationId xmlns:a16="http://schemas.microsoft.com/office/drawing/2014/main" id="{9C389655-9F11-42A4-A01E-F8878E4860C9}"/>
               </a:ext>
             </a:extLst>
           </p:cNvPr>
@@ -10016,7 +10344,7 @@
           <p:nvPr/>
         </p:nvPicPr>
         <p:blipFill>
-          <a:blip xmlns:r="http://schemas.openxmlformats.org/officeDocument/2006/relationships" xmlns:a="http://schemas.openxmlformats.org/drawingml/2006/main" r:embed="R4b3e11c41ceb4798"/>
+          <a:blip xmlns:r="http://schemas.openxmlformats.org/officeDocument/2006/relationships" xmlns:a="http://schemas.openxmlformats.org/drawingml/2006/main" r:embed="Rffc9c0641b2449ec"/>
           <a:stretch xmlns:a="http://schemas.openxmlformats.org/drawingml/2006/main"/>
         </p:blipFill>
         <p:spPr>
@@ -10034,7 +10362,7 @@
           <p:cNvPr id="3" name="Vexi Hakari">
             <a:extLst xmlns:a="http://schemas.openxmlformats.org/drawingml/2006/main">
               <a:ext uri="{FF2B5EF4-FFF2-40B4-BE49-F238E27FC236}">
-                <a16:creationId xmlns:a16="http://schemas.microsoft.com/office/drawing/2014/main" id="{B5462CB5-34E3-4F89-AE3E-C380CAA649B2}"/>
+                <a16:creationId xmlns:a16="http://schemas.microsoft.com/office/drawing/2014/main" id="{D1999427-9F50-40D7-94CE-AE86EFF5561A}"/>
               </a:ext>
             </a:extLst>
           </p:cNvPr>
@@ -10091,7 +10419,7 @@
           <p:cNvPr id="4" name="A1">
             <a:extLst xmlns:a="http://schemas.openxmlformats.org/drawingml/2006/main">
               <a:ext uri="{FF2B5EF4-FFF2-40B4-BE49-F238E27FC236}">
-                <a16:creationId xmlns:a16="http://schemas.microsoft.com/office/drawing/2014/main" id="{FF6503D0-B99A-4488-ABF4-71AEBC52F968}"/>
+                <a16:creationId xmlns:a16="http://schemas.microsoft.com/office/drawing/2014/main" id="{6E985349-D796-45AC-B284-FB8F47AC6CF2}"/>
               </a:ext>
             </a:extLst>
           </p:cNvPr>
@@ -10148,7 +10476,7 @@
           <p:cNvPr id="5" name="延後接受">
             <a:extLst xmlns:a="http://schemas.openxmlformats.org/drawingml/2006/main">
               <a:ext uri="{FF2B5EF4-FFF2-40B4-BE49-F238E27FC236}">
-                <a16:creationId xmlns:a16="http://schemas.microsoft.com/office/drawing/2014/main" id="{6CDF8FA4-76F3-468B-B0DA-6334BAFF8319}"/>
+                <a16:creationId xmlns:a16="http://schemas.microsoft.com/office/drawing/2014/main" id="{102981AD-C679-4B6E-8334-13D6DC37B59D}"/>
               </a:ext>
             </a:extLst>
           </p:cNvPr>
@@ -10205,7 +10533,7 @@
           <p:cNvPr id="6" name="窗口 0&#10;拒絕">
             <a:extLst xmlns:a="http://schemas.openxmlformats.org/drawingml/2006/main">
               <a:ext uri="{FF2B5EF4-FFF2-40B4-BE49-F238E27FC236}">
-                <a16:creationId xmlns:a16="http://schemas.microsoft.com/office/drawing/2014/main" id="{9790CAFE-6F23-4350-8DE7-BCA1C0F83F9D}"/>
+                <a16:creationId xmlns:a16="http://schemas.microsoft.com/office/drawing/2014/main" id="{EED09B08-F47B-4501-8363-49BAF141F569}"/>
               </a:ext>
             </a:extLst>
           </p:cNvPr>
@@ -10289,7 +10617,7 @@
           <p:cNvPr id="7" name="窗口 1&#10;接受">
             <a:extLst xmlns:a="http://schemas.openxmlformats.org/drawingml/2006/main">
               <a:ext uri="{FF2B5EF4-FFF2-40B4-BE49-F238E27FC236}">
-                <a16:creationId xmlns:a16="http://schemas.microsoft.com/office/drawing/2014/main" id="{79E1FD8F-C43C-4F73-8D1C-769522FEB272}"/>
+                <a16:creationId xmlns:a16="http://schemas.microsoft.com/office/drawing/2014/main" id="{619732CF-7A91-431D-9D5B-50077453246F}"/>
               </a:ext>
             </a:extLst>
           </p:cNvPr>
@@ -10399,7 +10727,7 @@
           <p:cNvPr id="9" name="呼叫者於 5 分鐘後重試">
             <a:extLst xmlns:a="http://schemas.openxmlformats.org/drawingml/2006/main">
               <a:ext uri="{FF2B5EF4-FFF2-40B4-BE49-F238E27FC236}">
-                <a16:creationId xmlns:a16="http://schemas.microsoft.com/office/drawing/2014/main" id="{652BF295-2F76-4D62-B7F3-E8C7B7743248}"/>
+                <a16:creationId xmlns:a16="http://schemas.microsoft.com/office/drawing/2014/main" id="{38518217-C6E6-4698-9F82-F70DD8906D17}"/>
               </a:ext>
             </a:extLst>
           </p:cNvPr>
@@ -10456,7 +10784,7 @@
           <p:cNvPr id="10" name="">
             <a:extLst xmlns:a="http://schemas.openxmlformats.org/drawingml/2006/main">
               <a:ext uri="{FF2B5EF4-FFF2-40B4-BE49-F238E27FC236}">
-                <a16:creationId xmlns:a16="http://schemas.microsoft.com/office/drawing/2014/main" id="{75D8D203-F9EE-4BCE-87C3-E6D21B8C091B}"/>
+                <a16:creationId xmlns:a16="http://schemas.microsoft.com/office/drawing/2014/main" id="{FD3EC000-20BA-4D1D-9CB3-A2D6E1B0E962}"/>
               </a:ext>
             </a:extLst>
           </p:cNvPr>
@@ -10486,7 +10814,7 @@
           <p:cNvPr id="11" name="持續跳空">
             <a:extLst xmlns:a="http://schemas.openxmlformats.org/drawingml/2006/main">
               <a:ext uri="{FF2B5EF4-FFF2-40B4-BE49-F238E27FC236}">
-                <a16:creationId xmlns:a16="http://schemas.microsoft.com/office/drawing/2014/main" id="{3A342034-A05A-45F2-97D7-35B92A4D2C9A}"/>
+                <a16:creationId xmlns:a16="http://schemas.microsoft.com/office/drawing/2014/main" id="{48021CA3-59E2-4BED-AFAA-CF5916DAF0B6}"/>
               </a:ext>
             </a:extLst>
           </p:cNvPr>
@@ -10543,7 +10871,7 @@
           <p:cNvPr id="12" name="0">
             <a:extLst xmlns:a="http://schemas.openxmlformats.org/drawingml/2006/main">
               <a:ext uri="{FF2B5EF4-FFF2-40B4-BE49-F238E27FC236}">
-                <a16:creationId xmlns:a16="http://schemas.microsoft.com/office/drawing/2014/main" id="{1A8BB245-36E0-4C14-87C4-B48DF82FFA08}"/>
+                <a16:creationId xmlns:a16="http://schemas.microsoft.com/office/drawing/2014/main" id="{8FC1F94D-3E0C-4804-B93A-11441E7EB061}"/>
               </a:ext>
             </a:extLst>
           </p:cNvPr>
@@ -10604,7 +10932,7 @@
           <p:cNvPr id="13" name="1">
             <a:extLst xmlns:a="http://schemas.openxmlformats.org/drawingml/2006/main">
               <a:ext uri="{FF2B5EF4-FFF2-40B4-BE49-F238E27FC236}">
-                <a16:creationId xmlns:a16="http://schemas.microsoft.com/office/drawing/2014/main" id="{1A00594A-7F46-457E-B7C9-DFAD9E5D6B29}"/>
+                <a16:creationId xmlns:a16="http://schemas.microsoft.com/office/drawing/2014/main" id="{377E8C20-E8AC-4DE6-8340-8D76E5C12A58}"/>
               </a:ext>
             </a:extLst>
           </p:cNvPr>
@@ -10665,7 +10993,7 @@
           <p:cNvPr id="14" name="2">
             <a:extLst xmlns:a="http://schemas.openxmlformats.org/drawingml/2006/main">
               <a:ext uri="{FF2B5EF4-FFF2-40B4-BE49-F238E27FC236}">
-                <a16:creationId xmlns:a16="http://schemas.microsoft.com/office/drawing/2014/main" id="{AC47380C-AE6B-4412-B98B-787EE17D0E53}"/>
+                <a16:creationId xmlns:a16="http://schemas.microsoft.com/office/drawing/2014/main" id="{4A7CEF2E-8815-4027-B8CD-9EE1F1DF60C2}"/>
               </a:ext>
             </a:extLst>
           </p:cNvPr>
@@ -10726,7 +11054,7 @@
           <p:cNvPr id="15" name="3">
             <a:extLst xmlns:a="http://schemas.openxmlformats.org/drawingml/2006/main">
               <a:ext uri="{FF2B5EF4-FFF2-40B4-BE49-F238E27FC236}">
-                <a16:creationId xmlns:a16="http://schemas.microsoft.com/office/drawing/2014/main" id="{9BAEFE5B-8AC9-482A-B3C6-6EFBA2A54B1B}"/>
+                <a16:creationId xmlns:a16="http://schemas.microsoft.com/office/drawing/2014/main" id="{E14C5198-D0D7-4ABD-9837-1DF640FA24CF}"/>
               </a:ext>
             </a:extLst>
           </p:cNvPr>
@@ -10787,7 +11115,7 @@
           <p:cNvPr id="16" name="4">
             <a:extLst xmlns:a="http://schemas.openxmlformats.org/drawingml/2006/main">
               <a:ext uri="{FF2B5EF4-FFF2-40B4-BE49-F238E27FC236}">
-                <a16:creationId xmlns:a16="http://schemas.microsoft.com/office/drawing/2014/main" id="{15B7EAEA-6CD8-4DE2-ACF8-D78BF0EB8DC4}"/>
+                <a16:creationId xmlns:a16="http://schemas.microsoft.com/office/drawing/2014/main" id="{76781AA5-7004-4964-B61F-028409B3AE10}"/>
               </a:ext>
             </a:extLst>
           </p:cNvPr>
@@ -10848,7 +11176,7 @@
           <p:cNvPr id="17" name="5">
             <a:extLst xmlns:a="http://schemas.openxmlformats.org/drawingml/2006/main">
               <a:ext uri="{FF2B5EF4-FFF2-40B4-BE49-F238E27FC236}">
-                <a16:creationId xmlns:a16="http://schemas.microsoft.com/office/drawing/2014/main" id="{2577C6B8-3315-4A42-B439-2B9848E62187}"/>
+                <a16:creationId xmlns:a16="http://schemas.microsoft.com/office/drawing/2014/main" id="{4A1B4F3A-F024-412B-89A2-221C6EAD7202}"/>
               </a:ext>
             </a:extLst>
           </p:cNvPr>
@@ -11039,7 +11367,7 @@
           <p:cNvPr id="23" name="6 個候選窗口全部拒絕">
             <a:extLst xmlns:a="http://schemas.openxmlformats.org/drawingml/2006/main">
               <a:ext uri="{FF2B5EF4-FFF2-40B4-BE49-F238E27FC236}">
-                <a16:creationId xmlns:a16="http://schemas.microsoft.com/office/drawing/2014/main" id="{B9820B09-674C-414B-8B8E-CDB50DEA35E9}"/>
+                <a16:creationId xmlns:a16="http://schemas.microsoft.com/office/drawing/2014/main" id="{B03E071D-9D6C-4177-B3D1-4165EF362433}"/>
               </a:ext>
             </a:extLst>
           </p:cNvPr>
@@ -11096,7 +11424,7 @@
           <p:cNvPr id="24" name="1 小時寬限後：退回抵押品 + 權利金池退款">
             <a:extLst xmlns:a="http://schemas.openxmlformats.org/drawingml/2006/main">
               <a:ext uri="{FF2B5EF4-FFF2-40B4-BE49-F238E27FC236}">
-                <a16:creationId xmlns:a16="http://schemas.microsoft.com/office/drawing/2014/main" id="{1C524E20-FB36-484A-A05D-FBF06AA8E784}"/>
+                <a16:creationId xmlns:a16="http://schemas.microsoft.com/office/drawing/2014/main" id="{C98D4050-3A50-4F48-A8ED-CFE9CF474030}"/>
               </a:ext>
             </a:extLst>
           </p:cNvPr>
@@ -11153,7 +11481,7 @@
           <p:cNvPr id="25" name="較晚價格或退款會改變經濟結果，均不代表公平到期價">
             <a:extLst xmlns:a="http://schemas.openxmlformats.org/drawingml/2006/main">
               <a:ext uri="{FF2B5EF4-FFF2-40B4-BE49-F238E27FC236}">
-                <a16:creationId xmlns:a16="http://schemas.microsoft.com/office/drawing/2014/main" id="{5DB9D96B-039C-4C22-8E8F-ED2D62F93AA1}"/>
+                <a16:creationId xmlns:a16="http://schemas.microsoft.com/office/drawing/2014/main" id="{5AFDF837-E54B-44D1-BD4E-A23E5019BDF2}"/>
               </a:ext>
             </a:extLst>
           </p:cNvPr>
@@ -11208,7 +11536,7 @@
     </p:spTree>
     <p:extLst>
       <p:ext uri="{BB962C8B-B14F-4D97-AF65-F5344CB8AC3E}">
-        <p14:creationId xmlns:p14="http://schemas.microsoft.com/office/powerpoint/2010/main" val="1957761516"/>
+        <p14:creationId xmlns:p14="http://schemas.microsoft.com/office/powerpoint/2010/main" val="517253611"/>
       </p:ext>
     </p:extLst>
   </p:cSld>
@@ -11239,7 +11567,7 @@
           <p:cNvPr id="17" name="v4 整合的具體做法">
             <a:extLst xmlns:a="http://schemas.openxmlformats.org/drawingml/2006/main">
               <a:ext uri="{FF2B5EF4-FFF2-40B4-BE49-F238E27FC236}">
-                <a16:creationId xmlns:a16="http://schemas.microsoft.com/office/drawing/2014/main" id="{7B6BC6B3-A48A-49AA-AADA-E5249FD5BD5D}"/>
+                <a16:creationId xmlns:a16="http://schemas.microsoft.com/office/drawing/2014/main" id="{DFC10483-EF62-409E-B78D-04D224F8A2A4}"/>
               </a:ext>
             </a:extLst>
           </p:cNvPr>
@@ -11300,7 +11628,7 @@
           <p:nvPr/>
         </p:nvPicPr>
         <p:blipFill>
-          <a:blip xmlns:r="http://schemas.openxmlformats.org/officeDocument/2006/relationships" xmlns:a="http://schemas.openxmlformats.org/drawingml/2006/main" r:embed="Ra35e901abf554bbe"/>
+          <a:blip xmlns:r="http://schemas.openxmlformats.org/officeDocument/2006/relationships" xmlns:a="http://schemas.openxmlformats.org/drawingml/2006/main" r:embed="R25835ab46b1d4543"/>
           <a:stretch xmlns:a="http://schemas.openxmlformats.org/drawingml/2006/main"/>
         </p:blipFill>
         <p:spPr>
@@ -11318,7 +11646,7 @@
           <p:cNvPr id="3" name="Vexi Hakari">
             <a:extLst xmlns:a="http://schemas.openxmlformats.org/drawingml/2006/main">
               <a:ext uri="{FF2B5EF4-FFF2-40B4-BE49-F238E27FC236}">
-                <a16:creationId xmlns:a16="http://schemas.microsoft.com/office/drawing/2014/main" id="{54736D9C-A8AD-425A-98D2-9E51E54BB71B}"/>
+                <a16:creationId xmlns:a16="http://schemas.microsoft.com/office/drawing/2014/main" id="{7D587BE7-6770-47CE-9F8F-5C1A0A5F1B4B}"/>
               </a:ext>
             </a:extLst>
           </p:cNvPr>
@@ -11375,7 +11703,7 @@
           <p:cNvPr id="4" name="A2">
             <a:extLst xmlns:a="http://schemas.openxmlformats.org/drawingml/2006/main">
               <a:ext uri="{FF2B5EF4-FFF2-40B4-BE49-F238E27FC236}">
-                <a16:creationId xmlns:a16="http://schemas.microsoft.com/office/drawing/2014/main" id="{6A522F74-94C6-43EB-A70D-DF4BFD3ACE68}"/>
+                <a16:creationId xmlns:a16="http://schemas.microsoft.com/office/drawing/2014/main" id="{04F4E337-F4C1-4AE6-B521-1D53F2FA6F57}"/>
               </a:ext>
             </a:extLst>
           </p:cNvPr>
@@ -11432,7 +11760,7 @@
           <p:cNvPr id="5" name="Pool key">
             <a:extLst xmlns:a="http://schemas.openxmlformats.org/drawingml/2006/main">
               <a:ext uri="{FF2B5EF4-FFF2-40B4-BE49-F238E27FC236}">
-                <a16:creationId xmlns:a16="http://schemas.microsoft.com/office/drawing/2014/main" id="{910017AF-D05A-409B-94E5-274FAFE53C94}"/>
+                <a16:creationId xmlns:a16="http://schemas.microsoft.com/office/drawing/2014/main" id="{6A2DA664-C5D6-49C2-A2CA-1F54EE7C6B4A}"/>
               </a:ext>
             </a:extLst>
           </p:cNvPr>
@@ -11489,7 +11817,7 @@
           <p:cNvPr id="6" name="Hook 是池的身分">
             <a:extLst xmlns:a="http://schemas.openxmlformats.org/drawingml/2006/main">
               <a:ext uri="{FF2B5EF4-FFF2-40B4-BE49-F238E27FC236}">
-                <a16:creationId xmlns:a16="http://schemas.microsoft.com/office/drawing/2014/main" id="{EAC09D31-A5B4-4BDF-8B8E-002DE79C703A}"/>
+                <a16:creationId xmlns:a16="http://schemas.microsoft.com/office/drawing/2014/main" id="{1FC7136A-0429-48EE-A37A-CCB4823ED990}"/>
               </a:ext>
             </a:extLst>
           </p:cNvPr>
@@ -11546,7 +11874,7 @@
           <p:cNvPr id="7" name="需要自己的 hooked pool 與流動性">
             <a:extLst xmlns:a="http://schemas.openxmlformats.org/drawingml/2006/main">
               <a:ext uri="{FF2B5EF4-FFF2-40B4-BE49-F238E27FC236}">
-                <a16:creationId xmlns:a16="http://schemas.microsoft.com/office/drawing/2014/main" id="{637EA2BF-6ED4-4CAE-8430-A91055124075}"/>
+                <a16:creationId xmlns:a16="http://schemas.microsoft.com/office/drawing/2014/main" id="{DA5FA2EA-F9D2-4198-A976-75C46AEA0472}"/>
               </a:ext>
             </a:extLst>
           </p:cNvPr>
@@ -11603,7 +11931,7 @@
           <p:cNvPr id="8" name="">
             <a:extLst xmlns:a="http://schemas.openxmlformats.org/drawingml/2006/main">
               <a:ext uri="{FF2B5EF4-FFF2-40B4-BE49-F238E27FC236}">
-                <a16:creationId xmlns:a16="http://schemas.microsoft.com/office/drawing/2014/main" id="{3A2CCE6A-5140-461B-9CF4-70E454F79954}"/>
+                <a16:creationId xmlns:a16="http://schemas.microsoft.com/office/drawing/2014/main" id="{796B3747-4085-4408-8A98-FC5ED55DA003}"/>
               </a:ext>
             </a:extLst>
           </p:cNvPr>
@@ -11633,7 +11961,7 @@
           <p:cNvPr id="9" name="Address bits">
             <a:extLst xmlns:a="http://schemas.openxmlformats.org/drawingml/2006/main">
               <a:ext uri="{FF2B5EF4-FFF2-40B4-BE49-F238E27FC236}">
-                <a16:creationId xmlns:a16="http://schemas.microsoft.com/office/drawing/2014/main" id="{A57DBEB0-EAD6-44DD-8B76-1892CDCDF474}"/>
+                <a16:creationId xmlns:a16="http://schemas.microsoft.com/office/drawing/2014/main" id="{D318B5BF-883B-4F84-BFF6-A199F7C49204}"/>
               </a:ext>
             </a:extLst>
           </p:cNvPr>
@@ -11690,7 +12018,7 @@
           <p:cNvPr id="10" name="CREATE2 salt 搜尋">
             <a:extLst xmlns:a="http://schemas.openxmlformats.org/drawingml/2006/main">
               <a:ext uri="{FF2B5EF4-FFF2-40B4-BE49-F238E27FC236}">
-                <a16:creationId xmlns:a16="http://schemas.microsoft.com/office/drawing/2014/main" id="{C22E388C-1BD6-4C40-9538-B060FF8694A9}"/>
+                <a16:creationId xmlns:a16="http://schemas.microsoft.com/office/drawing/2014/main" id="{A17B924B-CBA6-4667-A3CE-084129C00F10}"/>
               </a:ext>
             </a:extLst>
           </p:cNvPr>
@@ -11747,7 +12075,7 @@
           <p:cNvPr id="11" name="地址位元對應 hook 權限">
             <a:extLst xmlns:a="http://schemas.openxmlformats.org/drawingml/2006/main">
               <a:ext uri="{FF2B5EF4-FFF2-40B4-BE49-F238E27FC236}">
-                <a16:creationId xmlns:a16="http://schemas.microsoft.com/office/drawing/2014/main" id="{20E1E686-D7DC-4153-B134-D3DD09119BD5}"/>
+                <a16:creationId xmlns:a16="http://schemas.microsoft.com/office/drawing/2014/main" id="{4948E130-6E35-42AF-952E-B50978FEF875}"/>
               </a:ext>
             </a:extLst>
           </p:cNvPr>
@@ -11804,7 +12132,7 @@
           <p:cNvPr id="12" name="">
             <a:extLst xmlns:a="http://schemas.openxmlformats.org/drawingml/2006/main">
               <a:ext uri="{FF2B5EF4-FFF2-40B4-BE49-F238E27FC236}">
-                <a16:creationId xmlns:a16="http://schemas.microsoft.com/office/drawing/2014/main" id="{E79D9FB1-9DD1-4CFB-8994-F605F6F23765}"/>
+                <a16:creationId xmlns:a16="http://schemas.microsoft.com/office/drawing/2014/main" id="{1A34A1D4-8709-4CD8-98B6-D5C9EFC8720A}"/>
               </a:ext>
             </a:extLst>
           </p:cNvPr>
@@ -11834,7 +12162,7 @@
           <p:cNvPr id="13" name="State + observe">
             <a:extLst xmlns:a="http://schemas.openxmlformats.org/drawingml/2006/main">
               <a:ext uri="{FF2B5EF4-FFF2-40B4-BE49-F238E27FC236}">
-                <a16:creationId xmlns:a16="http://schemas.microsoft.com/office/drawing/2014/main" id="{FADE28B9-DB62-4B01-9647-32723B274F6C}"/>
+                <a16:creationId xmlns:a16="http://schemas.microsoft.com/office/drawing/2014/main" id="{24D6A8BB-F097-4865-A8F6-6F3D74164533}"/>
               </a:ext>
             </a:extLst>
           </p:cNvPr>
@@ -11891,7 +12219,7 @@
           <p:cNvPr id="14" name="即時價與雙 TWAP">
             <a:extLst xmlns:a="http://schemas.openxmlformats.org/drawingml/2006/main">
               <a:ext uri="{FF2B5EF4-FFF2-40B4-BE49-F238E27FC236}">
-                <a16:creationId xmlns:a16="http://schemas.microsoft.com/office/drawing/2014/main" id="{CEC1A07B-D1E8-466F-BDE1-FC51E0ADDFBB}"/>
+                <a16:creationId xmlns:a16="http://schemas.microsoft.com/office/drawing/2014/main" id="{B171D97E-9E24-4F49-A750-30A92A78D30E}"/>
               </a:ext>
             </a:extLst>
           </p:cNvPr>
@@ -11948,7 +12276,7 @@
           <p:cNvPr id="15" name="StateLibrary 讀取 PoolManager 狀態">
             <a:extLst xmlns:a="http://schemas.openxmlformats.org/drawingml/2006/main">
               <a:ext uri="{FF2B5EF4-FFF2-40B4-BE49-F238E27FC236}">
-                <a16:creationId xmlns:a16="http://schemas.microsoft.com/office/drawing/2014/main" id="{64F91306-E71B-4794-8BE4-166C9F3855D8}"/>
+                <a16:creationId xmlns:a16="http://schemas.microsoft.com/office/drawing/2014/main" id="{74C07A52-78DA-4620-B47A-0CDB8BCCE6AD}"/>
               </a:ext>
             </a:extLst>
           </p:cNvPr>
@@ -12005,7 +12333,7 @@
           <p:cNvPr id="16" name="真實 PoolManager 上的新池；canonical Aqua 與 SwapVM 均未修改">
             <a:extLst xmlns:a="http://schemas.openxmlformats.org/drawingml/2006/main">
               <a:ext uri="{FF2B5EF4-FFF2-40B4-BE49-F238E27FC236}">
-                <a16:creationId xmlns:a16="http://schemas.microsoft.com/office/drawing/2014/main" id="{024A9B0A-7EA7-49CA-8849-DEA14AC4E9B9}"/>
+                <a16:creationId xmlns:a16="http://schemas.microsoft.com/office/drawing/2014/main" id="{F4B0C2CF-5882-4BED-B9A9-599B4E68EB6C}"/>
               </a:ext>
             </a:extLst>
           </p:cNvPr>
@@ -12060,7 +12388,7 @@
     </p:spTree>
     <p:extLst>
       <p:ext uri="{BB962C8B-B14F-4D97-AF65-F5344CB8AC3E}">
-        <p14:creationId xmlns:p14="http://schemas.microsoft.com/office/powerpoint/2010/main" val="1204589512"/>
+        <p14:creationId xmlns:p14="http://schemas.microsoft.com/office/powerpoint/2010/main" val="189764273"/>
       </p:ext>
     </p:extLst>
   </p:cSld>
@@ -12091,7 +12419,7 @@
           <p:cNvPr id="6" name="常見問題與適用限制">
             <a:extLst xmlns:a="http://schemas.openxmlformats.org/drawingml/2006/main">
               <a:ext uri="{FF2B5EF4-FFF2-40B4-BE49-F238E27FC236}">
-                <a16:creationId xmlns:a16="http://schemas.microsoft.com/office/drawing/2014/main" id="{1DBF66A3-5271-45B7-A6E3-9F743BEE30CA}"/>
+                <a16:creationId xmlns:a16="http://schemas.microsoft.com/office/drawing/2014/main" id="{3E1E2944-202D-431E-9D05-0318D48EB877}"/>
               </a:ext>
             </a:extLst>
           </p:cNvPr>
@@ -12152,7 +12480,7 @@
           <p:nvPr/>
         </p:nvPicPr>
         <p:blipFill>
-          <a:blip xmlns:r="http://schemas.openxmlformats.org/officeDocument/2006/relationships" xmlns:a="http://schemas.openxmlformats.org/drawingml/2006/main" r:embed="R4f796ef7b11f4156"/>
+          <a:blip xmlns:r="http://schemas.openxmlformats.org/officeDocument/2006/relationships" xmlns:a="http://schemas.openxmlformats.org/drawingml/2006/main" r:embed="R4dde317993d2488d"/>
           <a:stretch xmlns:a="http://schemas.openxmlformats.org/drawingml/2006/main"/>
         </p:blipFill>
         <p:spPr>
@@ -12170,7 +12498,7 @@
           <p:cNvPr id="3" name="Vexi Hakari">
             <a:extLst xmlns:a="http://schemas.openxmlformats.org/drawingml/2006/main">
               <a:ext uri="{FF2B5EF4-FFF2-40B4-BE49-F238E27FC236}">
-                <a16:creationId xmlns:a16="http://schemas.microsoft.com/office/drawing/2014/main" id="{96BF866A-4493-49B5-BE93-7FF8F1B874A5}"/>
+                <a16:creationId xmlns:a16="http://schemas.microsoft.com/office/drawing/2014/main" id="{26C1DA25-88F3-440F-9E0A-3325326CB471}"/>
               </a:ext>
             </a:extLst>
           </p:cNvPr>
@@ -12227,7 +12555,7 @@
           <p:cNvPr id="4" name="A3">
             <a:extLst xmlns:a="http://schemas.openxmlformats.org/drawingml/2006/main">
               <a:ext uri="{FF2B5EF4-FFF2-40B4-BE49-F238E27FC236}">
-                <a16:creationId xmlns:a16="http://schemas.microsoft.com/office/drawing/2014/main" id="{AAD30A4F-FC4A-4230-8499-A10CD89D3F33}"/>
+                <a16:creationId xmlns:a16="http://schemas.microsoft.com/office/drawing/2014/main" id="{EC29E782-656C-4BFC-956E-D03F621D590E}"/>
               </a:ext>
             </a:extLst>
           </p:cNvPr>
@@ -12628,7 +12956,7 @@
     </p:spTree>
     <p:extLst>
       <p:ext uri="{BB962C8B-B14F-4D97-AF65-F5344CB8AC3E}">
-        <p14:creationId xmlns:p14="http://schemas.microsoft.com/office/powerpoint/2010/main" val="1193474792"/>
+        <p14:creationId xmlns:p14="http://schemas.microsoft.com/office/powerpoint/2010/main" val="256342325"/>
       </p:ext>
     </p:extLst>
   </p:cSld>
@@ -12659,7 +12987,7 @@
           <p:cNvPr id="18" name="Vexi 與本次 hackathon 的範圍">
             <a:extLst xmlns:a="http://schemas.openxmlformats.org/drawingml/2006/main">
               <a:ext uri="{FF2B5EF4-FFF2-40B4-BE49-F238E27FC236}">
-                <a16:creationId xmlns:a16="http://schemas.microsoft.com/office/drawing/2014/main" id="{E2829A48-9654-47D7-A7C9-75EF31A0F4AF}"/>
+                <a16:creationId xmlns:a16="http://schemas.microsoft.com/office/drawing/2014/main" id="{0E842974-05FC-4EF3-9E78-8AF499A7CE13}"/>
               </a:ext>
             </a:extLst>
           </p:cNvPr>
@@ -12720,7 +13048,7 @@
           <p:nvPr/>
         </p:nvPicPr>
         <p:blipFill>
-          <a:blip xmlns:r="http://schemas.openxmlformats.org/officeDocument/2006/relationships" xmlns:a="http://schemas.openxmlformats.org/drawingml/2006/main" r:embed="Rf8a27311e41245e9"/>
+          <a:blip xmlns:r="http://schemas.openxmlformats.org/officeDocument/2006/relationships" xmlns:a="http://schemas.openxmlformats.org/drawingml/2006/main" r:embed="Rda0115b71b0842a6"/>
           <a:stretch xmlns:a="http://schemas.openxmlformats.org/drawingml/2006/main"/>
         </p:blipFill>
         <p:spPr>
@@ -12738,7 +13066,7 @@
           <p:cNvPr id="3" name="Vexi Hakari">
             <a:extLst xmlns:a="http://schemas.openxmlformats.org/drawingml/2006/main">
               <a:ext uri="{FF2B5EF4-FFF2-40B4-BE49-F238E27FC236}">
-                <a16:creationId xmlns:a16="http://schemas.microsoft.com/office/drawing/2014/main" id="{A1B1CCE5-A410-49ED-AA38-C645AE08897D}"/>
+                <a16:creationId xmlns:a16="http://schemas.microsoft.com/office/drawing/2014/main" id="{902F82E7-4E65-446B-BE61-5AA901FF941C}"/>
               </a:ext>
             </a:extLst>
           </p:cNvPr>
@@ -12795,7 +13123,7 @@
           <p:cNvPr id="4" name="A4">
             <a:extLst xmlns:a="http://schemas.openxmlformats.org/drawingml/2006/main">
               <a:ext uri="{FF2B5EF4-FFF2-40B4-BE49-F238E27FC236}">
-                <a16:creationId xmlns:a16="http://schemas.microsoft.com/office/drawing/2014/main" id="{0153EFA9-C13B-467F-B0DE-3839C48501FF}"/>
+                <a16:creationId xmlns:a16="http://schemas.microsoft.com/office/drawing/2014/main" id="{650E3DA0-C5D3-4CAF-A2F4-D35A3686B638}"/>
               </a:ext>
             </a:extLst>
           </p:cNvPr>
@@ -12852,7 +13180,7 @@
           <p:cNvPr id="5" name="活動前">
             <a:extLst xmlns:a="http://schemas.openxmlformats.org/drawingml/2006/main">
               <a:ext uri="{FF2B5EF4-FFF2-40B4-BE49-F238E27FC236}">
-                <a16:creationId xmlns:a16="http://schemas.microsoft.com/office/drawing/2014/main" id="{9DF0A46D-CF34-4B2B-811A-52CC6057FFF2}"/>
+                <a16:creationId xmlns:a16="http://schemas.microsoft.com/office/drawing/2014/main" id="{E4DD756C-93B8-4F24-B1CC-EFB07F7AAF63}"/>
               </a:ext>
             </a:extLst>
           </p:cNvPr>
@@ -12909,7 +13237,7 @@
           <p:cNvPr id="6" name="Vexi 選擇權平台／私有產品程式">
             <a:extLst xmlns:a="http://schemas.openxmlformats.org/drawingml/2006/main">
               <a:ext uri="{FF2B5EF4-FFF2-40B4-BE49-F238E27FC236}">
-                <a16:creationId xmlns:a16="http://schemas.microsoft.com/office/drawing/2014/main" id="{EF490E07-BE22-4D92-859F-8DE1A5C5D233}"/>
+                <a16:creationId xmlns:a16="http://schemas.microsoft.com/office/drawing/2014/main" id="{4AF6DBA6-AA67-4CDD-BD13-94D6A49E146C}"/>
               </a:ext>
             </a:extLst>
           </p:cNvPr>
@@ -12966,7 +13294,7 @@
           <p:cNvPr id="7" name="">
             <a:extLst xmlns:a="http://schemas.openxmlformats.org/drawingml/2006/main">
               <a:ext uri="{FF2B5EF4-FFF2-40B4-BE49-F238E27FC236}">
-                <a16:creationId xmlns:a16="http://schemas.microsoft.com/office/drawing/2014/main" id="{45342339-C7D5-4958-AB4A-74F20C56ACA0}"/>
+                <a16:creationId xmlns:a16="http://schemas.microsoft.com/office/drawing/2014/main" id="{AA94CCCE-21E7-4068-A01F-9EFFAA1688B4}"/>
               </a:ext>
             </a:extLst>
           </p:cNvPr>
@@ -12996,7 +13324,7 @@
           <p:cNvPr id="8" name="09/25 22:26">
             <a:extLst xmlns:a="http://schemas.openxmlformats.org/drawingml/2006/main">
               <a:ext uri="{FF2B5EF4-FFF2-40B4-BE49-F238E27FC236}">
-                <a16:creationId xmlns:a16="http://schemas.microsoft.com/office/drawing/2014/main" id="{673B0977-EE66-40FA-A636-BE49DA401ECB}"/>
+                <a16:creationId xmlns:a16="http://schemas.microsoft.com/office/drawing/2014/main" id="{B3225E3A-806E-443B-A8AB-2E83E964FC91}"/>
               </a:ext>
             </a:extLst>
           </p:cNvPr>
@@ -13053,7 +13381,7 @@
           <p:cNvPr id="9" name="AquaWriter + book">
             <a:extLst xmlns:a="http://schemas.openxmlformats.org/drawingml/2006/main">
               <a:ext uri="{FF2B5EF4-FFF2-40B4-BE49-F238E27FC236}">
-                <a16:creationId xmlns:a16="http://schemas.microsoft.com/office/drawing/2014/main" id="{A5B6C835-5647-46C8-B6B3-E17FB2DE62B9}"/>
+                <a16:creationId xmlns:a16="http://schemas.microsoft.com/office/drawing/2014/main" id="{3867CEB4-D3B9-4BDE-B43E-72F51B4A1911}"/>
               </a:ext>
             </a:extLst>
           </p:cNvPr>
@@ -13110,7 +13438,7 @@
           <p:cNvPr id="10" name="09/25 23:39">
             <a:extLst xmlns:a="http://schemas.openxmlformats.org/drawingml/2006/main">
               <a:ext uri="{FF2B5EF4-FFF2-40B4-BE49-F238E27FC236}">
-                <a16:creationId xmlns:a16="http://schemas.microsoft.com/office/drawing/2014/main" id="{44A99CFB-BBE4-453B-B613-17DCC7673288}"/>
+                <a16:creationId xmlns:a16="http://schemas.microsoft.com/office/drawing/2014/main" id="{5A05E419-2FC9-4B2E-A19F-922C44209851}"/>
               </a:ext>
             </a:extLst>
           </p:cNvPr>
@@ -13167,7 +13495,7 @@
           <p:cNvPr id="11" name="Hook 部署">
             <a:extLst xmlns:a="http://schemas.openxmlformats.org/drawingml/2006/main">
               <a:ext uri="{FF2B5EF4-FFF2-40B4-BE49-F238E27FC236}">
-                <a16:creationId xmlns:a16="http://schemas.microsoft.com/office/drawing/2014/main" id="{7EAF0D36-8C81-431C-81DD-1237B178B7E8}"/>
+                <a16:creationId xmlns:a16="http://schemas.microsoft.com/office/drawing/2014/main" id="{942D2781-177E-4002-AF30-7E4A2BC721DE}"/>
               </a:ext>
             </a:extLst>
           </p:cNvPr>
@@ -13224,7 +13552,7 @@
           <p:cNvPr id="12" name="09/27 01:53">
             <a:extLst xmlns:a="http://schemas.openxmlformats.org/drawingml/2006/main">
               <a:ext uri="{FF2B5EF4-FFF2-40B4-BE49-F238E27FC236}">
-                <a16:creationId xmlns:a16="http://schemas.microsoft.com/office/drawing/2014/main" id="{7EDA2770-8679-4019-9993-30D3AFFD2AD1}"/>
+                <a16:creationId xmlns:a16="http://schemas.microsoft.com/office/drawing/2014/main" id="{F8E7176E-47E0-4A7B-B96B-BB01C0B8B7E9}"/>
               </a:ext>
             </a:extLst>
           </p:cNvPr>
@@ -13281,7 +13609,7 @@
           <p:cNvPr id="13" name="Hooked pool">
             <a:extLst xmlns:a="http://schemas.openxmlformats.org/drawingml/2006/main">
               <a:ext uri="{FF2B5EF4-FFF2-40B4-BE49-F238E27FC236}">
-                <a16:creationId xmlns:a16="http://schemas.microsoft.com/office/drawing/2014/main" id="{308EF233-7DC1-4BE2-9960-A7512CFECC86}"/>
+                <a16:creationId xmlns:a16="http://schemas.microsoft.com/office/drawing/2014/main" id="{D3036375-8EC4-4449-8FDD-00774344AF39}"/>
               </a:ext>
             </a:extLst>
           </p:cNvPr>
@@ -13338,7 +13666,7 @@
           <p:cNvPr id="14" name="09/27 02:32">
             <a:extLst xmlns:a="http://schemas.openxmlformats.org/drawingml/2006/main">
               <a:ext uri="{FF2B5EF4-FFF2-40B4-BE49-F238E27FC236}">
-                <a16:creationId xmlns:a16="http://schemas.microsoft.com/office/drawing/2014/main" id="{77655A53-A5FF-48AD-9211-FF9FAF7B8B5C}"/>
+                <a16:creationId xmlns:a16="http://schemas.microsoft.com/office/drawing/2014/main" id="{99414B67-3414-4D3B-83FA-CEBF915F1A29}"/>
               </a:ext>
             </a:extLst>
           </p:cNvPr>
@@ -13395,7 +13723,7 @@
           <p:cNvPr id="15" name="Band + 結算">
             <a:extLst xmlns:a="http://schemas.openxmlformats.org/drawingml/2006/main">
               <a:ext uri="{FF2B5EF4-FFF2-40B4-BE49-F238E27FC236}">
-                <a16:creationId xmlns:a16="http://schemas.microsoft.com/office/drawing/2014/main" id="{F7D9E813-874B-4211-ADBD-9C1CD2EC06EB}"/>
+                <a16:creationId xmlns:a16="http://schemas.microsoft.com/office/drawing/2014/main" id="{A26455B3-DAC6-4156-B297-6C0047A5A397}"/>
               </a:ext>
             </a:extLst>
           </p:cNvPr>
@@ -13452,7 +13780,7 @@
           <p:cNvPr id="16" name="公開抽出：小型 book + FixedPremium">
             <a:extLst xmlns:a="http://schemas.openxmlformats.org/drawingml/2006/main">
               <a:ext uri="{FF2B5EF4-FFF2-40B4-BE49-F238E27FC236}">
-                <a16:creationId xmlns:a16="http://schemas.microsoft.com/office/drawing/2014/main" id="{9A156900-A74E-44D9-9638-19E508A2F765}"/>
+                <a16:creationId xmlns:a16="http://schemas.microsoft.com/office/drawing/2014/main" id="{7076AD9B-8C6C-4712-8791-FB01EEF8C6DF}"/>
               </a:ext>
             </a:extLst>
           </p:cNvPr>
@@ -13509,7 +13837,7 @@
           <p:cNvPr id="17" name="活動期間新增，時間為 JST；私有產品定價不在公開範圍">
             <a:extLst xmlns:a="http://schemas.openxmlformats.org/drawingml/2006/main">
               <a:ext uri="{FF2B5EF4-FFF2-40B4-BE49-F238E27FC236}">
-                <a16:creationId xmlns:a16="http://schemas.microsoft.com/office/drawing/2014/main" id="{F8D490A4-FF09-4241-85D3-377118113621}"/>
+                <a16:creationId xmlns:a16="http://schemas.microsoft.com/office/drawing/2014/main" id="{9E279DA2-3B6D-44AC-99FA-C24D8187A6A1}"/>
               </a:ext>
             </a:extLst>
           </p:cNvPr>
@@ -13564,7 +13892,7 @@
     </p:spTree>
     <p:extLst>
       <p:ext uri="{BB962C8B-B14F-4D97-AF65-F5344CB8AC3E}">
-        <p14:creationId xmlns:p14="http://schemas.microsoft.com/office/powerpoint/2010/main" val="33855237"/>
+        <p14:creationId xmlns:p14="http://schemas.microsoft.com/office/powerpoint/2010/main" val="164631579"/>
       </p:ext>
     </p:extLst>
   </p:cSld>
@@ -13595,7 +13923,7 @@
           <p:cNvPr id="11" name="歷史動機：HIMS 案例">
             <a:extLst xmlns:a="http://schemas.openxmlformats.org/drawingml/2006/main">
               <a:ext uri="{FF2B5EF4-FFF2-40B4-BE49-F238E27FC236}">
-                <a16:creationId xmlns:a16="http://schemas.microsoft.com/office/drawing/2014/main" id="{9CF7455A-6D1A-4CBF-9753-97E89804C144}"/>
+                <a16:creationId xmlns:a16="http://schemas.microsoft.com/office/drawing/2014/main" id="{3592FAAE-18D5-4CB4-9AD1-9B402873513A}"/>
               </a:ext>
             </a:extLst>
           </p:cNvPr>
@@ -13656,7 +13984,7 @@
           <p:nvPr/>
         </p:nvPicPr>
         <p:blipFill>
-          <a:blip xmlns:r="http://schemas.openxmlformats.org/officeDocument/2006/relationships" xmlns:a="http://schemas.openxmlformats.org/drawingml/2006/main" r:embed="R4bc47f1d95d84f70"/>
+          <a:blip xmlns:r="http://schemas.openxmlformats.org/officeDocument/2006/relationships" xmlns:a="http://schemas.openxmlformats.org/drawingml/2006/main" r:embed="R03944e2290924eb3"/>
           <a:stretch xmlns:a="http://schemas.openxmlformats.org/drawingml/2006/main"/>
         </p:blipFill>
         <p:spPr>
@@ -13674,7 +14002,7 @@
           <p:cNvPr id="3" name="Vexi Hakari">
             <a:extLst xmlns:a="http://schemas.openxmlformats.org/drawingml/2006/main">
               <a:ext uri="{FF2B5EF4-FFF2-40B4-BE49-F238E27FC236}">
-                <a16:creationId xmlns:a16="http://schemas.microsoft.com/office/drawing/2014/main" id="{6F1A9CC5-A403-4524-8B15-2BE10F9AAC06}"/>
+                <a16:creationId xmlns:a16="http://schemas.microsoft.com/office/drawing/2014/main" id="{31F72E15-0978-4946-9623-E274895333B0}"/>
               </a:ext>
             </a:extLst>
           </p:cNvPr>
@@ -13731,7 +14059,7 @@
           <p:cNvPr id="4" name="A5">
             <a:extLst xmlns:a="http://schemas.openxmlformats.org/drawingml/2006/main">
               <a:ext uri="{FF2B5EF4-FFF2-40B4-BE49-F238E27FC236}">
-                <a16:creationId xmlns:a16="http://schemas.microsoft.com/office/drawing/2014/main" id="{BFEEB171-E0C9-48DB-BB59-C1EFB3E6B402}"/>
+                <a16:creationId xmlns:a16="http://schemas.microsoft.com/office/drawing/2014/main" id="{636CEDB6-7B31-4A2F-BBC1-0697C61586E1}"/>
               </a:ext>
             </a:extLst>
           </p:cNvPr>
@@ -13788,7 +14116,7 @@
           <p:cNvPr id="5" name="2026-08-30 週末研究">
             <a:extLst xmlns:a="http://schemas.openxmlformats.org/drawingml/2006/main">
               <a:ext uri="{FF2B5EF4-FFF2-40B4-BE49-F238E27FC236}">
-                <a16:creationId xmlns:a16="http://schemas.microsoft.com/office/drawing/2014/main" id="{32E41EF4-CCF8-49A3-BA86-68D9E85E40C5}"/>
+                <a16:creationId xmlns:a16="http://schemas.microsoft.com/office/drawing/2014/main" id="{70F3F38A-DC44-452C-88DA-DAA9F42DE319}"/>
               </a:ext>
             </a:extLst>
           </p:cNvPr>
@@ -13852,7 +14180,7 @@
         </p:xfrm>
         <a:graphic xmlns:a="http://schemas.openxmlformats.org/drawingml/2006/main">
           <a:graphicData uri="http://schemas.openxmlformats.org/drawingml/2006/chart">
-            <c:chart xmlns:r="http://schemas.openxmlformats.org/officeDocument/2006/relationships" xmlns:c="http://schemas.openxmlformats.org/drawingml/2006/chart" r:id="R1ab9e68792cc476d"/>
+            <c:chart xmlns:r="http://schemas.openxmlformats.org/officeDocument/2006/relationships" xmlns:c="http://schemas.openxmlformats.org/drawingml/2006/chart" r:id="R6880c07d2c984df2"/>
           </a:graphicData>
         </a:graphic>
       </p:graphicFrame>
@@ -13861,7 +14189,7 @@
           <p:cNvPr id="7" name="12 USDG">
             <a:extLst xmlns:a="http://schemas.openxmlformats.org/drawingml/2006/main">
               <a:ext uri="{FF2B5EF4-FFF2-40B4-BE49-F238E27FC236}">
-                <a16:creationId xmlns:a16="http://schemas.microsoft.com/office/drawing/2014/main" id="{F2C8D38B-4759-43AD-BAB5-4E54AE71251B}"/>
+                <a16:creationId xmlns:a16="http://schemas.microsoft.com/office/drawing/2014/main" id="{42EF90D0-3B94-4C59-B40A-17329B94B657}"/>
               </a:ext>
             </a:extLst>
           </p:cNvPr>
@@ -13918,7 +14246,7 @@
           <p:cNvPr id="8" name="估算來回費用">
             <a:extLst xmlns:a="http://schemas.openxmlformats.org/drawingml/2006/main">
               <a:ext uri="{FF2B5EF4-FFF2-40B4-BE49-F238E27FC236}">
-                <a16:creationId xmlns:a16="http://schemas.microsoft.com/office/drawing/2014/main" id="{F0655497-A214-4B1E-A0BB-166C73801BEB}"/>
+                <a16:creationId xmlns:a16="http://schemas.microsoft.com/office/drawing/2014/main" id="{EBACCD81-153B-4A6B-84A7-503D3D1639B5}"/>
               </a:ext>
             </a:extLst>
           </p:cNvPr>
@@ -13975,7 +14303,7 @@
           <p:cNvPr id="9" name="推價 10%，另一時點">
             <a:extLst xmlns:a="http://schemas.openxmlformats.org/drawingml/2006/main">
               <a:ext uri="{FF2B5EF4-FFF2-40B4-BE49-F238E27FC236}">
-                <a16:creationId xmlns:a16="http://schemas.microsoft.com/office/drawing/2014/main" id="{A8F55F33-7CC2-4258-B0B5-B2B952A853F4}"/>
+                <a16:creationId xmlns:a16="http://schemas.microsoft.com/office/drawing/2014/main" id="{2E576F0F-F983-4BB2-84F0-1D2BBDAF1094}"/>
               </a:ext>
             </a:extLst>
           </p:cNvPr>
@@ -14032,7 +14360,7 @@
           <p:cNvPr id="10" name="不同時點；這是歷史動機，並非 band 曾阻止事件的證據">
             <a:extLst xmlns:a="http://schemas.openxmlformats.org/drawingml/2006/main">
               <a:ext uri="{FF2B5EF4-FFF2-40B4-BE49-F238E27FC236}">
-                <a16:creationId xmlns:a16="http://schemas.microsoft.com/office/drawing/2014/main" id="{5B31A450-D046-4DF2-A135-405870F44705}"/>
+                <a16:creationId xmlns:a16="http://schemas.microsoft.com/office/drawing/2014/main" id="{A17A30A1-CAD6-4B51-BF94-F326E53D2DD7}"/>
               </a:ext>
             </a:extLst>
           </p:cNvPr>
@@ -14087,7 +14415,7 @@
     </p:spTree>
     <p:extLst>
       <p:ext uri="{BB962C8B-B14F-4D97-AF65-F5344CB8AC3E}">
-        <p14:creationId xmlns:p14="http://schemas.microsoft.com/office/powerpoint/2010/main" val="1126530315"/>
+        <p14:creationId xmlns:p14="http://schemas.microsoft.com/office/powerpoint/2010/main" val="301531182"/>
       </p:ext>
     </p:extLst>
   </p:cSld>
@@ -14115,10 +14443,10 @@
       </p:grpSpPr>
       <p:sp>
         <p:nvSpPr>
-          <p:cNvPr id="16" name="Covered call 與 cash-secured put">
-            <a:extLst xmlns:a="http://schemas.openxmlformats.org/drawingml/2006/main">
-              <a:ext uri="{FF2B5EF4-FFF2-40B4-BE49-F238E27FC236}">
-                <a16:creationId xmlns:a16="http://schemas.microsoft.com/office/drawing/2014/main" id="{B7F411F4-8904-4B92-AA72-FDB472832A60}"/>
+          <p:cNvPr id="17" name="Covered call 與 cash-secured put">
+            <a:extLst xmlns:a="http://schemas.openxmlformats.org/drawingml/2006/main">
+              <a:ext uri="{FF2B5EF4-FFF2-40B4-BE49-F238E27FC236}">
+                <a16:creationId xmlns:a16="http://schemas.microsoft.com/office/drawing/2014/main" id="{ADA18500-A0CA-4299-B19B-C705D3C4507D}"/>
               </a:ext>
             </a:extLst>
           </p:cNvPr>
@@ -14172,14 +14500,14 @@
       </p:sp>
       <p:pic>
         <p:nvPicPr>
-          <p:cNvPr id="17" name=""/>
+          <p:cNvPr id="18" name=""/>
           <p:cNvPicPr>
             <a:picLocks xmlns:a="http://schemas.openxmlformats.org/drawingml/2006/main" noChangeAspect="1"/>
           </p:cNvPicPr>
           <p:nvPr/>
         </p:nvPicPr>
         <p:blipFill>
-          <a:blip xmlns:r="http://schemas.openxmlformats.org/officeDocument/2006/relationships" xmlns:a="http://schemas.openxmlformats.org/drawingml/2006/main" r:embed="R235bfe73c148424e"/>
+          <a:blip xmlns:r="http://schemas.openxmlformats.org/officeDocument/2006/relationships" xmlns:a="http://schemas.openxmlformats.org/drawingml/2006/main" r:embed="R6f7c15eaf7c34a05"/>
           <a:stretch xmlns:a="http://schemas.openxmlformats.org/drawingml/2006/main"/>
         </p:blipFill>
         <p:spPr>
@@ -14197,7 +14525,7 @@
           <p:cNvPr id="3" name="Vexi Hakari">
             <a:extLst xmlns:a="http://schemas.openxmlformats.org/drawingml/2006/main">
               <a:ext uri="{FF2B5EF4-FFF2-40B4-BE49-F238E27FC236}">
-                <a16:creationId xmlns:a16="http://schemas.microsoft.com/office/drawing/2014/main" id="{72A524B2-1844-4E98-B25D-C3726165B601}"/>
+                <a16:creationId xmlns:a16="http://schemas.microsoft.com/office/drawing/2014/main" id="{D5D3742F-DC7A-473C-9007-8512B1428BF4}"/>
               </a:ext>
             </a:extLst>
           </p:cNvPr>
@@ -14251,22 +14579,22 @@
       </p:sp>
       <p:sp>
         <p:nvSpPr>
-          <p:cNvPr id="4" name="2">
-            <a:extLst xmlns:a="http://schemas.openxmlformats.org/drawingml/2006/main">
-              <a:ext uri="{FF2B5EF4-FFF2-40B4-BE49-F238E27FC236}">
-                <a16:creationId xmlns:a16="http://schemas.microsoft.com/office/drawing/2014/main" id="{29A829A0-6249-40BD-B016-BB56535F9AC5}"/>
-              </a:ext>
-            </a:extLst>
-          </p:cNvPr>
-          <p:cNvSpPr>
-            <a:spLocks xmlns:a="http://schemas.openxmlformats.org/drawingml/2006/main" noGrp="1"/>
-          </p:cNvSpPr>
-          <p:nvPr/>
-        </p:nvSpPr>
-        <p:spPr>
-          <a:xfrm xmlns:a="http://schemas.openxmlformats.org/drawingml/2006/main">
-            <a:off x="11001375" y="6153150"/>
-            <a:ext cx="619125" cy="342900"/>
+          <p:cNvPr id="4" name="AAPL 範例／示意數值">
+            <a:extLst xmlns:a="http://schemas.openxmlformats.org/drawingml/2006/main">
+              <a:ext uri="{FF2B5EF4-FFF2-40B4-BE49-F238E27FC236}">
+                <a16:creationId xmlns:a16="http://schemas.microsoft.com/office/drawing/2014/main" id="{47DDA7AC-3C3B-46D3-9DD3-29112661FB1D}"/>
+              </a:ext>
+            </a:extLst>
+          </p:cNvPr>
+          <p:cNvSpPr>
+            <a:spLocks xmlns:a="http://schemas.openxmlformats.org/drawingml/2006/main" noGrp="1"/>
+          </p:cNvSpPr>
+          <p:nvPr/>
+        </p:nvSpPr>
+        <p:spPr>
+          <a:xfrm xmlns:a="http://schemas.openxmlformats.org/drawingml/2006/main">
+            <a:off x="3905250" y="6153150"/>
+            <a:ext cx="6667500" cy="342900"/>
           </a:xfrm>
           <a:prstGeom xmlns:a="http://schemas.openxmlformats.org/drawingml/2006/main" prst="rect">
             <a:avLst/>
@@ -14282,7 +14610,7 @@
           </a:bodyPr>
           <a:lstStyle xmlns:a="http://schemas.openxmlformats.org/drawingml/2006/main"/>
           <a:p xmlns:a="http://schemas.openxmlformats.org/drawingml/2006/main">
-            <a:pPr algn="r">
+            <a:pPr algn="l">
               <a:defRPr sz="1275" b="0">
                 <a:solidFill>
                   <a:srgbClr val="A8A8B2"/>
@@ -14301,29 +14629,29 @@
                 <a:ea typeface="Arial Unicode MS"/>
                 <a:cs typeface="Arial Unicode MS"/>
               </a:rPr>
-              <a:t>2</a:t>
-            </a:r>
-          </a:p>
-        </p:txBody>
-      </p:sp>
-      <p:sp>
-        <p:nvSpPr>
-          <p:cNvPr id="5" name="1 TSLA">
-            <a:extLst xmlns:a="http://schemas.openxmlformats.org/drawingml/2006/main">
-              <a:ext uri="{FF2B5EF4-FFF2-40B4-BE49-F238E27FC236}">
-                <a16:creationId xmlns:a16="http://schemas.microsoft.com/office/drawing/2014/main" id="{F24798BB-1F95-49A3-BF3B-1E5BC8D02F9B}"/>
-              </a:ext>
-            </a:extLst>
-          </p:cNvPr>
-          <p:cNvSpPr>
-            <a:spLocks xmlns:a="http://schemas.openxmlformats.org/drawingml/2006/main" noGrp="1"/>
-          </p:cNvSpPr>
-          <p:nvPr/>
-        </p:nvSpPr>
-        <p:spPr>
-          <a:xfrm xmlns:a="http://schemas.openxmlformats.org/drawingml/2006/main">
-            <a:off x="666750" y="1533525"/>
-            <a:ext cx="3429000" cy="600075"/>
+              <a:t>AAPL 範例／示意數值</a:t>
+            </a:r>
+          </a:p>
+        </p:txBody>
+      </p:sp>
+      <p:sp>
+        <p:nvSpPr>
+          <p:cNvPr id="5" name="2">
+            <a:extLst xmlns:a="http://schemas.openxmlformats.org/drawingml/2006/main">
+              <a:ext uri="{FF2B5EF4-FFF2-40B4-BE49-F238E27FC236}">
+                <a16:creationId xmlns:a16="http://schemas.microsoft.com/office/drawing/2014/main" id="{DD9594D8-7C84-4DA3-8BC1-984103A97C09}"/>
+              </a:ext>
+            </a:extLst>
+          </p:cNvPr>
+          <p:cNvSpPr>
+            <a:spLocks xmlns:a="http://schemas.openxmlformats.org/drawingml/2006/main" noGrp="1"/>
+          </p:cNvSpPr>
+          <p:nvPr/>
+        </p:nvSpPr>
+        <p:spPr>
+          <a:xfrm xmlns:a="http://schemas.openxmlformats.org/drawingml/2006/main">
+            <a:off x="11001375" y="6153150"/>
+            <a:ext cx="619125" cy="342900"/>
           </a:xfrm>
           <a:prstGeom xmlns:a="http://schemas.openxmlformats.org/drawingml/2006/main" prst="rect">
             <a:avLst/>
@@ -14339,48 +14667,48 @@
           </a:bodyPr>
           <a:lstStyle xmlns:a="http://schemas.openxmlformats.org/drawingml/2006/main"/>
           <a:p xmlns:a="http://schemas.openxmlformats.org/drawingml/2006/main">
-            <a:pPr algn="l">
-              <a:defRPr sz="3525" b="1">
-                <a:solidFill>
-                  <a:srgbClr val="37D67A"/>
-                </a:solidFill>
-                <a:latin typeface="Arial Unicode MS"/>
-                <a:ea typeface="Arial Unicode MS"/>
-                <a:cs typeface="Arial Unicode MS"/>
-              </a:defRPr>
-            </a:pPr>
-            <a:r>
-              <a:rPr sz="3525" b="1">
-                <a:solidFill>
-                  <a:srgbClr val="37D67A"/>
-                </a:solidFill>
-                <a:latin typeface="Arial Unicode MS"/>
-                <a:ea typeface="Arial Unicode MS"/>
-                <a:cs typeface="Arial Unicode MS"/>
-              </a:rPr>
-              <a:t>1 TSLA</a:t>
-            </a:r>
-          </a:p>
-        </p:txBody>
-      </p:sp>
-      <p:sp>
-        <p:nvSpPr>
-          <p:cNvPr id="6" name="履約價 400 USDG">
-            <a:extLst xmlns:a="http://schemas.openxmlformats.org/drawingml/2006/main">
-              <a:ext uri="{FF2B5EF4-FFF2-40B4-BE49-F238E27FC236}">
-                <a16:creationId xmlns:a16="http://schemas.microsoft.com/office/drawing/2014/main" id="{1CC4FD22-84DF-4836-888D-E8F8E7404980}"/>
-              </a:ext>
-            </a:extLst>
-          </p:cNvPr>
-          <p:cNvSpPr>
-            <a:spLocks xmlns:a="http://schemas.openxmlformats.org/drawingml/2006/main" noGrp="1"/>
-          </p:cNvSpPr>
-          <p:nvPr/>
-        </p:nvSpPr>
-        <p:spPr>
-          <a:xfrm xmlns:a="http://schemas.openxmlformats.org/drawingml/2006/main">
-            <a:off x="4419600" y="1571625"/>
-            <a:ext cx="6572250" cy="561975"/>
+            <a:pPr algn="r">
+              <a:defRPr sz="1275" b="0">
+                <a:solidFill>
+                  <a:srgbClr val="A8A8B2"/>
+                </a:solidFill>
+                <a:latin typeface="Arial Unicode MS"/>
+                <a:ea typeface="Arial Unicode MS"/>
+                <a:cs typeface="Arial Unicode MS"/>
+              </a:defRPr>
+            </a:pPr>
+            <a:r>
+              <a:rPr sz="1275" b="0">
+                <a:solidFill>
+                  <a:srgbClr val="A8A8B2"/>
+                </a:solidFill>
+                <a:latin typeface="Arial Unicode MS"/>
+                <a:ea typeface="Arial Unicode MS"/>
+                <a:cs typeface="Arial Unicode MS"/>
+              </a:rPr>
+              <a:t>2</a:t>
+            </a:r>
+          </a:p>
+        </p:txBody>
+      </p:sp>
+      <p:sp>
+        <p:nvSpPr>
+          <p:cNvPr id="6" name="1 AAPL">
+            <a:extLst xmlns:a="http://schemas.openxmlformats.org/drawingml/2006/main">
+              <a:ext uri="{FF2B5EF4-FFF2-40B4-BE49-F238E27FC236}">
+                <a16:creationId xmlns:a16="http://schemas.microsoft.com/office/drawing/2014/main" id="{DCDBF43A-A645-4AB8-9EE6-937EAD843E74}"/>
+              </a:ext>
+            </a:extLst>
+          </p:cNvPr>
+          <p:cNvSpPr>
+            <a:spLocks xmlns:a="http://schemas.openxmlformats.org/drawingml/2006/main" noGrp="1"/>
+          </p:cNvSpPr>
+          <p:nvPr/>
+        </p:nvSpPr>
+        <p:spPr>
+          <a:xfrm xmlns:a="http://schemas.openxmlformats.org/drawingml/2006/main">
+            <a:off x="666750" y="1533525"/>
+            <a:ext cx="3429000" cy="600075"/>
           </a:xfrm>
           <a:prstGeom xmlns:a="http://schemas.openxmlformats.org/drawingml/2006/main" prst="rect">
             <a:avLst/>
@@ -14397,6 +14725,63 @@
           <a:lstStyle xmlns:a="http://schemas.openxmlformats.org/drawingml/2006/main"/>
           <a:p xmlns:a="http://schemas.openxmlformats.org/drawingml/2006/main">
             <a:pPr algn="l">
+              <a:defRPr sz="3525" b="1">
+                <a:solidFill>
+                  <a:srgbClr val="37D67A"/>
+                </a:solidFill>
+                <a:latin typeface="Arial Unicode MS"/>
+                <a:ea typeface="Arial Unicode MS"/>
+                <a:cs typeface="Arial Unicode MS"/>
+              </a:defRPr>
+            </a:pPr>
+            <a:r>
+              <a:rPr sz="3525" b="1">
+                <a:solidFill>
+                  <a:srgbClr val="37D67A"/>
+                </a:solidFill>
+                <a:latin typeface="Arial Unicode MS"/>
+                <a:ea typeface="Arial Unicode MS"/>
+                <a:cs typeface="Arial Unicode MS"/>
+              </a:rPr>
+              <a:t>1 AAPL</a:t>
+            </a:r>
+          </a:p>
+        </p:txBody>
+      </p:sp>
+      <p:sp>
+        <p:nvSpPr>
+          <p:cNvPr id="7" name="履約價 400 USDG">
+            <a:extLst xmlns:a="http://schemas.openxmlformats.org/drawingml/2006/main">
+              <a:ext uri="{FF2B5EF4-FFF2-40B4-BE49-F238E27FC236}">
+                <a16:creationId xmlns:a16="http://schemas.microsoft.com/office/drawing/2014/main" id="{E2678D76-75B4-4FD2-8790-2E715E98D446}"/>
+              </a:ext>
+            </a:extLst>
+          </p:cNvPr>
+          <p:cNvSpPr>
+            <a:spLocks xmlns:a="http://schemas.openxmlformats.org/drawingml/2006/main" noGrp="1"/>
+          </p:cNvSpPr>
+          <p:nvPr/>
+        </p:nvSpPr>
+        <p:spPr>
+          <a:xfrm xmlns:a="http://schemas.openxmlformats.org/drawingml/2006/main">
+            <a:off x="4419600" y="1571625"/>
+            <a:ext cx="6572250" cy="561975"/>
+          </a:xfrm>
+          <a:prstGeom xmlns:a="http://schemas.openxmlformats.org/drawingml/2006/main" prst="rect">
+            <a:avLst/>
+          </a:prstGeom>
+          <a:noFill xmlns:a="http://schemas.openxmlformats.org/drawingml/2006/main"/>
+          <a:ln xmlns:a="http://schemas.openxmlformats.org/drawingml/2006/main" w="0">
+            <a:noFill/>
+          </a:ln>
+        </p:spPr>
+        <p:txBody>
+          <a:bodyPr xmlns:a="http://schemas.openxmlformats.org/drawingml/2006/main" wrap="none" lIns="0" tIns="0" rIns="0" bIns="0" anchor="ctr">
+            <a:noAutofit/>
+          </a:bodyPr>
+          <a:lstStyle xmlns:a="http://schemas.openxmlformats.org/drawingml/2006/main"/>
+          <a:p xmlns:a="http://schemas.openxmlformats.org/drawingml/2006/main">
+            <a:pPr algn="l">
               <a:defRPr sz="3075" b="1">
                 <a:solidFill>
                   <a:srgbClr val="FAFAFA"/>
@@ -14422,10 +14807,10 @@
       </p:sp>
       <p:sp>
         <p:nvSpPr>
-          <p:cNvPr id="7" name="Alice／賣方">
-            <a:extLst xmlns:a="http://schemas.openxmlformats.org/drawingml/2006/main">
-              <a:ext uri="{FF2B5EF4-FFF2-40B4-BE49-F238E27FC236}">
-                <a16:creationId xmlns:a16="http://schemas.microsoft.com/office/drawing/2014/main" id="{E3CCB74F-9971-46CD-BC07-0EEC728F836B}"/>
+          <p:cNvPr id="8" name="Alice／賣方">
+            <a:extLst xmlns:a="http://schemas.openxmlformats.org/drawingml/2006/main">
+              <a:ext uri="{FF2B5EF4-FFF2-40B4-BE49-F238E27FC236}">
+                <a16:creationId xmlns:a16="http://schemas.microsoft.com/office/drawing/2014/main" id="{91F67C6F-C765-4B8E-9D19-EBA28876AD38}"/>
               </a:ext>
             </a:extLst>
           </p:cNvPr>
@@ -14483,10 +14868,10 @@
       </p:sp>
       <p:sp>
         <p:nvSpPr>
-          <p:cNvPr id="8" name="Bob／買方">
-            <a:extLst xmlns:a="http://schemas.openxmlformats.org/drawingml/2006/main">
-              <a:ext uri="{FF2B5EF4-FFF2-40B4-BE49-F238E27FC236}">
-                <a16:creationId xmlns:a16="http://schemas.microsoft.com/office/drawing/2014/main" id="{9C0C8C02-F606-494A-B53B-7579FBB58E72}"/>
+          <p:cNvPr id="9" name="Bob／買方">
+            <a:extLst xmlns:a="http://schemas.openxmlformats.org/drawingml/2006/main">
+              <a:ext uri="{FF2B5EF4-FFF2-40B4-BE49-F238E27FC236}">
+                <a16:creationId xmlns:a16="http://schemas.microsoft.com/office/drawing/2014/main" id="{CF4AC9DB-4254-4A16-AC47-D5CED2B78782}"/>
               </a:ext>
             </a:extLst>
           </p:cNvPr>
@@ -14544,10 +14929,10 @@
       </p:sp>
       <p:cxnSp>
         <p:nvCxnSpPr>
-          <p:cNvPr id="24" name=""/>
+          <p:cNvPr id="26" name=""/>
           <p:cNvCxnSpPr>
-            <a:stCxn xmlns:a="http://schemas.openxmlformats.org/drawingml/2006/main" id="8" idx="1"/>
-            <a:endCxn xmlns:a="http://schemas.openxmlformats.org/drawingml/2006/main" id="7" idx="3"/>
+            <a:stCxn xmlns:a="http://schemas.openxmlformats.org/drawingml/2006/main" id="9" idx="1"/>
+            <a:endCxn xmlns:a="http://schemas.openxmlformats.org/drawingml/2006/main" id="8" idx="3"/>
           </p:cNvCxnSpPr>
           <p:nvPr/>
         </p:nvCxnSpPr>
@@ -14570,10 +14955,10 @@
       </p:cxnSp>
       <p:sp>
         <p:nvSpPr>
-          <p:cNvPr id="10" name="今天支付 5 USDG 權利金">
-            <a:extLst xmlns:a="http://schemas.openxmlformats.org/drawingml/2006/main">
-              <a:ext uri="{FF2B5EF4-FFF2-40B4-BE49-F238E27FC236}">
-                <a16:creationId xmlns:a16="http://schemas.microsoft.com/office/drawing/2014/main" id="{296BECF7-6E5E-43C8-9E48-1DB6616CD428}"/>
+          <p:cNvPr id="11" name="今天支付 5 USDG 權利金">
+            <a:extLst xmlns:a="http://schemas.openxmlformats.org/drawingml/2006/main">
+              <a:ext uri="{FF2B5EF4-FFF2-40B4-BE49-F238E27FC236}">
+                <a16:creationId xmlns:a16="http://schemas.microsoft.com/office/drawing/2014/main" id="{1B3760C8-CF5D-4C48-A66E-D21906357929}"/>
               </a:ext>
             </a:extLst>
           </p:cNvPr>
@@ -14627,10 +15012,10 @@
       </p:sp>
       <p:sp>
         <p:nvSpPr>
-          <p:cNvPr id="11" name="350">
-            <a:extLst xmlns:a="http://schemas.openxmlformats.org/drawingml/2006/main">
-              <a:ext uri="{FF2B5EF4-FFF2-40B4-BE49-F238E27FC236}">
-                <a16:creationId xmlns:a16="http://schemas.microsoft.com/office/drawing/2014/main" id="{B013E115-B077-4F8D-ADD8-3AF4F9BF9D79}"/>
+          <p:cNvPr id="12" name="350">
+            <a:extLst xmlns:a="http://schemas.openxmlformats.org/drawingml/2006/main">
+              <a:ext uri="{FF2B5EF4-FFF2-40B4-BE49-F238E27FC236}">
+                <a16:creationId xmlns:a16="http://schemas.microsoft.com/office/drawing/2014/main" id="{E047B9BB-D425-4751-8D1B-139DEEEDEE33}"/>
               </a:ext>
             </a:extLst>
           </p:cNvPr>
@@ -14684,10 +15069,10 @@
       </p:sp>
       <p:sp>
         <p:nvSpPr>
-          <p:cNvPr id="12" name="不履約">
-            <a:extLst xmlns:a="http://schemas.openxmlformats.org/drawingml/2006/main">
-              <a:ext uri="{FF2B5EF4-FFF2-40B4-BE49-F238E27FC236}">
-                <a16:creationId xmlns:a16="http://schemas.microsoft.com/office/drawing/2014/main" id="{81FC9B1F-28A5-43C7-A5C0-709052D25E08}"/>
+          <p:cNvPr id="13" name="不履約">
+            <a:extLst xmlns:a="http://schemas.openxmlformats.org/drawingml/2006/main">
+              <a:ext uri="{FF2B5EF4-FFF2-40B4-BE49-F238E27FC236}">
+                <a16:creationId xmlns:a16="http://schemas.microsoft.com/office/drawing/2014/main" id="{1B170191-A605-47A9-8039-9AB4B8FD3798}"/>
               </a:ext>
             </a:extLst>
           </p:cNvPr>
@@ -14741,10 +15126,10 @@
       </p:sp>
       <p:sp>
         <p:nvSpPr>
-          <p:cNvPr id="13" name="450">
-            <a:extLst xmlns:a="http://schemas.openxmlformats.org/drawingml/2006/main">
-              <a:ext uri="{FF2B5EF4-FFF2-40B4-BE49-F238E27FC236}">
-                <a16:creationId xmlns:a16="http://schemas.microsoft.com/office/drawing/2014/main" id="{0E3CF048-0592-4162-A189-CE0E8AEB4FA4}"/>
+          <p:cNvPr id="14" name="450">
+            <a:extLst xmlns:a="http://schemas.openxmlformats.org/drawingml/2006/main">
+              <a:ext uri="{FF2B5EF4-FFF2-40B4-BE49-F238E27FC236}">
+                <a16:creationId xmlns:a16="http://schemas.microsoft.com/office/drawing/2014/main" id="{DBE911A9-617F-44D1-9FD8-467D7B41BBAE}"/>
               </a:ext>
             </a:extLst>
           </p:cNvPr>
@@ -14798,10 +15183,10 @@
       </p:sp>
       <p:sp>
         <p:nvSpPr>
-          <p:cNvPr id="14" name="付 400 USDG，取得 1 TSLA">
-            <a:extLst xmlns:a="http://schemas.openxmlformats.org/drawingml/2006/main">
-              <a:ext uri="{FF2B5EF4-FFF2-40B4-BE49-F238E27FC236}">
-                <a16:creationId xmlns:a16="http://schemas.microsoft.com/office/drawing/2014/main" id="{747AE304-40B1-4973-A855-C97CF5683D76}"/>
+          <p:cNvPr id="15" name="付 400 USDG，取得 1 AAPL">
+            <a:extLst xmlns:a="http://schemas.openxmlformats.org/drawingml/2006/main">
+              <a:ext uri="{FF2B5EF4-FFF2-40B4-BE49-F238E27FC236}">
+                <a16:creationId xmlns:a16="http://schemas.microsoft.com/office/drawing/2014/main" id="{D952C180-38BD-4250-85D8-5209E9B383B9}"/>
               </a:ext>
             </a:extLst>
           </p:cNvPr>
@@ -14848,17 +15233,17 @@
                 <a:ea typeface="Arial Unicode MS"/>
                 <a:cs typeface="Arial Unicode MS"/>
               </a:rPr>
-              <a:t>付 400 USDG，取得 1 TSLA</a:t>
-            </a:r>
-          </a:p>
-        </p:txBody>
-      </p:sp>
-      <p:sp>
-        <p:nvSpPr>
-          <p:cNvPr id="15" name="Call 賣方準備 TSLA；put 賣方準備履約價 × 口數的 USDG">
-            <a:extLst xmlns:a="http://schemas.openxmlformats.org/drawingml/2006/main">
-              <a:ext uri="{FF2B5EF4-FFF2-40B4-BE49-F238E27FC236}">
-                <a16:creationId xmlns:a16="http://schemas.microsoft.com/office/drawing/2014/main" id="{25002751-5A92-4D7E-8895-829DFC4BD839}"/>
+              <a:t>付 400 USDG，取得 1 AAPL</a:t>
+            </a:r>
+          </a:p>
+        </p:txBody>
+      </p:sp>
+      <p:sp>
+        <p:nvSpPr>
+          <p:cNvPr id="16" name="Call 賣方準備 AAPL；put 賣方準備履約價 × 口數的 USDG">
+            <a:extLst xmlns:a="http://schemas.openxmlformats.org/drawingml/2006/main">
+              <a:ext uri="{FF2B5EF4-FFF2-40B4-BE49-F238E27FC236}">
+                <a16:creationId xmlns:a16="http://schemas.microsoft.com/office/drawing/2014/main" id="{EFE5303A-221D-49DA-AB0F-B694F4EFFD1F}"/>
               </a:ext>
             </a:extLst>
           </p:cNvPr>
@@ -14905,7 +15290,7 @@
                 <a:ea typeface="Arial Unicode MS"/>
                 <a:cs typeface="Arial Unicode MS"/>
               </a:rPr>
-              <a:t>Call 賣方準備 TSLA；put 賣方準備履約價 × 口數的 USDG</a:t>
+              <a:t>Call 賣方準備 AAPL；put 賣方準備履約價 × 口數的 USDG</a:t>
             </a:r>
           </a:p>
         </p:txBody>
@@ -14913,7 +15298,7 @@
     </p:spTree>
     <p:extLst>
       <p:ext uri="{BB962C8B-B14F-4D97-AF65-F5344CB8AC3E}">
-        <p14:creationId xmlns:p14="http://schemas.microsoft.com/office/powerpoint/2010/main" val="131960058"/>
+        <p14:creationId xmlns:p14="http://schemas.microsoft.com/office/powerpoint/2010/main" val="293893689"/>
       </p:ext>
     </p:extLst>
   </p:cSld>
@@ -14944,7 +15329,7 @@
           <p:cNvPr id="17" name="可以重現的合約證據">
             <a:extLst xmlns:a="http://schemas.openxmlformats.org/drawingml/2006/main">
               <a:ext uri="{FF2B5EF4-FFF2-40B4-BE49-F238E27FC236}">
-                <a16:creationId xmlns:a16="http://schemas.microsoft.com/office/drawing/2014/main" id="{0C197313-6072-4D25-9822-912899E1C6F8}"/>
+                <a16:creationId xmlns:a16="http://schemas.microsoft.com/office/drawing/2014/main" id="{7025F54A-EFEF-475A-8D4E-3C8AB15253E3}"/>
               </a:ext>
             </a:extLst>
           </p:cNvPr>
@@ -15005,7 +15390,7 @@
           <p:nvPr/>
         </p:nvPicPr>
         <p:blipFill>
-          <a:blip xmlns:r="http://schemas.openxmlformats.org/officeDocument/2006/relationships" xmlns:a="http://schemas.openxmlformats.org/drawingml/2006/main" r:embed="R5db706bffb5e46c9"/>
+          <a:blip xmlns:r="http://schemas.openxmlformats.org/officeDocument/2006/relationships" xmlns:a="http://schemas.openxmlformats.org/drawingml/2006/main" r:embed="R1caface1725e409e"/>
           <a:stretch xmlns:a="http://schemas.openxmlformats.org/drawingml/2006/main"/>
         </p:blipFill>
         <p:spPr>
@@ -15023,7 +15408,7 @@
           <p:cNvPr id="3" name="Vexi Hakari">
             <a:extLst xmlns:a="http://schemas.openxmlformats.org/drawingml/2006/main">
               <a:ext uri="{FF2B5EF4-FFF2-40B4-BE49-F238E27FC236}">
-                <a16:creationId xmlns:a16="http://schemas.microsoft.com/office/drawing/2014/main" id="{34E3B403-4B27-4EC4-A1F1-52A940830029}"/>
+                <a16:creationId xmlns:a16="http://schemas.microsoft.com/office/drawing/2014/main" id="{1CF685C8-2114-4D04-BE12-1581CDF501A7}"/>
               </a:ext>
             </a:extLst>
           </p:cNvPr>
@@ -15080,7 +15465,7 @@
           <p:cNvPr id="4" name="A6">
             <a:extLst xmlns:a="http://schemas.openxmlformats.org/drawingml/2006/main">
               <a:ext uri="{FF2B5EF4-FFF2-40B4-BE49-F238E27FC236}">
-                <a16:creationId xmlns:a16="http://schemas.microsoft.com/office/drawing/2014/main" id="{EA70F8BC-9446-4277-AD67-88B497223A99}"/>
+                <a16:creationId xmlns:a16="http://schemas.microsoft.com/office/drawing/2014/main" id="{4CFDA164-64C8-4BCE-9448-7FA5CFD64A95}"/>
               </a:ext>
             </a:extLst>
           </p:cNvPr>
@@ -15137,7 +15522,7 @@
           <p:cNvPr id="5" name="1 + 4 = 5">
             <a:extLst xmlns:a="http://schemas.openxmlformats.org/drawingml/2006/main">
               <a:ext uri="{FF2B5EF4-FFF2-40B4-BE49-F238E27FC236}">
-                <a16:creationId xmlns:a16="http://schemas.microsoft.com/office/drawing/2014/main" id="{D8B33D0F-0D14-45E7-903C-4B7892301C06}"/>
+                <a16:creationId xmlns:a16="http://schemas.microsoft.com/office/drawing/2014/main" id="{DB386191-2541-459E-834B-4E5A162A4A58}"/>
               </a:ext>
             </a:extLst>
           </p:cNvPr>
@@ -15194,7 +15579,7 @@
           <p:cNvPr id="6" name="1 條 15 步生命週期 + 4 個獨立情境 = 5 個測試">
             <a:extLst xmlns:a="http://schemas.openxmlformats.org/drawingml/2006/main">
               <a:ext uri="{FF2B5EF4-FFF2-40B4-BE49-F238E27FC236}">
-                <a16:creationId xmlns:a16="http://schemas.microsoft.com/office/drawing/2014/main" id="{BDF7A9B4-BFDF-46FC-B6B6-8519B56963EC}"/>
+                <a16:creationId xmlns:a16="http://schemas.microsoft.com/office/drawing/2014/main" id="{F95E1D11-0F3A-4650-9F4D-DC53A91CF592}"/>
               </a:ext>
             </a:extLst>
           </p:cNvPr>
@@ -15251,7 +15636,7 @@
           <p:cNvPr id="7" name="原始碼">
             <a:extLst xmlns:a="http://schemas.openxmlformats.org/drawingml/2006/main">
               <a:ext uri="{FF2B5EF4-FFF2-40B4-BE49-F238E27FC236}">
-                <a16:creationId xmlns:a16="http://schemas.microsoft.com/office/drawing/2014/main" id="{0D1011EB-0277-41DE-91B4-C498AEF7FC3B}"/>
+                <a16:creationId xmlns:a16="http://schemas.microsoft.com/office/drawing/2014/main" id="{4435952F-410A-482A-9BAC-BFB70A32E941}"/>
               </a:ext>
             </a:extLst>
           </p:cNvPr>
@@ -15312,7 +15697,7 @@
           <p:cNvPr id="8" name="Foundry">
             <a:extLst xmlns:a="http://schemas.openxmlformats.org/drawingml/2006/main">
               <a:ext uri="{FF2B5EF4-FFF2-40B4-BE49-F238E27FC236}">
-                <a16:creationId xmlns:a16="http://schemas.microsoft.com/office/drawing/2014/main" id="{5EC7C230-CECE-4435-9062-46DA18275910}"/>
+                <a16:creationId xmlns:a16="http://schemas.microsoft.com/office/drawing/2014/main" id="{B8AC46DD-124A-4300-A7B5-00E69A7D278A}"/>
               </a:ext>
             </a:extLst>
           </p:cNvPr>
@@ -15373,7 +15758,7 @@
           <p:cNvPr id="9" name="JSON + trace">
             <a:extLst xmlns:a="http://schemas.openxmlformats.org/drawingml/2006/main">
               <a:ext uri="{FF2B5EF4-FFF2-40B4-BE49-F238E27FC236}">
-                <a16:creationId xmlns:a16="http://schemas.microsoft.com/office/drawing/2014/main" id="{7DA8E19D-481E-4EAC-92FF-EA750A04DEBA}"/>
+                <a16:creationId xmlns:a16="http://schemas.microsoft.com/office/drawing/2014/main" id="{FA5994C6-87B7-4BF7-BCFB-522C84535A2D}"/>
               </a:ext>
             </a:extLst>
           </p:cNvPr>
@@ -15434,7 +15819,7 @@
           <p:cNvPr id="10" name="網站">
             <a:extLst xmlns:a="http://schemas.openxmlformats.org/drawingml/2006/main">
               <a:ext uri="{FF2B5EF4-FFF2-40B4-BE49-F238E27FC236}">
-                <a16:creationId xmlns:a16="http://schemas.microsoft.com/office/drawing/2014/main" id="{1F4DE2E3-9B7C-486F-B168-73A1CAD2A70E}"/>
+                <a16:creationId xmlns:a16="http://schemas.microsoft.com/office/drawing/2014/main" id="{2D160F15-27D5-410E-B218-A92B34118B7A}"/>
               </a:ext>
             </a:extLst>
           </p:cNvPr>
@@ -15573,7 +15958,7 @@
           <p:cNvPr id="14" name="4663 分叉 @ 72,248,228">
             <a:extLst xmlns:a="http://schemas.openxmlformats.org/drawingml/2006/main">
               <a:ext uri="{FF2B5EF4-FFF2-40B4-BE49-F238E27FC236}">
-                <a16:creationId xmlns:a16="http://schemas.microsoft.com/office/drawing/2014/main" id="{A39610C1-24AC-4B2A-B0EB-933F350AFE62}"/>
+                <a16:creationId xmlns:a16="http://schemas.microsoft.com/office/drawing/2014/main" id="{5040B98D-4E65-4902-8A39-7E2770AA1A53}"/>
               </a:ext>
             </a:extLst>
           </p:cNvPr>
@@ -15630,7 +16015,7 @@
           <p:cNvPr id="15" name="0 筆主網廣播">
             <a:extLst xmlns:a="http://schemas.openxmlformats.org/drawingml/2006/main">
               <a:ext uri="{FF2B5EF4-FFF2-40B4-BE49-F238E27FC236}">
-                <a16:creationId xmlns:a16="http://schemas.microsoft.com/office/drawing/2014/main" id="{4AE69CCA-829F-4534-B6E8-FF45ECA35A78}"/>
+                <a16:creationId xmlns:a16="http://schemas.microsoft.com/office/drawing/2014/main" id="{0B2CF59A-D83D-4D95-B058-CA2ED2AFEFEA}"/>
               </a:ext>
             </a:extLst>
           </p:cNvPr>
@@ -15687,7 +16072,7 @@
           <p:cNvPr id="16" name="github.com/vexi-v1/vexi-hakari">
             <a:extLst xmlns:a="http://schemas.openxmlformats.org/drawingml/2006/main">
               <a:ext uri="{FF2B5EF4-FFF2-40B4-BE49-F238E27FC236}">
-                <a16:creationId xmlns:a16="http://schemas.microsoft.com/office/drawing/2014/main" id="{2D308AA2-6169-4784-8459-5FF1B5260DF4}"/>
+                <a16:creationId xmlns:a16="http://schemas.microsoft.com/office/drawing/2014/main" id="{5977B3B8-47CB-4F7C-87E1-6E48B7CCC98F}"/>
               </a:ext>
             </a:extLst>
           </p:cNvPr>
@@ -15733,7 +16118,7 @@
                 <a:latin typeface="Arial Unicode MS"/>
                 <a:ea typeface="Arial Unicode MS"/>
                 <a:cs typeface="Arial Unicode MS"/>
-                <a:hlinkClick xmlns:r="http://schemas.openxmlformats.org/officeDocument/2006/relationships" r:id="R60783f3744d04dc5"/>
+                <a:hlinkClick xmlns:r="http://schemas.openxmlformats.org/officeDocument/2006/relationships" r:id="R089c8d5d07664c55"/>
               </a:rPr>
               <a:t>github.com/vexi-v1/vexi-hakari</a:t>
             </a:r>
@@ -15743,7 +16128,7 @@
     </p:spTree>
     <p:extLst>
       <p:ext uri="{BB962C8B-B14F-4D97-AF65-F5344CB8AC3E}">
-        <p14:creationId xmlns:p14="http://schemas.microsoft.com/office/powerpoint/2010/main" val="1914473317"/>
+        <p14:creationId xmlns:p14="http://schemas.microsoft.com/office/powerpoint/2010/main" val="1392779925"/>
       </p:ext>
     </p:extLst>
   </p:cSld>
@@ -15774,7 +16159,7 @@
           <p:cNvPr id="17" name="閒置抵押品與過時報價">
             <a:extLst xmlns:a="http://schemas.openxmlformats.org/drawingml/2006/main">
               <a:ext uri="{FF2B5EF4-FFF2-40B4-BE49-F238E27FC236}">
-                <a16:creationId xmlns:a16="http://schemas.microsoft.com/office/drawing/2014/main" id="{68E29176-9635-48F7-AA4C-E345C29B5B05}"/>
+                <a16:creationId xmlns:a16="http://schemas.microsoft.com/office/drawing/2014/main" id="{FEB8751B-8420-4236-BF8B-86A536F614AA}"/>
               </a:ext>
             </a:extLst>
           </p:cNvPr>
@@ -15835,7 +16220,7 @@
           <p:nvPr/>
         </p:nvPicPr>
         <p:blipFill>
-          <a:blip xmlns:r="http://schemas.openxmlformats.org/officeDocument/2006/relationships" xmlns:a="http://schemas.openxmlformats.org/drawingml/2006/main" r:embed="R2d0477546d3c4145"/>
+          <a:blip xmlns:r="http://schemas.openxmlformats.org/officeDocument/2006/relationships" xmlns:a="http://schemas.openxmlformats.org/drawingml/2006/main" r:embed="Rc261772d6e2848c9"/>
           <a:stretch xmlns:a="http://schemas.openxmlformats.org/drawingml/2006/main"/>
         </p:blipFill>
         <p:spPr>
@@ -15853,7 +16238,7 @@
           <p:cNvPr id="3" name="Vexi Hakari">
             <a:extLst xmlns:a="http://schemas.openxmlformats.org/drawingml/2006/main">
               <a:ext uri="{FF2B5EF4-FFF2-40B4-BE49-F238E27FC236}">
-                <a16:creationId xmlns:a16="http://schemas.microsoft.com/office/drawing/2014/main" id="{D67C5415-4F16-4162-A006-4585752EA088}"/>
+                <a16:creationId xmlns:a16="http://schemas.microsoft.com/office/drawing/2014/main" id="{BBFD19D3-A08D-4DD1-8A9D-4A89C74866F7}"/>
               </a:ext>
             </a:extLst>
           </p:cNvPr>
@@ -15910,7 +16295,7 @@
           <p:cNvPr id="4" name="3">
             <a:extLst xmlns:a="http://schemas.openxmlformats.org/drawingml/2006/main">
               <a:ext uri="{FF2B5EF4-FFF2-40B4-BE49-F238E27FC236}">
-                <a16:creationId xmlns:a16="http://schemas.microsoft.com/office/drawing/2014/main" id="{8862DC01-5D3C-4233-9D09-21E2480E8443}"/>
+                <a16:creationId xmlns:a16="http://schemas.microsoft.com/office/drawing/2014/main" id="{13E48B3D-968E-4509-90B3-C92203C5C513}"/>
               </a:ext>
             </a:extLst>
           </p:cNvPr>
@@ -15967,7 +16352,7 @@
           <p:cNvPr id="5" name="買方出現前先鎖抵押品">
             <a:extLst xmlns:a="http://schemas.openxmlformats.org/drawingml/2006/main">
               <a:ext uri="{FF2B5EF4-FFF2-40B4-BE49-F238E27FC236}">
-                <a16:creationId xmlns:a16="http://schemas.microsoft.com/office/drawing/2014/main" id="{3F7EE5DB-6A73-4999-BA23-9E2E8FCBB3AC}"/>
+                <a16:creationId xmlns:a16="http://schemas.microsoft.com/office/drawing/2014/main" id="{7BEB2192-6D7B-4F68-8980-12B354699C9D}"/>
               </a:ext>
             </a:extLst>
           </p:cNvPr>
@@ -16024,7 +16409,7 @@
           <p:cNvPr id="6" name="池價變動，報價仍固定">
             <a:extLst xmlns:a="http://schemas.openxmlformats.org/drawingml/2006/main">
               <a:ext uri="{FF2B5EF4-FFF2-40B4-BE49-F238E27FC236}">
-                <a16:creationId xmlns:a16="http://schemas.microsoft.com/office/drawing/2014/main" id="{9FB7456A-D2D7-4E5D-B924-4BEB9E6D4E8B}"/>
+                <a16:creationId xmlns:a16="http://schemas.microsoft.com/office/drawing/2014/main" id="{0F59D6C0-8F3B-4617-B273-E3849D98F40A}"/>
               </a:ext>
             </a:extLst>
           </p:cNvPr>
@@ -16088,7 +16473,7 @@
         </p:xfrm>
         <a:graphic xmlns:a="http://schemas.openxmlformats.org/drawingml/2006/main">
           <a:graphicData uri="http://schemas.openxmlformats.org/drawingml/2006/chart">
-            <c:chart xmlns:r="http://schemas.openxmlformats.org/officeDocument/2006/relationships" xmlns:c="http://schemas.openxmlformats.org/drawingml/2006/chart" r:id="R5dd75174cdc04ccf"/>
+            <c:chart xmlns:r="http://schemas.openxmlformats.org/officeDocument/2006/relationships" xmlns:c="http://schemas.openxmlformats.org/drawingml/2006/chart" r:id="Rf75f815bc55842fe"/>
           </a:graphicData>
         </a:graphic>
       </p:graphicFrame>
@@ -16097,7 +16482,7 @@
           <p:cNvPr id="8" name="━">
             <a:extLst xmlns:a="http://schemas.openxmlformats.org/drawingml/2006/main">
               <a:ext uri="{FF2B5EF4-FFF2-40B4-BE49-F238E27FC236}">
-                <a16:creationId xmlns:a16="http://schemas.microsoft.com/office/drawing/2014/main" id="{82126451-DF30-4B0E-B038-AF71F6D789ED}"/>
+                <a16:creationId xmlns:a16="http://schemas.microsoft.com/office/drawing/2014/main" id="{24C73E29-0133-4D49-BE74-52FE0BC8CBEF}"/>
               </a:ext>
             </a:extLst>
           </p:cNvPr>
@@ -16154,7 +16539,7 @@
           <p:cNvPr id="9" name="已售">
             <a:extLst xmlns:a="http://schemas.openxmlformats.org/drawingml/2006/main">
               <a:ext uri="{FF2B5EF4-FFF2-40B4-BE49-F238E27FC236}">
-                <a16:creationId xmlns:a16="http://schemas.microsoft.com/office/drawing/2014/main" id="{0ECA291F-8A1D-4D16-9B82-DAC0BC01CBA4}"/>
+                <a16:creationId xmlns:a16="http://schemas.microsoft.com/office/drawing/2014/main" id="{100AD940-2179-4006-AF78-9441EA044A78}"/>
               </a:ext>
             </a:extLst>
           </p:cNvPr>
@@ -16211,7 +16596,7 @@
           <p:cNvPr id="10" name="━">
             <a:extLst xmlns:a="http://schemas.openxmlformats.org/drawingml/2006/main">
               <a:ext uri="{FF2B5EF4-FFF2-40B4-BE49-F238E27FC236}">
-                <a16:creationId xmlns:a16="http://schemas.microsoft.com/office/drawing/2014/main" id="{C7AF49FE-CC07-4583-9AD3-2258C9872E4D}"/>
+                <a16:creationId xmlns:a16="http://schemas.microsoft.com/office/drawing/2014/main" id="{180BA3B3-0148-4E91-86F9-EBC9F89CFB30}"/>
               </a:ext>
             </a:extLst>
           </p:cNvPr>
@@ -16268,7 +16653,7 @@
           <p:cNvPr id="11" name="未售">
             <a:extLst xmlns:a="http://schemas.openxmlformats.org/drawingml/2006/main">
               <a:ext uri="{FF2B5EF4-FFF2-40B4-BE49-F238E27FC236}">
-                <a16:creationId xmlns:a16="http://schemas.microsoft.com/office/drawing/2014/main" id="{CBC8F0AF-236D-4739-86AE-76ED68F2773D}"/>
+                <a16:creationId xmlns:a16="http://schemas.microsoft.com/office/drawing/2014/main" id="{9F300953-7084-46EF-B028-639C01D9F3F4}"/>
               </a:ext>
             </a:extLst>
           </p:cNvPr>
@@ -16332,7 +16717,7 @@
         </p:xfrm>
         <a:graphic xmlns:a="http://schemas.openxmlformats.org/drawingml/2006/main">
           <a:graphicData uri="http://schemas.openxmlformats.org/drawingml/2006/chart">
-            <c:chart xmlns:r="http://schemas.openxmlformats.org/officeDocument/2006/relationships" xmlns:c="http://schemas.openxmlformats.org/drawingml/2006/chart" r:id="R201c0db4b6284ec3"/>
+            <c:chart xmlns:r="http://schemas.openxmlformats.org/officeDocument/2006/relationships" xmlns:c="http://schemas.openxmlformats.org/drawingml/2006/chart" r:id="R6a6f9925e2bd43bc"/>
           </a:graphicData>
         </a:graphic>
       </p:graphicFrame>
@@ -16341,7 +16726,7 @@
           <p:cNvPr id="13" name="示意：先存入抵押品的模式">
             <a:extLst xmlns:a="http://schemas.openxmlformats.org/drawingml/2006/main">
               <a:ext uri="{FF2B5EF4-FFF2-40B4-BE49-F238E27FC236}">
-                <a16:creationId xmlns:a16="http://schemas.microsoft.com/office/drawing/2014/main" id="{A6BA6274-796F-42DE-913D-CEA4A375E2C6}"/>
+                <a16:creationId xmlns:a16="http://schemas.microsoft.com/office/drawing/2014/main" id="{B0D33A2E-1256-478F-B917-CE67B801123F}"/>
               </a:ext>
             </a:extLst>
           </p:cNvPr>
@@ -16398,7 +16783,7 @@
           <p:cNvPr id="14" name="示意價格路徑">
             <a:extLst xmlns:a="http://schemas.openxmlformats.org/drawingml/2006/main">
               <a:ext uri="{FF2B5EF4-FFF2-40B4-BE49-F238E27FC236}">
-                <a16:creationId xmlns:a16="http://schemas.microsoft.com/office/drawing/2014/main" id="{AA3B6BF9-8055-426F-A4EB-E8F38DB4CADB}"/>
+                <a16:creationId xmlns:a16="http://schemas.microsoft.com/office/drawing/2014/main" id="{D8D2BC80-E26B-48EB-AC23-A0C744047788}"/>
               </a:ext>
             </a:extLst>
           </p:cNvPr>
@@ -16455,7 +16840,7 @@
           <p:cNvPr id="15" name="Aqua：成交才移動資金">
             <a:extLst xmlns:a="http://schemas.openxmlformats.org/drawingml/2006/main">
               <a:ext uri="{FF2B5EF4-FFF2-40B4-BE49-F238E27FC236}">
-                <a16:creationId xmlns:a16="http://schemas.microsoft.com/office/drawing/2014/main" id="{8A95C7E5-2728-493C-ADBE-161FF910365C}"/>
+                <a16:creationId xmlns:a16="http://schemas.microsoft.com/office/drawing/2014/main" id="{A461806A-362D-4A5A-BDAE-44404D0C48C4}"/>
               </a:ext>
             </a:extLst>
           </p:cNvPr>
@@ -16512,7 +16897,7 @@
           <p:cNvPr id="16" name="Band：逐次檢查報價">
             <a:extLst xmlns:a="http://schemas.openxmlformats.org/drawingml/2006/main">
               <a:ext uri="{FF2B5EF4-FFF2-40B4-BE49-F238E27FC236}">
-                <a16:creationId xmlns:a16="http://schemas.microsoft.com/office/drawing/2014/main" id="{431C11F3-30EE-4E5B-8D45-83B9676AA24D}"/>
+                <a16:creationId xmlns:a16="http://schemas.microsoft.com/office/drawing/2014/main" id="{00DA8BCA-3B5E-4929-95C2-F520720ACEBF}"/>
               </a:ext>
             </a:extLst>
           </p:cNvPr>
@@ -16567,7 +16952,7 @@
     </p:spTree>
     <p:extLst>
       <p:ext uri="{BB962C8B-B14F-4D97-AF65-F5344CB8AC3E}">
-        <p14:creationId xmlns:p14="http://schemas.microsoft.com/office/powerpoint/2010/main" val="546319916"/>
+        <p14:creationId xmlns:p14="http://schemas.microsoft.com/office/powerpoint/2010/main" val="1499004169"/>
       </p:ext>
     </p:extLst>
   </p:cSld>
@@ -16598,7 +16983,7 @@
           <p:cNvPr id="22" name="公開整合的完整架構">
             <a:extLst xmlns:a="http://schemas.openxmlformats.org/drawingml/2006/main">
               <a:ext uri="{FF2B5EF4-FFF2-40B4-BE49-F238E27FC236}">
-                <a16:creationId xmlns:a16="http://schemas.microsoft.com/office/drawing/2014/main" id="{FBFD7CF4-EBD1-4F74-BC64-F09F442429BA}"/>
+                <a16:creationId xmlns:a16="http://schemas.microsoft.com/office/drawing/2014/main" id="{9BA096B1-3CB2-4776-934D-D296760F4144}"/>
               </a:ext>
             </a:extLst>
           </p:cNvPr>
@@ -16659,7 +17044,7 @@
           <p:nvPr/>
         </p:nvPicPr>
         <p:blipFill>
-          <a:blip xmlns:r="http://schemas.openxmlformats.org/officeDocument/2006/relationships" xmlns:a="http://schemas.openxmlformats.org/drawingml/2006/main" r:embed="R0fdc866b54324b34"/>
+          <a:blip xmlns:r="http://schemas.openxmlformats.org/officeDocument/2006/relationships" xmlns:a="http://schemas.openxmlformats.org/drawingml/2006/main" r:embed="Re3d4c20e89e547d5"/>
           <a:stretch xmlns:a="http://schemas.openxmlformats.org/drawingml/2006/main"/>
         </p:blipFill>
         <p:spPr>
@@ -16677,7 +17062,7 @@
           <p:cNvPr id="3" name="Vexi Hakari">
             <a:extLst xmlns:a="http://schemas.openxmlformats.org/drawingml/2006/main">
               <a:ext uri="{FF2B5EF4-FFF2-40B4-BE49-F238E27FC236}">
-                <a16:creationId xmlns:a16="http://schemas.microsoft.com/office/drawing/2014/main" id="{65732F10-E803-46D7-94DD-A786BE8CD7A5}"/>
+                <a16:creationId xmlns:a16="http://schemas.microsoft.com/office/drawing/2014/main" id="{9CE8A9D2-2DFA-4DFE-93D5-67BEB59C87A3}"/>
               </a:ext>
             </a:extLst>
           </p:cNvPr>
@@ -16734,7 +17119,7 @@
           <p:cNvPr id="4" name="4">
             <a:extLst xmlns:a="http://schemas.openxmlformats.org/drawingml/2006/main">
               <a:ext uri="{FF2B5EF4-FFF2-40B4-BE49-F238E27FC236}">
-                <a16:creationId xmlns:a16="http://schemas.microsoft.com/office/drawing/2014/main" id="{C1B71E3D-A412-4FE3-93E8-F5FFCD33547B}"/>
+                <a16:creationId xmlns:a16="http://schemas.microsoft.com/office/drawing/2014/main" id="{5C6DD0C9-E5B1-47E4-A883-C3077FC760B6}"/>
               </a:ext>
             </a:extLst>
           </p:cNvPr>
@@ -16791,7 +17176,7 @@
           <p:cNvPr id="5" name="造市者錢包">
             <a:extLst xmlns:a="http://schemas.openxmlformats.org/drawingml/2006/main">
               <a:ext uri="{FF2B5EF4-FFF2-40B4-BE49-F238E27FC236}">
-                <a16:creationId xmlns:a16="http://schemas.microsoft.com/office/drawing/2014/main" id="{6C0F4CBD-3383-421C-AAA5-527EA2D33F4B}"/>
+                <a16:creationId xmlns:a16="http://schemas.microsoft.com/office/drawing/2014/main" id="{E12E2EB3-10D8-498A-9D41-C775454BECD5}"/>
               </a:ext>
             </a:extLst>
           </p:cNvPr>
@@ -16852,7 +17237,7 @@
           <p:cNvPr id="6" name="Aqua">
             <a:extLst xmlns:a="http://schemas.openxmlformats.org/drawingml/2006/main">
               <a:ext uri="{FF2B5EF4-FFF2-40B4-BE49-F238E27FC236}">
-                <a16:creationId xmlns:a16="http://schemas.microsoft.com/office/drawing/2014/main" id="{F91EFADF-3DC3-4B21-BB71-AACC8EAB956B}"/>
+                <a16:creationId xmlns:a16="http://schemas.microsoft.com/office/drawing/2014/main" id="{1DDCA2FE-17CA-4F33-9E3E-C373A32A3E34}"/>
               </a:ext>
             </a:extLst>
           </p:cNvPr>
@@ -16913,7 +17298,7 @@
           <p:cNvPr id="7" name="Writer">
             <a:extLst xmlns:a="http://schemas.openxmlformats.org/drawingml/2006/main">
               <a:ext uri="{FF2B5EF4-FFF2-40B4-BE49-F238E27FC236}">
-                <a16:creationId xmlns:a16="http://schemas.microsoft.com/office/drawing/2014/main" id="{49404732-EB1F-4909-AA7C-D6881E934A3B}"/>
+                <a16:creationId xmlns:a16="http://schemas.microsoft.com/office/drawing/2014/main" id="{8DD7C2BE-54C0-4E4A-8023-1F4FF0004122}"/>
               </a:ext>
             </a:extLst>
           </p:cNvPr>
@@ -16974,7 +17359,7 @@
           <p:cNvPr id="8" name="Book">
             <a:extLst xmlns:a="http://schemas.openxmlformats.org/drawingml/2006/main">
               <a:ext uri="{FF2B5EF4-FFF2-40B4-BE49-F238E27FC236}">
-                <a16:creationId xmlns:a16="http://schemas.microsoft.com/office/drawing/2014/main" id="{B0F45551-F322-4C22-AF55-7547FE02972A}"/>
+                <a16:creationId xmlns:a16="http://schemas.microsoft.com/office/drawing/2014/main" id="{2276FEF0-14B1-4AD8-9BBD-22099E7C99E9}"/>
               </a:ext>
             </a:extLst>
           </p:cNvPr>
@@ -17035,7 +17420,7 @@
           <p:cNvPr id="9" name="SwapVM">
             <a:extLst xmlns:a="http://schemas.openxmlformats.org/drawingml/2006/main">
               <a:ext uri="{FF2B5EF4-FFF2-40B4-BE49-F238E27FC236}">
-                <a16:creationId xmlns:a16="http://schemas.microsoft.com/office/drawing/2014/main" id="{71F0E054-EFCD-4AF7-931F-C8E86F0C414D}"/>
+                <a16:creationId xmlns:a16="http://schemas.microsoft.com/office/drawing/2014/main" id="{45A5B623-D0A0-4E16-B530-3476E6AEEC76}"/>
               </a:ext>
             </a:extLst>
           </p:cNvPr>
@@ -17096,7 +17481,7 @@
           <p:cNvPr id="10" name="Guard">
             <a:extLst xmlns:a="http://schemas.openxmlformats.org/drawingml/2006/main">
               <a:ext uri="{FF2B5EF4-FFF2-40B4-BE49-F238E27FC236}">
-                <a16:creationId xmlns:a16="http://schemas.microsoft.com/office/drawing/2014/main" id="{ADC76655-2602-4777-B593-8A73075F868E}"/>
+                <a16:creationId xmlns:a16="http://schemas.microsoft.com/office/drawing/2014/main" id="{FE615B03-7F5C-41FA-8F12-487314D76F75}"/>
               </a:ext>
             </a:extLst>
           </p:cNvPr>
@@ -17157,7 +17542,7 @@
           <p:cNvPr id="11" name="v4 hook&#10;+ band">
             <a:extLst xmlns:a="http://schemas.openxmlformats.org/drawingml/2006/main">
               <a:ext uri="{FF2B5EF4-FFF2-40B4-BE49-F238E27FC236}">
-                <a16:creationId xmlns:a16="http://schemas.microsoft.com/office/drawing/2014/main" id="{E8A7CEFB-09D8-4AD4-8594-D31CEDBB097B}"/>
+                <a16:creationId xmlns:a16="http://schemas.microsoft.com/office/drawing/2014/main" id="{8CAC32AA-1F8B-4200-9B2C-913195AF7658}"/>
               </a:ext>
             </a:extLst>
           </p:cNvPr>
@@ -17403,7 +17788,7 @@
           <p:cNvPr id="18" name="資金存取">
             <a:extLst xmlns:a="http://schemas.openxmlformats.org/drawingml/2006/main">
               <a:ext uri="{FF2B5EF4-FFF2-40B4-BE49-F238E27FC236}">
-                <a16:creationId xmlns:a16="http://schemas.microsoft.com/office/drawing/2014/main" id="{46F848F7-8DB6-4CBE-AC03-9F9CACAF267F}"/>
+                <a16:creationId xmlns:a16="http://schemas.microsoft.com/office/drawing/2014/main" id="{1AF5F6D9-6996-40B3-ACF7-1264AD5DB0C6}"/>
               </a:ext>
             </a:extLst>
           </p:cNvPr>
@@ -17460,7 +17845,7 @@
           <p:cNvPr id="19" name="選擇權">
             <a:extLst xmlns:a="http://schemas.openxmlformats.org/drawingml/2006/main">
               <a:ext uri="{FF2B5EF4-FFF2-40B4-BE49-F238E27FC236}">
-                <a16:creationId xmlns:a16="http://schemas.microsoft.com/office/drawing/2014/main" id="{298A0B01-FE1A-406C-9B93-ECA390AEF1BC}"/>
+                <a16:creationId xmlns:a16="http://schemas.microsoft.com/office/drawing/2014/main" id="{579AB3B1-7F3F-4F03-94DD-123951736786}"/>
               </a:ext>
             </a:extLst>
           </p:cNvPr>
@@ -17517,7 +17902,7 @@
           <p:cNvPr id="20" name="現貨">
             <a:extLst xmlns:a="http://schemas.openxmlformats.org/drawingml/2006/main">
               <a:ext uri="{FF2B5EF4-FFF2-40B4-BE49-F238E27FC236}">
-                <a16:creationId xmlns:a16="http://schemas.microsoft.com/office/drawing/2014/main" id="{5AD78229-CEF9-4F95-A118-F44CDA0DB102}"/>
+                <a16:creationId xmlns:a16="http://schemas.microsoft.com/office/drawing/2014/main" id="{3C02C4B7-F6D6-4620-B216-FE8A763AF17B}"/>
               </a:ext>
             </a:extLst>
           </p:cNvPr>
@@ -17574,7 +17959,7 @@
           <p:cNvPr id="21" name="同一份庫存，共用策略帳務">
             <a:extLst xmlns:a="http://schemas.openxmlformats.org/drawingml/2006/main">
               <a:ext uri="{FF2B5EF4-FFF2-40B4-BE49-F238E27FC236}">
-                <a16:creationId xmlns:a16="http://schemas.microsoft.com/office/drawing/2014/main" id="{74B738E0-D7C7-4A6C-B1D6-9F9488D95930}"/>
+                <a16:creationId xmlns:a16="http://schemas.microsoft.com/office/drawing/2014/main" id="{09D47870-F49B-45ED-BCC1-BE5CFE1D1386}"/>
               </a:ext>
             </a:extLst>
           </p:cNvPr>
@@ -17629,7 +18014,7 @@
     </p:spTree>
     <p:extLst>
       <p:ext uri="{BB962C8B-B14F-4D97-AF65-F5344CB8AC3E}">
-        <p14:creationId xmlns:p14="http://schemas.microsoft.com/office/powerpoint/2010/main" val="723958040"/>
+        <p14:creationId xmlns:p14="http://schemas.microsoft.com/office/powerpoint/2010/main" val="252663439"/>
       </p:ext>
     </p:extLst>
   </p:cSld>
@@ -17657,10 +18042,10 @@
       </p:grpSpPr>
       <p:sp>
         <p:nvSpPr>
-          <p:cNvPr id="18" name="未成交承諾仍留在造市者錢包">
-            <a:extLst xmlns:a="http://schemas.openxmlformats.org/drawingml/2006/main">
-              <a:ext uri="{FF2B5EF4-FFF2-40B4-BE49-F238E27FC236}">
-                <a16:creationId xmlns:a16="http://schemas.microsoft.com/office/drawing/2014/main" id="{71CC995F-314D-4424-8E15-C9E01B3A405F}"/>
+          <p:cNvPr id="19" name="未成交承諾仍留在造市者錢包">
+            <a:extLst xmlns:a="http://schemas.openxmlformats.org/drawingml/2006/main">
+              <a:ext uri="{FF2B5EF4-FFF2-40B4-BE49-F238E27FC236}">
+                <a16:creationId xmlns:a16="http://schemas.microsoft.com/office/drawing/2014/main" id="{418AEDC0-5D8D-431C-8A3C-E510FC9DFCD9}"/>
               </a:ext>
             </a:extLst>
           </p:cNvPr>
@@ -17714,14 +18099,14 @@
       </p:sp>
       <p:pic>
         <p:nvPicPr>
-          <p:cNvPr id="19" name=""/>
+          <p:cNvPr id="20" name=""/>
           <p:cNvPicPr>
             <a:picLocks xmlns:a="http://schemas.openxmlformats.org/drawingml/2006/main" noChangeAspect="1"/>
           </p:cNvPicPr>
           <p:nvPr/>
         </p:nvPicPr>
         <p:blipFill>
-          <a:blip xmlns:r="http://schemas.openxmlformats.org/officeDocument/2006/relationships" xmlns:a="http://schemas.openxmlformats.org/drawingml/2006/main" r:embed="R154fec2b9b424cdf"/>
+          <a:blip xmlns:r="http://schemas.openxmlformats.org/officeDocument/2006/relationships" xmlns:a="http://schemas.openxmlformats.org/drawingml/2006/main" r:embed="R32e78edbf1284624"/>
           <a:stretch xmlns:a="http://schemas.openxmlformats.org/drawingml/2006/main"/>
         </p:blipFill>
         <p:spPr>
@@ -17739,7 +18124,7 @@
           <p:cNvPr id="3" name="Vexi Hakari">
             <a:extLst xmlns:a="http://schemas.openxmlformats.org/drawingml/2006/main">
               <a:ext uri="{FF2B5EF4-FFF2-40B4-BE49-F238E27FC236}">
-                <a16:creationId xmlns:a16="http://schemas.microsoft.com/office/drawing/2014/main" id="{428DE62F-A4FE-446E-8A6D-DB34E7C46EC1}"/>
+                <a16:creationId xmlns:a16="http://schemas.microsoft.com/office/drawing/2014/main" id="{DB1C2E6E-D889-4586-AA0B-3534F0282791}"/>
               </a:ext>
             </a:extLst>
           </p:cNvPr>
@@ -17793,22 +18178,22 @@
       </p:sp>
       <p:sp>
         <p:nvSpPr>
-          <p:cNvPr id="4" name="5">
-            <a:extLst xmlns:a="http://schemas.openxmlformats.org/drawingml/2006/main">
-              <a:ext uri="{FF2B5EF4-FFF2-40B4-BE49-F238E27FC236}">
-                <a16:creationId xmlns:a16="http://schemas.microsoft.com/office/drawing/2014/main" id="{2DCCCEC6-E46D-4FEF-86D9-67F44F097249}"/>
-              </a:ext>
-            </a:extLst>
-          </p:cNvPr>
-          <p:cNvSpPr>
-            <a:spLocks xmlns:a="http://schemas.openxmlformats.org/drawingml/2006/main" noGrp="1"/>
-          </p:cNvSpPr>
-          <p:nvPr/>
-        </p:nvSpPr>
-        <p:spPr>
-          <a:xfrm xmlns:a="http://schemas.openxmlformats.org/drawingml/2006/main">
-            <a:off x="11001375" y="6153150"/>
-            <a:ext cx="619125" cy="342900"/>
+          <p:cNvPr id="4" name="AAPL 範例／示意數值">
+            <a:extLst xmlns:a="http://schemas.openxmlformats.org/drawingml/2006/main">
+              <a:ext uri="{FF2B5EF4-FFF2-40B4-BE49-F238E27FC236}">
+                <a16:creationId xmlns:a16="http://schemas.microsoft.com/office/drawing/2014/main" id="{3286FDD3-E8A6-4560-B7CF-0ABCFDD0F819}"/>
+              </a:ext>
+            </a:extLst>
+          </p:cNvPr>
+          <p:cNvSpPr>
+            <a:spLocks xmlns:a="http://schemas.openxmlformats.org/drawingml/2006/main" noGrp="1"/>
+          </p:cNvSpPr>
+          <p:nvPr/>
+        </p:nvSpPr>
+        <p:spPr>
+          <a:xfrm xmlns:a="http://schemas.openxmlformats.org/drawingml/2006/main">
+            <a:off x="3905250" y="6153150"/>
+            <a:ext cx="6667500" cy="342900"/>
           </a:xfrm>
           <a:prstGeom xmlns:a="http://schemas.openxmlformats.org/drawingml/2006/main" prst="rect">
             <a:avLst/>
@@ -17824,7 +18209,7 @@
           </a:bodyPr>
           <a:lstStyle xmlns:a="http://schemas.openxmlformats.org/drawingml/2006/main"/>
           <a:p xmlns:a="http://schemas.openxmlformats.org/drawingml/2006/main">
-            <a:pPr algn="r">
+            <a:pPr algn="l">
               <a:defRPr sz="1275" b="0">
                 <a:solidFill>
                   <a:srgbClr val="A8A8B2"/>
@@ -17843,29 +18228,29 @@
                 <a:ea typeface="Arial Unicode MS"/>
                 <a:cs typeface="Arial Unicode MS"/>
               </a:rPr>
-              <a:t>5</a:t>
-            </a:r>
-          </a:p>
-        </p:txBody>
-      </p:sp>
-      <p:sp>
-        <p:nvSpPr>
-          <p:cNvPr id="5" name="10 口 call">
-            <a:extLst xmlns:a="http://schemas.openxmlformats.org/drawingml/2006/main">
-              <a:ext uri="{FF2B5EF4-FFF2-40B4-BE49-F238E27FC236}">
-                <a16:creationId xmlns:a16="http://schemas.microsoft.com/office/drawing/2014/main" id="{7206976B-79BB-44E3-A3B3-45FCAB128266}"/>
-              </a:ext>
-            </a:extLst>
-          </p:cNvPr>
-          <p:cNvSpPr>
-            <a:spLocks xmlns:a="http://schemas.openxmlformats.org/drawingml/2006/main" noGrp="1"/>
-          </p:cNvSpPr>
-          <p:nvPr/>
-        </p:nvSpPr>
-        <p:spPr>
-          <a:xfrm xmlns:a="http://schemas.openxmlformats.org/drawingml/2006/main">
-            <a:off x="714375" y="1495425"/>
-            <a:ext cx="3905250" cy="495300"/>
+              <a:t>AAPL 範例／示意數值</a:t>
+            </a:r>
+          </a:p>
+        </p:txBody>
+      </p:sp>
+      <p:sp>
+        <p:nvSpPr>
+          <p:cNvPr id="5" name="5">
+            <a:extLst xmlns:a="http://schemas.openxmlformats.org/drawingml/2006/main">
+              <a:ext uri="{FF2B5EF4-FFF2-40B4-BE49-F238E27FC236}">
+                <a16:creationId xmlns:a16="http://schemas.microsoft.com/office/drawing/2014/main" id="{D43819AB-D749-46DF-81F9-C85E35545333}"/>
+              </a:ext>
+            </a:extLst>
+          </p:cNvPr>
+          <p:cNvSpPr>
+            <a:spLocks xmlns:a="http://schemas.openxmlformats.org/drawingml/2006/main" noGrp="1"/>
+          </p:cNvSpPr>
+          <p:nvPr/>
+        </p:nvSpPr>
+        <p:spPr>
+          <a:xfrm xmlns:a="http://schemas.openxmlformats.org/drawingml/2006/main">
+            <a:off x="11001375" y="6153150"/>
+            <a:ext cx="619125" cy="342900"/>
           </a:xfrm>
           <a:prstGeom xmlns:a="http://schemas.openxmlformats.org/drawingml/2006/main" prst="rect">
             <a:avLst/>
@@ -17881,48 +18266,48 @@
           </a:bodyPr>
           <a:lstStyle xmlns:a="http://schemas.openxmlformats.org/drawingml/2006/main"/>
           <a:p xmlns:a="http://schemas.openxmlformats.org/drawingml/2006/main">
-            <a:pPr algn="l">
-              <a:defRPr sz="2325" b="1">
-                <a:solidFill>
-                  <a:srgbClr val="FAFAFA"/>
-                </a:solidFill>
-                <a:latin typeface="Arial Unicode MS"/>
-                <a:ea typeface="Arial Unicode MS"/>
-                <a:cs typeface="Arial Unicode MS"/>
-              </a:defRPr>
-            </a:pPr>
-            <a:r>
-              <a:rPr sz="2325" b="1">
-                <a:solidFill>
-                  <a:srgbClr val="FAFAFA"/>
-                </a:solidFill>
-                <a:latin typeface="Arial Unicode MS"/>
-                <a:ea typeface="Arial Unicode MS"/>
-                <a:cs typeface="Arial Unicode MS"/>
-              </a:rPr>
-              <a:t>10 口 call</a:t>
-            </a:r>
-          </a:p>
-        </p:txBody>
-      </p:sp>
-      <p:sp>
-        <p:nvSpPr>
-          <p:cNvPr id="6" name="10 口 put，履約價 400">
-            <a:extLst xmlns:a="http://schemas.openxmlformats.org/drawingml/2006/main">
-              <a:ext uri="{FF2B5EF4-FFF2-40B4-BE49-F238E27FC236}">
-                <a16:creationId xmlns:a16="http://schemas.microsoft.com/office/drawing/2014/main" id="{A1BB934C-E1C0-4042-A346-BDB2A523320A}"/>
-              </a:ext>
-            </a:extLst>
-          </p:cNvPr>
-          <p:cNvSpPr>
-            <a:spLocks xmlns:a="http://schemas.openxmlformats.org/drawingml/2006/main" noGrp="1"/>
-          </p:cNvSpPr>
-          <p:nvPr/>
-        </p:nvSpPr>
-        <p:spPr>
-          <a:xfrm xmlns:a="http://schemas.openxmlformats.org/drawingml/2006/main">
-            <a:off x="4857750" y="1495425"/>
-            <a:ext cx="4333875" cy="495300"/>
+            <a:pPr algn="r">
+              <a:defRPr sz="1275" b="0">
+                <a:solidFill>
+                  <a:srgbClr val="A8A8B2"/>
+                </a:solidFill>
+                <a:latin typeface="Arial Unicode MS"/>
+                <a:ea typeface="Arial Unicode MS"/>
+                <a:cs typeface="Arial Unicode MS"/>
+              </a:defRPr>
+            </a:pPr>
+            <a:r>
+              <a:rPr sz="1275" b="0">
+                <a:solidFill>
+                  <a:srgbClr val="A8A8B2"/>
+                </a:solidFill>
+                <a:latin typeface="Arial Unicode MS"/>
+                <a:ea typeface="Arial Unicode MS"/>
+                <a:cs typeface="Arial Unicode MS"/>
+              </a:rPr>
+              <a:t>5</a:t>
+            </a:r>
+          </a:p>
+        </p:txBody>
+      </p:sp>
+      <p:sp>
+        <p:nvSpPr>
+          <p:cNvPr id="6" name="10 口 call">
+            <a:extLst xmlns:a="http://schemas.openxmlformats.org/drawingml/2006/main">
+              <a:ext uri="{FF2B5EF4-FFF2-40B4-BE49-F238E27FC236}">
+                <a16:creationId xmlns:a16="http://schemas.microsoft.com/office/drawing/2014/main" id="{FC8760DF-F4EC-40B9-ABFE-939C1683918C}"/>
+              </a:ext>
+            </a:extLst>
+          </p:cNvPr>
+          <p:cNvSpPr>
+            <a:spLocks xmlns:a="http://schemas.openxmlformats.org/drawingml/2006/main" noGrp="1"/>
+          </p:cNvSpPr>
+          <p:nvPr/>
+        </p:nvSpPr>
+        <p:spPr>
+          <a:xfrm xmlns:a="http://schemas.openxmlformats.org/drawingml/2006/main">
+            <a:off x="714375" y="1495425"/>
+            <a:ext cx="3905250" cy="495300"/>
           </a:xfrm>
           <a:prstGeom xmlns:a="http://schemas.openxmlformats.org/drawingml/2006/main" prst="rect">
             <a:avLst/>
@@ -17957,6 +18342,63 @@
                 <a:ea typeface="Arial Unicode MS"/>
                 <a:cs typeface="Arial Unicode MS"/>
               </a:rPr>
+              <a:t>10 口 call</a:t>
+            </a:r>
+          </a:p>
+        </p:txBody>
+      </p:sp>
+      <p:sp>
+        <p:nvSpPr>
+          <p:cNvPr id="7" name="10 口 put，履約價 400">
+            <a:extLst xmlns:a="http://schemas.openxmlformats.org/drawingml/2006/main">
+              <a:ext uri="{FF2B5EF4-FFF2-40B4-BE49-F238E27FC236}">
+                <a16:creationId xmlns:a16="http://schemas.microsoft.com/office/drawing/2014/main" id="{4E7CF625-340A-41BB-8989-B62F39AB6562}"/>
+              </a:ext>
+            </a:extLst>
+          </p:cNvPr>
+          <p:cNvSpPr>
+            <a:spLocks xmlns:a="http://schemas.openxmlformats.org/drawingml/2006/main" noGrp="1"/>
+          </p:cNvSpPr>
+          <p:nvPr/>
+        </p:nvSpPr>
+        <p:spPr>
+          <a:xfrm xmlns:a="http://schemas.openxmlformats.org/drawingml/2006/main">
+            <a:off x="4857750" y="1495425"/>
+            <a:ext cx="4333875" cy="495300"/>
+          </a:xfrm>
+          <a:prstGeom xmlns:a="http://schemas.openxmlformats.org/drawingml/2006/main" prst="rect">
+            <a:avLst/>
+          </a:prstGeom>
+          <a:noFill xmlns:a="http://schemas.openxmlformats.org/drawingml/2006/main"/>
+          <a:ln xmlns:a="http://schemas.openxmlformats.org/drawingml/2006/main" w="0">
+            <a:noFill/>
+          </a:ln>
+        </p:spPr>
+        <p:txBody>
+          <a:bodyPr xmlns:a="http://schemas.openxmlformats.org/drawingml/2006/main" wrap="none" lIns="0" tIns="0" rIns="0" bIns="0" anchor="ctr">
+            <a:noAutofit/>
+          </a:bodyPr>
+          <a:lstStyle xmlns:a="http://schemas.openxmlformats.org/drawingml/2006/main"/>
+          <a:p xmlns:a="http://schemas.openxmlformats.org/drawingml/2006/main">
+            <a:pPr algn="l">
+              <a:defRPr sz="2325" b="1">
+                <a:solidFill>
+                  <a:srgbClr val="FAFAFA"/>
+                </a:solidFill>
+                <a:latin typeface="Arial Unicode MS"/>
+                <a:ea typeface="Arial Unicode MS"/>
+                <a:cs typeface="Arial Unicode MS"/>
+              </a:defRPr>
+            </a:pPr>
+            <a:r>
+              <a:rPr sz="2325" b="1">
+                <a:solidFill>
+                  <a:srgbClr val="FAFAFA"/>
+                </a:solidFill>
+                <a:latin typeface="Arial Unicode MS"/>
+                <a:ea typeface="Arial Unicode MS"/>
+                <a:cs typeface="Arial Unicode MS"/>
+              </a:rPr>
               <a:t>10 口 put，履約價 400</a:t>
             </a:r>
           </a:p>
@@ -17964,7 +18406,7 @@
       </p:sp>
       <p:graphicFrame>
         <p:nvGraphicFramePr>
-          <p:cNvPr id="24" name="Chart"/>
+          <p:cNvPr id="26" name="Chart"/>
           <p:cNvGraphicFramePr/>
           <p:nvPr/>
         </p:nvGraphicFramePr>
@@ -17974,13 +18416,13 @@
         </p:xfrm>
         <a:graphic xmlns:a="http://schemas.openxmlformats.org/drawingml/2006/main">
           <a:graphicData uri="http://schemas.openxmlformats.org/drawingml/2006/chart">
-            <c:chart xmlns:r="http://schemas.openxmlformats.org/officeDocument/2006/relationships" xmlns:c="http://schemas.openxmlformats.org/drawingml/2006/chart" r:id="Rebbfc9479ed143b9"/>
+            <c:chart xmlns:r="http://schemas.openxmlformats.org/officeDocument/2006/relationships" xmlns:c="http://schemas.openxmlformats.org/drawingml/2006/chart" r:id="R5b67b9e356ab4d10"/>
           </a:graphicData>
         </a:graphic>
       </p:graphicFrame>
       <p:graphicFrame>
         <p:nvGraphicFramePr>
-          <p:cNvPr id="25" name="Chart"/>
+          <p:cNvPr id="27" name="Chart"/>
           <p:cNvGraphicFramePr/>
           <p:nvPr/>
         </p:nvGraphicFramePr>
@@ -17990,16 +18432,16 @@
         </p:xfrm>
         <a:graphic xmlns:a="http://schemas.openxmlformats.org/drawingml/2006/main">
           <a:graphicData uri="http://schemas.openxmlformats.org/drawingml/2006/chart">
-            <c:chart xmlns:r="http://schemas.openxmlformats.org/officeDocument/2006/relationships" xmlns:c="http://schemas.openxmlformats.org/drawingml/2006/chart" r:id="R338f78c597c94a56"/>
+            <c:chart xmlns:r="http://schemas.openxmlformats.org/officeDocument/2006/relationships" xmlns:c="http://schemas.openxmlformats.org/drawingml/2006/chart" r:id="R1664708b3f8348cf"/>
           </a:graphicData>
         </a:graphic>
       </p:graphicFrame>
       <p:sp>
         <p:nvSpPr>
-          <p:cNvPr id="9" name="30 TSLA">
-            <a:extLst xmlns:a="http://schemas.openxmlformats.org/drawingml/2006/main">
-              <a:ext uri="{FF2B5EF4-FFF2-40B4-BE49-F238E27FC236}">
-                <a16:creationId xmlns:a16="http://schemas.microsoft.com/office/drawing/2014/main" id="{982063E1-C04B-4C04-B010-B1D3C2B755F7}"/>
+          <p:cNvPr id="10" name="30 AAPL">
+            <a:extLst xmlns:a="http://schemas.openxmlformats.org/drawingml/2006/main">
+              <a:ext uri="{FF2B5EF4-FFF2-40B4-BE49-F238E27FC236}">
+                <a16:creationId xmlns:a16="http://schemas.microsoft.com/office/drawing/2014/main" id="{248718A4-F169-4637-B254-C0A67C4D7DA7}"/>
               </a:ext>
             </a:extLst>
           </p:cNvPr>
@@ -18046,17 +18488,17 @@
                 <a:ea typeface="Arial Unicode MS"/>
                 <a:cs typeface="Arial Unicode MS"/>
               </a:rPr>
-              <a:t>30 TSLA</a:t>
-            </a:r>
-          </a:p>
-        </p:txBody>
-      </p:sp>
-      <p:sp>
-        <p:nvSpPr>
-          <p:cNvPr id="10" name="20,000 USDG">
-            <a:extLst xmlns:a="http://schemas.openxmlformats.org/drawingml/2006/main">
-              <a:ext uri="{FF2B5EF4-FFF2-40B4-BE49-F238E27FC236}">
-                <a16:creationId xmlns:a16="http://schemas.microsoft.com/office/drawing/2014/main" id="{8D9B6F98-61C0-44EE-8088-E0E16428A8A5}"/>
+              <a:t>30 AAPL</a:t>
+            </a:r>
+          </a:p>
+        </p:txBody>
+      </p:sp>
+      <p:sp>
+        <p:nvSpPr>
+          <p:cNvPr id="11" name="20,000 USDG">
+            <a:extLst xmlns:a="http://schemas.openxmlformats.org/drawingml/2006/main">
+              <a:ext uri="{FF2B5EF4-FFF2-40B4-BE49-F238E27FC236}">
+                <a16:creationId xmlns:a16="http://schemas.microsoft.com/office/drawing/2014/main" id="{D07CE38F-6B9A-4562-9F56-BBD6A98D2F33}"/>
               </a:ext>
             </a:extLst>
           </p:cNvPr>
@@ -18110,10 +18552,10 @@
       </p:sp>
       <p:sp>
         <p:nvSpPr>
-          <p:cNvPr id="11" name="0">
-            <a:extLst xmlns:a="http://schemas.openxmlformats.org/drawingml/2006/main">
-              <a:ext uri="{FF2B5EF4-FFF2-40B4-BE49-F238E27FC236}">
-                <a16:creationId xmlns:a16="http://schemas.microsoft.com/office/drawing/2014/main" id="{8D09AACD-ED91-4804-8C65-7BE63A6ED0C7}"/>
+          <p:cNvPr id="12" name="0">
+            <a:extLst xmlns:a="http://schemas.openxmlformats.org/drawingml/2006/main">
+              <a:ext uri="{FF2B5EF4-FFF2-40B4-BE49-F238E27FC236}">
+                <a16:creationId xmlns:a16="http://schemas.microsoft.com/office/drawing/2014/main" id="{59B33CEE-D247-41EA-B23D-ED79C3D30D67}"/>
               </a:ext>
             </a:extLst>
           </p:cNvPr>
@@ -18167,10 +18609,10 @@
       </p:sp>
       <p:sp>
         <p:nvSpPr>
-          <p:cNvPr id="12" name="Book 代幣">
-            <a:extLst xmlns:a="http://schemas.openxmlformats.org/drawingml/2006/main">
-              <a:ext uri="{FF2B5EF4-FFF2-40B4-BE49-F238E27FC236}">
-                <a16:creationId xmlns:a16="http://schemas.microsoft.com/office/drawing/2014/main" id="{8631490F-F388-4C60-B253-926CEA878979}"/>
+          <p:cNvPr id="13" name="Book 代幣">
+            <a:extLst xmlns:a="http://schemas.openxmlformats.org/drawingml/2006/main">
+              <a:ext uri="{FF2B5EF4-FFF2-40B4-BE49-F238E27FC236}">
+                <a16:creationId xmlns:a16="http://schemas.microsoft.com/office/drawing/2014/main" id="{919A42A6-84D4-4F94-9A07-1FCF211818D6}"/>
               </a:ext>
             </a:extLst>
           </p:cNvPr>
@@ -18224,10 +18666,10 @@
       </p:sp>
       <p:sp>
         <p:nvSpPr>
-          <p:cNvPr id="13" name="━">
-            <a:extLst xmlns:a="http://schemas.openxmlformats.org/drawingml/2006/main">
-              <a:ext uri="{FF2B5EF4-FFF2-40B4-BE49-F238E27FC236}">
-                <a16:creationId xmlns:a16="http://schemas.microsoft.com/office/drawing/2014/main" id="{FD5F5BFA-B8ED-4DB5-A283-5A2F6E8DB6DB}"/>
+          <p:cNvPr id="14" name="━">
+            <a:extLst xmlns:a="http://schemas.openxmlformats.org/drawingml/2006/main">
+              <a:ext uri="{FF2B5EF4-FFF2-40B4-BE49-F238E27FC236}">
+                <a16:creationId xmlns:a16="http://schemas.microsoft.com/office/drawing/2014/main" id="{AD11D22A-78AC-4593-996D-2C6EF1FF07F8}"/>
               </a:ext>
             </a:extLst>
           </p:cNvPr>
@@ -18281,10 +18723,10 @@
       </p:sp>
       <p:sp>
         <p:nvSpPr>
-          <p:cNvPr id="14" name="已承諾">
-            <a:extLst xmlns:a="http://schemas.openxmlformats.org/drawingml/2006/main">
-              <a:ext uri="{FF2B5EF4-FFF2-40B4-BE49-F238E27FC236}">
-                <a16:creationId xmlns:a16="http://schemas.microsoft.com/office/drawing/2014/main" id="{EA446A49-EA48-4463-B266-2003E74B9B6B}"/>
+          <p:cNvPr id="15" name="已承諾">
+            <a:extLst xmlns:a="http://schemas.openxmlformats.org/drawingml/2006/main">
+              <a:ext uri="{FF2B5EF4-FFF2-40B4-BE49-F238E27FC236}">
+                <a16:creationId xmlns:a16="http://schemas.microsoft.com/office/drawing/2014/main" id="{353B6418-2499-410A-A4E3-71C7F0F49777}"/>
               </a:ext>
             </a:extLst>
           </p:cNvPr>
@@ -18338,10 +18780,10 @@
       </p:sp>
       <p:sp>
         <p:nvSpPr>
-          <p:cNvPr id="15" name="━">
-            <a:extLst xmlns:a="http://schemas.openxmlformats.org/drawingml/2006/main">
-              <a:ext uri="{FF2B5EF4-FFF2-40B4-BE49-F238E27FC236}">
-                <a16:creationId xmlns:a16="http://schemas.microsoft.com/office/drawing/2014/main" id="{D79EFB17-D980-47D8-90FC-19C9B2E54A63}"/>
+          <p:cNvPr id="16" name="━">
+            <a:extLst xmlns:a="http://schemas.openxmlformats.org/drawingml/2006/main">
+              <a:ext uri="{FF2B5EF4-FFF2-40B4-BE49-F238E27FC236}">
+                <a16:creationId xmlns:a16="http://schemas.microsoft.com/office/drawing/2014/main" id="{90186B3E-3B45-42AE-9996-2784C1B38EE0}"/>
               </a:ext>
             </a:extLst>
           </p:cNvPr>
@@ -18395,10 +18837,10 @@
       </p:sp>
       <p:sp>
         <p:nvSpPr>
-          <p:cNvPr id="16" name="未承諾">
-            <a:extLst xmlns:a="http://schemas.openxmlformats.org/drawingml/2006/main">
-              <a:ext uri="{FF2B5EF4-FFF2-40B4-BE49-F238E27FC236}">
-                <a16:creationId xmlns:a16="http://schemas.microsoft.com/office/drawing/2014/main" id="{9D2B707D-287C-41F7-B311-EFE77CEFFEBF}"/>
+          <p:cNvPr id="17" name="未承諾">
+            <a:extLst xmlns:a="http://schemas.openxmlformats.org/drawingml/2006/main">
+              <a:ext uri="{FF2B5EF4-FFF2-40B4-BE49-F238E27FC236}">
+                <a16:creationId xmlns:a16="http://schemas.microsoft.com/office/drawing/2014/main" id="{1E917E3C-6342-4B77-BC1F-AD838BAB5707}"/>
               </a:ext>
             </a:extLst>
           </p:cNvPr>
@@ -18452,10 +18894,10 @@
       </p:sp>
       <p:sp>
         <p:nvSpPr>
-          <p:cNvPr id="17" name="Ship 與 post 不轉移代幣；虛擬額度不是額外資產">
-            <a:extLst xmlns:a="http://schemas.openxmlformats.org/drawingml/2006/main">
-              <a:ext uri="{FF2B5EF4-FFF2-40B4-BE49-F238E27FC236}">
-                <a16:creationId xmlns:a16="http://schemas.microsoft.com/office/drawing/2014/main" id="{B5402851-1B35-4E40-9108-304E20EF2402}"/>
+          <p:cNvPr id="18" name="Ship 與 post 不轉移代幣；虛擬額度不是額外資產">
+            <a:extLst xmlns:a="http://schemas.openxmlformats.org/drawingml/2006/main">
+              <a:ext uri="{FF2B5EF4-FFF2-40B4-BE49-F238E27FC236}">
+                <a16:creationId xmlns:a16="http://schemas.microsoft.com/office/drawing/2014/main" id="{17D78492-10AC-4DFC-A641-6FEE8442784A}"/>
               </a:ext>
             </a:extLst>
           </p:cNvPr>
@@ -18510,7 +18952,7 @@
     </p:spTree>
     <p:extLst>
       <p:ext uri="{BB962C8B-B14F-4D97-AF65-F5344CB8AC3E}">
-        <p14:creationId xmlns:p14="http://schemas.microsoft.com/office/powerpoint/2010/main" val="912522363"/>
+        <p14:creationId xmlns:p14="http://schemas.microsoft.com/office/powerpoint/2010/main" val="2049666904"/>
       </p:ext>
     </p:extLst>
   </p:cSld>
@@ -18538,10 +18980,10 @@
       </p:grpSpPr>
       <p:sp>
         <p:nvSpPr>
-          <p:cNvPr id="12" name="現貨 guard 保護未成交承諾">
-            <a:extLst xmlns:a="http://schemas.openxmlformats.org/drawingml/2006/main">
-              <a:ext uri="{FF2B5EF4-FFF2-40B4-BE49-F238E27FC236}">
-                <a16:creationId xmlns:a16="http://schemas.microsoft.com/office/drawing/2014/main" id="{4D0BDAF0-27DB-4D2B-9922-A310374DD80E}"/>
+          <p:cNvPr id="13" name="現貨 guard 保護未成交承諾">
+            <a:extLst xmlns:a="http://schemas.openxmlformats.org/drawingml/2006/main">
+              <a:ext uri="{FF2B5EF4-FFF2-40B4-BE49-F238E27FC236}">
+                <a16:creationId xmlns:a16="http://schemas.microsoft.com/office/drawing/2014/main" id="{0F9A1996-0190-4B26-A707-2861ED934EBE}"/>
               </a:ext>
             </a:extLst>
           </p:cNvPr>
@@ -18595,14 +19037,14 @@
       </p:sp>
       <p:pic>
         <p:nvPicPr>
-          <p:cNvPr id="13" name=""/>
+          <p:cNvPr id="14" name=""/>
           <p:cNvPicPr>
             <a:picLocks xmlns:a="http://schemas.openxmlformats.org/drawingml/2006/main" noChangeAspect="1"/>
           </p:cNvPicPr>
           <p:nvPr/>
         </p:nvPicPr>
         <p:blipFill>
-          <a:blip xmlns:r="http://schemas.openxmlformats.org/officeDocument/2006/relationships" xmlns:a="http://schemas.openxmlformats.org/drawingml/2006/main" r:embed="R4a4c7b7bc1e14b92"/>
+          <a:blip xmlns:r="http://schemas.openxmlformats.org/officeDocument/2006/relationships" xmlns:a="http://schemas.openxmlformats.org/drawingml/2006/main" r:embed="R7c1810952f464d01"/>
           <a:stretch xmlns:a="http://schemas.openxmlformats.org/drawingml/2006/main"/>
         </p:blipFill>
         <p:spPr>
@@ -18620,7 +19062,7 @@
           <p:cNvPr id="3" name="Vexi Hakari">
             <a:extLst xmlns:a="http://schemas.openxmlformats.org/drawingml/2006/main">
               <a:ext uri="{FF2B5EF4-FFF2-40B4-BE49-F238E27FC236}">
-                <a16:creationId xmlns:a16="http://schemas.microsoft.com/office/drawing/2014/main" id="{A3B009C2-7109-42FE-BA4A-719A1A506E9E}"/>
+                <a16:creationId xmlns:a16="http://schemas.microsoft.com/office/drawing/2014/main" id="{72BC84FB-BD08-46C4-BB7C-E025C5BFF64C}"/>
               </a:ext>
             </a:extLst>
           </p:cNvPr>
@@ -18674,22 +19116,22 @@
       </p:sp>
       <p:sp>
         <p:nvSpPr>
-          <p:cNvPr id="4" name="6">
-            <a:extLst xmlns:a="http://schemas.openxmlformats.org/drawingml/2006/main">
-              <a:ext uri="{FF2B5EF4-FFF2-40B4-BE49-F238E27FC236}">
-                <a16:creationId xmlns:a16="http://schemas.microsoft.com/office/drawing/2014/main" id="{C47EDCE9-422F-4E96-957C-9052C3FE422C}"/>
-              </a:ext>
-            </a:extLst>
-          </p:cNvPr>
-          <p:cNvSpPr>
-            <a:spLocks xmlns:a="http://schemas.openxmlformats.org/drawingml/2006/main" noGrp="1"/>
-          </p:cNvSpPr>
-          <p:nvPr/>
-        </p:nvSpPr>
-        <p:spPr>
-          <a:xfrm xmlns:a="http://schemas.openxmlformats.org/drawingml/2006/main">
-            <a:off x="11001375" y="6153150"/>
-            <a:ext cx="619125" cy="342900"/>
+          <p:cNvPr id="4" name="AAPL 範例／示意數值">
+            <a:extLst xmlns:a="http://schemas.openxmlformats.org/drawingml/2006/main">
+              <a:ext uri="{FF2B5EF4-FFF2-40B4-BE49-F238E27FC236}">
+                <a16:creationId xmlns:a16="http://schemas.microsoft.com/office/drawing/2014/main" id="{67B60C3C-B7C1-4B46-B528-82DC5197FA19}"/>
+              </a:ext>
+            </a:extLst>
+          </p:cNvPr>
+          <p:cNvSpPr>
+            <a:spLocks xmlns:a="http://schemas.openxmlformats.org/drawingml/2006/main" noGrp="1"/>
+          </p:cNvSpPr>
+          <p:nvPr/>
+        </p:nvSpPr>
+        <p:spPr>
+          <a:xfrm xmlns:a="http://schemas.openxmlformats.org/drawingml/2006/main">
+            <a:off x="3905250" y="6153150"/>
+            <a:ext cx="6667500" cy="342900"/>
           </a:xfrm>
           <a:prstGeom xmlns:a="http://schemas.openxmlformats.org/drawingml/2006/main" prst="rect">
             <a:avLst/>
@@ -18705,7 +19147,7 @@
           </a:bodyPr>
           <a:lstStyle xmlns:a="http://schemas.openxmlformats.org/drawingml/2006/main"/>
           <a:p xmlns:a="http://schemas.openxmlformats.org/drawingml/2006/main">
-            <a:pPr algn="r">
+            <a:pPr algn="l">
               <a:defRPr sz="1275" b="0">
                 <a:solidFill>
                   <a:srgbClr val="A8A8B2"/>
@@ -18724,29 +19166,29 @@
                 <a:ea typeface="Arial Unicode MS"/>
                 <a:cs typeface="Arial Unicode MS"/>
               </a:rPr>
-              <a:t>6</a:t>
-            </a:r>
-          </a:p>
-        </p:txBody>
-      </p:sp>
-      <p:sp>
-        <p:nvSpPr>
-          <p:cNvPr id="5" name="可用庫存 = 錢包餘額 − 已承諾">
-            <a:extLst xmlns:a="http://schemas.openxmlformats.org/drawingml/2006/main">
-              <a:ext uri="{FF2B5EF4-FFF2-40B4-BE49-F238E27FC236}">
-                <a16:creationId xmlns:a16="http://schemas.microsoft.com/office/drawing/2014/main" id="{B26143F0-81F7-4984-890D-5D8851843FED}"/>
-              </a:ext>
-            </a:extLst>
-          </p:cNvPr>
-          <p:cNvSpPr>
-            <a:spLocks xmlns:a="http://schemas.openxmlformats.org/drawingml/2006/main" noGrp="1"/>
-          </p:cNvSpPr>
-          <p:nvPr/>
-        </p:nvSpPr>
-        <p:spPr>
-          <a:xfrm xmlns:a="http://schemas.openxmlformats.org/drawingml/2006/main">
-            <a:off x="666750" y="1419225"/>
-            <a:ext cx="10858500" cy="571500"/>
+              <a:t>AAPL 範例／示意數值</a:t>
+            </a:r>
+          </a:p>
+        </p:txBody>
+      </p:sp>
+      <p:sp>
+        <p:nvSpPr>
+          <p:cNvPr id="5" name="6">
+            <a:extLst xmlns:a="http://schemas.openxmlformats.org/drawingml/2006/main">
+              <a:ext uri="{FF2B5EF4-FFF2-40B4-BE49-F238E27FC236}">
+                <a16:creationId xmlns:a16="http://schemas.microsoft.com/office/drawing/2014/main" id="{5E758E5D-CD43-4E80-AF3F-716B655A5B69}"/>
+              </a:ext>
+            </a:extLst>
+          </p:cNvPr>
+          <p:cNvSpPr>
+            <a:spLocks xmlns:a="http://schemas.openxmlformats.org/drawingml/2006/main" noGrp="1"/>
+          </p:cNvSpPr>
+          <p:nvPr/>
+        </p:nvSpPr>
+        <p:spPr>
+          <a:xfrm xmlns:a="http://schemas.openxmlformats.org/drawingml/2006/main">
+            <a:off x="11001375" y="6153150"/>
+            <a:ext cx="619125" cy="342900"/>
           </a:xfrm>
           <a:prstGeom xmlns:a="http://schemas.openxmlformats.org/drawingml/2006/main" prst="rect">
             <a:avLst/>
@@ -18762,6 +19204,63 @@
           </a:bodyPr>
           <a:lstStyle xmlns:a="http://schemas.openxmlformats.org/drawingml/2006/main"/>
           <a:p xmlns:a="http://schemas.openxmlformats.org/drawingml/2006/main">
+            <a:pPr algn="r">
+              <a:defRPr sz="1275" b="0">
+                <a:solidFill>
+                  <a:srgbClr val="A8A8B2"/>
+                </a:solidFill>
+                <a:latin typeface="Arial Unicode MS"/>
+                <a:ea typeface="Arial Unicode MS"/>
+                <a:cs typeface="Arial Unicode MS"/>
+              </a:defRPr>
+            </a:pPr>
+            <a:r>
+              <a:rPr sz="1275" b="0">
+                <a:solidFill>
+                  <a:srgbClr val="A8A8B2"/>
+                </a:solidFill>
+                <a:latin typeface="Arial Unicode MS"/>
+                <a:ea typeface="Arial Unicode MS"/>
+                <a:cs typeface="Arial Unicode MS"/>
+              </a:rPr>
+              <a:t>6</a:t>
+            </a:r>
+          </a:p>
+        </p:txBody>
+      </p:sp>
+      <p:sp>
+        <p:nvSpPr>
+          <p:cNvPr id="6" name="可用庫存 = 錢包餘額 − 已承諾">
+            <a:extLst xmlns:a="http://schemas.openxmlformats.org/drawingml/2006/main">
+              <a:ext uri="{FF2B5EF4-FFF2-40B4-BE49-F238E27FC236}">
+                <a16:creationId xmlns:a16="http://schemas.microsoft.com/office/drawing/2014/main" id="{D73D626D-7326-4968-938E-A4CB1B5E48AD}"/>
+              </a:ext>
+            </a:extLst>
+          </p:cNvPr>
+          <p:cNvSpPr>
+            <a:spLocks xmlns:a="http://schemas.openxmlformats.org/drawingml/2006/main" noGrp="1"/>
+          </p:cNvSpPr>
+          <p:nvPr/>
+        </p:nvSpPr>
+        <p:spPr>
+          <a:xfrm xmlns:a="http://schemas.openxmlformats.org/drawingml/2006/main">
+            <a:off x="666750" y="1419225"/>
+            <a:ext cx="10858500" cy="571500"/>
+          </a:xfrm>
+          <a:prstGeom xmlns:a="http://schemas.openxmlformats.org/drawingml/2006/main" prst="rect">
+            <a:avLst/>
+          </a:prstGeom>
+          <a:noFill xmlns:a="http://schemas.openxmlformats.org/drawingml/2006/main"/>
+          <a:ln xmlns:a="http://schemas.openxmlformats.org/drawingml/2006/main" w="0">
+            <a:noFill/>
+          </a:ln>
+        </p:spPr>
+        <p:txBody>
+          <a:bodyPr xmlns:a="http://schemas.openxmlformats.org/drawingml/2006/main" wrap="none" lIns="0" tIns="0" rIns="0" bIns="0" anchor="ctr">
+            <a:noAutofit/>
+          </a:bodyPr>
+          <a:lstStyle xmlns:a="http://schemas.openxmlformats.org/drawingml/2006/main"/>
+          <a:p xmlns:a="http://schemas.openxmlformats.org/drawingml/2006/main">
             <a:pPr algn="l">
               <a:defRPr sz="2700" b="1">
                 <a:solidFill>
@@ -18788,7 +19287,7 @@
       </p:sp>
       <p:graphicFrame>
         <p:nvGraphicFramePr>
-          <p:cNvPr id="17" name="Chart"/>
+          <p:cNvPr id="19" name="Chart"/>
           <p:cNvGraphicFramePr/>
           <p:nvPr/>
         </p:nvGraphicFramePr>
@@ -18798,16 +19297,16 @@
         </p:xfrm>
         <a:graphic xmlns:a="http://schemas.openxmlformats.org/drawingml/2006/main">
           <a:graphicData uri="http://schemas.openxmlformats.org/drawingml/2006/chart">
-            <c:chart xmlns:r="http://schemas.openxmlformats.org/officeDocument/2006/relationships" xmlns:c="http://schemas.openxmlformats.org/drawingml/2006/chart" r:id="R3d1c9feff651444a"/>
+            <c:chart xmlns:r="http://schemas.openxmlformats.org/officeDocument/2006/relationships" xmlns:c="http://schemas.openxmlformats.org/drawingml/2006/chart" r:id="Rc8f738361d4e4323"/>
           </a:graphicData>
         </a:graphic>
       </p:graphicFrame>
       <p:sp>
         <p:nvSpPr>
-          <p:cNvPr id="7" name="29.05 &gt; 10">
-            <a:extLst xmlns:a="http://schemas.openxmlformats.org/drawingml/2006/main">
-              <a:ext uri="{FF2B5EF4-FFF2-40B4-BE49-F238E27FC236}">
-                <a16:creationId xmlns:a16="http://schemas.microsoft.com/office/drawing/2014/main" id="{3411342A-BC54-496B-8A9E-DA051181B4E2}"/>
+          <p:cNvPr id="8" name="29.05 &gt; 10">
+            <a:extLst xmlns:a="http://schemas.openxmlformats.org/drawingml/2006/main">
+              <a:ext uri="{FF2B5EF4-FFF2-40B4-BE49-F238E27FC236}">
+                <a16:creationId xmlns:a16="http://schemas.microsoft.com/office/drawing/2014/main" id="{B504FDB9-41FB-4750-9D2D-29CF18ABE142}"/>
               </a:ext>
             </a:extLst>
           </p:cNvPr>
@@ -18861,10 +19360,10 @@
       </p:sp>
       <p:sp>
         <p:nvSpPr>
-          <p:cNvPr id="8" name="承諾仍有足額支撐">
-            <a:extLst xmlns:a="http://schemas.openxmlformats.org/drawingml/2006/main">
-              <a:ext uri="{FF2B5EF4-FFF2-40B4-BE49-F238E27FC236}">
-                <a16:creationId xmlns:a16="http://schemas.microsoft.com/office/drawing/2014/main" id="{2BBC67A3-3FA2-4FD6-8119-03E5214C4DD9}"/>
+          <p:cNvPr id="9" name="承諾仍有足額支撐">
+            <a:extLst xmlns:a="http://schemas.openxmlformats.org/drawingml/2006/main">
+              <a:ext uri="{FF2B5EF4-FFF2-40B4-BE49-F238E27FC236}">
+                <a16:creationId xmlns:a16="http://schemas.microsoft.com/office/drawing/2014/main" id="{8AD16598-587F-43B2-8A4B-346B8E3A3DBA}"/>
               </a:ext>
             </a:extLst>
           </p:cNvPr>
@@ -18918,10 +19417,10 @@
       </p:sp>
       <p:sp>
         <p:nvSpPr>
-          <p:cNvPr id="9" name="9 &lt; 10">
-            <a:extLst xmlns:a="http://schemas.openxmlformats.org/drawingml/2006/main">
-              <a:ext uri="{FF2B5EF4-FFF2-40B4-BE49-F238E27FC236}">
-                <a16:creationId xmlns:a16="http://schemas.microsoft.com/office/drawing/2014/main" id="{919E9788-431D-4697-B892-59D928C2B8E2}"/>
+          <p:cNvPr id="10" name="9 &lt; 10">
+            <a:extLst xmlns:a="http://schemas.openxmlformats.org/drawingml/2006/main">
+              <a:ext uri="{FF2B5EF4-FFF2-40B4-BE49-F238E27FC236}">
+                <a16:creationId xmlns:a16="http://schemas.microsoft.com/office/drawing/2014/main" id="{1DBCC972-9637-4B4D-93AD-B330E402A96F}"/>
               </a:ext>
             </a:extLst>
           </p:cNvPr>
@@ -18975,10 +19474,10 @@
       </p:sp>
       <p:sp>
         <p:nvSpPr>
-          <p:cNvPr id="10" name="後續成交拒絕">
-            <a:extLst xmlns:a="http://schemas.openxmlformats.org/drawingml/2006/main">
-              <a:ext uri="{FF2B5EF4-FFF2-40B4-BE49-F238E27FC236}">
-                <a16:creationId xmlns:a16="http://schemas.microsoft.com/office/drawing/2014/main" id="{8DD6A687-9584-4654-AF69-3551582F0F7D}"/>
+          <p:cNvPr id="11" name="後續成交拒絕">
+            <a:extLst xmlns:a="http://schemas.openxmlformats.org/drawingml/2006/main">
+              <a:ext uri="{FF2B5EF4-FFF2-40B4-BE49-F238E27FC236}">
+                <a16:creationId xmlns:a16="http://schemas.microsoft.com/office/drawing/2014/main" id="{01EE5352-2FED-4731-A4A6-1F6E83238536}"/>
               </a:ext>
             </a:extLst>
           </p:cNvPr>
@@ -19032,10 +19531,10 @@
       </p:sp>
       <p:sp>
         <p:nvSpPr>
-          <p:cNvPr id="11" name="獨立情境：有 guard 交易 400 USDG；無 guard 賣出 21 TSLA">
-            <a:extLst xmlns:a="http://schemas.openxmlformats.org/drawingml/2006/main">
-              <a:ext uri="{FF2B5EF4-FFF2-40B4-BE49-F238E27FC236}">
-                <a16:creationId xmlns:a16="http://schemas.microsoft.com/office/drawing/2014/main" id="{0081A471-F2EB-4790-8152-E96EA9CDADF8}"/>
+          <p:cNvPr id="12" name="獨立情境：有 guard 交易 400 USDG；無 guard 賣出 21 AAPL">
+            <a:extLst xmlns:a="http://schemas.openxmlformats.org/drawingml/2006/main">
+              <a:ext uri="{FF2B5EF4-FFF2-40B4-BE49-F238E27FC236}">
+                <a16:creationId xmlns:a16="http://schemas.microsoft.com/office/drawing/2014/main" id="{A017B44B-AF17-45E9-91D5-CE42987D36C8}"/>
               </a:ext>
             </a:extLst>
           </p:cNvPr>
@@ -19082,7 +19581,7 @@
                 <a:ea typeface="Arial Unicode MS"/>
                 <a:cs typeface="Arial Unicode MS"/>
               </a:rPr>
-              <a:t>獨立情境：有 guard 交易 400 USDG；無 guard 賣出 21 TSLA</a:t>
+              <a:t>獨立情境：有 guard 交易 400 USDG；無 guard 賣出 21 AAPL</a:t>
             </a:r>
           </a:p>
         </p:txBody>
@@ -19090,7 +19589,7 @@
     </p:spTree>
     <p:extLst>
       <p:ext uri="{BB962C8B-B14F-4D97-AF65-F5344CB8AC3E}">
-        <p14:creationId xmlns:p14="http://schemas.microsoft.com/office/powerpoint/2010/main" val="1266753964"/>
+        <p14:creationId xmlns:p14="http://schemas.microsoft.com/office/powerpoint/2010/main" val="1319005814"/>
       </p:ext>
     </p:extLst>
   </p:cSld>
@@ -19118,10 +19617,10 @@
       </p:grpSpPr>
       <p:sp>
         <p:nvSpPr>
-          <p:cNvPr id="22" name="成交時拉取剛好的抵押品">
-            <a:extLst xmlns:a="http://schemas.openxmlformats.org/drawingml/2006/main">
-              <a:ext uri="{FF2B5EF4-FFF2-40B4-BE49-F238E27FC236}">
-                <a16:creationId xmlns:a16="http://schemas.microsoft.com/office/drawing/2014/main" id="{600704B5-B844-46E3-9547-B18319B32BA6}"/>
+          <p:cNvPr id="23" name="成交時拉取剛好的抵押品">
+            <a:extLst xmlns:a="http://schemas.openxmlformats.org/drawingml/2006/main">
+              <a:ext uri="{FF2B5EF4-FFF2-40B4-BE49-F238E27FC236}">
+                <a16:creationId xmlns:a16="http://schemas.microsoft.com/office/drawing/2014/main" id="{FE530194-C421-45A7-92EF-76C9FFEBB84F}"/>
               </a:ext>
             </a:extLst>
           </p:cNvPr>
@@ -19175,14 +19674,14 @@
       </p:sp>
       <p:pic>
         <p:nvPicPr>
-          <p:cNvPr id="23" name=""/>
+          <p:cNvPr id="24" name=""/>
           <p:cNvPicPr>
             <a:picLocks xmlns:a="http://schemas.openxmlformats.org/drawingml/2006/main" noChangeAspect="1"/>
           </p:cNvPicPr>
           <p:nvPr/>
         </p:nvPicPr>
         <p:blipFill>
-          <a:blip xmlns:r="http://schemas.openxmlformats.org/officeDocument/2006/relationships" xmlns:a="http://schemas.openxmlformats.org/drawingml/2006/main" r:embed="R1c82445989cd4c1b"/>
+          <a:blip xmlns:r="http://schemas.openxmlformats.org/officeDocument/2006/relationships" xmlns:a="http://schemas.openxmlformats.org/drawingml/2006/main" r:embed="R30b9e92ac9e54b4a"/>
           <a:stretch xmlns:a="http://schemas.openxmlformats.org/drawingml/2006/main"/>
         </p:blipFill>
         <p:spPr>
@@ -19200,7 +19699,7 @@
           <p:cNvPr id="3" name="Vexi Hakari">
             <a:extLst xmlns:a="http://schemas.openxmlformats.org/drawingml/2006/main">
               <a:ext uri="{FF2B5EF4-FFF2-40B4-BE49-F238E27FC236}">
-                <a16:creationId xmlns:a16="http://schemas.microsoft.com/office/drawing/2014/main" id="{ACBFA8E9-CC44-483C-AAD4-58956E157DC1}"/>
+                <a16:creationId xmlns:a16="http://schemas.microsoft.com/office/drawing/2014/main" id="{C1F1C581-915D-4B60-9C4B-44271A431D58}"/>
               </a:ext>
             </a:extLst>
           </p:cNvPr>
@@ -19254,22 +19753,22 @@
       </p:sp>
       <p:sp>
         <p:nvSpPr>
-          <p:cNvPr id="4" name="7">
-            <a:extLst xmlns:a="http://schemas.openxmlformats.org/drawingml/2006/main">
-              <a:ext uri="{FF2B5EF4-FFF2-40B4-BE49-F238E27FC236}">
-                <a16:creationId xmlns:a16="http://schemas.microsoft.com/office/drawing/2014/main" id="{A820835B-FF60-4354-B3C4-7FAE7D22A8C6}"/>
-              </a:ext>
-            </a:extLst>
-          </p:cNvPr>
-          <p:cNvSpPr>
-            <a:spLocks xmlns:a="http://schemas.openxmlformats.org/drawingml/2006/main" noGrp="1"/>
-          </p:cNvSpPr>
-          <p:nvPr/>
-        </p:nvSpPr>
-        <p:spPr>
-          <a:xfrm xmlns:a="http://schemas.openxmlformats.org/drawingml/2006/main">
-            <a:off x="11001375" y="6153150"/>
-            <a:ext cx="619125" cy="342900"/>
+          <p:cNvPr id="4" name="AAPL 範例／示意數值">
+            <a:extLst xmlns:a="http://schemas.openxmlformats.org/drawingml/2006/main">
+              <a:ext uri="{FF2B5EF4-FFF2-40B4-BE49-F238E27FC236}">
+                <a16:creationId xmlns:a16="http://schemas.microsoft.com/office/drawing/2014/main" id="{45E92B2A-AAC7-43E3-B8AC-BA1ABDE0526F}"/>
+              </a:ext>
+            </a:extLst>
+          </p:cNvPr>
+          <p:cNvSpPr>
+            <a:spLocks xmlns:a="http://schemas.openxmlformats.org/drawingml/2006/main" noGrp="1"/>
+          </p:cNvSpPr>
+          <p:nvPr/>
+        </p:nvSpPr>
+        <p:spPr>
+          <a:xfrm xmlns:a="http://schemas.openxmlformats.org/drawingml/2006/main">
+            <a:off x="3905250" y="6153150"/>
+            <a:ext cx="6667500" cy="342900"/>
           </a:xfrm>
           <a:prstGeom xmlns:a="http://schemas.openxmlformats.org/drawingml/2006/main" prst="rect">
             <a:avLst/>
@@ -19285,7 +19784,7 @@
           </a:bodyPr>
           <a:lstStyle xmlns:a="http://schemas.openxmlformats.org/drawingml/2006/main"/>
           <a:p xmlns:a="http://schemas.openxmlformats.org/drawingml/2006/main">
-            <a:pPr algn="r">
+            <a:pPr algn="l">
               <a:defRPr sz="1275" b="0">
                 <a:solidFill>
                   <a:srgbClr val="A8A8B2"/>
@@ -19304,29 +19803,29 @@
                 <a:ea typeface="Arial Unicode MS"/>
                 <a:cs typeface="Arial Unicode MS"/>
               </a:rPr>
-              <a:t>7</a:t>
-            </a:r>
-          </a:p>
-        </p:txBody>
-      </p:sp>
-      <p:sp>
-        <p:nvSpPr>
-          <p:cNvPr id="5" name="5 口 call + 3 口 put">
-            <a:extLst xmlns:a="http://schemas.openxmlformats.org/drawingml/2006/main">
-              <a:ext uri="{FF2B5EF4-FFF2-40B4-BE49-F238E27FC236}">
-                <a16:creationId xmlns:a16="http://schemas.microsoft.com/office/drawing/2014/main" id="{2C980826-16B1-4354-9BD5-520ABF3C1F57}"/>
-              </a:ext>
-            </a:extLst>
-          </p:cNvPr>
-          <p:cNvSpPr>
-            <a:spLocks xmlns:a="http://schemas.openxmlformats.org/drawingml/2006/main" noGrp="1"/>
-          </p:cNvSpPr>
-          <p:nvPr/>
-        </p:nvSpPr>
-        <p:spPr>
-          <a:xfrm xmlns:a="http://schemas.openxmlformats.org/drawingml/2006/main">
-            <a:off x="609600" y="1419225"/>
-            <a:ext cx="7715250" cy="523875"/>
+              <a:t>AAPL 範例／示意數值</a:t>
+            </a:r>
+          </a:p>
+        </p:txBody>
+      </p:sp>
+      <p:sp>
+        <p:nvSpPr>
+          <p:cNvPr id="5" name="7">
+            <a:extLst xmlns:a="http://schemas.openxmlformats.org/drawingml/2006/main">
+              <a:ext uri="{FF2B5EF4-FFF2-40B4-BE49-F238E27FC236}">
+                <a16:creationId xmlns:a16="http://schemas.microsoft.com/office/drawing/2014/main" id="{853DA0B5-4CF9-4A21-A9A8-B865F1B17FF2}"/>
+              </a:ext>
+            </a:extLst>
+          </p:cNvPr>
+          <p:cNvSpPr>
+            <a:spLocks xmlns:a="http://schemas.openxmlformats.org/drawingml/2006/main" noGrp="1"/>
+          </p:cNvSpPr>
+          <p:nvPr/>
+        </p:nvSpPr>
+        <p:spPr>
+          <a:xfrm xmlns:a="http://schemas.openxmlformats.org/drawingml/2006/main">
+            <a:off x="11001375" y="6153150"/>
+            <a:ext cx="619125" cy="342900"/>
           </a:xfrm>
           <a:prstGeom xmlns:a="http://schemas.openxmlformats.org/drawingml/2006/main" prst="rect">
             <a:avLst/>
@@ -19342,6 +19841,63 @@
           </a:bodyPr>
           <a:lstStyle xmlns:a="http://schemas.openxmlformats.org/drawingml/2006/main"/>
           <a:p xmlns:a="http://schemas.openxmlformats.org/drawingml/2006/main">
+            <a:pPr algn="r">
+              <a:defRPr sz="1275" b="0">
+                <a:solidFill>
+                  <a:srgbClr val="A8A8B2"/>
+                </a:solidFill>
+                <a:latin typeface="Arial Unicode MS"/>
+                <a:ea typeface="Arial Unicode MS"/>
+                <a:cs typeface="Arial Unicode MS"/>
+              </a:defRPr>
+            </a:pPr>
+            <a:r>
+              <a:rPr sz="1275" b="0">
+                <a:solidFill>
+                  <a:srgbClr val="A8A8B2"/>
+                </a:solidFill>
+                <a:latin typeface="Arial Unicode MS"/>
+                <a:ea typeface="Arial Unicode MS"/>
+                <a:cs typeface="Arial Unicode MS"/>
+              </a:rPr>
+              <a:t>7</a:t>
+            </a:r>
+          </a:p>
+        </p:txBody>
+      </p:sp>
+      <p:sp>
+        <p:nvSpPr>
+          <p:cNvPr id="6" name="5 口 call + 3 口 put">
+            <a:extLst xmlns:a="http://schemas.openxmlformats.org/drawingml/2006/main">
+              <a:ext uri="{FF2B5EF4-FFF2-40B4-BE49-F238E27FC236}">
+                <a16:creationId xmlns:a16="http://schemas.microsoft.com/office/drawing/2014/main" id="{71023BD5-23B4-4ADD-9F68-89BF3ED17E92}"/>
+              </a:ext>
+            </a:extLst>
+          </p:cNvPr>
+          <p:cNvSpPr>
+            <a:spLocks xmlns:a="http://schemas.openxmlformats.org/drawingml/2006/main" noGrp="1"/>
+          </p:cNvSpPr>
+          <p:nvPr/>
+        </p:nvSpPr>
+        <p:spPr>
+          <a:xfrm xmlns:a="http://schemas.openxmlformats.org/drawingml/2006/main">
+            <a:off x="609600" y="1419225"/>
+            <a:ext cx="7715250" cy="523875"/>
+          </a:xfrm>
+          <a:prstGeom xmlns:a="http://schemas.openxmlformats.org/drawingml/2006/main" prst="rect">
+            <a:avLst/>
+          </a:prstGeom>
+          <a:noFill xmlns:a="http://schemas.openxmlformats.org/drawingml/2006/main"/>
+          <a:ln xmlns:a="http://schemas.openxmlformats.org/drawingml/2006/main" w="0">
+            <a:noFill/>
+          </a:ln>
+        </p:spPr>
+        <p:txBody>
+          <a:bodyPr xmlns:a="http://schemas.openxmlformats.org/drawingml/2006/main" wrap="none" lIns="0" tIns="0" rIns="0" bIns="0" anchor="ctr">
+            <a:noAutofit/>
+          </a:bodyPr>
+          <a:lstStyle xmlns:a="http://schemas.openxmlformats.org/drawingml/2006/main"/>
+          <a:p xmlns:a="http://schemas.openxmlformats.org/drawingml/2006/main">
             <a:pPr algn="l">
               <a:defRPr sz="2625" b="1">
                 <a:solidFill>
@@ -19368,10 +19924,10 @@
       </p:sp>
       <p:sp>
         <p:nvSpPr>
-          <p:cNvPr id="6" name="造市者">
-            <a:extLst xmlns:a="http://schemas.openxmlformats.org/drawingml/2006/main">
-              <a:ext uri="{FF2B5EF4-FFF2-40B4-BE49-F238E27FC236}">
-                <a16:creationId xmlns:a16="http://schemas.microsoft.com/office/drawing/2014/main" id="{DFFC09AB-E813-49A9-B063-68B192949EC9}"/>
+          <p:cNvPr id="7" name="造市者">
+            <a:extLst xmlns:a="http://schemas.openxmlformats.org/drawingml/2006/main">
+              <a:ext uri="{FF2B5EF4-FFF2-40B4-BE49-F238E27FC236}">
+                <a16:creationId xmlns:a16="http://schemas.microsoft.com/office/drawing/2014/main" id="{F711CF1C-C856-47D8-ADEE-3341CF289721}"/>
               </a:ext>
             </a:extLst>
           </p:cNvPr>
@@ -19429,10 +19985,10 @@
       </p:sp>
       <p:sp>
         <p:nvSpPr>
-          <p:cNvPr id="7" name="Aqua.pull">
-            <a:extLst xmlns:a="http://schemas.openxmlformats.org/drawingml/2006/main">
-              <a:ext uri="{FF2B5EF4-FFF2-40B4-BE49-F238E27FC236}">
-                <a16:creationId xmlns:a16="http://schemas.microsoft.com/office/drawing/2014/main" id="{C21ED78C-931D-4384-8185-BC28EF3229AD}"/>
+          <p:cNvPr id="8" name="Aqua.pull">
+            <a:extLst xmlns:a="http://schemas.openxmlformats.org/drawingml/2006/main">
+              <a:ext uri="{FF2B5EF4-FFF2-40B4-BE49-F238E27FC236}">
+                <a16:creationId xmlns:a16="http://schemas.microsoft.com/office/drawing/2014/main" id="{07B605E6-66CA-4939-BC60-F2626A89F273}"/>
               </a:ext>
             </a:extLst>
           </p:cNvPr>
@@ -19490,10 +20046,10 @@
       </p:sp>
       <p:sp>
         <p:nvSpPr>
-          <p:cNvPr id="8" name="">
-            <a:extLst xmlns:a="http://schemas.openxmlformats.org/drawingml/2006/main">
-              <a:ext uri="{FF2B5EF4-FFF2-40B4-BE49-F238E27FC236}">
-                <a16:creationId xmlns:a16="http://schemas.microsoft.com/office/drawing/2014/main" id="{C7E5F396-BDB0-4C6A-86B6-FF562EA45D33}"/>
+          <p:cNvPr id="9" name="">
+            <a:extLst xmlns:a="http://schemas.openxmlformats.org/drawingml/2006/main">
+              <a:ext uri="{FF2B5EF4-FFF2-40B4-BE49-F238E27FC236}">
+                <a16:creationId xmlns:a16="http://schemas.microsoft.com/office/drawing/2014/main" id="{039327DF-CC61-4F4D-B62D-2C650EC46388}"/>
               </a:ext>
             </a:extLst>
           </p:cNvPr>
@@ -19533,10 +20089,10 @@
       </p:sp>
       <p:sp>
         <p:nvSpPr>
-          <p:cNvPr id="9" name="Book">
-            <a:extLst xmlns:a="http://schemas.openxmlformats.org/drawingml/2006/main">
-              <a:ext uri="{FF2B5EF4-FFF2-40B4-BE49-F238E27FC236}">
-                <a16:creationId xmlns:a16="http://schemas.microsoft.com/office/drawing/2014/main" id="{A36182ED-1DCE-4FD3-985D-2AAD81421FE5}"/>
+          <p:cNvPr id="10" name="Book">
+            <a:extLst xmlns:a="http://schemas.openxmlformats.org/drawingml/2006/main">
+              <a:ext uri="{FF2B5EF4-FFF2-40B4-BE49-F238E27FC236}">
+                <a16:creationId xmlns:a16="http://schemas.microsoft.com/office/drawing/2014/main" id="{A9566C3C-186C-4A72-A1EE-CE3A9E8C34CC}"/>
               </a:ext>
             </a:extLst>
           </p:cNvPr>
@@ -19590,10 +20146,10 @@
       </p:sp>
       <p:cxnSp>
         <p:nvCxnSpPr>
-          <p:cNvPr id="31" name=""/>
+          <p:cNvPr id="33" name=""/>
           <p:cNvCxnSpPr>
-            <a:stCxn xmlns:a="http://schemas.openxmlformats.org/drawingml/2006/main" id="6" idx="3"/>
-            <a:endCxn xmlns:a="http://schemas.openxmlformats.org/drawingml/2006/main" id="7" idx="1"/>
+            <a:stCxn xmlns:a="http://schemas.openxmlformats.org/drawingml/2006/main" id="7" idx="3"/>
+            <a:endCxn xmlns:a="http://schemas.openxmlformats.org/drawingml/2006/main" id="8" idx="1"/>
           </p:cNvCxnSpPr>
           <p:nvPr/>
         </p:nvCxnSpPr>
@@ -19616,10 +20172,10 @@
       </p:cxnSp>
       <p:cxnSp>
         <p:nvCxnSpPr>
-          <p:cNvPr id="32" name=""/>
+          <p:cNvPr id="34" name=""/>
           <p:cNvCxnSpPr>
-            <a:stCxn xmlns:a="http://schemas.openxmlformats.org/drawingml/2006/main" id="7" idx="3"/>
-            <a:endCxn xmlns:a="http://schemas.openxmlformats.org/drawingml/2006/main" id="8" idx="1"/>
+            <a:stCxn xmlns:a="http://schemas.openxmlformats.org/drawingml/2006/main" id="8" idx="3"/>
+            <a:endCxn xmlns:a="http://schemas.openxmlformats.org/drawingml/2006/main" id="9" idx="1"/>
           </p:cNvCxnSpPr>
           <p:nvPr/>
         </p:nvCxnSpPr>
@@ -19642,10 +20198,10 @@
       </p:cxnSp>
       <p:sp>
         <p:nvSpPr>
-          <p:cNvPr id="12" name="5 TSLA + 1,200 USDG">
-            <a:extLst xmlns:a="http://schemas.openxmlformats.org/drawingml/2006/main">
-              <a:ext uri="{FF2B5EF4-FFF2-40B4-BE49-F238E27FC236}">
-                <a16:creationId xmlns:a16="http://schemas.microsoft.com/office/drawing/2014/main" id="{41E559B4-AA25-4CD8-969B-DA2FC226105F}"/>
+          <p:cNvPr id="13" name="5 AAPL + 1,200 USDG">
+            <a:extLst xmlns:a="http://schemas.openxmlformats.org/drawingml/2006/main">
+              <a:ext uri="{FF2B5EF4-FFF2-40B4-BE49-F238E27FC236}">
+                <a16:creationId xmlns:a16="http://schemas.microsoft.com/office/drawing/2014/main" id="{C09593BF-3853-463C-B533-D35424B237C7}"/>
               </a:ext>
             </a:extLst>
           </p:cNvPr>
@@ -19692,17 +20248,17 @@
                 <a:ea typeface="Arial Unicode MS"/>
                 <a:cs typeface="Arial Unicode MS"/>
               </a:rPr>
-              <a:t>5 TSLA + 1,200 USDG</a:t>
-            </a:r>
-          </a:p>
-        </p:txBody>
-      </p:sp>
-      <p:sp>
-        <p:nvSpPr>
-          <p:cNvPr id="13" name="買方">
-            <a:extLst xmlns:a="http://schemas.openxmlformats.org/drawingml/2006/main">
-              <a:ext uri="{FF2B5EF4-FFF2-40B4-BE49-F238E27FC236}">
-                <a16:creationId xmlns:a16="http://schemas.microsoft.com/office/drawing/2014/main" id="{D943BA6E-6AA4-4616-9723-22B5B2ADE86E}"/>
+              <a:t>5 AAPL + 1,200 USDG</a:t>
+            </a:r>
+          </a:p>
+        </p:txBody>
+      </p:sp>
+      <p:sp>
+        <p:nvSpPr>
+          <p:cNvPr id="14" name="買方">
+            <a:extLst xmlns:a="http://schemas.openxmlformats.org/drawingml/2006/main">
+              <a:ext uri="{FF2B5EF4-FFF2-40B4-BE49-F238E27FC236}">
+                <a16:creationId xmlns:a16="http://schemas.microsoft.com/office/drawing/2014/main" id="{ADF2CDEE-4FF0-43DA-A5AE-14F2A7F8F020}"/>
               </a:ext>
             </a:extLst>
           </p:cNvPr>
@@ -19760,10 +20316,10 @@
       </p:sp>
       <p:cxnSp>
         <p:nvCxnSpPr>
-          <p:cNvPr id="35" name=""/>
+          <p:cNvPr id="37" name=""/>
           <p:cNvCxnSpPr>
-            <a:stCxn xmlns:a="http://schemas.openxmlformats.org/drawingml/2006/main" id="13" idx="3"/>
-            <a:endCxn xmlns:a="http://schemas.openxmlformats.org/drawingml/2006/main" id="8" idx="2"/>
+            <a:stCxn xmlns:a="http://schemas.openxmlformats.org/drawingml/2006/main" id="14" idx="3"/>
+            <a:endCxn xmlns:a="http://schemas.openxmlformats.org/drawingml/2006/main" id="9" idx="2"/>
           </p:cNvCxnSpPr>
           <p:nvPr/>
         </p:nvCxnSpPr>
@@ -19786,10 +20342,10 @@
       </p:cxnSp>
       <p:sp>
         <p:nvSpPr>
-          <p:cNvPr id="15" name="64.0064 USDG 權利金">
-            <a:extLst xmlns:a="http://schemas.openxmlformats.org/drawingml/2006/main">
-              <a:ext uri="{FF2B5EF4-FFF2-40B4-BE49-F238E27FC236}">
-                <a16:creationId xmlns:a16="http://schemas.microsoft.com/office/drawing/2014/main" id="{6FE1A226-A170-4F9C-86F4-193D59247FD4}"/>
+          <p:cNvPr id="16" name="64.0064 USDG 權利金">
+            <a:extLst xmlns:a="http://schemas.openxmlformats.org/drawingml/2006/main">
+              <a:ext uri="{FF2B5EF4-FFF2-40B4-BE49-F238E27FC236}">
+                <a16:creationId xmlns:a16="http://schemas.microsoft.com/office/drawing/2014/main" id="{E6BC61F3-19EF-4976-B353-5381CD7FFB86}"/>
               </a:ext>
             </a:extLst>
           </p:cNvPr>
@@ -19843,10 +20399,10 @@
       </p:sp>
       <p:sp>
         <p:nvSpPr>
-          <p:cNvPr id="16" name="5 call + 3 put 多頭部位">
-            <a:extLst xmlns:a="http://schemas.openxmlformats.org/drawingml/2006/main">
-              <a:ext uri="{FF2B5EF4-FFF2-40B4-BE49-F238E27FC236}">
-                <a16:creationId xmlns:a16="http://schemas.microsoft.com/office/drawing/2014/main" id="{0D93EE48-193C-484F-8E03-27CBBF6C403F}"/>
+          <p:cNvPr id="17" name="5 call + 3 put 多頭部位">
+            <a:extLst xmlns:a="http://schemas.openxmlformats.org/drawingml/2006/main">
+              <a:ext uri="{FF2B5EF4-FFF2-40B4-BE49-F238E27FC236}">
+                <a16:creationId xmlns:a16="http://schemas.microsoft.com/office/drawing/2014/main" id="{884A4A4B-59EE-4A39-B281-37E262513F10}"/>
               </a:ext>
             </a:extLst>
           </p:cNvPr>
@@ -19900,10 +20456,10 @@
       </p:sp>
       <p:sp>
         <p:nvSpPr>
-          <p:cNvPr id="17" name="5 TSLA">
-            <a:extLst xmlns:a="http://schemas.openxmlformats.org/drawingml/2006/main">
-              <a:ext uri="{FF2B5EF4-FFF2-40B4-BE49-F238E27FC236}">
-                <a16:creationId xmlns:a16="http://schemas.microsoft.com/office/drawing/2014/main" id="{880F460E-EDD0-4BDD-B54B-57859FEFB052}"/>
+          <p:cNvPr id="18" name="5 AAPL">
+            <a:extLst xmlns:a="http://schemas.openxmlformats.org/drawingml/2006/main">
+              <a:ext uri="{FF2B5EF4-FFF2-40B4-BE49-F238E27FC236}">
+                <a16:creationId xmlns:a16="http://schemas.microsoft.com/office/drawing/2014/main" id="{80D12D0D-34D3-4373-875F-D593127047A5}"/>
               </a:ext>
             </a:extLst>
           </p:cNvPr>
@@ -19950,17 +20506,17 @@
                 <a:ea typeface="Arial Unicode MS"/>
                 <a:cs typeface="Arial Unicode MS"/>
               </a:rPr>
-              <a:t>5 TSLA</a:t>
-            </a:r>
-          </a:p>
-        </p:txBody>
-      </p:sp>
-      <p:sp>
-        <p:nvSpPr>
-          <p:cNvPr id="18" name="1,264.0064 USDG">
-            <a:extLst xmlns:a="http://schemas.openxmlformats.org/drawingml/2006/main">
-              <a:ext uri="{FF2B5EF4-FFF2-40B4-BE49-F238E27FC236}">
-                <a16:creationId xmlns:a16="http://schemas.microsoft.com/office/drawing/2014/main" id="{ED3C7717-970E-49C3-8845-5C75DD2A8C05}"/>
+              <a:t>5 AAPL</a:t>
+            </a:r>
+          </a:p>
+        </p:txBody>
+      </p:sp>
+      <p:sp>
+        <p:nvSpPr>
+          <p:cNvPr id="19" name="1,264.0064 USDG">
+            <a:extLst xmlns:a="http://schemas.openxmlformats.org/drawingml/2006/main">
+              <a:ext uri="{FF2B5EF4-FFF2-40B4-BE49-F238E27FC236}">
+                <a16:creationId xmlns:a16="http://schemas.microsoft.com/office/drawing/2014/main" id="{E919BB43-86A6-46AA-9F86-353BC9E8CA1E}"/>
               </a:ext>
             </a:extLst>
           </p:cNvPr>
@@ -20014,10 +20570,10 @@
       </p:sp>
       <p:sp>
         <p:nvSpPr>
-          <p:cNvPr id="19" name="未成交承諾">
-            <a:extLst xmlns:a="http://schemas.openxmlformats.org/drawingml/2006/main">
-              <a:ext uri="{FF2B5EF4-FFF2-40B4-BE49-F238E27FC236}">
-                <a16:creationId xmlns:a16="http://schemas.microsoft.com/office/drawing/2014/main" id="{F4FE7B61-1AF3-4F08-B4C6-972D9EA268C1}"/>
+          <p:cNvPr id="20" name="未成交承諾">
+            <a:extLst xmlns:a="http://schemas.openxmlformats.org/drawingml/2006/main">
+              <a:ext uri="{FF2B5EF4-FFF2-40B4-BE49-F238E27FC236}">
+                <a16:creationId xmlns:a16="http://schemas.microsoft.com/office/drawing/2014/main" id="{93C9F5BF-56C5-41EF-9F0D-644EB9DA2281}"/>
               </a:ext>
             </a:extLst>
           </p:cNvPr>
@@ -20071,10 +20627,10 @@
       </p:sp>
       <p:sp>
         <p:nvSpPr>
-          <p:cNvPr id="20" name="5 TSLA">
-            <a:extLst xmlns:a="http://schemas.openxmlformats.org/drawingml/2006/main">
-              <a:ext uri="{FF2B5EF4-FFF2-40B4-BE49-F238E27FC236}">
-                <a16:creationId xmlns:a16="http://schemas.microsoft.com/office/drawing/2014/main" id="{196471D4-93D0-49E5-85ED-445C94492DEF}"/>
+          <p:cNvPr id="21" name="5 AAPL">
+            <a:extLst xmlns:a="http://schemas.openxmlformats.org/drawingml/2006/main">
+              <a:ext uri="{FF2B5EF4-FFF2-40B4-BE49-F238E27FC236}">
+                <a16:creationId xmlns:a16="http://schemas.microsoft.com/office/drawing/2014/main" id="{B94EFE97-8A5B-443A-9A08-9DDA3CBC14F2}"/>
               </a:ext>
             </a:extLst>
           </p:cNvPr>
@@ -20121,17 +20677,17 @@
                 <a:ea typeface="Arial Unicode MS"/>
                 <a:cs typeface="Arial Unicode MS"/>
               </a:rPr>
-              <a:t>5 TSLA</a:t>
-            </a:r>
-          </a:p>
-        </p:txBody>
-      </p:sp>
-      <p:sp>
-        <p:nvSpPr>
-          <p:cNvPr id="21" name="2,800 USDG">
-            <a:extLst xmlns:a="http://schemas.openxmlformats.org/drawingml/2006/main">
-              <a:ext uri="{FF2B5EF4-FFF2-40B4-BE49-F238E27FC236}">
-                <a16:creationId xmlns:a16="http://schemas.microsoft.com/office/drawing/2014/main" id="{FA7074FA-6089-4C2E-B145-9409DF14F22B}"/>
+              <a:t>5 AAPL</a:t>
+            </a:r>
+          </a:p>
+        </p:txBody>
+      </p:sp>
+      <p:sp>
+        <p:nvSpPr>
+          <p:cNvPr id="22" name="2,800 USDG">
+            <a:extLst xmlns:a="http://schemas.openxmlformats.org/drawingml/2006/main">
+              <a:ext uri="{FF2B5EF4-FFF2-40B4-BE49-F238E27FC236}">
+                <a16:creationId xmlns:a16="http://schemas.microsoft.com/office/drawing/2014/main" id="{8E448726-06E1-4E6A-9294-FA297D5092C4}"/>
               </a:ext>
             </a:extLst>
           </p:cNvPr>
@@ -20186,7 +20742,7 @@
     </p:spTree>
     <p:extLst>
       <p:ext uri="{BB962C8B-B14F-4D97-AF65-F5344CB8AC3E}">
-        <p14:creationId xmlns:p14="http://schemas.microsoft.com/office/powerpoint/2010/main" val="881495698"/>
+        <p14:creationId xmlns:p14="http://schemas.microsoft.com/office/powerpoint/2010/main" val="1485663703"/>
       </p:ext>
     </p:extLst>
   </p:cSld>
@@ -20217,7 +20773,7 @@
           <p:cNvPr id="20" name="Hook 如何記錄價格">
             <a:extLst xmlns:a="http://schemas.openxmlformats.org/drawingml/2006/main">
               <a:ext uri="{FF2B5EF4-FFF2-40B4-BE49-F238E27FC236}">
-                <a16:creationId xmlns:a16="http://schemas.microsoft.com/office/drawing/2014/main" id="{F54727B9-AC1B-441C-B796-2BF76CF2CCA7}"/>
+                <a16:creationId xmlns:a16="http://schemas.microsoft.com/office/drawing/2014/main" id="{8549783D-E0B8-42DF-8A7A-EB3E8C98E957}"/>
               </a:ext>
             </a:extLst>
           </p:cNvPr>
@@ -20278,7 +20834,7 @@
           <p:nvPr/>
         </p:nvPicPr>
         <p:blipFill>
-          <a:blip xmlns:r="http://schemas.openxmlformats.org/officeDocument/2006/relationships" xmlns:a="http://schemas.openxmlformats.org/drawingml/2006/main" r:embed="R01590e3fc5034c54"/>
+          <a:blip xmlns:r="http://schemas.openxmlformats.org/officeDocument/2006/relationships" xmlns:a="http://schemas.openxmlformats.org/drawingml/2006/main" r:embed="Rbb036ffdc922407b"/>
           <a:stretch xmlns:a="http://schemas.openxmlformats.org/drawingml/2006/main"/>
         </p:blipFill>
         <p:spPr>
@@ -20296,7 +20852,7 @@
           <p:cNvPr id="3" name="Vexi Hakari">
             <a:extLst xmlns:a="http://schemas.openxmlformats.org/drawingml/2006/main">
               <a:ext uri="{FF2B5EF4-FFF2-40B4-BE49-F238E27FC236}">
-                <a16:creationId xmlns:a16="http://schemas.microsoft.com/office/drawing/2014/main" id="{06FF1127-E5E9-4809-86B8-5D92A2BD1877}"/>
+                <a16:creationId xmlns:a16="http://schemas.microsoft.com/office/drawing/2014/main" id="{796DC71E-37E1-4630-AF57-EBF2F0C8A1A5}"/>
               </a:ext>
             </a:extLst>
           </p:cNvPr>
@@ -20353,7 +20909,7 @@
           <p:cNvPr id="4" name="8">
             <a:extLst xmlns:a="http://schemas.openxmlformats.org/drawingml/2006/main">
               <a:ext uri="{FF2B5EF4-FFF2-40B4-BE49-F238E27FC236}">
-                <a16:creationId xmlns:a16="http://schemas.microsoft.com/office/drawing/2014/main" id="{EB6A9DAC-4BB9-4EEF-A482-8EB90A176368}"/>
+                <a16:creationId xmlns:a16="http://schemas.microsoft.com/office/drawing/2014/main" id="{52E0782A-5783-4821-B3B2-DC6C1A936422}"/>
               </a:ext>
             </a:extLst>
           </p:cNvPr>
@@ -20410,7 +20966,7 @@
           <p:cNvPr id="5" name="每秒第一筆 swap 之前">
             <a:extLst xmlns:a="http://schemas.openxmlformats.org/drawingml/2006/main">
               <a:ext uri="{FF2B5EF4-FFF2-40B4-BE49-F238E27FC236}">
-                <a16:creationId xmlns:a16="http://schemas.microsoft.com/office/drawing/2014/main" id="{8E9603BD-D659-4EE4-9E5B-A212BDFA1811}"/>
+                <a16:creationId xmlns:a16="http://schemas.microsoft.com/office/drawing/2014/main" id="{52CCC3EF-1452-456D-8CFE-F842AE59AF9E}"/>
               </a:ext>
             </a:extLst>
           </p:cNvPr>
@@ -20467,7 +21023,7 @@
           <p:cNvPr id="6" name="記錄">
             <a:extLst xmlns:a="http://schemas.openxmlformats.org/drawingml/2006/main">
               <a:ext uri="{FF2B5EF4-FFF2-40B4-BE49-F238E27FC236}">
-                <a16:creationId xmlns:a16="http://schemas.microsoft.com/office/drawing/2014/main" id="{B76FCB36-0922-4CE1-9EA6-2BAACDD2BF53}"/>
+                <a16:creationId xmlns:a16="http://schemas.microsoft.com/office/drawing/2014/main" id="{9C3F4E59-37CD-4B32-B46D-DB30EF45F8FB}"/>
               </a:ext>
             </a:extLst>
           </p:cNvPr>
@@ -20528,7 +21084,7 @@
           <p:cNvPr id="7" name="推價">
             <a:extLst xmlns:a="http://schemas.openxmlformats.org/drawingml/2006/main">
               <a:ext uri="{FF2B5EF4-FFF2-40B4-BE49-F238E27FC236}">
-                <a16:creationId xmlns:a16="http://schemas.microsoft.com/office/drawing/2014/main" id="{3C1EC487-9BC7-4A48-961E-6776233EB147}"/>
+                <a16:creationId xmlns:a16="http://schemas.microsoft.com/office/drawing/2014/main" id="{EBBA3295-B255-47D8-B40F-F59DF917BE60}"/>
               </a:ext>
             </a:extLst>
           </p:cNvPr>
@@ -20589,7 +21145,7 @@
           <p:cNvPr id="8" name="拉回">
             <a:extLst xmlns:a="http://schemas.openxmlformats.org/drawingml/2006/main">
               <a:ext uri="{FF2B5EF4-FFF2-40B4-BE49-F238E27FC236}">
-                <a16:creationId xmlns:a16="http://schemas.microsoft.com/office/drawing/2014/main" id="{2F61BEC5-D661-4F7E-BA9E-8B3A9929376C}"/>
+                <a16:creationId xmlns:a16="http://schemas.microsoft.com/office/drawing/2014/main" id="{FD265039-ECB9-41D0-839C-9DFC08DA24FB}"/>
               </a:ext>
             </a:extLst>
           </p:cNvPr>
@@ -20650,7 +21206,7 @@
           <p:cNvPr id="9" name="下秒記錄">
             <a:extLst xmlns:a="http://schemas.openxmlformats.org/drawingml/2006/main">
               <a:ext uri="{FF2B5EF4-FFF2-40B4-BE49-F238E27FC236}">
-                <a16:creationId xmlns:a16="http://schemas.microsoft.com/office/drawing/2014/main" id="{51407581-CC73-4BA7-B9B1-9E7F15A6C0BC}"/>
+                <a16:creationId xmlns:a16="http://schemas.microsoft.com/office/drawing/2014/main" id="{F875CCE4-9351-4BE9-A12A-46D33F870093}"/>
               </a:ext>
             </a:extLst>
           </p:cNvPr>
@@ -20789,7 +21345,7 @@
           <p:cNvPr id="13" name="同一交易內推價再拉回">
             <a:extLst xmlns:a="http://schemas.openxmlformats.org/drawingml/2006/main">
               <a:ext uri="{FF2B5EF4-FFF2-40B4-BE49-F238E27FC236}">
-                <a16:creationId xmlns:a16="http://schemas.microsoft.com/office/drawing/2014/main" id="{C852A4AF-74EE-4F56-B2F0-25D3427EE59E}"/>
+                <a16:creationId xmlns:a16="http://schemas.microsoft.com/office/drawing/2014/main" id="{B9CF2AFE-68CE-48F9-B1F2-6FEDF85FAC8E}"/>
               </a:ext>
             </a:extLst>
           </p:cNvPr>
@@ -20846,7 +21402,7 @@
           <p:cNvPr id="14" name="">
             <a:extLst xmlns:a="http://schemas.openxmlformats.org/drawingml/2006/main">
               <a:ext uri="{FF2B5EF4-FFF2-40B4-BE49-F238E27FC236}">
-                <a16:creationId xmlns:a16="http://schemas.microsoft.com/office/drawing/2014/main" id="{4FA3CCFB-C099-4628-BE04-042203F876E3}"/>
+                <a16:creationId xmlns:a16="http://schemas.microsoft.com/office/drawing/2014/main" id="{36F0D840-D2A9-4A0B-B986-494ABCE762A9}"/>
               </a:ext>
             </a:extLst>
           </p:cNvPr>
@@ -20876,7 +21432,7 @@
           <p:cNvPr id="15" name="原始 tick TWAP">
             <a:extLst xmlns:a="http://schemas.openxmlformats.org/drawingml/2006/main">
               <a:ext uri="{FF2B5EF4-FFF2-40B4-BE49-F238E27FC236}">
-                <a16:creationId xmlns:a16="http://schemas.microsoft.com/office/drawing/2014/main" id="{C6149BC4-FF69-48F6-9872-41D6E1BD5D5D}"/>
+                <a16:creationId xmlns:a16="http://schemas.microsoft.com/office/drawing/2014/main" id="{3B16E297-3689-48AB-AFB0-7E7088D80EE4}"/>
               </a:ext>
             </a:extLst>
           </p:cNvPr>
@@ -20933,7 +21489,7 @@
           <p:cNvPr id="16" name="截斷 tick TWAP">
             <a:extLst xmlns:a="http://schemas.openxmlformats.org/drawingml/2006/main">
               <a:ext uri="{FF2B5EF4-FFF2-40B4-BE49-F238E27FC236}">
-                <a16:creationId xmlns:a16="http://schemas.microsoft.com/office/drawing/2014/main" id="{4B2E3ABA-E011-4313-8A8D-B5DAC44DA1CA}"/>
+                <a16:creationId xmlns:a16="http://schemas.microsoft.com/office/drawing/2014/main" id="{EAB70683-D54F-48BD-A6F4-2D55BAD1473F}"/>
               </a:ext>
             </a:extLst>
           </p:cNvPr>
@@ -20990,7 +21546,7 @@
           <p:cNvPr id="17" name="1 小時中心">
             <a:extLst xmlns:a="http://schemas.openxmlformats.org/drawingml/2006/main">
               <a:ext uri="{FF2B5EF4-FFF2-40B4-BE49-F238E27FC236}">
-                <a16:creationId xmlns:a16="http://schemas.microsoft.com/office/drawing/2014/main" id="{B475E2D6-3F3C-4357-8EE2-BCAFAEA3C71C}"/>
+                <a16:creationId xmlns:a16="http://schemas.microsoft.com/office/drawing/2014/main" id="{503BC174-9D5E-46F3-BD24-9870B6508585}"/>
               </a:ext>
             </a:extLst>
           </p:cNvPr>
@@ -21047,7 +21603,7 @@
           <p:cNvPr id="18" name="每次記錄最多 250 ticks">
             <a:extLst xmlns:a="http://schemas.openxmlformats.org/drawingml/2006/main">
               <a:ext uri="{FF2B5EF4-FFF2-40B4-BE49-F238E27FC236}">
-                <a16:creationId xmlns:a16="http://schemas.microsoft.com/office/drawing/2014/main" id="{33FF1229-C205-4CED-9909-6B5FA2376A7E}"/>
+                <a16:creationId xmlns:a16="http://schemas.microsoft.com/office/drawing/2014/main" id="{B488E7C2-4B7B-4695-97C1-8426FE4BE70E}"/>
               </a:ext>
             </a:extLst>
           </p:cNvPr>
@@ -21104,7 +21660,7 @@
           <p:cNvPr id="19" name="OpenZeppelin／Panoptic oracle；持續偏移仍會成為新中心">
             <a:extLst xmlns:a="http://schemas.openxmlformats.org/drawingml/2006/main">
               <a:ext uri="{FF2B5EF4-FFF2-40B4-BE49-F238E27FC236}">
-                <a16:creationId xmlns:a16="http://schemas.microsoft.com/office/drawing/2014/main" id="{FACD6741-660B-4D2E-A0B0-6FAAE48B1D0B}"/>
+                <a16:creationId xmlns:a16="http://schemas.microsoft.com/office/drawing/2014/main" id="{E99EEA97-B31A-4D58-B415-794691A73ECA}"/>
               </a:ext>
             </a:extLst>
           </p:cNvPr>
@@ -21159,7 +21715,7 @@
     </p:spTree>
     <p:extLst>
       <p:ext uri="{BB962C8B-B14F-4D97-AF65-F5344CB8AC3E}">
-        <p14:creationId xmlns:p14="http://schemas.microsoft.com/office/powerpoint/2010/main" val="1492388687"/>
+        <p14:creationId xmlns:p14="http://schemas.microsoft.com/office/powerpoint/2010/main" val="1318597296"/>
       </p:ext>
     </p:extLst>
   </p:cSld>
@@ -21187,10 +21743,10 @@
       </p:grpSpPr>
       <p:sp>
         <p:nvSpPr>
-          <p:cNvPr id="19" name="價格參考決定固定百分比價格帶">
-            <a:extLst xmlns:a="http://schemas.openxmlformats.org/drawingml/2006/main">
-              <a:ext uri="{FF2B5EF4-FFF2-40B4-BE49-F238E27FC236}">
-                <a16:creationId xmlns:a16="http://schemas.microsoft.com/office/drawing/2014/main" id="{F8CDBEA9-D171-4B72-8897-FAF0314A3513}"/>
+          <p:cNvPr id="20" name="價格參考決定固定百分比價格帶">
+            <a:extLst xmlns:a="http://schemas.openxmlformats.org/drawingml/2006/main">
+              <a:ext uri="{FF2B5EF4-FFF2-40B4-BE49-F238E27FC236}">
+                <a16:creationId xmlns:a16="http://schemas.microsoft.com/office/drawing/2014/main" id="{0987D8B6-5B59-49B3-BD23-DF85E38D4665}"/>
               </a:ext>
             </a:extLst>
           </p:cNvPr>
@@ -21244,14 +21800,14 @@
       </p:sp>
       <p:pic>
         <p:nvPicPr>
-          <p:cNvPr id="20" name=""/>
+          <p:cNvPr id="21" name=""/>
           <p:cNvPicPr>
             <a:picLocks xmlns:a="http://schemas.openxmlformats.org/drawingml/2006/main" noChangeAspect="1"/>
           </p:cNvPicPr>
           <p:nvPr/>
         </p:nvPicPr>
         <p:blipFill>
-          <a:blip xmlns:r="http://schemas.openxmlformats.org/officeDocument/2006/relationships" xmlns:a="http://schemas.openxmlformats.org/drawingml/2006/main" r:embed="R7bcd44ddad334de8"/>
+          <a:blip xmlns:r="http://schemas.openxmlformats.org/officeDocument/2006/relationships" xmlns:a="http://schemas.openxmlformats.org/drawingml/2006/main" r:embed="R6e3c2a7e5fcb4b9c"/>
           <a:stretch xmlns:a="http://schemas.openxmlformats.org/drawingml/2006/main"/>
         </p:blipFill>
         <p:spPr>
@@ -21269,7 +21825,7 @@
           <p:cNvPr id="3" name="Vexi Hakari">
             <a:extLst xmlns:a="http://schemas.openxmlformats.org/drawingml/2006/main">
               <a:ext uri="{FF2B5EF4-FFF2-40B4-BE49-F238E27FC236}">
-                <a16:creationId xmlns:a16="http://schemas.microsoft.com/office/drawing/2014/main" id="{046166EB-C691-42D3-A01A-F10E28C28485}"/>
+                <a16:creationId xmlns:a16="http://schemas.microsoft.com/office/drawing/2014/main" id="{6CB11BED-D4BC-40D3-B887-5D7153A2769E}"/>
               </a:ext>
             </a:extLst>
           </p:cNvPr>
@@ -21323,22 +21879,22 @@
       </p:sp>
       <p:sp>
         <p:nvSpPr>
-          <p:cNvPr id="4" name="9">
-            <a:extLst xmlns:a="http://schemas.openxmlformats.org/drawingml/2006/main">
-              <a:ext uri="{FF2B5EF4-FFF2-40B4-BE49-F238E27FC236}">
-                <a16:creationId xmlns:a16="http://schemas.microsoft.com/office/drawing/2014/main" id="{AF3CE6E0-EB0C-46F9-A3D9-6094FF307344}"/>
-              </a:ext>
-            </a:extLst>
-          </p:cNvPr>
-          <p:cNvSpPr>
-            <a:spLocks xmlns:a="http://schemas.openxmlformats.org/drawingml/2006/main" noGrp="1"/>
-          </p:cNvSpPr>
-          <p:nvPr/>
-        </p:nvSpPr>
-        <p:spPr>
-          <a:xfrm xmlns:a="http://schemas.openxmlformats.org/drawingml/2006/main">
-            <a:off x="11001375" y="6153150"/>
-            <a:ext cx="619125" cy="342900"/>
+          <p:cNvPr id="4" name="AAPL 範例／示意數值">
+            <a:extLst xmlns:a="http://schemas.openxmlformats.org/drawingml/2006/main">
+              <a:ext uri="{FF2B5EF4-FFF2-40B4-BE49-F238E27FC236}">
+                <a16:creationId xmlns:a16="http://schemas.microsoft.com/office/drawing/2014/main" id="{BF0D0F69-FFFB-4E81-97B6-3DF4B671DEFF}"/>
+              </a:ext>
+            </a:extLst>
+          </p:cNvPr>
+          <p:cNvSpPr>
+            <a:spLocks xmlns:a="http://schemas.openxmlformats.org/drawingml/2006/main" noGrp="1"/>
+          </p:cNvSpPr>
+          <p:nvPr/>
+        </p:nvSpPr>
+        <p:spPr>
+          <a:xfrm xmlns:a="http://schemas.openxmlformats.org/drawingml/2006/main">
+            <a:off x="3905250" y="6153150"/>
+            <a:ext cx="6667500" cy="342900"/>
           </a:xfrm>
           <a:prstGeom xmlns:a="http://schemas.openxmlformats.org/drawingml/2006/main" prst="rect">
             <a:avLst/>
@@ -21354,6 +21910,63 @@
           </a:bodyPr>
           <a:lstStyle xmlns:a="http://schemas.openxmlformats.org/drawingml/2006/main"/>
           <a:p xmlns:a="http://schemas.openxmlformats.org/drawingml/2006/main">
+            <a:pPr algn="l">
+              <a:defRPr sz="1275" b="0">
+                <a:solidFill>
+                  <a:srgbClr val="A8A8B2"/>
+                </a:solidFill>
+                <a:latin typeface="Arial Unicode MS"/>
+                <a:ea typeface="Arial Unicode MS"/>
+                <a:cs typeface="Arial Unicode MS"/>
+              </a:defRPr>
+            </a:pPr>
+            <a:r>
+              <a:rPr sz="1275" b="0">
+                <a:solidFill>
+                  <a:srgbClr val="A8A8B2"/>
+                </a:solidFill>
+                <a:latin typeface="Arial Unicode MS"/>
+                <a:ea typeface="Arial Unicode MS"/>
+                <a:cs typeface="Arial Unicode MS"/>
+              </a:rPr>
+              <a:t>AAPL 範例／示意數值</a:t>
+            </a:r>
+          </a:p>
+        </p:txBody>
+      </p:sp>
+      <p:sp>
+        <p:nvSpPr>
+          <p:cNvPr id="5" name="9">
+            <a:extLst xmlns:a="http://schemas.openxmlformats.org/drawingml/2006/main">
+              <a:ext uri="{FF2B5EF4-FFF2-40B4-BE49-F238E27FC236}">
+                <a16:creationId xmlns:a16="http://schemas.microsoft.com/office/drawing/2014/main" id="{9FF93420-8039-4CC6-86B2-E44743FF7944}"/>
+              </a:ext>
+            </a:extLst>
+          </p:cNvPr>
+          <p:cNvSpPr>
+            <a:spLocks xmlns:a="http://schemas.openxmlformats.org/drawingml/2006/main" noGrp="1"/>
+          </p:cNvSpPr>
+          <p:nvPr/>
+        </p:nvSpPr>
+        <p:spPr>
+          <a:xfrm xmlns:a="http://schemas.openxmlformats.org/drawingml/2006/main">
+            <a:off x="11001375" y="6153150"/>
+            <a:ext cx="619125" cy="342900"/>
+          </a:xfrm>
+          <a:prstGeom xmlns:a="http://schemas.openxmlformats.org/drawingml/2006/main" prst="rect">
+            <a:avLst/>
+          </a:prstGeom>
+          <a:noFill xmlns:a="http://schemas.openxmlformats.org/drawingml/2006/main"/>
+          <a:ln xmlns:a="http://schemas.openxmlformats.org/drawingml/2006/main" w="0">
+            <a:noFill/>
+          </a:ln>
+        </p:spPr>
+        <p:txBody>
+          <a:bodyPr xmlns:a="http://schemas.openxmlformats.org/drawingml/2006/main" wrap="none" lIns="0" tIns="0" rIns="0" bIns="0" anchor="ctr">
+            <a:noAutofit/>
+          </a:bodyPr>
+          <a:lstStyle xmlns:a="http://schemas.openxmlformats.org/drawingml/2006/main"/>
+          <a:p xmlns:a="http://schemas.openxmlformats.org/drawingml/2006/main">
             <a:pPr algn="r">
               <a:defRPr sz="1275" b="0">
                 <a:solidFill>
@@ -21380,7 +21993,7 @@
       </p:sp>
       <p:graphicFrame>
         <p:nvGraphicFramePr>
-          <p:cNvPr id="23" name="Chart"/>
+          <p:cNvPr id="25" name="Chart"/>
           <p:cNvGraphicFramePr/>
           <p:nvPr/>
         </p:nvGraphicFramePr>
@@ -21390,16 +22003,16 @@
         </p:xfrm>
         <a:graphic xmlns:a="http://schemas.openxmlformats.org/drawingml/2006/main">
           <a:graphicData uri="http://schemas.openxmlformats.org/drawingml/2006/chart">
-            <c:chart xmlns:r="http://schemas.openxmlformats.org/officeDocument/2006/relationships" xmlns:c="http://schemas.openxmlformats.org/drawingml/2006/chart" r:id="R6f14dbcc758a41c5"/>
+            <c:chart xmlns:r="http://schemas.openxmlformats.org/officeDocument/2006/relationships" xmlns:c="http://schemas.openxmlformats.org/drawingml/2006/chart" r:id="R4b66de31059049e8"/>
           </a:graphicData>
         </a:graphic>
       </p:graphicFrame>
       <p:sp>
         <p:nvSpPr>
-          <p:cNvPr id="6" name="USDG">
-            <a:extLst xmlns:a="http://schemas.openxmlformats.org/drawingml/2006/main">
-              <a:ext uri="{FF2B5EF4-FFF2-40B4-BE49-F238E27FC236}">
-                <a16:creationId xmlns:a16="http://schemas.microsoft.com/office/drawing/2014/main" id="{874609D7-317A-4CFC-B032-D8188354E7F9}"/>
+          <p:cNvPr id="7" name="USDG">
+            <a:extLst xmlns:a="http://schemas.openxmlformats.org/drawingml/2006/main">
+              <a:ext uri="{FF2B5EF4-FFF2-40B4-BE49-F238E27FC236}">
+                <a16:creationId xmlns:a16="http://schemas.microsoft.com/office/drawing/2014/main" id="{3940B2D7-EE49-4A8C-8514-FFA7B55E1FBB}"/>
               </a:ext>
             </a:extLst>
           </p:cNvPr>
@@ -21453,10 +22066,10 @@
       </p:sp>
       <p:sp>
         <p:nvSpPr>
-          <p:cNvPr id="7" name="━">
-            <a:extLst xmlns:a="http://schemas.openxmlformats.org/drawingml/2006/main">
-              <a:ext uri="{FF2B5EF4-FFF2-40B4-BE49-F238E27FC236}">
-                <a16:creationId xmlns:a16="http://schemas.microsoft.com/office/drawing/2014/main" id="{ACA791E6-7283-4F9C-8CCB-677F1DAFADC8}"/>
+          <p:cNvPr id="8" name="━">
+            <a:extLst xmlns:a="http://schemas.openxmlformats.org/drawingml/2006/main">
+              <a:ext uri="{FF2B5EF4-FFF2-40B4-BE49-F238E27FC236}">
+                <a16:creationId xmlns:a16="http://schemas.microsoft.com/office/drawing/2014/main" id="{92A076AF-C872-4E8F-B25E-1DE6AFDB3F1C}"/>
               </a:ext>
             </a:extLst>
           </p:cNvPr>
@@ -21510,10 +22123,10 @@
       </p:sp>
       <p:sp>
         <p:nvSpPr>
-          <p:cNvPr id="8" name="即時參考">
-            <a:extLst xmlns:a="http://schemas.openxmlformats.org/drawingml/2006/main">
-              <a:ext uri="{FF2B5EF4-FFF2-40B4-BE49-F238E27FC236}">
-                <a16:creationId xmlns:a16="http://schemas.microsoft.com/office/drawing/2014/main" id="{52D6C836-5A54-4D55-AC39-13E97ECBC018}"/>
+          <p:cNvPr id="9" name="即時參考">
+            <a:extLst xmlns:a="http://schemas.openxmlformats.org/drawingml/2006/main">
+              <a:ext uri="{FF2B5EF4-FFF2-40B4-BE49-F238E27FC236}">
+                <a16:creationId xmlns:a16="http://schemas.microsoft.com/office/drawing/2014/main" id="{0BA6F469-19D5-4EC0-BBB7-46B58A55A813}"/>
               </a:ext>
             </a:extLst>
           </p:cNvPr>
@@ -21567,10 +22180,10 @@
       </p:sp>
       <p:sp>
         <p:nvSpPr>
-          <p:cNvPr id="9" name="━">
-            <a:extLst xmlns:a="http://schemas.openxmlformats.org/drawingml/2006/main">
-              <a:ext uri="{FF2B5EF4-FFF2-40B4-BE49-F238E27FC236}">
-                <a16:creationId xmlns:a16="http://schemas.microsoft.com/office/drawing/2014/main" id="{D912F64E-1F91-4618-9419-D3A06AD789FE}"/>
+          <p:cNvPr id="10" name="━">
+            <a:extLst xmlns:a="http://schemas.openxmlformats.org/drawingml/2006/main">
+              <a:ext uri="{FF2B5EF4-FFF2-40B4-BE49-F238E27FC236}">
+                <a16:creationId xmlns:a16="http://schemas.microsoft.com/office/drawing/2014/main" id="{A2F616B2-58BC-4B09-BC85-4B93F450A3C2}"/>
               </a:ext>
             </a:extLst>
           </p:cNvPr>
@@ -21624,10 +22237,10 @@
       </p:sp>
       <p:sp>
         <p:nvSpPr>
-          <p:cNvPr id="10" name="TWAP">
-            <a:extLst xmlns:a="http://schemas.openxmlformats.org/drawingml/2006/main">
-              <a:ext uri="{FF2B5EF4-FFF2-40B4-BE49-F238E27FC236}">
-                <a16:creationId xmlns:a16="http://schemas.microsoft.com/office/drawing/2014/main" id="{801A64DC-6020-4AFC-BDA2-8F20FCB809CB}"/>
+          <p:cNvPr id="11" name="TWAP">
+            <a:extLst xmlns:a="http://schemas.openxmlformats.org/drawingml/2006/main">
+              <a:ext uri="{FF2B5EF4-FFF2-40B4-BE49-F238E27FC236}">
+                <a16:creationId xmlns:a16="http://schemas.microsoft.com/office/drawing/2014/main" id="{5E78A751-6922-45E3-869E-C2706B9F60EA}"/>
               </a:ext>
             </a:extLst>
           </p:cNvPr>
@@ -21681,10 +22294,10 @@
       </p:sp>
       <p:sp>
         <p:nvSpPr>
-          <p:cNvPr id="11" name="━">
-            <a:extLst xmlns:a="http://schemas.openxmlformats.org/drawingml/2006/main">
-              <a:ext uri="{FF2B5EF4-FFF2-40B4-BE49-F238E27FC236}">
-                <a16:creationId xmlns:a16="http://schemas.microsoft.com/office/drawing/2014/main" id="{630953CB-5834-4035-B01B-BE56CCAABC26}"/>
+          <p:cNvPr id="12" name="━">
+            <a:extLst xmlns:a="http://schemas.openxmlformats.org/drawingml/2006/main">
+              <a:ext uri="{FF2B5EF4-FFF2-40B4-BE49-F238E27FC236}">
+                <a16:creationId xmlns:a16="http://schemas.microsoft.com/office/drawing/2014/main" id="{1F1BAA77-15C7-4B85-8CC3-7D31A511A8CA}"/>
               </a:ext>
             </a:extLst>
           </p:cNvPr>
@@ -21738,10 +22351,10 @@
       </p:sp>
       <p:sp>
         <p:nvSpPr>
-          <p:cNvPr id="12" name="±5%">
-            <a:extLst xmlns:a="http://schemas.openxmlformats.org/drawingml/2006/main">
-              <a:ext uri="{FF2B5EF4-FFF2-40B4-BE49-F238E27FC236}">
-                <a16:creationId xmlns:a16="http://schemas.microsoft.com/office/drawing/2014/main" id="{1A5E2A6A-A40D-4B18-BE9C-38D00107D741}"/>
+          <p:cNvPr id="13" name="±5%">
+            <a:extLst xmlns:a="http://schemas.openxmlformats.org/drawingml/2006/main">
+              <a:ext uri="{FF2B5EF4-FFF2-40B4-BE49-F238E27FC236}">
+                <a16:creationId xmlns:a16="http://schemas.microsoft.com/office/drawing/2014/main" id="{14E464D1-8224-431D-B29A-ED6F43A82D9B}"/>
               </a:ext>
             </a:extLst>
           </p:cNvPr>
@@ -21795,10 +22408,10 @@
       </p:sp>
       <p:sp>
         <p:nvSpPr>
-          <p:cNvPr id="13" name="+5.1%">
-            <a:extLst xmlns:a="http://schemas.openxmlformats.org/drawingml/2006/main">
-              <a:ext uri="{FF2B5EF4-FFF2-40B4-BE49-F238E27FC236}">
-                <a16:creationId xmlns:a16="http://schemas.microsoft.com/office/drawing/2014/main" id="{10DB8BDB-32B6-457F-81FC-37B0816C070F}"/>
+          <p:cNvPr id="14" name="+5.1%">
+            <a:extLst xmlns:a="http://schemas.openxmlformats.org/drawingml/2006/main">
+              <a:ext uri="{FF2B5EF4-FFF2-40B4-BE49-F238E27FC236}">
+                <a16:creationId xmlns:a16="http://schemas.microsoft.com/office/drawing/2014/main" id="{FB95F66B-5712-4C55-B69B-FE39BD825AF6}"/>
               </a:ext>
             </a:extLst>
           </p:cNvPr>
@@ -21852,10 +22465,10 @@
       </p:sp>
       <p:sp>
         <p:nvSpPr>
-          <p:cNvPr id="14" name="買入拒絕">
-            <a:extLst xmlns:a="http://schemas.openxmlformats.org/drawingml/2006/main">
-              <a:ext uri="{FF2B5EF4-FFF2-40B4-BE49-F238E27FC236}">
-                <a16:creationId xmlns:a16="http://schemas.microsoft.com/office/drawing/2014/main" id="{E955130A-5243-4B7A-B8D5-AE398392B2E8}"/>
+          <p:cNvPr id="15" name="買入拒絕">
+            <a:extLst xmlns:a="http://schemas.openxmlformats.org/drawingml/2006/main">
+              <a:ext uri="{FF2B5EF4-FFF2-40B4-BE49-F238E27FC236}">
+                <a16:creationId xmlns:a16="http://schemas.microsoft.com/office/drawing/2014/main" id="{220CE0E0-8D4C-4825-94E3-28140626DEC6}"/>
               </a:ext>
             </a:extLst>
           </p:cNvPr>
@@ -21909,10 +22522,10 @@
       </p:sp>
       <p:sp>
         <p:nvSpPr>
-          <p:cNvPr id="15" name="同時檢查">
-            <a:extLst xmlns:a="http://schemas.openxmlformats.org/drawingml/2006/main">
-              <a:ext uri="{FF2B5EF4-FFF2-40B4-BE49-F238E27FC236}">
-                <a16:creationId xmlns:a16="http://schemas.microsoft.com/office/drawing/2014/main" id="{9F20306E-E86D-48A5-8564-053B93023C2F}"/>
+          <p:cNvPr id="16" name="同時檢查">
+            <a:extLst xmlns:a="http://schemas.openxmlformats.org/drawingml/2006/main">
+              <a:ext uri="{FF2B5EF4-FFF2-40B4-BE49-F238E27FC236}">
+                <a16:creationId xmlns:a16="http://schemas.microsoft.com/office/drawing/2014/main" id="{31B46064-6B29-41B1-B143-C742D2508369}"/>
               </a:ext>
             </a:extLst>
           </p:cNvPr>
@@ -21966,10 +22579,10 @@
       </p:sp>
       <p:sp>
         <p:nvSpPr>
-          <p:cNvPr id="16" name="觀測歷史／流動性">
-            <a:extLst xmlns:a="http://schemas.openxmlformats.org/drawingml/2006/main">
-              <a:ext uri="{FF2B5EF4-FFF2-40B4-BE49-F238E27FC236}">
-                <a16:creationId xmlns:a16="http://schemas.microsoft.com/office/drawing/2014/main" id="{59B0E462-E20E-442E-AF29-79E2864416CA}"/>
+          <p:cNvPr id="17" name="觀測歷史／流動性">
+            <a:extLst xmlns:a="http://schemas.openxmlformats.org/drawingml/2006/main">
+              <a:ext uri="{FF2B5EF4-FFF2-40B4-BE49-F238E27FC236}">
+                <a16:creationId xmlns:a16="http://schemas.microsoft.com/office/drawing/2014/main" id="{FA10DFE8-26A5-409B-9362-41DFB91D431C}"/>
               </a:ext>
             </a:extLst>
           </p:cNvPr>
@@ -22023,10 +22636,10 @@
       </p:sp>
       <p:sp>
         <p:nvSpPr>
-          <p:cNvPr id="17" name="原始／截斷價格">
-            <a:extLst xmlns:a="http://schemas.openxmlformats.org/drawingml/2006/main">
-              <a:ext uri="{FF2B5EF4-FFF2-40B4-BE49-F238E27FC236}">
-                <a16:creationId xmlns:a16="http://schemas.microsoft.com/office/drawing/2014/main" id="{C0FB0CE9-6537-448E-8620-2868DDF80635}"/>
+          <p:cNvPr id="18" name="原始／截斷價格">
+            <a:extLst xmlns:a="http://schemas.openxmlformats.org/drawingml/2006/main">
+              <a:ext uri="{FF2B5EF4-FFF2-40B4-BE49-F238E27FC236}">
+                <a16:creationId xmlns:a16="http://schemas.microsoft.com/office/drawing/2014/main" id="{F02A7EC3-6C7F-475C-8761-F12360165CAF}"/>
               </a:ext>
             </a:extLst>
           </p:cNvPr>
@@ -22080,10 +22693,10 @@
       </p:sp>
       <p:sp>
         <p:nvSpPr>
-          <p:cNvPr id="18" name="本機分叉的已記錄快照；寬度固定，中心滾動">
-            <a:extLst xmlns:a="http://schemas.openxmlformats.org/drawingml/2006/main">
-              <a:ext uri="{FF2B5EF4-FFF2-40B4-BE49-F238E27FC236}">
-                <a16:creationId xmlns:a16="http://schemas.microsoft.com/office/drawing/2014/main" id="{2F2E4F2B-28A3-495A-AA96-DC6ECA86FB7C}"/>
+          <p:cNvPr id="19" name="AAPL 示意沿用分叉價格路徑；寬度固定，中心滾動">
+            <a:extLst xmlns:a="http://schemas.openxmlformats.org/drawingml/2006/main">
+              <a:ext uri="{FF2B5EF4-FFF2-40B4-BE49-F238E27FC236}">
+                <a16:creationId xmlns:a16="http://schemas.microsoft.com/office/drawing/2014/main" id="{AC762E47-1AAC-4D1D-9A1F-E4CC3CA6A863}"/>
               </a:ext>
             </a:extLst>
           </p:cNvPr>
@@ -22130,7 +22743,7 @@
                 <a:ea typeface="Arial Unicode MS"/>
                 <a:cs typeface="Arial Unicode MS"/>
               </a:rPr>
-              <a:t>本機分叉的已記錄快照；寬度固定，中心滾動</a:t>
+              <a:t>AAPL 示意沿用分叉價格路徑；寬度固定，中心滾動</a:t>
             </a:r>
           </a:p>
         </p:txBody>
@@ -22138,7 +22751,7 @@
     </p:spTree>
     <p:extLst>
       <p:ext uri="{BB962C8B-B14F-4D97-AF65-F5344CB8AC3E}">
-        <p14:creationId xmlns:p14="http://schemas.microsoft.com/office/powerpoint/2010/main" val="72432080"/>
+        <p14:creationId xmlns:p14="http://schemas.microsoft.com/office/powerpoint/2010/main" val="1473610370"/>
       </p:ext>
     </p:extLst>
   </p:cSld>
